--- a/unit6-lesson24-fables.pptx
+++ b/unit6-lesson24-fables.pptx
@@ -11,6 +11,9 @@
     <p:sldId id="259" r:id="rId10"/>
     <p:sldId id="260" r:id="rId11"/>
     <p:sldId id="261" r:id="rId12"/>
+    <p:sldId id="262" r:id="rId13"/>
+    <p:sldId id="263" r:id="rId14"/>
+    <p:sldId id="264" r:id="rId15"/>
   </p:sldIdLst>
   <p:sldSz cx="12191695" cy="6858000" type="screen4x3"/>
   <p:notesSz cx="6858000" cy="9144000"/>
@@ -3095,7 +3098,7 @@
       <p:grpSpPr/>
       <p:pic>
         <p:nvPicPr>
-          <p:cNvPr id="2" name="Picture 1" descr="bg_scroll.png"/>
+          <p:cNvPr id="2" name="Picture 1" descr="bg_fable.png"/>
           <p:cNvPicPr>
             <a:picLocks noChangeAspect="1"/>
           </p:cNvPicPr>
@@ -3119,24 +3122,22 @@
       </p:pic>
       <p:sp>
         <p:nvSpPr>
-          <p:cNvPr id="3" name="Rounded Rectangle 2"/>
+          <p:cNvPr id="3" name="Rectangle 2"/>
           <p:cNvSpPr/>
           <p:nvPr/>
         </p:nvSpPr>
         <p:spPr>
           <a:xfrm>
-            <a:off x="1828800" y="1371600"/>
-            <a:ext cx="8503920" cy="4114800"/>
-          </a:xfrm>
-          <a:prstGeom prst="roundRect">
-            <a:avLst/>
-          </a:prstGeom>
-          <a:solidFill>
-            <a:srgbClr val="FFFAEB"/>
-          </a:solidFill>
-          <a:ln w="38100">
+            <a:off x="292608" y="274320"/>
+            <a:ext cx="11594592" cy="6300216"/>
+          </a:xfrm>
+          <a:prstGeom prst="rect">
+            <a:avLst/>
+          </a:prstGeom>
+          <a:noFill/>
+          <a:ln w="31750">
             <a:solidFill>
-              <a:srgbClr val="C8963C"/>
+              <a:srgbClr val="B48C3C"/>
             </a:solidFill>
           </a:ln>
         </p:spPr>
@@ -3162,16 +3163,150 @@
           </a:p>
         </p:txBody>
       </p:sp>
-      <p:sp>
-        <p:nvSpPr>
-          <p:cNvPr id="4" name="TextBox 3"/>
+      <p:pic>
+        <p:nvPicPr>
+          <p:cNvPr id="4" name="Picture 3" descr="corner_fable_tl.png"/>
+          <p:cNvPicPr>
+            <a:picLocks noChangeAspect="1"/>
+          </p:cNvPicPr>
+          <p:nvPr/>
+        </p:nvPicPr>
+        <p:blipFill>
+          <a:blip r:embed="rId3"/>
+          <a:stretch>
+            <a:fillRect/>
+          </a:stretch>
+        </p:blipFill>
+        <p:spPr>
+          <a:xfrm>
+            <a:off x="-45720" y="-45720"/>
+            <a:ext cx="2011680" cy="2011680"/>
+          </a:xfrm>
+          <a:prstGeom prst="rect">
+            <a:avLst/>
+          </a:prstGeom>
+        </p:spPr>
+      </p:pic>
+      <p:pic>
+        <p:nvPicPr>
+          <p:cNvPr id="5" name="Picture 4" descr="corner_fable_tr.png"/>
+          <p:cNvPicPr>
+            <a:picLocks noChangeAspect="1"/>
+          </p:cNvPicPr>
+          <p:nvPr/>
+        </p:nvPicPr>
+        <p:blipFill>
+          <a:blip r:embed="rId4"/>
+          <a:stretch>
+            <a:fillRect/>
+          </a:stretch>
+        </p:blipFill>
+        <p:spPr>
+          <a:xfrm>
+            <a:off x="9875520" y="-45720"/>
+            <a:ext cx="2011680" cy="2011680"/>
+          </a:xfrm>
+          <a:prstGeom prst="rect">
+            <a:avLst/>
+          </a:prstGeom>
+        </p:spPr>
+      </p:pic>
+      <p:sp>
+        <p:nvSpPr>
+          <p:cNvPr id="6" name="Rectangle 5"/>
+          <p:cNvSpPr/>
+          <p:nvPr/>
+        </p:nvSpPr>
+        <p:spPr>
+          <a:xfrm>
+            <a:off x="292608" y="274320"/>
+            <a:ext cx="11594592" cy="6300216"/>
+          </a:xfrm>
+          <a:prstGeom prst="rect">
+            <a:avLst/>
+          </a:prstGeom>
+          <a:noFill/>
+          <a:ln w="31750">
+            <a:solidFill>
+              <a:srgbClr val="B48C3C"/>
+            </a:solidFill>
+          </a:ln>
+        </p:spPr>
+        <p:style>
+          <a:lnRef idx="1">
+            <a:schemeClr val="accent1"/>
+          </a:lnRef>
+          <a:fillRef idx="3">
+            <a:schemeClr val="accent1"/>
+          </a:fillRef>
+          <a:effectRef idx="2">
+            <a:schemeClr val="accent1"/>
+          </a:effectRef>
+          <a:fontRef idx="minor">
+            <a:schemeClr val="lt1"/>
+          </a:fontRef>
+        </p:style>
+        <p:txBody>
+          <a:bodyPr rtlCol="0" anchor="ctr"/>
+          <a:lstStyle/>
+          <a:p>
+            <a:pPr algn="ctr"/>
+          </a:p>
+        </p:txBody>
+      </p:sp>
+      <p:sp>
+        <p:nvSpPr>
+          <p:cNvPr id="7" name="Rectangle 6"/>
+          <p:cNvSpPr/>
+          <p:nvPr/>
+        </p:nvSpPr>
+        <p:spPr>
+          <a:xfrm>
+            <a:off x="347472" y="329184"/>
+            <a:ext cx="11484864" cy="6190488"/>
+          </a:xfrm>
+          <a:prstGeom prst="rect">
+            <a:avLst/>
+          </a:prstGeom>
+          <a:noFill/>
+          <a:ln w="12700">
+            <a:solidFill>
+              <a:srgbClr val="F0C864"/>
+            </a:solidFill>
+          </a:ln>
+        </p:spPr>
+        <p:style>
+          <a:lnRef idx="1">
+            <a:schemeClr val="accent1"/>
+          </a:lnRef>
+          <a:fillRef idx="3">
+            <a:schemeClr val="accent1"/>
+          </a:fillRef>
+          <a:effectRef idx="2">
+            <a:schemeClr val="accent1"/>
+          </a:effectRef>
+          <a:fontRef idx="minor">
+            <a:schemeClr val="lt1"/>
+          </a:fontRef>
+        </p:style>
+        <p:txBody>
+          <a:bodyPr rtlCol="0" anchor="ctr"/>
+          <a:lstStyle/>
+          <a:p>
+            <a:pPr algn="ctr"/>
+          </a:p>
+        </p:txBody>
+      </p:sp>
+      <p:sp>
+        <p:nvSpPr>
+          <p:cNvPr id="8" name="TextBox 7"/>
           <p:cNvSpPr txBox="1"/>
           <p:nvPr/>
         </p:nvSpPr>
         <p:spPr>
           <a:xfrm>
-            <a:off x="2286000" y="2286000"/>
-            <a:ext cx="7589520" cy="1097280"/>
+            <a:off x="1371600" y="1828800"/>
+            <a:ext cx="9418320" cy="1828800"/>
           </a:xfrm>
           <a:prstGeom prst="rect">
             <a:avLst/>
@@ -3186,57 +3321,77 @@
           <a:p>
             <a:pPr algn="ctr">
               <a:spcAft>
-                <a:spcPts val="800"/>
+                <a:spcPts val="1000"/>
               </a:spcAft>
             </a:pPr>
             <a:r>
-              <a:rPr sz="4800" b="1">
-                <a:solidFill>
-                  <a:srgbClr val="64461E"/>
+              <a:rPr sz="5200" b="1">
+                <a:solidFill>
+                  <a:srgbClr val="C89628"/>
                 </a:solidFill>
                 <a:latin typeface="Microsoft YaHei"/>
               </a:rPr>
               <a:t>寓言四则</a:t>
             </a:r>
           </a:p>
-        </p:txBody>
-      </p:sp>
-      <p:sp>
-        <p:nvSpPr>
-          <p:cNvPr id="5" name="TextBox 4"/>
-          <p:cNvSpPr txBox="1"/>
-          <p:nvPr/>
-        </p:nvSpPr>
-        <p:spPr>
-          <a:xfrm>
-            <a:off x="2286000" y="3657600"/>
-            <a:ext cx="7589520" cy="548640"/>
-          </a:xfrm>
-          <a:prstGeom prst="rect">
-            <a:avLst/>
-          </a:prstGeom>
-          <a:noFill/>
-        </p:spPr>
-        <p:txBody>
-          <a:bodyPr wrap="none">
-            <a:spAutoFit/>
-          </a:bodyPr>
-          <a:lstStyle/>
           <a:p>
             <a:pPr algn="ctr">
               <a:spcAft>
-                <a:spcPts val="800"/>
+                <a:spcPts val="1000"/>
               </a:spcAft>
             </a:pPr>
             <a:r>
-              <a:rPr sz="2400" b="0">
-                <a:solidFill>
-                  <a:srgbClr val="C8963C"/>
+              <a:rPr sz="2600" b="0">
+                <a:solidFill>
+                  <a:srgbClr val="5A461E"/>
                 </a:solidFill>
                 <a:latin typeface="Microsoft YaHei"/>
               </a:rPr>
-              <a:t>母题：智慧与局限</a:t>
-            </a:r>
+              <a:t>第24课 · 第八、九课时 · 智慧与局限</a:t>
+            </a:r>
+          </a:p>
+        </p:txBody>
+      </p:sp>
+      <p:sp>
+        <p:nvSpPr>
+          <p:cNvPr id="9" name="Rectangle 8"/>
+          <p:cNvSpPr/>
+          <p:nvPr/>
+        </p:nvSpPr>
+        <p:spPr>
+          <a:xfrm>
+            <a:off x="3200400" y="5029200"/>
+            <a:ext cx="5760720" cy="27432"/>
+          </a:xfrm>
+          <a:prstGeom prst="rect">
+            <a:avLst/>
+          </a:prstGeom>
+          <a:solidFill>
+            <a:srgbClr val="F0C864"/>
+          </a:solidFill>
+          <a:ln>
+            <a:noFill/>
+          </a:ln>
+        </p:spPr>
+        <p:style>
+          <a:lnRef idx="1">
+            <a:schemeClr val="accent1"/>
+          </a:lnRef>
+          <a:fillRef idx="3">
+            <a:schemeClr val="accent1"/>
+          </a:fillRef>
+          <a:effectRef idx="2">
+            <a:schemeClr val="accent1"/>
+          </a:effectRef>
+          <a:fontRef idx="minor">
+            <a:schemeClr val="lt1"/>
+          </a:fontRef>
+        </p:style>
+        <p:txBody>
+          <a:bodyPr rtlCol="0" anchor="ctr"/>
+          <a:lstStyle/>
+          <a:p>
+            <a:pPr algn="ctr"/>
           </a:p>
         </p:txBody>
       </p:sp>
@@ -3260,7 +3415,7 @@
       <p:grpSpPr/>
       <p:pic>
         <p:nvPicPr>
-          <p:cNvPr id="2" name="Picture 1" descr="bg_scroll.png"/>
+          <p:cNvPr id="2" name="Picture 1" descr="bg_fable.png"/>
           <p:cNvPicPr>
             <a:picLocks noChangeAspect="1"/>
           </p:cNvPicPr>
@@ -3284,14 +3439,148 @@
       </p:pic>
       <p:sp>
         <p:nvSpPr>
-          <p:cNvPr id="3" name="TextBox 2"/>
+          <p:cNvPr id="3" name="Rectangle 2"/>
+          <p:cNvSpPr/>
+          <p:nvPr/>
+        </p:nvSpPr>
+        <p:spPr>
+          <a:xfrm>
+            <a:off x="292608" y="274320"/>
+            <a:ext cx="11594592" cy="6300216"/>
+          </a:xfrm>
+          <a:prstGeom prst="rect">
+            <a:avLst/>
+          </a:prstGeom>
+          <a:noFill/>
+          <a:ln w="31750">
+            <a:solidFill>
+              <a:srgbClr val="B48C3C"/>
+            </a:solidFill>
+          </a:ln>
+        </p:spPr>
+        <p:style>
+          <a:lnRef idx="1">
+            <a:schemeClr val="accent1"/>
+          </a:lnRef>
+          <a:fillRef idx="3">
+            <a:schemeClr val="accent1"/>
+          </a:fillRef>
+          <a:effectRef idx="2">
+            <a:schemeClr val="accent1"/>
+          </a:effectRef>
+          <a:fontRef idx="minor">
+            <a:schemeClr val="lt1"/>
+          </a:fontRef>
+        </p:style>
+        <p:txBody>
+          <a:bodyPr rtlCol="0" anchor="ctr"/>
+          <a:lstStyle/>
+          <a:p>
+            <a:pPr algn="ctr"/>
+          </a:p>
+        </p:txBody>
+      </p:sp>
+      <p:pic>
+        <p:nvPicPr>
+          <p:cNvPr id="4" name="Picture 3" descr="corner_fable_tl.png"/>
+          <p:cNvPicPr>
+            <a:picLocks noChangeAspect="1"/>
+          </p:cNvPicPr>
+          <p:nvPr/>
+        </p:nvPicPr>
+        <p:blipFill>
+          <a:blip r:embed="rId3"/>
+          <a:stretch>
+            <a:fillRect/>
+          </a:stretch>
+        </p:blipFill>
+        <p:spPr>
+          <a:xfrm>
+            <a:off x="-45720" y="-45720"/>
+            <a:ext cx="2011680" cy="2011680"/>
+          </a:xfrm>
+          <a:prstGeom prst="rect">
+            <a:avLst/>
+          </a:prstGeom>
+        </p:spPr>
+      </p:pic>
+      <p:pic>
+        <p:nvPicPr>
+          <p:cNvPr id="5" name="Picture 4" descr="corner_fable_tr.png"/>
+          <p:cNvPicPr>
+            <a:picLocks noChangeAspect="1"/>
+          </p:cNvPicPr>
+          <p:nvPr/>
+        </p:nvPicPr>
+        <p:blipFill>
+          <a:blip r:embed="rId4"/>
+          <a:stretch>
+            <a:fillRect/>
+          </a:stretch>
+        </p:blipFill>
+        <p:spPr>
+          <a:xfrm>
+            <a:off x="9875520" y="-45720"/>
+            <a:ext cx="2011680" cy="2011680"/>
+          </a:xfrm>
+          <a:prstGeom prst="rect">
+            <a:avLst/>
+          </a:prstGeom>
+        </p:spPr>
+      </p:pic>
+      <p:sp>
+        <p:nvSpPr>
+          <p:cNvPr id="6" name="Rounded Rectangle 5"/>
+          <p:cNvSpPr/>
+          <p:nvPr/>
+        </p:nvSpPr>
+        <p:spPr>
+          <a:xfrm>
+            <a:off x="4953304" y="502920"/>
+            <a:ext cx="2286000" cy="411480"/>
+          </a:xfrm>
+          <a:prstGeom prst="roundRect">
+            <a:avLst/>
+          </a:prstGeom>
+          <a:solidFill>
+            <a:srgbClr val="F0C864"/>
+          </a:solidFill>
+          <a:ln>
+            <a:noFill/>
+          </a:ln>
+        </p:spPr>
+        <p:style>
+          <a:lnRef idx="1">
+            <a:schemeClr val="accent1"/>
+          </a:lnRef>
+          <a:fillRef idx="3">
+            <a:schemeClr val="accent1"/>
+          </a:fillRef>
+          <a:effectRef idx="2">
+            <a:schemeClr val="accent1"/>
+          </a:effectRef>
+          <a:fontRef idx="minor">
+            <a:schemeClr val="lt1"/>
+          </a:fontRef>
+        </p:style>
+        <p:txBody>
+          <a:bodyPr rtlCol="0" anchor="ctr"/>
+          <a:lstStyle/>
+          <a:p>
+            <a:pPr algn="ctr"/>
+          </a:p>
+        </p:txBody>
+      </p:sp>
+      <p:sp>
+        <p:nvSpPr>
+          <p:cNvPr id="7" name="TextBox 6"/>
           <p:cNvSpPr txBox="1"/>
           <p:nvPr/>
         </p:nvSpPr>
         <p:spPr>
           <a:xfrm>
-            <a:off x="1371600" y="457200"/>
-            <a:ext cx="9418320" cy="640080"/>
+            <a:off x="4953304" y="521208"/>
+            <a:ext cx="2286000" cy="384048"/>
           </a:xfrm>
           <a:prstGeom prst="rect">
             <a:avLst/>
@@ -3304,15 +3593,54 @@
           </a:bodyPr>
           <a:lstStyle/>
           <a:p>
-            <a:pPr algn="l">
+            <a:pPr algn="ctr">
               <a:spcAft>
-                <a:spcPts val="800"/>
+                <a:spcPts val="1000"/>
               </a:spcAft>
             </a:pPr>
             <a:r>
-              <a:rPr sz="3200" b="1">
-                <a:solidFill>
-                  <a:srgbClr val="64461E"/>
+              <a:rPr sz="1800" b="1">
+                <a:solidFill>
+                  <a:srgbClr val="5A461E"/>
+                </a:solidFill>
+                <a:latin typeface="Microsoft YaHei"/>
+              </a:rPr>
+              <a:t>课堂笔记</a:t>
+            </a:r>
+          </a:p>
+        </p:txBody>
+      </p:sp>
+      <p:sp>
+        <p:nvSpPr>
+          <p:cNvPr id="8" name="TextBox 7"/>
+          <p:cNvSpPr txBox="1"/>
+          <p:nvPr/>
+        </p:nvSpPr>
+        <p:spPr>
+          <a:xfrm>
+            <a:off x="1371600" y="1051560"/>
+            <a:ext cx="9418320" cy="822960"/>
+          </a:xfrm>
+          <a:prstGeom prst="rect">
+            <a:avLst/>
+          </a:prstGeom>
+          <a:noFill/>
+        </p:spPr>
+        <p:txBody>
+          <a:bodyPr wrap="square">
+            <a:spAutoFit/>
+          </a:bodyPr>
+          <a:lstStyle/>
+          <a:p>
+            <a:pPr algn="ctr">
+              <a:spcAft>
+                <a:spcPts val="1000"/>
+              </a:spcAft>
+            </a:pPr>
+            <a:r>
+              <a:rPr sz="3600" b="1">
+                <a:solidFill>
+                  <a:srgbClr val="C89628"/>
                 </a:solidFill>
                 <a:latin typeface="Microsoft YaHei"/>
               </a:rPr>
@@ -3323,14 +3651,102 @@
       </p:sp>
       <p:sp>
         <p:nvSpPr>
-          <p:cNvPr id="4" name="TextBox 3"/>
+          <p:cNvPr id="9" name="Rectangle 8"/>
+          <p:cNvSpPr/>
+          <p:nvPr/>
+        </p:nvSpPr>
+        <p:spPr>
+          <a:xfrm>
+            <a:off x="3200400" y="1691640"/>
+            <a:ext cx="5760720" cy="27432"/>
+          </a:xfrm>
+          <a:prstGeom prst="rect">
+            <a:avLst/>
+          </a:prstGeom>
+          <a:solidFill>
+            <a:srgbClr val="F0C864"/>
+          </a:solidFill>
+          <a:ln>
+            <a:noFill/>
+          </a:ln>
+        </p:spPr>
+        <p:style>
+          <a:lnRef idx="1">
+            <a:schemeClr val="accent1"/>
+          </a:lnRef>
+          <a:fillRef idx="3">
+            <a:schemeClr val="accent1"/>
+          </a:fillRef>
+          <a:effectRef idx="2">
+            <a:schemeClr val="accent1"/>
+          </a:effectRef>
+          <a:fontRef idx="minor">
+            <a:schemeClr val="lt1"/>
+          </a:fontRef>
+        </p:style>
+        <p:txBody>
+          <a:bodyPr rtlCol="0" anchor="ctr"/>
+          <a:lstStyle/>
+          <a:p>
+            <a:pPr algn="ctr"/>
+          </a:p>
+        </p:txBody>
+      </p:sp>
+      <p:sp>
+        <p:nvSpPr>
+          <p:cNvPr id="10" name="Rounded Rectangle 9"/>
+          <p:cNvSpPr/>
+          <p:nvPr/>
+        </p:nvSpPr>
+        <p:spPr>
+          <a:xfrm>
+            <a:off x="1249984" y="1810512"/>
+            <a:ext cx="9692640" cy="3319272"/>
+          </a:xfrm>
+          <a:prstGeom prst="roundRect">
+            <a:avLst/>
+          </a:prstGeom>
+          <a:solidFill>
+            <a:srgbClr val="FFFCF0"/>
+          </a:solidFill>
+          <a:ln w="19050">
+            <a:solidFill>
+              <a:srgbClr val="F0C864"/>
+            </a:solidFill>
+          </a:ln>
+        </p:spPr>
+        <p:style>
+          <a:lnRef idx="1">
+            <a:schemeClr val="accent1"/>
+          </a:lnRef>
+          <a:fillRef idx="3">
+            <a:schemeClr val="accent1"/>
+          </a:fillRef>
+          <a:effectRef idx="2">
+            <a:schemeClr val="accent1"/>
+          </a:effectRef>
+          <a:fontRef idx="minor">
+            <a:schemeClr val="lt1"/>
+          </a:fontRef>
+        </p:style>
+        <p:txBody>
+          <a:bodyPr rtlCol="0" anchor="ctr"/>
+          <a:lstStyle/>
+          <a:p>
+            <a:pPr algn="ctr"/>
+          </a:p>
+        </p:txBody>
+      </p:sp>
+      <p:sp>
+        <p:nvSpPr>
+          <p:cNvPr id="11" name="TextBox 10"/>
           <p:cNvSpPr txBox="1"/>
           <p:nvPr/>
         </p:nvSpPr>
         <p:spPr>
           <a:xfrm>
-            <a:off x="1097280" y="1280160"/>
-            <a:ext cx="2286000" cy="457200"/>
+            <a:off x="1463040" y="1920240"/>
+            <a:ext cx="2103120" cy="502920"/>
           </a:xfrm>
           <a:prstGeom prst="rect">
             <a:avLst/>
@@ -3345,13 +3761,13 @@
           <a:p>
             <a:pPr algn="r">
               <a:spcAft>
-                <a:spcPts val="800"/>
+                <a:spcPts val="1000"/>
               </a:spcAft>
             </a:pPr>
             <a:r>
               <a:rPr sz="2200" b="1">
                 <a:solidFill>
-                  <a:srgbClr val="C8963C"/>
+                  <a:srgbClr val="C89628"/>
                 </a:solidFill>
                 <a:latin typeface="Microsoft YaHei"/>
               </a:rPr>
@@ -3362,14 +3778,14 @@
       </p:sp>
       <p:sp>
         <p:nvSpPr>
-          <p:cNvPr id="5" name="TextBox 4"/>
+          <p:cNvPr id="12" name="TextBox 11"/>
           <p:cNvSpPr txBox="1"/>
           <p:nvPr/>
         </p:nvSpPr>
         <p:spPr>
           <a:xfrm>
-            <a:off x="3657600" y="1280160"/>
-            <a:ext cx="7772400" cy="640080"/>
+            <a:off x="3749039" y="1920240"/>
+            <a:ext cx="7132320" cy="685800"/>
           </a:xfrm>
           <a:prstGeom prst="rect">
             <a:avLst/>
@@ -3384,31 +3800,31 @@
           <a:p>
             <a:pPr algn="l">
               <a:spcAft>
-                <a:spcPts val="800"/>
+                <a:spcPts val="1000"/>
               </a:spcAft>
             </a:pPr>
             <a:r>
               <a:rPr sz="2200" b="0">
                 <a:solidFill>
-                  <a:srgbClr val="64461E"/>
+                  <a:srgbClr val="5A461E"/>
                 </a:solidFill>
                 <a:latin typeface="Microsoft YaHei"/>
               </a:rPr>
-              <a:t>短小故事，寄寓深刻道理，多运用拟人</a:t>
-            </a:r>
-          </a:p>
-        </p:txBody>
-      </p:sp>
-      <p:sp>
-        <p:nvSpPr>
-          <p:cNvPr id="6" name="TextBox 5"/>
+              <a:t>短小故事，寄寓深刻道理，多运用拟人手法</a:t>
+            </a:r>
+          </a:p>
+        </p:txBody>
+      </p:sp>
+      <p:sp>
+        <p:nvSpPr>
+          <p:cNvPr id="13" name="TextBox 12"/>
           <p:cNvSpPr txBox="1"/>
           <p:nvPr/>
         </p:nvSpPr>
         <p:spPr>
           <a:xfrm>
-            <a:off x="1097280" y="2011680"/>
-            <a:ext cx="2286000" cy="457200"/>
+            <a:off x="1463040" y="2670048"/>
+            <a:ext cx="2103120" cy="502920"/>
           </a:xfrm>
           <a:prstGeom prst="rect">
             <a:avLst/>
@@ -3423,13 +3839,13 @@
           <a:p>
             <a:pPr algn="r">
               <a:spcAft>
-                <a:spcPts val="800"/>
+                <a:spcPts val="1000"/>
               </a:spcAft>
             </a:pPr>
             <a:r>
               <a:rPr sz="2200" b="1">
                 <a:solidFill>
-                  <a:srgbClr val="C8963C"/>
+                  <a:srgbClr val="C89628"/>
                 </a:solidFill>
                 <a:latin typeface="Microsoft YaHei"/>
               </a:rPr>
@@ -3440,14 +3856,14 @@
       </p:sp>
       <p:sp>
         <p:nvSpPr>
-          <p:cNvPr id="7" name="TextBox 6"/>
+          <p:cNvPr id="14" name="TextBox 13"/>
           <p:cNvSpPr txBox="1"/>
           <p:nvPr/>
         </p:nvSpPr>
         <p:spPr>
           <a:xfrm>
-            <a:off x="3657600" y="2011680"/>
-            <a:ext cx="7772400" cy="640080"/>
+            <a:off x="3749039" y="2670048"/>
+            <a:ext cx="7132320" cy="685800"/>
           </a:xfrm>
           <a:prstGeom prst="rect">
             <a:avLst/>
@@ -3462,31 +3878,31 @@
           <a:p>
             <a:pPr algn="l">
               <a:spcAft>
-                <a:spcPts val="800"/>
+                <a:spcPts val="1000"/>
               </a:spcAft>
             </a:pPr>
             <a:r>
               <a:rPr sz="2200" b="0">
                 <a:solidFill>
-                  <a:srgbClr val="64461E"/>
+                  <a:srgbClr val="5A461E"/>
                 </a:solidFill>
                 <a:latin typeface="Microsoft YaHei"/>
               </a:rPr>
-              <a:t>情节简短、人物典型、寓意明确</a:t>
-            </a:r>
-          </a:p>
-        </p:txBody>
-      </p:sp>
-      <p:sp>
-        <p:nvSpPr>
-          <p:cNvPr id="8" name="TextBox 7"/>
+              <a:t>情节简短、人物典型、寓意明确、多讽刺或警醒</a:t>
+            </a:r>
+          </a:p>
+        </p:txBody>
+      </p:sp>
+      <p:sp>
+        <p:nvSpPr>
+          <p:cNvPr id="15" name="TextBox 14"/>
           <p:cNvSpPr txBox="1"/>
           <p:nvPr/>
         </p:nvSpPr>
         <p:spPr>
           <a:xfrm>
-            <a:off x="1097280" y="2743200"/>
-            <a:ext cx="2286000" cy="457200"/>
+            <a:off x="1463040" y="3419856"/>
+            <a:ext cx="2103120" cy="502920"/>
           </a:xfrm>
           <a:prstGeom prst="rect">
             <a:avLst/>
@@ -3501,31 +3917,31 @@
           <a:p>
             <a:pPr algn="r">
               <a:spcAft>
-                <a:spcPts val="800"/>
+                <a:spcPts val="1000"/>
               </a:spcAft>
             </a:pPr>
             <a:r>
               <a:rPr sz="2200" b="1">
                 <a:solidFill>
-                  <a:srgbClr val="C8963C"/>
+                  <a:srgbClr val="C89628"/>
                 </a:solidFill>
                 <a:latin typeface="Microsoft YaHei"/>
               </a:rPr>
-              <a:t>出处</a:t>
-            </a:r>
-          </a:p>
-        </p:txBody>
-      </p:sp>
-      <p:sp>
-        <p:nvSpPr>
-          <p:cNvPr id="9" name="TextBox 8"/>
+              <a:t>四则出处</a:t>
+            </a:r>
+          </a:p>
+        </p:txBody>
+      </p:sp>
+      <p:sp>
+        <p:nvSpPr>
+          <p:cNvPr id="16" name="TextBox 15"/>
           <p:cNvSpPr txBox="1"/>
           <p:nvPr/>
         </p:nvSpPr>
         <p:spPr>
           <a:xfrm>
-            <a:off x="3657600" y="2743200"/>
-            <a:ext cx="7772400" cy="640080"/>
+            <a:off x="3749039" y="3419856"/>
+            <a:ext cx="7132320" cy="685800"/>
           </a:xfrm>
           <a:prstGeom prst="rect">
             <a:avLst/>
@@ -3540,31 +3956,31 @@
           <a:p>
             <a:pPr algn="l">
               <a:spcAft>
-                <a:spcPts val="800"/>
+                <a:spcPts val="1000"/>
               </a:spcAft>
             </a:pPr>
             <a:r>
               <a:rPr sz="2200" b="0">
                 <a:solidFill>
-                  <a:srgbClr val="64461E"/>
+                  <a:srgbClr val="5A461E"/>
                 </a:solidFill>
                 <a:latin typeface="Microsoft YaHei"/>
               </a:rPr>
-              <a:t>《赫耳墨斯和雕像者》《蚊子和狮子》→《伊索寓言》</a:t>
-            </a:r>
-          </a:p>
-        </p:txBody>
-      </p:sp>
-      <p:sp>
-        <p:nvSpPr>
-          <p:cNvPr id="10" name="TextBox 9"/>
+              <a:t>《赫耳墨斯和雕像者》《蚊子和狮子》出自《伊索寓言》</a:t>
+            </a:r>
+          </a:p>
+        </p:txBody>
+      </p:sp>
+      <p:sp>
+        <p:nvSpPr>
+          <p:cNvPr id="17" name="TextBox 16"/>
           <p:cNvSpPr txBox="1"/>
           <p:nvPr/>
         </p:nvSpPr>
         <p:spPr>
           <a:xfrm>
-            <a:off x="1097280" y="3474720"/>
-            <a:ext cx="2286000" cy="457200"/>
+            <a:off x="1463040" y="4169664"/>
+            <a:ext cx="9418320" cy="685800"/>
           </a:xfrm>
           <a:prstGeom prst="rect">
             <a:avLst/>
@@ -3577,58 +3993,19 @@
           </a:bodyPr>
           <a:lstStyle/>
           <a:p>
-            <a:pPr algn="r">
+            <a:pPr algn="l">
               <a:spcAft>
-                <a:spcPts val="800"/>
+                <a:spcPts val="1000"/>
               </a:spcAft>
             </a:pPr>
             <a:r>
-              <a:rPr sz="2200" b="1">
-                <a:solidFill>
-                  <a:srgbClr val="C8963C"/>
+              <a:rPr sz="2200" b="0">
+                <a:solidFill>
+                  <a:srgbClr val="5A461E"/>
                 </a:solidFill>
                 <a:latin typeface="Microsoft YaHei"/>
               </a:rPr>
-              <a:t/>
-            </a:r>
-          </a:p>
-        </p:txBody>
-      </p:sp>
-      <p:sp>
-        <p:nvSpPr>
-          <p:cNvPr id="11" name="TextBox 10"/>
-          <p:cNvSpPr txBox="1"/>
-          <p:nvPr/>
-        </p:nvSpPr>
-        <p:spPr>
-          <a:xfrm>
-            <a:off x="3657600" y="3474720"/>
-            <a:ext cx="7772400" cy="640080"/>
-          </a:xfrm>
-          <a:prstGeom prst="rect">
-            <a:avLst/>
-          </a:prstGeom>
-          <a:noFill/>
-        </p:spPr>
-        <p:txBody>
-          <a:bodyPr wrap="none">
-            <a:spAutoFit/>
-          </a:bodyPr>
-          <a:lstStyle/>
-          <a:p>
-            <a:pPr algn="l">
-              <a:spcAft>
-                <a:spcPts val="800"/>
-              </a:spcAft>
-            </a:pPr>
-            <a:r>
-              <a:rPr sz="2200" b="0">
-                <a:solidFill>
-                  <a:srgbClr val="64461E"/>
-                </a:solidFill>
-                <a:latin typeface="Microsoft YaHei"/>
-              </a:rPr>
-              <a:t>《穿井得一人》《杞人忧天》→《吕氏春秋》</a:t>
+              <a:t>《穿井得一人》《杞人忧天》出自《吕氏春秋》</a:t>
             </a:r>
           </a:p>
         </p:txBody>
@@ -3653,7 +4030,7 @@
       <p:grpSpPr/>
       <p:pic>
         <p:nvPicPr>
-          <p:cNvPr id="2" name="Picture 1" descr="bg_scroll.png"/>
+          <p:cNvPr id="2" name="Picture 1" descr="bg_fable.png"/>
           <p:cNvPicPr>
             <a:picLocks noChangeAspect="1"/>
           </p:cNvPicPr>
@@ -3677,63 +4054,22 @@
       </p:pic>
       <p:sp>
         <p:nvSpPr>
-          <p:cNvPr id="3" name="TextBox 2"/>
-          <p:cNvSpPr txBox="1"/>
-          <p:nvPr/>
-        </p:nvSpPr>
-        <p:spPr>
-          <a:xfrm>
-            <a:off x="1828800" y="457200"/>
-            <a:ext cx="8503920" cy="640080"/>
+          <p:cNvPr id="3" name="Rectangle 2"/>
+          <p:cNvSpPr/>
+          <p:nvPr/>
+        </p:nvSpPr>
+        <p:spPr>
+          <a:xfrm>
+            <a:off x="292608" y="274320"/>
+            <a:ext cx="11594592" cy="6300216"/>
           </a:xfrm>
           <a:prstGeom prst="rect">
             <a:avLst/>
           </a:prstGeom>
           <a:noFill/>
-        </p:spPr>
-        <p:txBody>
-          <a:bodyPr wrap="none">
-            <a:spAutoFit/>
-          </a:bodyPr>
-          <a:lstStyle/>
-          <a:p>
-            <a:pPr algn="ctr">
-              <a:spcAft>
-                <a:spcPts val="800"/>
-              </a:spcAft>
-            </a:pPr>
-            <a:r>
-              <a:rPr sz="3600" b="1">
-                <a:solidFill>
-                  <a:srgbClr val="64461E"/>
-                </a:solidFill>
-                <a:latin typeface="Microsoft YaHei"/>
-              </a:rPr>
-              <a:t>四则寓意</a:t>
-            </a:r>
-          </a:p>
-        </p:txBody>
-      </p:sp>
-      <p:sp>
-        <p:nvSpPr>
-          <p:cNvPr id="4" name="Rounded Rectangle 3"/>
-          <p:cNvSpPr/>
-          <p:nvPr/>
-        </p:nvSpPr>
-        <p:spPr>
-          <a:xfrm>
-            <a:off x="731520" y="1280160"/>
-            <a:ext cx="5029200" cy="2103120"/>
-          </a:xfrm>
-          <a:prstGeom prst="roundRect">
-            <a:avLst/>
-          </a:prstGeom>
-          <a:solidFill>
-            <a:srgbClr val="FFFAEB"/>
-          </a:solidFill>
-          <a:ln>
+          <a:ln w="31750">
             <a:solidFill>
-              <a:srgbClr val="C8963C"/>
+              <a:srgbClr val="B48C3C"/>
             </a:solidFill>
           </a:ln>
         </p:spPr>
@@ -3759,105 +4095,73 @@
           </a:p>
         </p:txBody>
       </p:sp>
-      <p:sp>
-        <p:nvSpPr>
-          <p:cNvPr id="5" name="TextBox 4"/>
-          <p:cNvSpPr txBox="1"/>
-          <p:nvPr/>
-        </p:nvSpPr>
-        <p:spPr>
-          <a:xfrm>
-            <a:off x="914400" y="1463039"/>
-            <a:ext cx="4663440" cy="457200"/>
-          </a:xfrm>
-          <a:prstGeom prst="rect">
-            <a:avLst/>
-          </a:prstGeom>
-          <a:noFill/>
-        </p:spPr>
-        <p:txBody>
-          <a:bodyPr wrap="none">
-            <a:spAutoFit/>
-          </a:bodyPr>
-          <a:lstStyle/>
-          <a:p>
-            <a:pPr algn="ctr">
-              <a:spcAft>
-                <a:spcPts val="800"/>
-              </a:spcAft>
-            </a:pPr>
-            <a:r>
-              <a:rPr sz="2600" b="1">
-                <a:solidFill>
-                  <a:srgbClr val="C8963C"/>
-                </a:solidFill>
-                <a:latin typeface="Microsoft YaHei"/>
-              </a:rPr>
-              <a:t>《赫耳墨斯和雕像者》</a:t>
-            </a:r>
-          </a:p>
-        </p:txBody>
-      </p:sp>
-      <p:sp>
-        <p:nvSpPr>
-          <p:cNvPr id="6" name="TextBox 5"/>
-          <p:cNvSpPr txBox="1"/>
-          <p:nvPr/>
-        </p:nvSpPr>
-        <p:spPr>
-          <a:xfrm>
-            <a:off x="914400" y="2011680"/>
-            <a:ext cx="4663440" cy="1188720"/>
-          </a:xfrm>
-          <a:prstGeom prst="rect">
-            <a:avLst/>
-          </a:prstGeom>
-          <a:noFill/>
-        </p:spPr>
-        <p:txBody>
-          <a:bodyPr wrap="none">
-            <a:spAutoFit/>
-          </a:bodyPr>
-          <a:lstStyle/>
-          <a:p>
-            <a:pPr algn="ctr">
-              <a:spcAft>
-                <a:spcPts val="800"/>
-              </a:spcAft>
-            </a:pPr>
-            <a:r>
-              <a:rPr sz="2000" b="0">
-                <a:solidFill>
-                  <a:srgbClr val="64461E"/>
-                </a:solidFill>
-                <a:latin typeface="Microsoft YaHei"/>
-              </a:rPr>
-              <a:t>讽刺自高自大、妄自尊重的人</a:t>
-            </a:r>
-          </a:p>
-        </p:txBody>
-      </p:sp>
-      <p:sp>
-        <p:nvSpPr>
-          <p:cNvPr id="7" name="Rounded Rectangle 6"/>
+      <p:pic>
+        <p:nvPicPr>
+          <p:cNvPr id="4" name="Picture 3" descr="corner_fable_tl.png"/>
+          <p:cNvPicPr>
+            <a:picLocks noChangeAspect="1"/>
+          </p:cNvPicPr>
+          <p:nvPr/>
+        </p:nvPicPr>
+        <p:blipFill>
+          <a:blip r:embed="rId3"/>
+          <a:stretch>
+            <a:fillRect/>
+          </a:stretch>
+        </p:blipFill>
+        <p:spPr>
+          <a:xfrm>
+            <a:off x="-45720" y="-45720"/>
+            <a:ext cx="2011680" cy="2011680"/>
+          </a:xfrm>
+          <a:prstGeom prst="rect">
+            <a:avLst/>
+          </a:prstGeom>
+        </p:spPr>
+      </p:pic>
+      <p:pic>
+        <p:nvPicPr>
+          <p:cNvPr id="5" name="Picture 4" descr="corner_fable_tr.png"/>
+          <p:cNvPicPr>
+            <a:picLocks noChangeAspect="1"/>
+          </p:cNvPicPr>
+          <p:nvPr/>
+        </p:nvPicPr>
+        <p:blipFill>
+          <a:blip r:embed="rId4"/>
+          <a:stretch>
+            <a:fillRect/>
+          </a:stretch>
+        </p:blipFill>
+        <p:spPr>
+          <a:xfrm>
+            <a:off x="9875520" y="-45720"/>
+            <a:ext cx="2011680" cy="2011680"/>
+          </a:xfrm>
+          <a:prstGeom prst="rect">
+            <a:avLst/>
+          </a:prstGeom>
+        </p:spPr>
+      </p:pic>
+      <p:sp>
+        <p:nvSpPr>
+          <p:cNvPr id="6" name="Rounded Rectangle 5"/>
           <p:cNvSpPr/>
           <p:nvPr/>
         </p:nvSpPr>
         <p:spPr>
           <a:xfrm>
-            <a:off x="6217920" y="1280160"/>
-            <a:ext cx="5029200" cy="2103120"/>
+            <a:off x="4953304" y="502920"/>
+            <a:ext cx="2286000" cy="411480"/>
           </a:xfrm>
           <a:prstGeom prst="roundRect">
             <a:avLst/>
           </a:prstGeom>
           <a:solidFill>
-            <a:srgbClr val="FFFAEB"/>
+            <a:srgbClr val="F0C864"/>
           </a:solidFill>
           <a:ln>
-            <a:solidFill>
-              <a:srgbClr val="C8963C"/>
-            </a:solidFill>
+            <a:noFill/>
           </a:ln>
         </p:spPr>
         <p:style>
@@ -3884,14 +4188,14 @@
       </p:sp>
       <p:sp>
         <p:nvSpPr>
-          <p:cNvPr id="8" name="TextBox 7"/>
+          <p:cNvPr id="7" name="TextBox 6"/>
           <p:cNvSpPr txBox="1"/>
           <p:nvPr/>
         </p:nvSpPr>
         <p:spPr>
           <a:xfrm>
-            <a:off x="6400800" y="1463039"/>
-            <a:ext cx="4663440" cy="457200"/>
+            <a:off x="4953304" y="521208"/>
+            <a:ext cx="2286000" cy="384048"/>
           </a:xfrm>
           <a:prstGeom prst="rect">
             <a:avLst/>
@@ -3906,31 +4210,31 @@
           <a:p>
             <a:pPr algn="ctr">
               <a:spcAft>
-                <a:spcPts val="800"/>
+                <a:spcPts val="1000"/>
               </a:spcAft>
             </a:pPr>
             <a:r>
-              <a:rPr sz="2600" b="1">
-                <a:solidFill>
-                  <a:srgbClr val="C8963C"/>
+              <a:rPr sz="1800" b="1">
+                <a:solidFill>
+                  <a:srgbClr val="5A461E"/>
                 </a:solidFill>
                 <a:latin typeface="Microsoft YaHei"/>
               </a:rPr>
-              <a:t>《蚊子和狮子》</a:t>
-            </a:r>
-          </a:p>
-        </p:txBody>
-      </p:sp>
-      <p:sp>
-        <p:nvSpPr>
-          <p:cNvPr id="9" name="TextBox 8"/>
+              <a:t>寓意笔记</a:t>
+            </a:r>
+          </a:p>
+        </p:txBody>
+      </p:sp>
+      <p:sp>
+        <p:nvSpPr>
+          <p:cNvPr id="8" name="TextBox 7"/>
           <p:cNvSpPr txBox="1"/>
           <p:nvPr/>
         </p:nvSpPr>
         <p:spPr>
           <a:xfrm>
-            <a:off x="6400800" y="2011680"/>
-            <a:ext cx="4663440" cy="1188720"/>
+            <a:off x="1371600" y="1051560"/>
+            <a:ext cx="9418320" cy="822960"/>
           </a:xfrm>
           <a:prstGeom prst="rect">
             <a:avLst/>
@@ -3938,49 +4242,47 @@
           <a:noFill/>
         </p:spPr>
         <p:txBody>
-          <a:bodyPr wrap="none">
+          <a:bodyPr wrap="square">
             <a:spAutoFit/>
           </a:bodyPr>
           <a:lstStyle/>
           <a:p>
             <a:pPr algn="ctr">
               <a:spcAft>
-                <a:spcPts val="800"/>
+                <a:spcPts val="1000"/>
               </a:spcAft>
             </a:pPr>
             <a:r>
-              <a:rPr sz="2000" b="0">
-                <a:solidFill>
-                  <a:srgbClr val="64461E"/>
+              <a:rPr sz="3600" b="1">
+                <a:solidFill>
+                  <a:srgbClr val="C89628"/>
                 </a:solidFill>
                 <a:latin typeface="Microsoft YaHei"/>
               </a:rPr>
-              <a:t>再小的个体也有长处，骄兵必败</a:t>
-            </a:r>
-          </a:p>
-        </p:txBody>
-      </p:sp>
-      <p:sp>
-        <p:nvSpPr>
-          <p:cNvPr id="10" name="Rounded Rectangle 9"/>
+              <a:t>四则寓意</a:t>
+            </a:r>
+          </a:p>
+        </p:txBody>
+      </p:sp>
+      <p:sp>
+        <p:nvSpPr>
+          <p:cNvPr id="9" name="Rectangle 8"/>
           <p:cNvSpPr/>
           <p:nvPr/>
         </p:nvSpPr>
         <p:spPr>
           <a:xfrm>
-            <a:off x="731520" y="3657600"/>
-            <a:ext cx="5029200" cy="2103120"/>
-          </a:xfrm>
-          <a:prstGeom prst="roundRect">
+            <a:off x="3200400" y="1691640"/>
+            <a:ext cx="5760720" cy="27432"/>
+          </a:xfrm>
+          <a:prstGeom prst="rect">
             <a:avLst/>
           </a:prstGeom>
           <a:solidFill>
-            <a:srgbClr val="FFFAEB"/>
+            <a:srgbClr val="F0C864"/>
           </a:solidFill>
           <a:ln>
-            <a:solidFill>
-              <a:srgbClr val="C8963C"/>
-            </a:solidFill>
+            <a:noFill/>
           </a:ln>
         </p:spPr>
         <p:style>
@@ -4007,102 +4309,24 @@
       </p:sp>
       <p:sp>
         <p:nvSpPr>
-          <p:cNvPr id="11" name="TextBox 10"/>
-          <p:cNvSpPr txBox="1"/>
-          <p:nvPr/>
-        </p:nvSpPr>
-        <p:spPr>
-          <a:xfrm>
-            <a:off x="914400" y="3840480"/>
-            <a:ext cx="4663440" cy="457200"/>
-          </a:xfrm>
-          <a:prstGeom prst="rect">
-            <a:avLst/>
-          </a:prstGeom>
-          <a:noFill/>
-        </p:spPr>
-        <p:txBody>
-          <a:bodyPr wrap="none">
-            <a:spAutoFit/>
-          </a:bodyPr>
-          <a:lstStyle/>
-          <a:p>
-            <a:pPr algn="ctr">
-              <a:spcAft>
-                <a:spcPts val="800"/>
-              </a:spcAft>
-            </a:pPr>
-            <a:r>
-              <a:rPr sz="2600" b="1">
-                <a:solidFill>
-                  <a:srgbClr val="C8963C"/>
-                </a:solidFill>
-                <a:latin typeface="Microsoft YaHei"/>
-              </a:rPr>
-              <a:t>《穿井得一人》</a:t>
-            </a:r>
-          </a:p>
-        </p:txBody>
-      </p:sp>
-      <p:sp>
-        <p:nvSpPr>
-          <p:cNvPr id="12" name="TextBox 11"/>
-          <p:cNvSpPr txBox="1"/>
-          <p:nvPr/>
-        </p:nvSpPr>
-        <p:spPr>
-          <a:xfrm>
-            <a:off x="914400" y="4389120"/>
-            <a:ext cx="4663440" cy="1188720"/>
-          </a:xfrm>
-          <a:prstGeom prst="rect">
-            <a:avLst/>
-          </a:prstGeom>
-          <a:noFill/>
-        </p:spPr>
-        <p:txBody>
-          <a:bodyPr wrap="none">
-            <a:spAutoFit/>
-          </a:bodyPr>
-          <a:lstStyle/>
-          <a:p>
-            <a:pPr algn="ctr">
-              <a:spcAft>
-                <a:spcPts val="800"/>
-              </a:spcAft>
-            </a:pPr>
-            <a:r>
-              <a:rPr sz="2000" b="0">
-                <a:solidFill>
-                  <a:srgbClr val="64461E"/>
-                </a:solidFill>
-                <a:latin typeface="Microsoft YaHei"/>
-              </a:rPr>
-              <a:t>以讹传讹，调查求证才能辨明真相</a:t>
-            </a:r>
-          </a:p>
-        </p:txBody>
-      </p:sp>
-      <p:sp>
-        <p:nvSpPr>
-          <p:cNvPr id="13" name="Rounded Rectangle 12"/>
+          <p:cNvPr id="10" name="Rounded Rectangle 9"/>
           <p:cNvSpPr/>
           <p:nvPr/>
         </p:nvSpPr>
         <p:spPr>
           <a:xfrm>
-            <a:off x="6217920" y="3657600"/>
-            <a:ext cx="5029200" cy="2103120"/>
+            <a:off x="1249984" y="1810512"/>
+            <a:ext cx="9692640" cy="3319272"/>
           </a:xfrm>
           <a:prstGeom prst="roundRect">
             <a:avLst/>
           </a:prstGeom>
           <a:solidFill>
-            <a:srgbClr val="FFFAEB"/>
+            <a:srgbClr val="FFFCF0"/>
           </a:solidFill>
-          <a:ln>
+          <a:ln w="19050">
             <a:solidFill>
-              <a:srgbClr val="C8963C"/>
+              <a:srgbClr val="F0C864"/>
             </a:solidFill>
           </a:ln>
         </p:spPr>
@@ -4130,14 +4354,14 @@
       </p:sp>
       <p:sp>
         <p:nvSpPr>
-          <p:cNvPr id="14" name="TextBox 13"/>
+          <p:cNvPr id="11" name="TextBox 10"/>
           <p:cNvSpPr txBox="1"/>
           <p:nvPr/>
         </p:nvSpPr>
         <p:spPr>
           <a:xfrm>
-            <a:off x="6400800" y="3840480"/>
-            <a:ext cx="4663440" cy="457200"/>
+            <a:off x="1463040" y="1920240"/>
+            <a:ext cx="2103120" cy="502920"/>
           </a:xfrm>
           <a:prstGeom prst="rect">
             <a:avLst/>
@@ -4150,33 +4374,33 @@
           </a:bodyPr>
           <a:lstStyle/>
           <a:p>
-            <a:pPr algn="ctr">
+            <a:pPr algn="r">
               <a:spcAft>
-                <a:spcPts val="800"/>
+                <a:spcPts val="1000"/>
               </a:spcAft>
             </a:pPr>
             <a:r>
-              <a:rPr sz="2600" b="1">
-                <a:solidFill>
-                  <a:srgbClr val="C8963C"/>
+              <a:rPr sz="2200" b="1">
+                <a:solidFill>
+                  <a:srgbClr val="C89628"/>
                 </a:solidFill>
                 <a:latin typeface="Microsoft YaHei"/>
               </a:rPr>
-              <a:t>《杞人忧天》</a:t>
-            </a:r>
-          </a:p>
-        </p:txBody>
-      </p:sp>
-      <p:sp>
-        <p:nvSpPr>
-          <p:cNvPr id="15" name="TextBox 14"/>
+              <a:t>赫耳墨斯</a:t>
+            </a:r>
+          </a:p>
+        </p:txBody>
+      </p:sp>
+      <p:sp>
+        <p:nvSpPr>
+          <p:cNvPr id="12" name="TextBox 11"/>
           <p:cNvSpPr txBox="1"/>
           <p:nvPr/>
         </p:nvSpPr>
         <p:spPr>
           <a:xfrm>
-            <a:off x="6400800" y="4389120"/>
-            <a:ext cx="4663440" cy="1188720"/>
+            <a:off x="3749039" y="1920240"/>
+            <a:ext cx="7132320" cy="685800"/>
           </a:xfrm>
           <a:prstGeom prst="rect">
             <a:avLst/>
@@ -4189,15 +4413,249 @@
           </a:bodyPr>
           <a:lstStyle/>
           <a:p>
-            <a:pPr algn="ctr">
+            <a:pPr algn="l">
               <a:spcAft>
-                <a:spcPts val="800"/>
+                <a:spcPts val="1000"/>
               </a:spcAft>
             </a:pPr>
             <a:r>
-              <a:rPr sz="2000" b="0">
-                <a:solidFill>
-                  <a:srgbClr val="64461E"/>
+              <a:rPr sz="2200" b="0">
+                <a:solidFill>
+                  <a:srgbClr val="5A461E"/>
+                </a:solidFill>
+                <a:latin typeface="Microsoft YaHei"/>
+              </a:rPr>
+              <a:t>讽刺自高自大、妄自尊重的人</a:t>
+            </a:r>
+          </a:p>
+        </p:txBody>
+      </p:sp>
+      <p:sp>
+        <p:nvSpPr>
+          <p:cNvPr id="13" name="TextBox 12"/>
+          <p:cNvSpPr txBox="1"/>
+          <p:nvPr/>
+        </p:nvSpPr>
+        <p:spPr>
+          <a:xfrm>
+            <a:off x="1463040" y="2670048"/>
+            <a:ext cx="2103120" cy="502920"/>
+          </a:xfrm>
+          <a:prstGeom prst="rect">
+            <a:avLst/>
+          </a:prstGeom>
+          <a:noFill/>
+        </p:spPr>
+        <p:txBody>
+          <a:bodyPr wrap="none">
+            <a:spAutoFit/>
+          </a:bodyPr>
+          <a:lstStyle/>
+          <a:p>
+            <a:pPr algn="r">
+              <a:spcAft>
+                <a:spcPts val="1000"/>
+              </a:spcAft>
+            </a:pPr>
+            <a:r>
+              <a:rPr sz="2200" b="1">
+                <a:solidFill>
+                  <a:srgbClr val="C89628"/>
+                </a:solidFill>
+                <a:latin typeface="Microsoft YaHei"/>
+              </a:rPr>
+              <a:t>蚊子和狮子</a:t>
+            </a:r>
+          </a:p>
+        </p:txBody>
+      </p:sp>
+      <p:sp>
+        <p:nvSpPr>
+          <p:cNvPr id="14" name="TextBox 13"/>
+          <p:cNvSpPr txBox="1"/>
+          <p:nvPr/>
+        </p:nvSpPr>
+        <p:spPr>
+          <a:xfrm>
+            <a:off x="3749039" y="2670048"/>
+            <a:ext cx="7132320" cy="685800"/>
+          </a:xfrm>
+          <a:prstGeom prst="rect">
+            <a:avLst/>
+          </a:prstGeom>
+          <a:noFill/>
+        </p:spPr>
+        <p:txBody>
+          <a:bodyPr wrap="none">
+            <a:spAutoFit/>
+          </a:bodyPr>
+          <a:lstStyle/>
+          <a:p>
+            <a:pPr algn="l">
+              <a:spcAft>
+                <a:spcPts val="1000"/>
+              </a:spcAft>
+            </a:pPr>
+            <a:r>
+              <a:rPr sz="2200" b="0">
+                <a:solidFill>
+                  <a:srgbClr val="5A461E"/>
+                </a:solidFill>
+                <a:latin typeface="Microsoft YaHei"/>
+              </a:rPr>
+              <a:t>再小的个体也有长处，骄兵必败</a:t>
+            </a:r>
+          </a:p>
+        </p:txBody>
+      </p:sp>
+      <p:sp>
+        <p:nvSpPr>
+          <p:cNvPr id="15" name="TextBox 14"/>
+          <p:cNvSpPr txBox="1"/>
+          <p:nvPr/>
+        </p:nvSpPr>
+        <p:spPr>
+          <a:xfrm>
+            <a:off x="1463040" y="3419856"/>
+            <a:ext cx="2103120" cy="502920"/>
+          </a:xfrm>
+          <a:prstGeom prst="rect">
+            <a:avLst/>
+          </a:prstGeom>
+          <a:noFill/>
+        </p:spPr>
+        <p:txBody>
+          <a:bodyPr wrap="none">
+            <a:spAutoFit/>
+          </a:bodyPr>
+          <a:lstStyle/>
+          <a:p>
+            <a:pPr algn="r">
+              <a:spcAft>
+                <a:spcPts val="1000"/>
+              </a:spcAft>
+            </a:pPr>
+            <a:r>
+              <a:rPr sz="2200" b="1">
+                <a:solidFill>
+                  <a:srgbClr val="C89628"/>
+                </a:solidFill>
+                <a:latin typeface="Microsoft YaHei"/>
+              </a:rPr>
+              <a:t>穿井得一人</a:t>
+            </a:r>
+          </a:p>
+        </p:txBody>
+      </p:sp>
+      <p:sp>
+        <p:nvSpPr>
+          <p:cNvPr id="16" name="TextBox 15"/>
+          <p:cNvSpPr txBox="1"/>
+          <p:nvPr/>
+        </p:nvSpPr>
+        <p:spPr>
+          <a:xfrm>
+            <a:off x="3749039" y="3419856"/>
+            <a:ext cx="7132320" cy="685800"/>
+          </a:xfrm>
+          <a:prstGeom prst="rect">
+            <a:avLst/>
+          </a:prstGeom>
+          <a:noFill/>
+        </p:spPr>
+        <p:txBody>
+          <a:bodyPr wrap="none">
+            <a:spAutoFit/>
+          </a:bodyPr>
+          <a:lstStyle/>
+          <a:p>
+            <a:pPr algn="l">
+              <a:spcAft>
+                <a:spcPts val="1000"/>
+              </a:spcAft>
+            </a:pPr>
+            <a:r>
+              <a:rPr sz="2200" b="0">
+                <a:solidFill>
+                  <a:srgbClr val="5A461E"/>
+                </a:solidFill>
+                <a:latin typeface="Microsoft YaHei"/>
+              </a:rPr>
+              <a:t>以讹传讹，调查求证才能辨明真相</a:t>
+            </a:r>
+          </a:p>
+        </p:txBody>
+      </p:sp>
+      <p:sp>
+        <p:nvSpPr>
+          <p:cNvPr id="17" name="TextBox 16"/>
+          <p:cNvSpPr txBox="1"/>
+          <p:nvPr/>
+        </p:nvSpPr>
+        <p:spPr>
+          <a:xfrm>
+            <a:off x="1463040" y="4169664"/>
+            <a:ext cx="2103120" cy="502920"/>
+          </a:xfrm>
+          <a:prstGeom prst="rect">
+            <a:avLst/>
+          </a:prstGeom>
+          <a:noFill/>
+        </p:spPr>
+        <p:txBody>
+          <a:bodyPr wrap="none">
+            <a:spAutoFit/>
+          </a:bodyPr>
+          <a:lstStyle/>
+          <a:p>
+            <a:pPr algn="r">
+              <a:spcAft>
+                <a:spcPts val="1000"/>
+              </a:spcAft>
+            </a:pPr>
+            <a:r>
+              <a:rPr sz="2200" b="1">
+                <a:solidFill>
+                  <a:srgbClr val="C89628"/>
+                </a:solidFill>
+                <a:latin typeface="Microsoft YaHei"/>
+              </a:rPr>
+              <a:t>杞人忧天</a:t>
+            </a:r>
+          </a:p>
+        </p:txBody>
+      </p:sp>
+      <p:sp>
+        <p:nvSpPr>
+          <p:cNvPr id="18" name="TextBox 17"/>
+          <p:cNvSpPr txBox="1"/>
+          <p:nvPr/>
+        </p:nvSpPr>
+        <p:spPr>
+          <a:xfrm>
+            <a:off x="3749039" y="4169664"/>
+            <a:ext cx="7132320" cy="685800"/>
+          </a:xfrm>
+          <a:prstGeom prst="rect">
+            <a:avLst/>
+          </a:prstGeom>
+          <a:noFill/>
+        </p:spPr>
+        <p:txBody>
+          <a:bodyPr wrap="none">
+            <a:spAutoFit/>
+          </a:bodyPr>
+          <a:lstStyle/>
+          <a:p>
+            <a:pPr algn="l">
+              <a:spcAft>
+                <a:spcPts val="1000"/>
+              </a:spcAft>
+            </a:pPr>
+            <a:r>
+              <a:rPr sz="2200" b="0">
+                <a:solidFill>
+                  <a:srgbClr val="5A461E"/>
                 </a:solidFill>
                 <a:latin typeface="Microsoft YaHei"/>
               </a:rPr>
@@ -4226,7 +4684,7 @@
       <p:grpSpPr/>
       <p:pic>
         <p:nvPicPr>
-          <p:cNvPr id="2" name="Picture 1" descr="bg_scroll.png"/>
+          <p:cNvPr id="2" name="Picture 1" descr="bg_fable.png"/>
           <p:cNvPicPr>
             <a:picLocks noChangeAspect="1"/>
           </p:cNvPicPr>
@@ -4250,179 +4708,23 @@
       </p:pic>
       <p:sp>
         <p:nvSpPr>
-          <p:cNvPr id="3" name="TextBox 2"/>
-          <p:cNvSpPr txBox="1"/>
-          <p:nvPr/>
-        </p:nvSpPr>
-        <p:spPr>
-          <a:xfrm>
-            <a:off x="1828800" y="411480"/>
-            <a:ext cx="8503920" cy="548640"/>
+          <p:cNvPr id="3" name="Rectangle 2"/>
+          <p:cNvSpPr/>
+          <p:nvPr/>
+        </p:nvSpPr>
+        <p:spPr>
+          <a:xfrm>
+            <a:off x="292608" y="274320"/>
+            <a:ext cx="11594592" cy="6300216"/>
           </a:xfrm>
           <a:prstGeom prst="rect">
             <a:avLst/>
           </a:prstGeom>
           <a:noFill/>
-        </p:spPr>
-        <p:txBody>
-          <a:bodyPr wrap="none">
-            <a:spAutoFit/>
-          </a:bodyPr>
-          <a:lstStyle/>
-          <a:p>
-            <a:pPr algn="ctr">
-              <a:spcAft>
-                <a:spcPts val="800"/>
-              </a:spcAft>
-            </a:pPr>
-            <a:r>
-              <a:rPr sz="3200" b="1">
-                <a:solidFill>
-                  <a:srgbClr val="64461E"/>
-                </a:solidFill>
-                <a:latin typeface="Microsoft YaHei"/>
-              </a:rPr>
-              <a:t>文言积累</a:t>
-            </a:r>
-          </a:p>
-        </p:txBody>
-      </p:sp>
-      <p:sp>
-        <p:nvSpPr>
-          <p:cNvPr id="4" name="TextBox 3"/>
-          <p:cNvSpPr txBox="1"/>
-          <p:nvPr/>
-        </p:nvSpPr>
-        <p:spPr>
-          <a:xfrm>
-            <a:off x="914400" y="1188720"/>
-            <a:ext cx="10332720" cy="731520"/>
-          </a:xfrm>
-          <a:prstGeom prst="rect">
-            <a:avLst/>
-          </a:prstGeom>
-          <a:noFill/>
-        </p:spPr>
-        <p:txBody>
-          <a:bodyPr wrap="none">
-            <a:spAutoFit/>
-          </a:bodyPr>
-          <a:lstStyle/>
-          <a:p>
-            <a:pPr algn="ctr">
-              <a:spcAft>
-                <a:spcPts val="800"/>
-              </a:spcAft>
-            </a:pPr>
-            <a:r>
-              <a:rPr sz="3600" b="1">
-                <a:solidFill>
-                  <a:srgbClr val="64461E"/>
-                </a:solidFill>
-                <a:latin typeface="Microsoft YaHei"/>
-              </a:rPr>
-              <a:t>得一人之使，非得一人于井中也。</a:t>
-            </a:r>
-          </a:p>
-        </p:txBody>
-      </p:sp>
-      <p:sp>
-        <p:nvSpPr>
-          <p:cNvPr id="5" name="TextBox 4"/>
-          <p:cNvSpPr txBox="1"/>
-          <p:nvPr/>
-        </p:nvSpPr>
-        <p:spPr>
-          <a:xfrm>
-            <a:off x="1371600" y="2286000"/>
-            <a:ext cx="2286000" cy="457200"/>
-          </a:xfrm>
-          <a:prstGeom prst="rect">
-            <a:avLst/>
-          </a:prstGeom>
-          <a:noFill/>
-        </p:spPr>
-        <p:txBody>
-          <a:bodyPr wrap="none">
-            <a:spAutoFit/>
-          </a:bodyPr>
-          <a:lstStyle/>
-          <a:p>
-            <a:pPr algn="ctr">
-              <a:spcAft>
-                <a:spcPts val="800"/>
-              </a:spcAft>
-            </a:pPr>
-            <a:r>
-              <a:rPr sz="2400" b="1">
-                <a:solidFill>
-                  <a:srgbClr val="C8963C"/>
-                </a:solidFill>
-                <a:latin typeface="Microsoft YaHei"/>
-              </a:rPr>
-              <a:t>闻</a:t>
-            </a:r>
-          </a:p>
-        </p:txBody>
-      </p:sp>
-      <p:sp>
-        <p:nvSpPr>
-          <p:cNvPr id="6" name="TextBox 5"/>
-          <p:cNvSpPr txBox="1"/>
-          <p:nvPr/>
-        </p:nvSpPr>
-        <p:spPr>
-          <a:xfrm>
-            <a:off x="1371600" y="2834640"/>
-            <a:ext cx="2286000" cy="548640"/>
-          </a:xfrm>
-          <a:prstGeom prst="rect">
-            <a:avLst/>
-          </a:prstGeom>
-          <a:noFill/>
-        </p:spPr>
-        <p:txBody>
-          <a:bodyPr wrap="none">
-            <a:spAutoFit/>
-          </a:bodyPr>
-          <a:lstStyle/>
-          <a:p>
-            <a:pPr algn="ctr">
-              <a:spcAft>
-                <a:spcPts val="800"/>
-              </a:spcAft>
-            </a:pPr>
-            <a:r>
-              <a:rPr sz="2000" b="0">
-                <a:solidFill>
-                  <a:srgbClr val="64461E"/>
-                </a:solidFill>
-                <a:latin typeface="Microsoft YaHei"/>
-              </a:rPr>
-              <a:t>听说</a:t>
-            </a:r>
-          </a:p>
-        </p:txBody>
-      </p:sp>
-      <p:sp>
-        <p:nvSpPr>
-          <p:cNvPr id="7" name="Rectangle 6"/>
-          <p:cNvSpPr/>
-          <p:nvPr/>
-        </p:nvSpPr>
-        <p:spPr>
-          <a:xfrm>
-            <a:off x="1097280" y="2103120"/>
-            <a:ext cx="10058400" cy="13716"/>
-          </a:xfrm>
-          <a:prstGeom prst="rect">
-            <a:avLst/>
-          </a:prstGeom>
-          <a:solidFill>
-            <a:srgbClr val="C8963C"/>
-          </a:solidFill>
-          <a:ln>
-            <a:noFill/>
+          <a:ln w="31750">
+            <a:solidFill>
+              <a:srgbClr val="B48C3C"/>
+            </a:solidFill>
           </a:ln>
         </p:spPr>
         <p:style>
@@ -4447,100 +4749,70 @@
           </a:p>
         </p:txBody>
       </p:sp>
-      <p:sp>
-        <p:nvSpPr>
-          <p:cNvPr id="8" name="TextBox 7"/>
-          <p:cNvSpPr txBox="1"/>
-          <p:nvPr/>
-        </p:nvSpPr>
-        <p:spPr>
-          <a:xfrm>
-            <a:off x="3931920" y="2286000"/>
-            <a:ext cx="2286000" cy="457200"/>
-          </a:xfrm>
-          <a:prstGeom prst="rect">
-            <a:avLst/>
-          </a:prstGeom>
-          <a:noFill/>
-        </p:spPr>
-        <p:txBody>
-          <a:bodyPr wrap="none">
-            <a:spAutoFit/>
-          </a:bodyPr>
-          <a:lstStyle/>
-          <a:p>
-            <a:pPr algn="ctr">
-              <a:spcAft>
-                <a:spcPts val="800"/>
-              </a:spcAft>
-            </a:pPr>
-            <a:r>
-              <a:rPr sz="2400" b="1">
-                <a:solidFill>
-                  <a:srgbClr val="C8963C"/>
-                </a:solidFill>
-                <a:latin typeface="Microsoft YaHei"/>
-              </a:rPr>
-              <a:t>道</a:t>
-            </a:r>
-          </a:p>
-        </p:txBody>
-      </p:sp>
-      <p:sp>
-        <p:nvSpPr>
-          <p:cNvPr id="9" name="TextBox 8"/>
-          <p:cNvSpPr txBox="1"/>
-          <p:nvPr/>
-        </p:nvSpPr>
-        <p:spPr>
-          <a:xfrm>
-            <a:off x="3931920" y="2834640"/>
-            <a:ext cx="2286000" cy="548640"/>
-          </a:xfrm>
-          <a:prstGeom prst="rect">
-            <a:avLst/>
-          </a:prstGeom>
-          <a:noFill/>
-        </p:spPr>
-        <p:txBody>
-          <a:bodyPr wrap="none">
-            <a:spAutoFit/>
-          </a:bodyPr>
-          <a:lstStyle/>
-          <a:p>
-            <a:pPr algn="ctr">
-              <a:spcAft>
-                <a:spcPts val="800"/>
-              </a:spcAft>
-            </a:pPr>
-            <a:r>
-              <a:rPr sz="2000" b="0">
-                <a:solidFill>
-                  <a:srgbClr val="64461E"/>
-                </a:solidFill>
-                <a:latin typeface="Microsoft YaHei"/>
-              </a:rPr>
-              <a:t>讲述</a:t>
-            </a:r>
-          </a:p>
-        </p:txBody>
-      </p:sp>
-      <p:sp>
-        <p:nvSpPr>
-          <p:cNvPr id="10" name="Rectangle 9"/>
+      <p:pic>
+        <p:nvPicPr>
+          <p:cNvPr id="4" name="Picture 3" descr="corner_fable_tl.png"/>
+          <p:cNvPicPr>
+            <a:picLocks noChangeAspect="1"/>
+          </p:cNvPicPr>
+          <p:nvPr/>
+        </p:nvPicPr>
+        <p:blipFill>
+          <a:blip r:embed="rId3"/>
+          <a:stretch>
+            <a:fillRect/>
+          </a:stretch>
+        </p:blipFill>
+        <p:spPr>
+          <a:xfrm>
+            <a:off x="-45720" y="-45720"/>
+            <a:ext cx="2011680" cy="2011680"/>
+          </a:xfrm>
+          <a:prstGeom prst="rect">
+            <a:avLst/>
+          </a:prstGeom>
+        </p:spPr>
+      </p:pic>
+      <p:pic>
+        <p:nvPicPr>
+          <p:cNvPr id="5" name="Picture 4" descr="corner_fable_tr.png"/>
+          <p:cNvPicPr>
+            <a:picLocks noChangeAspect="1"/>
+          </p:cNvPicPr>
+          <p:nvPr/>
+        </p:nvPicPr>
+        <p:blipFill>
+          <a:blip r:embed="rId4"/>
+          <a:stretch>
+            <a:fillRect/>
+          </a:stretch>
+        </p:blipFill>
+        <p:spPr>
+          <a:xfrm>
+            <a:off x="9875520" y="-45720"/>
+            <a:ext cx="2011680" cy="2011680"/>
+          </a:xfrm>
+          <a:prstGeom prst="rect">
+            <a:avLst/>
+          </a:prstGeom>
+        </p:spPr>
+      </p:pic>
+      <p:sp>
+        <p:nvSpPr>
+          <p:cNvPr id="6" name="Rounded Rectangle 5"/>
           <p:cNvSpPr/>
           <p:nvPr/>
         </p:nvSpPr>
         <p:spPr>
           <a:xfrm>
-            <a:off x="1097280" y="2148839"/>
-            <a:ext cx="10058400" cy="13716"/>
-          </a:xfrm>
-          <a:prstGeom prst="rect">
+            <a:off x="4953304" y="502920"/>
+            <a:ext cx="2286000" cy="411480"/>
+          </a:xfrm>
+          <a:prstGeom prst="roundRect">
             <a:avLst/>
           </a:prstGeom>
           <a:solidFill>
-            <a:srgbClr val="C8963C"/>
+            <a:srgbClr val="F0C864"/>
           </a:solidFill>
           <a:ln>
             <a:noFill/>
@@ -4570,14 +4842,14 @@
       </p:sp>
       <p:sp>
         <p:nvSpPr>
-          <p:cNvPr id="11" name="TextBox 10"/>
+          <p:cNvPr id="7" name="TextBox 6"/>
           <p:cNvSpPr txBox="1"/>
           <p:nvPr/>
         </p:nvSpPr>
         <p:spPr>
           <a:xfrm>
-            <a:off x="6492240" y="2286000"/>
-            <a:ext cx="2286000" cy="457200"/>
+            <a:off x="4953304" y="521208"/>
+            <a:ext cx="2286000" cy="384048"/>
           </a:xfrm>
           <a:prstGeom prst="rect">
             <a:avLst/>
@@ -4592,31 +4864,31 @@
           <a:p>
             <a:pPr algn="ctr">
               <a:spcAft>
-                <a:spcPts val="800"/>
+                <a:spcPts val="1000"/>
               </a:spcAft>
             </a:pPr>
             <a:r>
-              <a:rPr sz="2400" b="1">
-                <a:solidFill>
-                  <a:srgbClr val="C8963C"/>
+              <a:rPr sz="1800" b="1">
+                <a:solidFill>
+                  <a:srgbClr val="5A461E"/>
                 </a:solidFill>
                 <a:latin typeface="Microsoft YaHei"/>
               </a:rPr>
-              <a:t>亡</a:t>
-            </a:r>
-          </a:p>
-        </p:txBody>
-      </p:sp>
-      <p:sp>
-        <p:nvSpPr>
-          <p:cNvPr id="12" name="TextBox 11"/>
+              <a:t>文言笔记</a:t>
+            </a:r>
+          </a:p>
+        </p:txBody>
+      </p:sp>
+      <p:sp>
+        <p:nvSpPr>
+          <p:cNvPr id="8" name="TextBox 7"/>
           <p:cNvSpPr txBox="1"/>
           <p:nvPr/>
         </p:nvSpPr>
         <p:spPr>
           <a:xfrm>
-            <a:off x="6492240" y="2834640"/>
-            <a:ext cx="2286000" cy="548640"/>
+            <a:off x="1371600" y="1051560"/>
+            <a:ext cx="9418320" cy="822960"/>
           </a:xfrm>
           <a:prstGeom prst="rect">
             <a:avLst/>
@@ -4624,44 +4896,44 @@
           <a:noFill/>
         </p:spPr>
         <p:txBody>
-          <a:bodyPr wrap="none">
+          <a:bodyPr wrap="square">
             <a:spAutoFit/>
           </a:bodyPr>
           <a:lstStyle/>
           <a:p>
             <a:pPr algn="ctr">
               <a:spcAft>
-                <a:spcPts val="800"/>
+                <a:spcPts val="1000"/>
               </a:spcAft>
             </a:pPr>
             <a:r>
-              <a:rPr sz="2000" b="0">
-                <a:solidFill>
-                  <a:srgbClr val="64461E"/>
+              <a:rPr sz="3600" b="1">
+                <a:solidFill>
+                  <a:srgbClr val="C89628"/>
                 </a:solidFill>
                 <a:latin typeface="Microsoft YaHei"/>
               </a:rPr>
-              <a:t>同「无」</a:t>
-            </a:r>
-          </a:p>
-        </p:txBody>
-      </p:sp>
-      <p:sp>
-        <p:nvSpPr>
-          <p:cNvPr id="13" name="Rectangle 12"/>
+              <a:t>文言词语</a:t>
+            </a:r>
+          </a:p>
+        </p:txBody>
+      </p:sp>
+      <p:sp>
+        <p:nvSpPr>
+          <p:cNvPr id="9" name="Rectangle 8"/>
           <p:cNvSpPr/>
           <p:nvPr/>
         </p:nvSpPr>
         <p:spPr>
           <a:xfrm>
-            <a:off x="1097280" y="2194560"/>
-            <a:ext cx="10058400" cy="13716"/>
+            <a:off x="3200400" y="1691640"/>
+            <a:ext cx="5760720" cy="27432"/>
           </a:xfrm>
           <a:prstGeom prst="rect">
             <a:avLst/>
           </a:prstGeom>
           <a:solidFill>
-            <a:srgbClr val="C8963C"/>
+            <a:srgbClr val="F0C864"/>
           </a:solidFill>
           <a:ln>
             <a:noFill/>
@@ -4691,101 +4963,25 @@
       </p:sp>
       <p:sp>
         <p:nvSpPr>
-          <p:cNvPr id="14" name="TextBox 13"/>
-          <p:cNvSpPr txBox="1"/>
-          <p:nvPr/>
-        </p:nvSpPr>
-        <p:spPr>
-          <a:xfrm>
-            <a:off x="9052559" y="2286000"/>
-            <a:ext cx="2286000" cy="457200"/>
-          </a:xfrm>
-          <a:prstGeom prst="rect">
-            <a:avLst/>
-          </a:prstGeom>
-          <a:noFill/>
-        </p:spPr>
-        <p:txBody>
-          <a:bodyPr wrap="none">
-            <a:spAutoFit/>
-          </a:bodyPr>
-          <a:lstStyle/>
-          <a:p>
-            <a:pPr algn="ctr">
-              <a:spcAft>
-                <a:spcPts val="800"/>
-              </a:spcAft>
-            </a:pPr>
-            <a:r>
-              <a:rPr sz="2400" b="1">
-                <a:solidFill>
-                  <a:srgbClr val="C8963C"/>
-                </a:solidFill>
-                <a:latin typeface="Microsoft YaHei"/>
-              </a:rPr>
-              <a:t>只使</a:t>
-            </a:r>
-          </a:p>
-        </p:txBody>
-      </p:sp>
-      <p:sp>
-        <p:nvSpPr>
-          <p:cNvPr id="15" name="TextBox 14"/>
-          <p:cNvSpPr txBox="1"/>
-          <p:nvPr/>
-        </p:nvSpPr>
-        <p:spPr>
-          <a:xfrm>
-            <a:off x="9052559" y="2834640"/>
-            <a:ext cx="2286000" cy="548640"/>
-          </a:xfrm>
-          <a:prstGeom prst="rect">
-            <a:avLst/>
-          </a:prstGeom>
-          <a:noFill/>
-        </p:spPr>
-        <p:txBody>
-          <a:bodyPr wrap="none">
-            <a:spAutoFit/>
-          </a:bodyPr>
-          <a:lstStyle/>
-          <a:p>
-            <a:pPr algn="ctr">
-              <a:spcAft>
-                <a:spcPts val="800"/>
-              </a:spcAft>
-            </a:pPr>
-            <a:r>
-              <a:rPr sz="2000" b="0">
-                <a:solidFill>
-                  <a:srgbClr val="64461E"/>
-                </a:solidFill>
-                <a:latin typeface="Microsoft YaHei"/>
-              </a:rPr>
-              <a:t>纵使</a:t>
-            </a:r>
-          </a:p>
-        </p:txBody>
-      </p:sp>
-      <p:sp>
-        <p:nvSpPr>
-          <p:cNvPr id="16" name="Rectangle 15"/>
+          <p:cNvPr id="10" name="Rounded Rectangle 9"/>
           <p:cNvSpPr/>
           <p:nvPr/>
         </p:nvSpPr>
         <p:spPr>
           <a:xfrm>
-            <a:off x="1097280" y="2240279"/>
-            <a:ext cx="10058400" cy="13716"/>
-          </a:xfrm>
-          <a:prstGeom prst="rect">
+            <a:off x="1249984" y="1810512"/>
+            <a:ext cx="9692640" cy="3319272"/>
+          </a:xfrm>
+          <a:prstGeom prst="roundRect">
             <a:avLst/>
           </a:prstGeom>
           <a:solidFill>
-            <a:srgbClr val="C8963C"/>
+            <a:srgbClr val="FFFCF0"/>
           </a:solidFill>
-          <a:ln>
-            <a:noFill/>
+          <a:ln w="19050">
+            <a:solidFill>
+              <a:srgbClr val="F0C864"/>
+            </a:solidFill>
           </a:ln>
         </p:spPr>
         <p:style>
@@ -4812,57 +5008,14 @@
       </p:sp>
       <p:sp>
         <p:nvSpPr>
-          <p:cNvPr id="17" name="Rectangle 16"/>
-          <p:cNvSpPr/>
-          <p:nvPr/>
-        </p:nvSpPr>
-        <p:spPr>
-          <a:xfrm>
-            <a:off x="914400" y="4114800"/>
-            <a:ext cx="10332720" cy="36576"/>
-          </a:xfrm>
-          <a:prstGeom prst="rect">
-            <a:avLst/>
-          </a:prstGeom>
-          <a:solidFill>
-            <a:srgbClr val="C8963C"/>
-          </a:solidFill>
-          <a:ln>
-            <a:noFill/>
-          </a:ln>
-        </p:spPr>
-        <p:style>
-          <a:lnRef idx="1">
-            <a:schemeClr val="accent1"/>
-          </a:lnRef>
-          <a:fillRef idx="3">
-            <a:schemeClr val="accent1"/>
-          </a:fillRef>
-          <a:effectRef idx="2">
-            <a:schemeClr val="accent1"/>
-          </a:effectRef>
-          <a:fontRef idx="minor">
-            <a:schemeClr val="lt1"/>
-          </a:fontRef>
-        </p:style>
-        <p:txBody>
-          <a:bodyPr rtlCol="0" anchor="ctr"/>
-          <a:lstStyle/>
-          <a:p>
-            <a:pPr algn="ctr"/>
-          </a:p>
-        </p:txBody>
-      </p:sp>
-      <p:sp>
-        <p:nvSpPr>
-          <p:cNvPr id="18" name="TextBox 17"/>
+          <p:cNvPr id="11" name="TextBox 10"/>
           <p:cNvSpPr txBox="1"/>
           <p:nvPr/>
         </p:nvSpPr>
         <p:spPr>
           <a:xfrm>
-            <a:off x="1371600" y="4389120"/>
-            <a:ext cx="9418320" cy="731520"/>
+            <a:off x="1463040" y="1920240"/>
+            <a:ext cx="2103120" cy="502920"/>
           </a:xfrm>
           <a:prstGeom prst="rect">
             <a:avLst/>
@@ -4875,19 +5028,292 @@
           </a:bodyPr>
           <a:lstStyle/>
           <a:p>
-            <a:pPr algn="ctr">
+            <a:pPr algn="r">
               <a:spcAft>
-                <a:spcPts val="800"/>
+                <a:spcPts val="1000"/>
               </a:spcAft>
             </a:pPr>
             <a:r>
-              <a:rPr sz="2800" b="0">
-                <a:solidFill>
-                  <a:srgbClr val="64461E"/>
+              <a:rPr sz="2200" b="1">
+                <a:solidFill>
+                  <a:srgbClr val="C89628"/>
                 </a:solidFill>
                 <a:latin typeface="Microsoft YaHei"/>
               </a:rPr>
-              <a:t>节省了一个人的劳力，并不是从井里挖出一个人。</a:t>
+              <a:t>闻</a:t>
+            </a:r>
+          </a:p>
+        </p:txBody>
+      </p:sp>
+      <p:sp>
+        <p:nvSpPr>
+          <p:cNvPr id="12" name="TextBox 11"/>
+          <p:cNvSpPr txBox="1"/>
+          <p:nvPr/>
+        </p:nvSpPr>
+        <p:spPr>
+          <a:xfrm>
+            <a:off x="3749039" y="1920240"/>
+            <a:ext cx="7132320" cy="685800"/>
+          </a:xfrm>
+          <a:prstGeom prst="rect">
+            <a:avLst/>
+          </a:prstGeom>
+          <a:noFill/>
+        </p:spPr>
+        <p:txBody>
+          <a:bodyPr wrap="none">
+            <a:spAutoFit/>
+          </a:bodyPr>
+          <a:lstStyle/>
+          <a:p>
+            <a:pPr algn="l">
+              <a:spcAft>
+                <a:spcPts val="1000"/>
+              </a:spcAft>
+            </a:pPr>
+            <a:r>
+              <a:rPr sz="2200" b="0">
+                <a:solidFill>
+                  <a:srgbClr val="5A461E"/>
+                </a:solidFill>
+                <a:latin typeface="Microsoft YaHei"/>
+              </a:rPr>
+              <a:t>听说</a:t>
+            </a:r>
+          </a:p>
+        </p:txBody>
+      </p:sp>
+      <p:sp>
+        <p:nvSpPr>
+          <p:cNvPr id="13" name="TextBox 12"/>
+          <p:cNvSpPr txBox="1"/>
+          <p:nvPr/>
+        </p:nvSpPr>
+        <p:spPr>
+          <a:xfrm>
+            <a:off x="1463040" y="2670048"/>
+            <a:ext cx="2103120" cy="502920"/>
+          </a:xfrm>
+          <a:prstGeom prst="rect">
+            <a:avLst/>
+          </a:prstGeom>
+          <a:noFill/>
+        </p:spPr>
+        <p:txBody>
+          <a:bodyPr wrap="none">
+            <a:spAutoFit/>
+          </a:bodyPr>
+          <a:lstStyle/>
+          <a:p>
+            <a:pPr algn="r">
+              <a:spcAft>
+                <a:spcPts val="1000"/>
+              </a:spcAft>
+            </a:pPr>
+            <a:r>
+              <a:rPr sz="2200" b="1">
+                <a:solidFill>
+                  <a:srgbClr val="C89628"/>
+                </a:solidFill>
+                <a:latin typeface="Microsoft YaHei"/>
+              </a:rPr>
+              <a:t>传</a:t>
+            </a:r>
+          </a:p>
+        </p:txBody>
+      </p:sp>
+      <p:sp>
+        <p:nvSpPr>
+          <p:cNvPr id="14" name="TextBox 13"/>
+          <p:cNvSpPr txBox="1"/>
+          <p:nvPr/>
+        </p:nvSpPr>
+        <p:spPr>
+          <a:xfrm>
+            <a:off x="3749039" y="2670048"/>
+            <a:ext cx="7132320" cy="685800"/>
+          </a:xfrm>
+          <a:prstGeom prst="rect">
+            <a:avLst/>
+          </a:prstGeom>
+          <a:noFill/>
+        </p:spPr>
+        <p:txBody>
+          <a:bodyPr wrap="none">
+            <a:spAutoFit/>
+          </a:bodyPr>
+          <a:lstStyle/>
+          <a:p>
+            <a:pPr algn="l">
+              <a:spcAft>
+                <a:spcPts val="1000"/>
+              </a:spcAft>
+            </a:pPr>
+            <a:r>
+              <a:rPr sz="2200" b="0">
+                <a:solidFill>
+                  <a:srgbClr val="5A461E"/>
+                </a:solidFill>
+                <a:latin typeface="Microsoft YaHei"/>
+              </a:rPr>
+              <a:t>传播、流传</a:t>
+            </a:r>
+          </a:p>
+        </p:txBody>
+      </p:sp>
+      <p:sp>
+        <p:nvSpPr>
+          <p:cNvPr id="15" name="TextBox 14"/>
+          <p:cNvSpPr txBox="1"/>
+          <p:nvPr/>
+        </p:nvSpPr>
+        <p:spPr>
+          <a:xfrm>
+            <a:off x="1463040" y="3419856"/>
+            <a:ext cx="2103120" cy="502920"/>
+          </a:xfrm>
+          <a:prstGeom prst="rect">
+            <a:avLst/>
+          </a:prstGeom>
+          <a:noFill/>
+        </p:spPr>
+        <p:txBody>
+          <a:bodyPr wrap="none">
+            <a:spAutoFit/>
+          </a:bodyPr>
+          <a:lstStyle/>
+          <a:p>
+            <a:pPr algn="r">
+              <a:spcAft>
+                <a:spcPts val="1000"/>
+              </a:spcAft>
+            </a:pPr>
+            <a:r>
+              <a:rPr sz="2200" b="1">
+                <a:solidFill>
+                  <a:srgbClr val="C89628"/>
+                </a:solidFill>
+                <a:latin typeface="Microsoft YaHei"/>
+              </a:rPr>
+              <a:t>道</a:t>
+            </a:r>
+          </a:p>
+        </p:txBody>
+      </p:sp>
+      <p:sp>
+        <p:nvSpPr>
+          <p:cNvPr id="16" name="TextBox 15"/>
+          <p:cNvSpPr txBox="1"/>
+          <p:nvPr/>
+        </p:nvSpPr>
+        <p:spPr>
+          <a:xfrm>
+            <a:off x="3749039" y="3419856"/>
+            <a:ext cx="7132320" cy="685800"/>
+          </a:xfrm>
+          <a:prstGeom prst="rect">
+            <a:avLst/>
+          </a:prstGeom>
+          <a:noFill/>
+        </p:spPr>
+        <p:txBody>
+          <a:bodyPr wrap="none">
+            <a:spAutoFit/>
+          </a:bodyPr>
+          <a:lstStyle/>
+          <a:p>
+            <a:pPr algn="l">
+              <a:spcAft>
+                <a:spcPts val="1000"/>
+              </a:spcAft>
+            </a:pPr>
+            <a:r>
+              <a:rPr sz="2200" b="0">
+                <a:solidFill>
+                  <a:srgbClr val="5A461E"/>
+                </a:solidFill>
+                <a:latin typeface="Microsoft YaHei"/>
+              </a:rPr>
+              <a:t>讲述、说</a:t>
+            </a:r>
+          </a:p>
+        </p:txBody>
+      </p:sp>
+      <p:sp>
+        <p:nvSpPr>
+          <p:cNvPr id="17" name="TextBox 16"/>
+          <p:cNvSpPr txBox="1"/>
+          <p:nvPr/>
+        </p:nvSpPr>
+        <p:spPr>
+          <a:xfrm>
+            <a:off x="1463040" y="4169664"/>
+            <a:ext cx="2103120" cy="502920"/>
+          </a:xfrm>
+          <a:prstGeom prst="rect">
+            <a:avLst/>
+          </a:prstGeom>
+          <a:noFill/>
+        </p:spPr>
+        <p:txBody>
+          <a:bodyPr wrap="none">
+            <a:spAutoFit/>
+          </a:bodyPr>
+          <a:lstStyle/>
+          <a:p>
+            <a:pPr algn="r">
+              <a:spcAft>
+                <a:spcPts val="1000"/>
+              </a:spcAft>
+            </a:pPr>
+            <a:r>
+              <a:rPr sz="2200" b="1">
+                <a:solidFill>
+                  <a:srgbClr val="C89628"/>
+                </a:solidFill>
+                <a:latin typeface="Microsoft YaHei"/>
+              </a:rPr>
+              <a:t>亡</a:t>
+            </a:r>
+          </a:p>
+        </p:txBody>
+      </p:sp>
+      <p:sp>
+        <p:nvSpPr>
+          <p:cNvPr id="18" name="TextBox 17"/>
+          <p:cNvSpPr txBox="1"/>
+          <p:nvPr/>
+        </p:nvSpPr>
+        <p:spPr>
+          <a:xfrm>
+            <a:off x="3749039" y="4169664"/>
+            <a:ext cx="7132320" cy="685800"/>
+          </a:xfrm>
+          <a:prstGeom prst="rect">
+            <a:avLst/>
+          </a:prstGeom>
+          <a:noFill/>
+        </p:spPr>
+        <p:txBody>
+          <a:bodyPr wrap="none">
+            <a:spAutoFit/>
+          </a:bodyPr>
+          <a:lstStyle/>
+          <a:p>
+            <a:pPr algn="l">
+              <a:spcAft>
+                <a:spcPts val="1000"/>
+              </a:spcAft>
+            </a:pPr>
+            <a:r>
+              <a:rPr sz="2200" b="0">
+                <a:solidFill>
+                  <a:srgbClr val="5A461E"/>
+                </a:solidFill>
+                <a:latin typeface="Microsoft YaHei"/>
+              </a:rPr>
+              <a:t>同「无」，没有</a:t>
             </a:r>
           </a:p>
         </p:txBody>
@@ -4912,7 +5338,7 @@
       <p:grpSpPr/>
       <p:pic>
         <p:nvPicPr>
-          <p:cNvPr id="2" name="Picture 1" descr="bg_scroll.png"/>
+          <p:cNvPr id="2" name="Picture 1" descr="bg_fable.png"/>
           <p:cNvPicPr>
             <a:picLocks noChangeAspect="1"/>
           </p:cNvPicPr>
@@ -4936,14 +5362,148 @@
       </p:pic>
       <p:sp>
         <p:nvSpPr>
-          <p:cNvPr id="3" name="TextBox 2"/>
+          <p:cNvPr id="3" name="Rectangle 2"/>
+          <p:cNvSpPr/>
+          <p:nvPr/>
+        </p:nvSpPr>
+        <p:spPr>
+          <a:xfrm>
+            <a:off x="292608" y="274320"/>
+            <a:ext cx="11594592" cy="6300216"/>
+          </a:xfrm>
+          <a:prstGeom prst="rect">
+            <a:avLst/>
+          </a:prstGeom>
+          <a:noFill/>
+          <a:ln w="31750">
+            <a:solidFill>
+              <a:srgbClr val="B48C3C"/>
+            </a:solidFill>
+          </a:ln>
+        </p:spPr>
+        <p:style>
+          <a:lnRef idx="1">
+            <a:schemeClr val="accent1"/>
+          </a:lnRef>
+          <a:fillRef idx="3">
+            <a:schemeClr val="accent1"/>
+          </a:fillRef>
+          <a:effectRef idx="2">
+            <a:schemeClr val="accent1"/>
+          </a:effectRef>
+          <a:fontRef idx="minor">
+            <a:schemeClr val="lt1"/>
+          </a:fontRef>
+        </p:style>
+        <p:txBody>
+          <a:bodyPr rtlCol="0" anchor="ctr"/>
+          <a:lstStyle/>
+          <a:p>
+            <a:pPr algn="ctr"/>
+          </a:p>
+        </p:txBody>
+      </p:sp>
+      <p:pic>
+        <p:nvPicPr>
+          <p:cNvPr id="4" name="Picture 3" descr="corner_fable_tl.png"/>
+          <p:cNvPicPr>
+            <a:picLocks noChangeAspect="1"/>
+          </p:cNvPicPr>
+          <p:nvPr/>
+        </p:nvPicPr>
+        <p:blipFill>
+          <a:blip r:embed="rId3"/>
+          <a:stretch>
+            <a:fillRect/>
+          </a:stretch>
+        </p:blipFill>
+        <p:spPr>
+          <a:xfrm>
+            <a:off x="-45720" y="-45720"/>
+            <a:ext cx="2011680" cy="2011680"/>
+          </a:xfrm>
+          <a:prstGeom prst="rect">
+            <a:avLst/>
+          </a:prstGeom>
+        </p:spPr>
+      </p:pic>
+      <p:pic>
+        <p:nvPicPr>
+          <p:cNvPr id="5" name="Picture 4" descr="corner_fable_tr.png"/>
+          <p:cNvPicPr>
+            <a:picLocks noChangeAspect="1"/>
+          </p:cNvPicPr>
+          <p:nvPr/>
+        </p:nvPicPr>
+        <p:blipFill>
+          <a:blip r:embed="rId4"/>
+          <a:stretch>
+            <a:fillRect/>
+          </a:stretch>
+        </p:blipFill>
+        <p:spPr>
+          <a:xfrm>
+            <a:off x="9875520" y="-45720"/>
+            <a:ext cx="2011680" cy="2011680"/>
+          </a:xfrm>
+          <a:prstGeom prst="rect">
+            <a:avLst/>
+          </a:prstGeom>
+        </p:spPr>
+      </p:pic>
+      <p:sp>
+        <p:nvSpPr>
+          <p:cNvPr id="6" name="Rounded Rectangle 5"/>
+          <p:cNvSpPr/>
+          <p:nvPr/>
+        </p:nvSpPr>
+        <p:spPr>
+          <a:xfrm>
+            <a:off x="4953304" y="502920"/>
+            <a:ext cx="2286000" cy="411480"/>
+          </a:xfrm>
+          <a:prstGeom prst="roundRect">
+            <a:avLst/>
+          </a:prstGeom>
+          <a:solidFill>
+            <a:srgbClr val="F0C864"/>
+          </a:solidFill>
+          <a:ln>
+            <a:noFill/>
+          </a:ln>
+        </p:spPr>
+        <p:style>
+          <a:lnRef idx="1">
+            <a:schemeClr val="accent1"/>
+          </a:lnRef>
+          <a:fillRef idx="3">
+            <a:schemeClr val="accent1"/>
+          </a:fillRef>
+          <a:effectRef idx="2">
+            <a:schemeClr val="accent1"/>
+          </a:effectRef>
+          <a:fontRef idx="minor">
+            <a:schemeClr val="lt1"/>
+          </a:fontRef>
+        </p:style>
+        <p:txBody>
+          <a:bodyPr rtlCol="0" anchor="ctr"/>
+          <a:lstStyle/>
+          <a:p>
+            <a:pPr algn="ctr"/>
+          </a:p>
+        </p:txBody>
+      </p:sp>
+      <p:sp>
+        <p:nvSpPr>
+          <p:cNvPr id="7" name="TextBox 6"/>
           <p:cNvSpPr txBox="1"/>
           <p:nvPr/>
         </p:nvSpPr>
         <p:spPr>
           <a:xfrm>
-            <a:off x="1371600" y="457200"/>
-            <a:ext cx="9418320" cy="640080"/>
+            <a:off x="4953304" y="521208"/>
+            <a:ext cx="2286000" cy="384048"/>
           </a:xfrm>
           <a:prstGeom prst="rect">
             <a:avLst/>
@@ -4956,33 +5516,160 @@
           </a:bodyPr>
           <a:lstStyle/>
           <a:p>
-            <a:pPr algn="l">
+            <a:pPr algn="ctr">
               <a:spcAft>
-                <a:spcPts val="800"/>
+                <a:spcPts val="1000"/>
               </a:spcAft>
             </a:pPr>
             <a:r>
-              <a:rPr sz="3200" b="1">
-                <a:solidFill>
-                  <a:srgbClr val="64461E"/>
+              <a:rPr sz="1800" b="1">
+                <a:solidFill>
+                  <a:srgbClr val="5A461E"/>
                 </a:solidFill>
                 <a:latin typeface="Microsoft YaHei"/>
               </a:rPr>
-              <a:t>写法探究</a:t>
-            </a:r>
-          </a:p>
-        </p:txBody>
-      </p:sp>
-      <p:sp>
-        <p:nvSpPr>
-          <p:cNvPr id="4" name="TextBox 3"/>
+              <a:t>文言笔记</a:t>
+            </a:r>
+          </a:p>
+        </p:txBody>
+      </p:sp>
+      <p:sp>
+        <p:nvSpPr>
+          <p:cNvPr id="8" name="TextBox 7"/>
           <p:cNvSpPr txBox="1"/>
           <p:nvPr/>
         </p:nvSpPr>
         <p:spPr>
           <a:xfrm>
-            <a:off x="1097280" y="1280160"/>
-            <a:ext cx="2286000" cy="457200"/>
+            <a:off x="1371600" y="1051560"/>
+            <a:ext cx="9418320" cy="822960"/>
+          </a:xfrm>
+          <a:prstGeom prst="rect">
+            <a:avLst/>
+          </a:prstGeom>
+          <a:noFill/>
+        </p:spPr>
+        <p:txBody>
+          <a:bodyPr wrap="square">
+            <a:spAutoFit/>
+          </a:bodyPr>
+          <a:lstStyle/>
+          <a:p>
+            <a:pPr algn="ctr">
+              <a:spcAft>
+                <a:spcPts val="1000"/>
+              </a:spcAft>
+            </a:pPr>
+            <a:r>
+              <a:rPr sz="3600" b="1">
+                <a:solidFill>
+                  <a:srgbClr val="C89628"/>
+                </a:solidFill>
+                <a:latin typeface="Microsoft YaHei"/>
+              </a:rPr>
+              <a:t>文言翻译</a:t>
+            </a:r>
+          </a:p>
+        </p:txBody>
+      </p:sp>
+      <p:sp>
+        <p:nvSpPr>
+          <p:cNvPr id="9" name="Rectangle 8"/>
+          <p:cNvSpPr/>
+          <p:nvPr/>
+        </p:nvSpPr>
+        <p:spPr>
+          <a:xfrm>
+            <a:off x="3200400" y="1691640"/>
+            <a:ext cx="5760720" cy="27432"/>
+          </a:xfrm>
+          <a:prstGeom prst="rect">
+            <a:avLst/>
+          </a:prstGeom>
+          <a:solidFill>
+            <a:srgbClr val="F0C864"/>
+          </a:solidFill>
+          <a:ln>
+            <a:noFill/>
+          </a:ln>
+        </p:spPr>
+        <p:style>
+          <a:lnRef idx="1">
+            <a:schemeClr val="accent1"/>
+          </a:lnRef>
+          <a:fillRef idx="3">
+            <a:schemeClr val="accent1"/>
+          </a:fillRef>
+          <a:effectRef idx="2">
+            <a:schemeClr val="accent1"/>
+          </a:effectRef>
+          <a:fontRef idx="minor">
+            <a:schemeClr val="lt1"/>
+          </a:fontRef>
+        </p:style>
+        <p:txBody>
+          <a:bodyPr rtlCol="0" anchor="ctr"/>
+          <a:lstStyle/>
+          <a:p>
+            <a:pPr algn="ctr"/>
+          </a:p>
+        </p:txBody>
+      </p:sp>
+      <p:sp>
+        <p:nvSpPr>
+          <p:cNvPr id="10" name="Rounded Rectangle 9"/>
+          <p:cNvSpPr/>
+          <p:nvPr/>
+        </p:nvSpPr>
+        <p:spPr>
+          <a:xfrm>
+            <a:off x="1249984" y="1810512"/>
+            <a:ext cx="9692640" cy="3319272"/>
+          </a:xfrm>
+          <a:prstGeom prst="roundRect">
+            <a:avLst/>
+          </a:prstGeom>
+          <a:solidFill>
+            <a:srgbClr val="FFFCF0"/>
+          </a:solidFill>
+          <a:ln w="19050">
+            <a:solidFill>
+              <a:srgbClr val="F0C864"/>
+            </a:solidFill>
+          </a:ln>
+        </p:spPr>
+        <p:style>
+          <a:lnRef idx="1">
+            <a:schemeClr val="accent1"/>
+          </a:lnRef>
+          <a:fillRef idx="3">
+            <a:schemeClr val="accent1"/>
+          </a:fillRef>
+          <a:effectRef idx="2">
+            <a:schemeClr val="accent1"/>
+          </a:effectRef>
+          <a:fontRef idx="minor">
+            <a:schemeClr val="lt1"/>
+          </a:fontRef>
+        </p:style>
+        <p:txBody>
+          <a:bodyPr rtlCol="0" anchor="ctr"/>
+          <a:lstStyle/>
+          <a:p>
+            <a:pPr algn="ctr"/>
+          </a:p>
+        </p:txBody>
+      </p:sp>
+      <p:sp>
+        <p:nvSpPr>
+          <p:cNvPr id="11" name="TextBox 10"/>
+          <p:cNvSpPr txBox="1"/>
+          <p:nvPr/>
+        </p:nvSpPr>
+        <p:spPr>
+          <a:xfrm>
+            <a:off x="1463040" y="1920240"/>
+            <a:ext cx="2103120" cy="502920"/>
           </a:xfrm>
           <a:prstGeom prst="rect">
             <a:avLst/>
@@ -4997,31 +5684,31 @@
           <a:p>
             <a:pPr algn="r">
               <a:spcAft>
-                <a:spcPts val="800"/>
+                <a:spcPts val="1000"/>
               </a:spcAft>
             </a:pPr>
             <a:r>
               <a:rPr sz="2200" b="1">
                 <a:solidFill>
-                  <a:srgbClr val="C8963C"/>
+                  <a:srgbClr val="C89628"/>
                 </a:solidFill>
                 <a:latin typeface="Microsoft YaHei"/>
               </a:rPr>
-              <a:t>情节设计</a:t>
-            </a:r>
-          </a:p>
-        </p:txBody>
-      </p:sp>
-      <p:sp>
-        <p:nvSpPr>
-          <p:cNvPr id="5" name="TextBox 4"/>
+              <a:t>只使</a:t>
+            </a:r>
+          </a:p>
+        </p:txBody>
+      </p:sp>
+      <p:sp>
+        <p:nvSpPr>
+          <p:cNvPr id="12" name="TextBox 11"/>
           <p:cNvSpPr txBox="1"/>
           <p:nvPr/>
         </p:nvSpPr>
         <p:spPr>
           <a:xfrm>
-            <a:off x="3657600" y="1280160"/>
-            <a:ext cx="7772400" cy="640080"/>
+            <a:off x="3749039" y="1920240"/>
+            <a:ext cx="7132320" cy="685800"/>
           </a:xfrm>
           <a:prstGeom prst="rect">
             <a:avLst/>
@@ -5036,31 +5723,31 @@
           <a:p>
             <a:pPr algn="l">
               <a:spcAft>
-                <a:spcPts val="800"/>
+                <a:spcPts val="1000"/>
               </a:spcAft>
             </a:pPr>
             <a:r>
               <a:rPr sz="2200" b="0">
                 <a:solidFill>
-                  <a:srgbClr val="64461E"/>
+                  <a:srgbClr val="5A461E"/>
                 </a:solidFill>
                 <a:latin typeface="Microsoft YaHei"/>
               </a:rPr>
-              <a:t>寓意藏在欲望、选择与意外后果中</a:t>
-            </a:r>
-          </a:p>
-        </p:txBody>
-      </p:sp>
-      <p:sp>
-        <p:nvSpPr>
-          <p:cNvPr id="6" name="TextBox 5"/>
+              <a:t>纵使、即使</a:t>
+            </a:r>
+          </a:p>
+        </p:txBody>
+      </p:sp>
+      <p:sp>
+        <p:nvSpPr>
+          <p:cNvPr id="13" name="TextBox 12"/>
           <p:cNvSpPr txBox="1"/>
           <p:nvPr/>
         </p:nvSpPr>
         <p:spPr>
           <a:xfrm>
-            <a:off x="1097280" y="2011680"/>
-            <a:ext cx="2286000" cy="457200"/>
+            <a:off x="1463040" y="2670048"/>
+            <a:ext cx="2103120" cy="502920"/>
           </a:xfrm>
           <a:prstGeom prst="rect">
             <a:avLst/>
@@ -5075,31 +5762,31 @@
           <a:p>
             <a:pPr algn="r">
               <a:spcAft>
-                <a:spcPts val="800"/>
+                <a:spcPts val="1000"/>
               </a:spcAft>
             </a:pPr>
             <a:r>
               <a:rPr sz="2200" b="1">
                 <a:solidFill>
-                  <a:srgbClr val="C8963C"/>
+                  <a:srgbClr val="C89628"/>
                 </a:solidFill>
                 <a:latin typeface="Microsoft YaHei"/>
               </a:rPr>
-              <a:t>改情节</a:t>
-            </a:r>
-          </a:p>
-        </p:txBody>
-      </p:sp>
-      <p:sp>
-        <p:nvSpPr>
-          <p:cNvPr id="7" name="TextBox 6"/>
+              <a:t>中伤</a:t>
+            </a:r>
+          </a:p>
+        </p:txBody>
+      </p:sp>
+      <p:sp>
+        <p:nvSpPr>
+          <p:cNvPr id="14" name="TextBox 13"/>
           <p:cNvSpPr txBox="1"/>
           <p:nvPr/>
         </p:nvSpPr>
         <p:spPr>
           <a:xfrm>
-            <a:off x="3657600" y="2011680"/>
-            <a:ext cx="7772400" cy="640080"/>
+            <a:off x="3749039" y="2670048"/>
+            <a:ext cx="7132320" cy="685800"/>
           </a:xfrm>
           <a:prstGeom prst="rect">
             <a:avLst/>
@@ -5114,31 +5801,31 @@
           <a:p>
             <a:pPr algn="l">
               <a:spcAft>
-                <a:spcPts val="800"/>
+                <a:spcPts val="1000"/>
               </a:spcAft>
             </a:pPr>
             <a:r>
               <a:rPr sz="2200" b="0">
                 <a:solidFill>
-                  <a:srgbClr val="64461E"/>
+                  <a:srgbClr val="5A461E"/>
                 </a:solidFill>
                 <a:latin typeface="Microsoft YaHei"/>
               </a:rPr>
-              <a:t>蚊子平静离开→寓意变为「懂得适可而止」</a:t>
-            </a:r>
-          </a:p>
-        </p:txBody>
-      </p:sp>
-      <p:sp>
-        <p:nvSpPr>
-          <p:cNvPr id="8" name="TextBox 7"/>
+              <a:t>伤害</a:t>
+            </a:r>
+          </a:p>
+        </p:txBody>
+      </p:sp>
+      <p:sp>
+        <p:nvSpPr>
+          <p:cNvPr id="15" name="TextBox 14"/>
           <p:cNvSpPr txBox="1"/>
           <p:nvPr/>
         </p:nvSpPr>
         <p:spPr>
           <a:xfrm>
-            <a:off x="1097280" y="2743200"/>
-            <a:ext cx="2286000" cy="457200"/>
+            <a:off x="1463040" y="3419856"/>
+            <a:ext cx="2103120" cy="502920"/>
           </a:xfrm>
           <a:prstGeom prst="rect">
             <a:avLst/>
@@ -5153,31 +5840,31 @@
           <a:p>
             <a:pPr algn="r">
               <a:spcAft>
-                <a:spcPts val="800"/>
+                <a:spcPts val="1000"/>
               </a:spcAft>
             </a:pPr>
             <a:r>
               <a:rPr sz="2200" b="1">
                 <a:solidFill>
-                  <a:srgbClr val="C8963C"/>
+                  <a:srgbClr val="C89628"/>
                 </a:solidFill>
                 <a:latin typeface="Microsoft YaHei"/>
               </a:rPr>
-              <a:t>阅读法</a:t>
-            </a:r>
-          </a:p>
-        </p:txBody>
-      </p:sp>
-      <p:sp>
-        <p:nvSpPr>
-          <p:cNvPr id="9" name="TextBox 8"/>
+              <a:t>重点句</a:t>
+            </a:r>
+          </a:p>
+        </p:txBody>
+      </p:sp>
+      <p:sp>
+        <p:nvSpPr>
+          <p:cNvPr id="16" name="TextBox 15"/>
           <p:cNvSpPr txBox="1"/>
           <p:nvPr/>
         </p:nvSpPr>
         <p:spPr>
           <a:xfrm>
-            <a:off x="3657600" y="2743200"/>
-            <a:ext cx="7772400" cy="640080"/>
+            <a:off x="3749039" y="3419856"/>
+            <a:ext cx="7132320" cy="685800"/>
           </a:xfrm>
           <a:prstGeom prst="rect">
             <a:avLst/>
@@ -5192,31 +5879,31 @@
           <a:p>
             <a:pPr algn="l">
               <a:spcAft>
-                <a:spcPts val="800"/>
+                <a:spcPts val="1000"/>
               </a:spcAft>
             </a:pPr>
             <a:r>
               <a:rPr sz="2200" b="0">
                 <a:solidFill>
-                  <a:srgbClr val="64461E"/>
+                  <a:srgbClr val="5A461E"/>
                 </a:solidFill>
                 <a:latin typeface="Microsoft YaHei"/>
               </a:rPr>
-              <a:t>读懂「为什么这样结尾」</a:t>
-            </a:r>
-          </a:p>
-        </p:txBody>
-      </p:sp>
-      <p:sp>
-        <p:nvSpPr>
-          <p:cNvPr id="10" name="TextBox 9"/>
+              <a:t>得一人之使，非得一人于井中也</a:t>
+            </a:r>
+          </a:p>
+        </p:txBody>
+      </p:sp>
+      <p:sp>
+        <p:nvSpPr>
+          <p:cNvPr id="17" name="TextBox 16"/>
           <p:cNvSpPr txBox="1"/>
           <p:nvPr/>
         </p:nvSpPr>
         <p:spPr>
           <a:xfrm>
-            <a:off x="1097280" y="3474720"/>
-            <a:ext cx="2286000" cy="457200"/>
+            <a:off x="1463040" y="4169664"/>
+            <a:ext cx="2103120" cy="502920"/>
           </a:xfrm>
           <a:prstGeom prst="rect">
             <a:avLst/>
@@ -5231,31 +5918,31 @@
           <a:p>
             <a:pPr algn="r">
               <a:spcAft>
-                <a:spcPts val="800"/>
+                <a:spcPts val="1000"/>
               </a:spcAft>
             </a:pPr>
             <a:r>
               <a:rPr sz="2200" b="1">
                 <a:solidFill>
-                  <a:srgbClr val="C8963C"/>
+                  <a:srgbClr val="C89628"/>
                 </a:solidFill>
                 <a:latin typeface="Microsoft YaHei"/>
               </a:rPr>
-              <a:t>策展主题</a:t>
-            </a:r>
-          </a:p>
-        </p:txBody>
-      </p:sp>
-      <p:sp>
-        <p:nvSpPr>
-          <p:cNvPr id="11" name="TextBox 10"/>
+              <a:t>句意</a:t>
+            </a:r>
+          </a:p>
+        </p:txBody>
+      </p:sp>
+      <p:sp>
+        <p:nvSpPr>
+          <p:cNvPr id="18" name="TextBox 17"/>
           <p:cNvSpPr txBox="1"/>
           <p:nvPr/>
         </p:nvSpPr>
         <p:spPr>
           <a:xfrm>
-            <a:off x="3657600" y="3474720"/>
-            <a:ext cx="7772400" cy="640080"/>
+            <a:off x="3749039" y="4169664"/>
+            <a:ext cx="7132320" cy="685800"/>
           </a:xfrm>
           <a:prstGeom prst="rect">
             <a:avLst/>
@@ -5270,17 +5957,17 @@
           <a:p>
             <a:pPr algn="l">
               <a:spcAft>
-                <a:spcPts val="800"/>
+                <a:spcPts val="1000"/>
               </a:spcAft>
             </a:pPr>
             <a:r>
               <a:rPr sz="2200" b="0">
                 <a:solidFill>
-                  <a:srgbClr val="64461E"/>
+                  <a:srgbClr val="5A461E"/>
                 </a:solidFill>
                 <a:latin typeface="Microsoft YaHei"/>
               </a:rPr>
-              <a:t>认识认知局限，善用智慧</a:t>
+              <a:t>节省一人劳力，不是井里挖出一人</a:t>
             </a:r>
           </a:p>
         </p:txBody>
@@ -5305,7 +5992,7 @@
       <p:grpSpPr/>
       <p:pic>
         <p:nvPicPr>
-          <p:cNvPr id="2" name="Picture 1" descr="bg_scroll.png"/>
+          <p:cNvPr id="2" name="Picture 1" descr="bg_fable.png"/>
           <p:cNvPicPr>
             <a:picLocks noChangeAspect="1"/>
           </p:cNvPicPr>
@@ -5329,14 +6016,148 @@
       </p:pic>
       <p:sp>
         <p:nvSpPr>
-          <p:cNvPr id="3" name="TextBox 2"/>
+          <p:cNvPr id="3" name="Rectangle 2"/>
+          <p:cNvSpPr/>
+          <p:nvPr/>
+        </p:nvSpPr>
+        <p:spPr>
+          <a:xfrm>
+            <a:off x="292608" y="274320"/>
+            <a:ext cx="11594592" cy="6300216"/>
+          </a:xfrm>
+          <a:prstGeom prst="rect">
+            <a:avLst/>
+          </a:prstGeom>
+          <a:noFill/>
+          <a:ln w="31750">
+            <a:solidFill>
+              <a:srgbClr val="B48C3C"/>
+            </a:solidFill>
+          </a:ln>
+        </p:spPr>
+        <p:style>
+          <a:lnRef idx="1">
+            <a:schemeClr val="accent1"/>
+          </a:lnRef>
+          <a:fillRef idx="3">
+            <a:schemeClr val="accent1"/>
+          </a:fillRef>
+          <a:effectRef idx="2">
+            <a:schemeClr val="accent1"/>
+          </a:effectRef>
+          <a:fontRef idx="minor">
+            <a:schemeClr val="lt1"/>
+          </a:fontRef>
+        </p:style>
+        <p:txBody>
+          <a:bodyPr rtlCol="0" anchor="ctr"/>
+          <a:lstStyle/>
+          <a:p>
+            <a:pPr algn="ctr"/>
+          </a:p>
+        </p:txBody>
+      </p:sp>
+      <p:pic>
+        <p:nvPicPr>
+          <p:cNvPr id="4" name="Picture 3" descr="corner_fable_tl.png"/>
+          <p:cNvPicPr>
+            <a:picLocks noChangeAspect="1"/>
+          </p:cNvPicPr>
+          <p:nvPr/>
+        </p:nvPicPr>
+        <p:blipFill>
+          <a:blip r:embed="rId3"/>
+          <a:stretch>
+            <a:fillRect/>
+          </a:stretch>
+        </p:blipFill>
+        <p:spPr>
+          <a:xfrm>
+            <a:off x="-45720" y="-45720"/>
+            <a:ext cx="2011680" cy="2011680"/>
+          </a:xfrm>
+          <a:prstGeom prst="rect">
+            <a:avLst/>
+          </a:prstGeom>
+        </p:spPr>
+      </p:pic>
+      <p:pic>
+        <p:nvPicPr>
+          <p:cNvPr id="5" name="Picture 4" descr="corner_fable_tr.png"/>
+          <p:cNvPicPr>
+            <a:picLocks noChangeAspect="1"/>
+          </p:cNvPicPr>
+          <p:nvPr/>
+        </p:nvPicPr>
+        <p:blipFill>
+          <a:blip r:embed="rId4"/>
+          <a:stretch>
+            <a:fillRect/>
+          </a:stretch>
+        </p:blipFill>
+        <p:spPr>
+          <a:xfrm>
+            <a:off x="9875520" y="-45720"/>
+            <a:ext cx="2011680" cy="2011680"/>
+          </a:xfrm>
+          <a:prstGeom prst="rect">
+            <a:avLst/>
+          </a:prstGeom>
+        </p:spPr>
+      </p:pic>
+      <p:sp>
+        <p:nvSpPr>
+          <p:cNvPr id="6" name="Rounded Rectangle 5"/>
+          <p:cNvSpPr/>
+          <p:nvPr/>
+        </p:nvSpPr>
+        <p:spPr>
+          <a:xfrm>
+            <a:off x="4953304" y="502920"/>
+            <a:ext cx="2286000" cy="411480"/>
+          </a:xfrm>
+          <a:prstGeom prst="roundRect">
+            <a:avLst/>
+          </a:prstGeom>
+          <a:solidFill>
+            <a:srgbClr val="F0C864"/>
+          </a:solidFill>
+          <a:ln>
+            <a:noFill/>
+          </a:ln>
+        </p:spPr>
+        <p:style>
+          <a:lnRef idx="1">
+            <a:schemeClr val="accent1"/>
+          </a:lnRef>
+          <a:fillRef idx="3">
+            <a:schemeClr val="accent1"/>
+          </a:fillRef>
+          <a:effectRef idx="2">
+            <a:schemeClr val="accent1"/>
+          </a:effectRef>
+          <a:fontRef idx="minor">
+            <a:schemeClr val="lt1"/>
+          </a:fontRef>
+        </p:style>
+        <p:txBody>
+          <a:bodyPr rtlCol="0" anchor="ctr"/>
+          <a:lstStyle/>
+          <a:p>
+            <a:pPr algn="ctr"/>
+          </a:p>
+        </p:txBody>
+      </p:sp>
+      <p:sp>
+        <p:nvSpPr>
+          <p:cNvPr id="7" name="TextBox 6"/>
           <p:cNvSpPr txBox="1"/>
           <p:nvPr/>
         </p:nvSpPr>
         <p:spPr>
           <a:xfrm>
-            <a:off x="1371600" y="457200"/>
-            <a:ext cx="9418320" cy="640080"/>
+            <a:off x="4953304" y="521208"/>
+            <a:ext cx="2286000" cy="384048"/>
           </a:xfrm>
           <a:prstGeom prst="rect">
             <a:avLst/>
@@ -5349,33 +6170,160 @@
           </a:bodyPr>
           <a:lstStyle/>
           <a:p>
-            <a:pPr algn="l">
+            <a:pPr algn="ctr">
               <a:spcAft>
-                <a:spcPts val="800"/>
+                <a:spcPts val="1000"/>
               </a:spcAft>
             </a:pPr>
             <a:r>
-              <a:rPr sz="3200" b="1">
-                <a:solidFill>
-                  <a:srgbClr val="64461E"/>
+              <a:rPr sz="1800" b="1">
+                <a:solidFill>
+                  <a:srgbClr val="5A461E"/>
                 </a:solidFill>
                 <a:latin typeface="Microsoft YaHei"/>
               </a:rPr>
-              <a:t>▶ 学习任务</a:t>
-            </a:r>
-          </a:p>
-        </p:txBody>
-      </p:sp>
-      <p:sp>
-        <p:nvSpPr>
-          <p:cNvPr id="4" name="TextBox 3"/>
+              <a:t>主题笔记</a:t>
+            </a:r>
+          </a:p>
+        </p:txBody>
+      </p:sp>
+      <p:sp>
+        <p:nvSpPr>
+          <p:cNvPr id="8" name="TextBox 7"/>
           <p:cNvSpPr txBox="1"/>
           <p:nvPr/>
         </p:nvSpPr>
         <p:spPr>
           <a:xfrm>
-            <a:off x="1097280" y="1280160"/>
-            <a:ext cx="2286000" cy="457200"/>
+            <a:off x="1371600" y="1051560"/>
+            <a:ext cx="9418320" cy="822960"/>
+          </a:xfrm>
+          <a:prstGeom prst="rect">
+            <a:avLst/>
+          </a:prstGeom>
+          <a:noFill/>
+        </p:spPr>
+        <p:txBody>
+          <a:bodyPr wrap="square">
+            <a:spAutoFit/>
+          </a:bodyPr>
+          <a:lstStyle/>
+          <a:p>
+            <a:pPr algn="ctr">
+              <a:spcAft>
+                <a:spcPts val="1000"/>
+              </a:spcAft>
+            </a:pPr>
+            <a:r>
+              <a:rPr sz="3600" b="1">
+                <a:solidFill>
+                  <a:srgbClr val="C89628"/>
+                </a:solidFill>
+                <a:latin typeface="Microsoft YaHei"/>
+              </a:rPr>
+              <a:t>写法探究</a:t>
+            </a:r>
+          </a:p>
+        </p:txBody>
+      </p:sp>
+      <p:sp>
+        <p:nvSpPr>
+          <p:cNvPr id="9" name="Rectangle 8"/>
+          <p:cNvSpPr/>
+          <p:nvPr/>
+        </p:nvSpPr>
+        <p:spPr>
+          <a:xfrm>
+            <a:off x="3200400" y="1691640"/>
+            <a:ext cx="5760720" cy="27432"/>
+          </a:xfrm>
+          <a:prstGeom prst="rect">
+            <a:avLst/>
+          </a:prstGeom>
+          <a:solidFill>
+            <a:srgbClr val="F0C864"/>
+          </a:solidFill>
+          <a:ln>
+            <a:noFill/>
+          </a:ln>
+        </p:spPr>
+        <p:style>
+          <a:lnRef idx="1">
+            <a:schemeClr val="accent1"/>
+          </a:lnRef>
+          <a:fillRef idx="3">
+            <a:schemeClr val="accent1"/>
+          </a:fillRef>
+          <a:effectRef idx="2">
+            <a:schemeClr val="accent1"/>
+          </a:effectRef>
+          <a:fontRef idx="minor">
+            <a:schemeClr val="lt1"/>
+          </a:fontRef>
+        </p:style>
+        <p:txBody>
+          <a:bodyPr rtlCol="0" anchor="ctr"/>
+          <a:lstStyle/>
+          <a:p>
+            <a:pPr algn="ctr"/>
+          </a:p>
+        </p:txBody>
+      </p:sp>
+      <p:sp>
+        <p:nvSpPr>
+          <p:cNvPr id="10" name="Rounded Rectangle 9"/>
+          <p:cNvSpPr/>
+          <p:nvPr/>
+        </p:nvSpPr>
+        <p:spPr>
+          <a:xfrm>
+            <a:off x="1249984" y="1810512"/>
+            <a:ext cx="9692640" cy="3319272"/>
+          </a:xfrm>
+          <a:prstGeom prst="roundRect">
+            <a:avLst/>
+          </a:prstGeom>
+          <a:solidFill>
+            <a:srgbClr val="FFFCF0"/>
+          </a:solidFill>
+          <a:ln w="19050">
+            <a:solidFill>
+              <a:srgbClr val="F0C864"/>
+            </a:solidFill>
+          </a:ln>
+        </p:spPr>
+        <p:style>
+          <a:lnRef idx="1">
+            <a:schemeClr val="accent1"/>
+          </a:lnRef>
+          <a:fillRef idx="3">
+            <a:schemeClr val="accent1"/>
+          </a:fillRef>
+          <a:effectRef idx="2">
+            <a:schemeClr val="accent1"/>
+          </a:effectRef>
+          <a:fontRef idx="minor">
+            <a:schemeClr val="lt1"/>
+          </a:fontRef>
+        </p:style>
+        <p:txBody>
+          <a:bodyPr rtlCol="0" anchor="ctr"/>
+          <a:lstStyle/>
+          <a:p>
+            <a:pPr algn="ctr"/>
+          </a:p>
+        </p:txBody>
+      </p:sp>
+      <p:sp>
+        <p:nvSpPr>
+          <p:cNvPr id="11" name="TextBox 10"/>
+          <p:cNvSpPr txBox="1"/>
+          <p:nvPr/>
+        </p:nvSpPr>
+        <p:spPr>
+          <a:xfrm>
+            <a:off x="1463040" y="1920240"/>
+            <a:ext cx="2103120" cy="502920"/>
           </a:xfrm>
           <a:prstGeom prst="rect">
             <a:avLst/>
@@ -5390,13 +6338,710 @@
           <a:p>
             <a:pPr algn="r">
               <a:spcAft>
-                <a:spcPts val="800"/>
+                <a:spcPts val="1000"/>
               </a:spcAft>
             </a:pPr>
             <a:r>
               <a:rPr sz="2200" b="1">
                 <a:solidFill>
-                  <a:srgbClr val="C8963C"/>
+                  <a:srgbClr val="C89628"/>
+                </a:solidFill>
+                <a:latin typeface="Microsoft YaHei"/>
+              </a:rPr>
+              <a:t>情节设计</a:t>
+            </a:r>
+          </a:p>
+        </p:txBody>
+      </p:sp>
+      <p:sp>
+        <p:nvSpPr>
+          <p:cNvPr id="12" name="TextBox 11"/>
+          <p:cNvSpPr txBox="1"/>
+          <p:nvPr/>
+        </p:nvSpPr>
+        <p:spPr>
+          <a:xfrm>
+            <a:off x="3749039" y="1920240"/>
+            <a:ext cx="7132320" cy="685800"/>
+          </a:xfrm>
+          <a:prstGeom prst="rect">
+            <a:avLst/>
+          </a:prstGeom>
+          <a:noFill/>
+        </p:spPr>
+        <p:txBody>
+          <a:bodyPr wrap="none">
+            <a:spAutoFit/>
+          </a:bodyPr>
+          <a:lstStyle/>
+          <a:p>
+            <a:pPr algn="l">
+              <a:spcAft>
+                <a:spcPts val="1000"/>
+              </a:spcAft>
+            </a:pPr>
+            <a:r>
+              <a:rPr sz="2200" b="0">
+                <a:solidFill>
+                  <a:srgbClr val="5A461E"/>
+                </a:solidFill>
+                <a:latin typeface="Microsoft YaHei"/>
+              </a:rPr>
+              <a:t>寓意藏在人物的欲望、选择与意外后果中</a:t>
+            </a:r>
+          </a:p>
+        </p:txBody>
+      </p:sp>
+      <p:sp>
+        <p:nvSpPr>
+          <p:cNvPr id="13" name="TextBox 12"/>
+          <p:cNvSpPr txBox="1"/>
+          <p:nvPr/>
+        </p:nvSpPr>
+        <p:spPr>
+          <a:xfrm>
+            <a:off x="1463040" y="2670048"/>
+            <a:ext cx="2103120" cy="502920"/>
+          </a:xfrm>
+          <a:prstGeom prst="rect">
+            <a:avLst/>
+          </a:prstGeom>
+          <a:noFill/>
+        </p:spPr>
+        <p:txBody>
+          <a:bodyPr wrap="none">
+            <a:spAutoFit/>
+          </a:bodyPr>
+          <a:lstStyle/>
+          <a:p>
+            <a:pPr algn="r">
+              <a:spcAft>
+                <a:spcPts val="1000"/>
+              </a:spcAft>
+            </a:pPr>
+            <a:r>
+              <a:rPr sz="2200" b="1">
+                <a:solidFill>
+                  <a:srgbClr val="C89628"/>
+                </a:solidFill>
+                <a:latin typeface="Microsoft YaHei"/>
+              </a:rPr>
+              <a:t>改情节改寓意</a:t>
+            </a:r>
+          </a:p>
+        </p:txBody>
+      </p:sp>
+      <p:sp>
+        <p:nvSpPr>
+          <p:cNvPr id="14" name="TextBox 13"/>
+          <p:cNvSpPr txBox="1"/>
+          <p:nvPr/>
+        </p:nvSpPr>
+        <p:spPr>
+          <a:xfrm>
+            <a:off x="3749039" y="2670048"/>
+            <a:ext cx="7132320" cy="685800"/>
+          </a:xfrm>
+          <a:prstGeom prst="rect">
+            <a:avLst/>
+          </a:prstGeom>
+          <a:noFill/>
+        </p:spPr>
+        <p:txBody>
+          <a:bodyPr wrap="none">
+            <a:spAutoFit/>
+          </a:bodyPr>
+          <a:lstStyle/>
+          <a:p>
+            <a:pPr algn="l">
+              <a:spcAft>
+                <a:spcPts val="1000"/>
+              </a:spcAft>
+            </a:pPr>
+            <a:r>
+              <a:rPr sz="2200" b="0">
+                <a:solidFill>
+                  <a:srgbClr val="5A461E"/>
+                </a:solidFill>
+                <a:latin typeface="Microsoft YaHei"/>
+              </a:rPr>
+              <a:t>蚊子战胜后平静离开→寓意从「骄兵必败」变为「懂得适可而止」</a:t>
+            </a:r>
+          </a:p>
+        </p:txBody>
+      </p:sp>
+      <p:sp>
+        <p:nvSpPr>
+          <p:cNvPr id="15" name="TextBox 14"/>
+          <p:cNvSpPr txBox="1"/>
+          <p:nvPr/>
+        </p:nvSpPr>
+        <p:spPr>
+          <a:xfrm>
+            <a:off x="1463040" y="3419856"/>
+            <a:ext cx="2103120" cy="502920"/>
+          </a:xfrm>
+          <a:prstGeom prst="rect">
+            <a:avLst/>
+          </a:prstGeom>
+          <a:noFill/>
+        </p:spPr>
+        <p:txBody>
+          <a:bodyPr wrap="none">
+            <a:spAutoFit/>
+          </a:bodyPr>
+          <a:lstStyle/>
+          <a:p>
+            <a:pPr algn="r">
+              <a:spcAft>
+                <a:spcPts val="1000"/>
+              </a:spcAft>
+            </a:pPr>
+            <a:r>
+              <a:rPr sz="2200" b="1">
+                <a:solidFill>
+                  <a:srgbClr val="C89628"/>
+                </a:solidFill>
+                <a:latin typeface="Microsoft YaHei"/>
+              </a:rPr>
+              <a:t>阅读方法</a:t>
+            </a:r>
+          </a:p>
+        </p:txBody>
+      </p:sp>
+      <p:sp>
+        <p:nvSpPr>
+          <p:cNvPr id="16" name="TextBox 15"/>
+          <p:cNvSpPr txBox="1"/>
+          <p:nvPr/>
+        </p:nvSpPr>
+        <p:spPr>
+          <a:xfrm>
+            <a:off x="3749039" y="3419856"/>
+            <a:ext cx="7132320" cy="685800"/>
+          </a:xfrm>
+          <a:prstGeom prst="rect">
+            <a:avLst/>
+          </a:prstGeom>
+          <a:noFill/>
+        </p:spPr>
+        <p:txBody>
+          <a:bodyPr wrap="none">
+            <a:spAutoFit/>
+          </a:bodyPr>
+          <a:lstStyle/>
+          <a:p>
+            <a:pPr algn="l">
+              <a:spcAft>
+                <a:spcPts val="1000"/>
+              </a:spcAft>
+            </a:pPr>
+            <a:r>
+              <a:rPr sz="2200" b="0">
+                <a:solidFill>
+                  <a:srgbClr val="5A461E"/>
+                </a:solidFill>
+                <a:latin typeface="Microsoft YaHei"/>
+              </a:rPr>
+              <a:t>读懂「为什么这样结尾」，才能读到真正的提醒</a:t>
+            </a:r>
+          </a:p>
+        </p:txBody>
+      </p:sp>
+      <p:sp>
+        <p:nvSpPr>
+          <p:cNvPr id="17" name="TextBox 16"/>
+          <p:cNvSpPr txBox="1"/>
+          <p:nvPr/>
+        </p:nvSpPr>
+        <p:spPr>
+          <a:xfrm>
+            <a:off x="1463040" y="4169664"/>
+            <a:ext cx="2103120" cy="502920"/>
+          </a:xfrm>
+          <a:prstGeom prst="rect">
+            <a:avLst/>
+          </a:prstGeom>
+          <a:noFill/>
+        </p:spPr>
+        <p:txBody>
+          <a:bodyPr wrap="none">
+            <a:spAutoFit/>
+          </a:bodyPr>
+          <a:lstStyle/>
+          <a:p>
+            <a:pPr algn="r">
+              <a:spcAft>
+                <a:spcPts val="1000"/>
+              </a:spcAft>
+            </a:pPr>
+            <a:r>
+              <a:rPr sz="2200" b="1">
+                <a:solidFill>
+                  <a:srgbClr val="C89628"/>
+                </a:solidFill>
+                <a:latin typeface="Microsoft YaHei"/>
+              </a:rPr>
+              <a:t>策展主题</a:t>
+            </a:r>
+          </a:p>
+        </p:txBody>
+      </p:sp>
+      <p:sp>
+        <p:nvSpPr>
+          <p:cNvPr id="18" name="TextBox 17"/>
+          <p:cNvSpPr txBox="1"/>
+          <p:nvPr/>
+        </p:nvSpPr>
+        <p:spPr>
+          <a:xfrm>
+            <a:off x="3749039" y="4169664"/>
+            <a:ext cx="7132320" cy="685800"/>
+          </a:xfrm>
+          <a:prstGeom prst="rect">
+            <a:avLst/>
+          </a:prstGeom>
+          <a:noFill/>
+        </p:spPr>
+        <p:txBody>
+          <a:bodyPr wrap="none">
+            <a:spAutoFit/>
+          </a:bodyPr>
+          <a:lstStyle/>
+          <a:p>
+            <a:pPr algn="l">
+              <a:spcAft>
+                <a:spcPts val="1000"/>
+              </a:spcAft>
+            </a:pPr>
+            <a:r>
+              <a:rPr sz="2200" b="0">
+                <a:solidFill>
+                  <a:srgbClr val="5A461E"/>
+                </a:solidFill>
+                <a:latin typeface="Microsoft YaHei"/>
+              </a:rPr>
+              <a:t>认识自己的认知局限，善用智慧（智慧与局限）</a:t>
+            </a:r>
+          </a:p>
+        </p:txBody>
+      </p:sp>
+    </p:spTree>
+  </p:cSld>
+  <p:clrMapOvr>
+    <a:masterClrMapping/>
+  </p:clrMapOvr>
+</p:sld>
+</file>
+
+<file path=ppt/slides/slide7.xml><?xml version="1.0" encoding="utf-8"?>
+<p:sld xmlns:a="http://schemas.openxmlformats.org/drawingml/2006/main" xmlns:p="http://schemas.openxmlformats.org/presentationml/2006/main" xmlns:r="http://schemas.openxmlformats.org/officeDocument/2006/relationships">
+  <p:cSld>
+    <p:spTree>
+      <p:nvGrpSpPr>
+        <p:cNvPr id="1" name=""/>
+        <p:cNvGrpSpPr/>
+        <p:nvPr/>
+      </p:nvGrpSpPr>
+      <p:grpSpPr/>
+      <p:pic>
+        <p:nvPicPr>
+          <p:cNvPr id="2" name="Picture 1" descr="bg_fable.png"/>
+          <p:cNvPicPr>
+            <a:picLocks noChangeAspect="1"/>
+          </p:cNvPicPr>
+          <p:nvPr/>
+        </p:nvPicPr>
+        <p:blipFill>
+          <a:blip r:embed="rId2"/>
+          <a:stretch>
+            <a:fillRect/>
+          </a:stretch>
+        </p:blipFill>
+        <p:spPr>
+          <a:xfrm>
+            <a:off x="0" y="0"/>
+            <a:ext cx="12191695" cy="6858000"/>
+          </a:xfrm>
+          <a:prstGeom prst="rect">
+            <a:avLst/>
+          </a:prstGeom>
+        </p:spPr>
+      </p:pic>
+      <p:sp>
+        <p:nvSpPr>
+          <p:cNvPr id="3" name="Rectangle 2"/>
+          <p:cNvSpPr/>
+          <p:nvPr/>
+        </p:nvSpPr>
+        <p:spPr>
+          <a:xfrm>
+            <a:off x="292608" y="274320"/>
+            <a:ext cx="11594592" cy="6300216"/>
+          </a:xfrm>
+          <a:prstGeom prst="rect">
+            <a:avLst/>
+          </a:prstGeom>
+          <a:noFill/>
+          <a:ln w="31750">
+            <a:solidFill>
+              <a:srgbClr val="B48C3C"/>
+            </a:solidFill>
+          </a:ln>
+        </p:spPr>
+        <p:style>
+          <a:lnRef idx="1">
+            <a:schemeClr val="accent1"/>
+          </a:lnRef>
+          <a:fillRef idx="3">
+            <a:schemeClr val="accent1"/>
+          </a:fillRef>
+          <a:effectRef idx="2">
+            <a:schemeClr val="accent1"/>
+          </a:effectRef>
+          <a:fontRef idx="minor">
+            <a:schemeClr val="lt1"/>
+          </a:fontRef>
+        </p:style>
+        <p:txBody>
+          <a:bodyPr rtlCol="0" anchor="ctr"/>
+          <a:lstStyle/>
+          <a:p>
+            <a:pPr algn="ctr"/>
+          </a:p>
+        </p:txBody>
+      </p:sp>
+      <p:pic>
+        <p:nvPicPr>
+          <p:cNvPr id="4" name="Picture 3" descr="corner_fable_tl.png"/>
+          <p:cNvPicPr>
+            <a:picLocks noChangeAspect="1"/>
+          </p:cNvPicPr>
+          <p:nvPr/>
+        </p:nvPicPr>
+        <p:blipFill>
+          <a:blip r:embed="rId3"/>
+          <a:stretch>
+            <a:fillRect/>
+          </a:stretch>
+        </p:blipFill>
+        <p:spPr>
+          <a:xfrm>
+            <a:off x="-45720" y="-45720"/>
+            <a:ext cx="2011680" cy="2011680"/>
+          </a:xfrm>
+          <a:prstGeom prst="rect">
+            <a:avLst/>
+          </a:prstGeom>
+        </p:spPr>
+      </p:pic>
+      <p:pic>
+        <p:nvPicPr>
+          <p:cNvPr id="5" name="Picture 4" descr="corner_fable_tr.png"/>
+          <p:cNvPicPr>
+            <a:picLocks noChangeAspect="1"/>
+          </p:cNvPicPr>
+          <p:nvPr/>
+        </p:nvPicPr>
+        <p:blipFill>
+          <a:blip r:embed="rId4"/>
+          <a:stretch>
+            <a:fillRect/>
+          </a:stretch>
+        </p:blipFill>
+        <p:spPr>
+          <a:xfrm>
+            <a:off x="9875520" y="-45720"/>
+            <a:ext cx="2011680" cy="2011680"/>
+          </a:xfrm>
+          <a:prstGeom prst="rect">
+            <a:avLst/>
+          </a:prstGeom>
+        </p:spPr>
+      </p:pic>
+      <p:sp>
+        <p:nvSpPr>
+          <p:cNvPr id="6" name="Rounded Rectangle 5"/>
+          <p:cNvSpPr/>
+          <p:nvPr/>
+        </p:nvSpPr>
+        <p:spPr>
+          <a:xfrm>
+            <a:off x="4953304" y="502920"/>
+            <a:ext cx="2286000" cy="411480"/>
+          </a:xfrm>
+          <a:prstGeom prst="roundRect">
+            <a:avLst/>
+          </a:prstGeom>
+          <a:solidFill>
+            <a:srgbClr val="F0C864"/>
+          </a:solidFill>
+          <a:ln>
+            <a:noFill/>
+          </a:ln>
+        </p:spPr>
+        <p:style>
+          <a:lnRef idx="1">
+            <a:schemeClr val="accent1"/>
+          </a:lnRef>
+          <a:fillRef idx="3">
+            <a:schemeClr val="accent1"/>
+          </a:fillRef>
+          <a:effectRef idx="2">
+            <a:schemeClr val="accent1"/>
+          </a:effectRef>
+          <a:fontRef idx="minor">
+            <a:schemeClr val="lt1"/>
+          </a:fontRef>
+        </p:style>
+        <p:txBody>
+          <a:bodyPr rtlCol="0" anchor="ctr"/>
+          <a:lstStyle/>
+          <a:p>
+            <a:pPr algn="ctr"/>
+          </a:p>
+        </p:txBody>
+      </p:sp>
+      <p:sp>
+        <p:nvSpPr>
+          <p:cNvPr id="7" name="TextBox 6"/>
+          <p:cNvSpPr txBox="1"/>
+          <p:nvPr/>
+        </p:nvSpPr>
+        <p:spPr>
+          <a:xfrm>
+            <a:off x="4953304" y="521208"/>
+            <a:ext cx="2286000" cy="384048"/>
+          </a:xfrm>
+          <a:prstGeom prst="rect">
+            <a:avLst/>
+          </a:prstGeom>
+          <a:noFill/>
+        </p:spPr>
+        <p:txBody>
+          <a:bodyPr wrap="none">
+            <a:spAutoFit/>
+          </a:bodyPr>
+          <a:lstStyle/>
+          <a:p>
+            <a:pPr algn="ctr">
+              <a:spcAft>
+                <a:spcPts val="1000"/>
+              </a:spcAft>
+            </a:pPr>
+            <a:r>
+              <a:rPr sz="1800" b="1">
+                <a:solidFill>
+                  <a:srgbClr val="5A461E"/>
+                </a:solidFill>
+                <a:latin typeface="Microsoft YaHei"/>
+              </a:rPr>
+              <a:t>课堂活动</a:t>
+            </a:r>
+          </a:p>
+        </p:txBody>
+      </p:sp>
+      <p:sp>
+        <p:nvSpPr>
+          <p:cNvPr id="8" name="TextBox 7"/>
+          <p:cNvSpPr txBox="1"/>
+          <p:nvPr/>
+        </p:nvSpPr>
+        <p:spPr>
+          <a:xfrm>
+            <a:off x="1371600" y="1051560"/>
+            <a:ext cx="9418320" cy="822960"/>
+          </a:xfrm>
+          <a:prstGeom prst="rect">
+            <a:avLst/>
+          </a:prstGeom>
+          <a:noFill/>
+        </p:spPr>
+        <p:txBody>
+          <a:bodyPr wrap="square">
+            <a:spAutoFit/>
+          </a:bodyPr>
+          <a:lstStyle/>
+          <a:p>
+            <a:pPr algn="ctr">
+              <a:spcAft>
+                <a:spcPts val="1000"/>
+              </a:spcAft>
+            </a:pPr>
+            <a:r>
+              <a:rPr sz="3600" b="1">
+                <a:solidFill>
+                  <a:srgbClr val="C89628"/>
+                </a:solidFill>
+                <a:latin typeface="Microsoft YaHei"/>
+              </a:rPr>
+              <a:t>学习任务</a:t>
+            </a:r>
+          </a:p>
+        </p:txBody>
+      </p:sp>
+      <p:sp>
+        <p:nvSpPr>
+          <p:cNvPr id="9" name="Rectangle 8"/>
+          <p:cNvSpPr/>
+          <p:nvPr/>
+        </p:nvSpPr>
+        <p:spPr>
+          <a:xfrm>
+            <a:off x="3200400" y="1691640"/>
+            <a:ext cx="5760720" cy="27432"/>
+          </a:xfrm>
+          <a:prstGeom prst="rect">
+            <a:avLst/>
+          </a:prstGeom>
+          <a:solidFill>
+            <a:srgbClr val="F0C864"/>
+          </a:solidFill>
+          <a:ln>
+            <a:noFill/>
+          </a:ln>
+        </p:spPr>
+        <p:style>
+          <a:lnRef idx="1">
+            <a:schemeClr val="accent1"/>
+          </a:lnRef>
+          <a:fillRef idx="3">
+            <a:schemeClr val="accent1"/>
+          </a:fillRef>
+          <a:effectRef idx="2">
+            <a:schemeClr val="accent1"/>
+          </a:effectRef>
+          <a:fontRef idx="minor">
+            <a:schemeClr val="lt1"/>
+          </a:fontRef>
+        </p:style>
+        <p:txBody>
+          <a:bodyPr rtlCol="0" anchor="ctr"/>
+          <a:lstStyle/>
+          <a:p>
+            <a:pPr algn="ctr"/>
+          </a:p>
+        </p:txBody>
+      </p:sp>
+      <p:sp>
+        <p:nvSpPr>
+          <p:cNvPr id="10" name="Rounded Rectangle 9"/>
+          <p:cNvSpPr/>
+          <p:nvPr/>
+        </p:nvSpPr>
+        <p:spPr>
+          <a:xfrm>
+            <a:off x="1295704" y="1737360"/>
+            <a:ext cx="9601200" cy="2112264"/>
+          </a:xfrm>
+          <a:prstGeom prst="roundRect">
+            <a:avLst/>
+          </a:prstGeom>
+          <a:solidFill>
+            <a:srgbClr val="FFFCF0"/>
+          </a:solidFill>
+          <a:ln w="19050">
+            <a:solidFill>
+              <a:srgbClr val="F0C864"/>
+            </a:solidFill>
+          </a:ln>
+        </p:spPr>
+        <p:style>
+          <a:lnRef idx="1">
+            <a:schemeClr val="accent1"/>
+          </a:lnRef>
+          <a:fillRef idx="3">
+            <a:schemeClr val="accent1"/>
+          </a:fillRef>
+          <a:effectRef idx="2">
+            <a:schemeClr val="accent1"/>
+          </a:effectRef>
+          <a:fontRef idx="minor">
+            <a:schemeClr val="lt1"/>
+          </a:fontRef>
+        </p:style>
+        <p:txBody>
+          <a:bodyPr rtlCol="0" anchor="ctr"/>
+          <a:lstStyle/>
+          <a:p>
+            <a:pPr algn="ctr"/>
+          </a:p>
+        </p:txBody>
+      </p:sp>
+      <p:sp>
+        <p:nvSpPr>
+          <p:cNvPr id="11" name="Oval 10"/>
+          <p:cNvSpPr/>
+          <p:nvPr/>
+        </p:nvSpPr>
+        <p:spPr>
+          <a:xfrm>
+            <a:off x="2621584" y="1920240"/>
+            <a:ext cx="347472" cy="347472"/>
+          </a:xfrm>
+          <a:prstGeom prst="ellipse">
+            <a:avLst/>
+          </a:prstGeom>
+          <a:solidFill>
+            <a:srgbClr val="C89628"/>
+          </a:solidFill>
+          <a:ln>
+            <a:noFill/>
+          </a:ln>
+        </p:spPr>
+        <p:style>
+          <a:lnRef idx="1">
+            <a:schemeClr val="accent1"/>
+          </a:lnRef>
+          <a:fillRef idx="3">
+            <a:schemeClr val="accent1"/>
+          </a:fillRef>
+          <a:effectRef idx="2">
+            <a:schemeClr val="accent1"/>
+          </a:effectRef>
+          <a:fontRef idx="minor">
+            <a:schemeClr val="lt1"/>
+          </a:fontRef>
+        </p:style>
+        <p:txBody>
+          <a:bodyPr rtlCol="0" anchor="ctr"/>
+          <a:lstStyle/>
+          <a:p>
+            <a:pPr algn="ctr"/>
+          </a:p>
+        </p:txBody>
+      </p:sp>
+      <p:sp>
+        <p:nvSpPr>
+          <p:cNvPr id="12" name="TextBox 11"/>
+          <p:cNvSpPr txBox="1"/>
+          <p:nvPr/>
+        </p:nvSpPr>
+        <p:spPr>
+          <a:xfrm>
+            <a:off x="2621584" y="1938528"/>
+            <a:ext cx="347472" cy="329184"/>
+          </a:xfrm>
+          <a:prstGeom prst="rect">
+            <a:avLst/>
+          </a:prstGeom>
+          <a:noFill/>
+        </p:spPr>
+        <p:txBody>
+          <a:bodyPr wrap="none">
+            <a:spAutoFit/>
+          </a:bodyPr>
+          <a:lstStyle/>
+          <a:p>
+            <a:pPr algn="ctr">
+              <a:spcAft>
+                <a:spcPts val="1000"/>
+              </a:spcAft>
+            </a:pPr>
+            <a:r>
+              <a:rPr sz="1400" b="1">
+                <a:solidFill>
+                  <a:srgbClr val="FFFFFF"/>
                 </a:solidFill>
                 <a:latin typeface="Microsoft YaHei"/>
               </a:rPr>
@@ -5407,14 +7052,14 @@
       </p:sp>
       <p:sp>
         <p:nvSpPr>
-          <p:cNvPr id="5" name="TextBox 4"/>
+          <p:cNvPr id="13" name="TextBox 12"/>
           <p:cNvSpPr txBox="1"/>
           <p:nvPr/>
         </p:nvSpPr>
         <p:spPr>
           <a:xfrm>
-            <a:off x="3657600" y="1280160"/>
-            <a:ext cx="7772400" cy="640080"/>
+            <a:off x="3078784" y="1901952"/>
+            <a:ext cx="7863840" cy="457200"/>
           </a:xfrm>
           <a:prstGeom prst="rect">
             <a:avLst/>
@@ -5429,13 +7074,13 @@
           <a:p>
             <a:pPr algn="l">
               <a:spcAft>
-                <a:spcPts val="800"/>
+                <a:spcPts val="1000"/>
               </a:spcAft>
             </a:pPr>
             <a:r>
-              <a:rPr sz="2200" b="0">
-                <a:solidFill>
-                  <a:srgbClr val="64461E"/>
+              <a:rPr sz="2400" b="0">
+                <a:solidFill>
+                  <a:srgbClr val="5A461E"/>
                 </a:solidFill>
                 <a:latin typeface="Microsoft YaHei"/>
               </a:rPr>
@@ -5446,14 +7091,57 @@
       </p:sp>
       <p:sp>
         <p:nvSpPr>
-          <p:cNvPr id="6" name="TextBox 5"/>
+          <p:cNvPr id="14" name="Oval 13"/>
+          <p:cNvSpPr/>
+          <p:nvPr/>
+        </p:nvSpPr>
+        <p:spPr>
+          <a:xfrm>
+            <a:off x="2621584" y="2487168"/>
+            <a:ext cx="347472" cy="347472"/>
+          </a:xfrm>
+          <a:prstGeom prst="ellipse">
+            <a:avLst/>
+          </a:prstGeom>
+          <a:solidFill>
+            <a:srgbClr val="C89628"/>
+          </a:solidFill>
+          <a:ln>
+            <a:noFill/>
+          </a:ln>
+        </p:spPr>
+        <p:style>
+          <a:lnRef idx="1">
+            <a:schemeClr val="accent1"/>
+          </a:lnRef>
+          <a:fillRef idx="3">
+            <a:schemeClr val="accent1"/>
+          </a:fillRef>
+          <a:effectRef idx="2">
+            <a:schemeClr val="accent1"/>
+          </a:effectRef>
+          <a:fontRef idx="minor">
+            <a:schemeClr val="lt1"/>
+          </a:fontRef>
+        </p:style>
+        <p:txBody>
+          <a:bodyPr rtlCol="0" anchor="ctr"/>
+          <a:lstStyle/>
+          <a:p>
+            <a:pPr algn="ctr"/>
+          </a:p>
+        </p:txBody>
+      </p:sp>
+      <p:sp>
+        <p:nvSpPr>
+          <p:cNvPr id="15" name="TextBox 14"/>
           <p:cNvSpPr txBox="1"/>
           <p:nvPr/>
         </p:nvSpPr>
         <p:spPr>
           <a:xfrm>
-            <a:off x="1097280" y="2011680"/>
-            <a:ext cx="2286000" cy="457200"/>
+            <a:off x="2621584" y="2505456"/>
+            <a:ext cx="347472" cy="329184"/>
           </a:xfrm>
           <a:prstGeom prst="rect">
             <a:avLst/>
@@ -5466,15 +7154,15 @@
           </a:bodyPr>
           <a:lstStyle/>
           <a:p>
-            <a:pPr algn="r">
+            <a:pPr algn="ctr">
               <a:spcAft>
-                <a:spcPts val="800"/>
+                <a:spcPts val="1000"/>
               </a:spcAft>
             </a:pPr>
             <a:r>
-              <a:rPr sz="2200" b="1">
-                <a:solidFill>
-                  <a:srgbClr val="C8963C"/>
+              <a:rPr sz="1400" b="1">
+                <a:solidFill>
+                  <a:srgbClr val="FFFFFF"/>
                 </a:solidFill>
                 <a:latin typeface="Microsoft YaHei"/>
               </a:rPr>
@@ -5485,14 +7173,14 @@
       </p:sp>
       <p:sp>
         <p:nvSpPr>
-          <p:cNvPr id="7" name="TextBox 6"/>
+          <p:cNvPr id="16" name="TextBox 15"/>
           <p:cNvSpPr txBox="1"/>
           <p:nvPr/>
         </p:nvSpPr>
         <p:spPr>
           <a:xfrm>
-            <a:off x="3657600" y="2011680"/>
-            <a:ext cx="7772400" cy="640080"/>
+            <a:off x="3078784" y="2468880"/>
+            <a:ext cx="7863840" cy="457200"/>
           </a:xfrm>
           <a:prstGeom prst="rect">
             <a:avLst/>
@@ -5507,13 +7195,13 @@
           <a:p>
             <a:pPr algn="l">
               <a:spcAft>
-                <a:spcPts val="800"/>
+                <a:spcPts val="1000"/>
               </a:spcAft>
             </a:pPr>
             <a:r>
-              <a:rPr sz="2200" b="0">
-                <a:solidFill>
-                  <a:srgbClr val="64461E"/>
+              <a:rPr sz="2400" b="0">
+                <a:solidFill>
+                  <a:srgbClr val="5A461E"/>
                 </a:solidFill>
                 <a:latin typeface="Microsoft YaHei"/>
               </a:rPr>
@@ -5524,14 +7212,57 @@
       </p:sp>
       <p:sp>
         <p:nvSpPr>
-          <p:cNvPr id="8" name="TextBox 7"/>
+          <p:cNvPr id="17" name="Oval 16"/>
+          <p:cNvSpPr/>
+          <p:nvPr/>
+        </p:nvSpPr>
+        <p:spPr>
+          <a:xfrm>
+            <a:off x="2621584" y="3054096"/>
+            <a:ext cx="347472" cy="347472"/>
+          </a:xfrm>
+          <a:prstGeom prst="ellipse">
+            <a:avLst/>
+          </a:prstGeom>
+          <a:solidFill>
+            <a:srgbClr val="C89628"/>
+          </a:solidFill>
+          <a:ln>
+            <a:noFill/>
+          </a:ln>
+        </p:spPr>
+        <p:style>
+          <a:lnRef idx="1">
+            <a:schemeClr val="accent1"/>
+          </a:lnRef>
+          <a:fillRef idx="3">
+            <a:schemeClr val="accent1"/>
+          </a:fillRef>
+          <a:effectRef idx="2">
+            <a:schemeClr val="accent1"/>
+          </a:effectRef>
+          <a:fontRef idx="minor">
+            <a:schemeClr val="lt1"/>
+          </a:fontRef>
+        </p:style>
+        <p:txBody>
+          <a:bodyPr rtlCol="0" anchor="ctr"/>
+          <a:lstStyle/>
+          <a:p>
+            <a:pPr algn="ctr"/>
+          </a:p>
+        </p:txBody>
+      </p:sp>
+      <p:sp>
+        <p:nvSpPr>
+          <p:cNvPr id="18" name="TextBox 17"/>
           <p:cNvSpPr txBox="1"/>
           <p:nvPr/>
         </p:nvSpPr>
         <p:spPr>
           <a:xfrm>
-            <a:off x="1097280" y="2743200"/>
-            <a:ext cx="2286000" cy="457200"/>
+            <a:off x="2621584" y="3072384"/>
+            <a:ext cx="347472" cy="329184"/>
           </a:xfrm>
           <a:prstGeom prst="rect">
             <a:avLst/>
@@ -5544,15 +7275,15 @@
           </a:bodyPr>
           <a:lstStyle/>
           <a:p>
-            <a:pPr algn="r">
+            <a:pPr algn="ctr">
               <a:spcAft>
-                <a:spcPts val="800"/>
+                <a:spcPts val="1000"/>
               </a:spcAft>
             </a:pPr>
             <a:r>
-              <a:rPr sz="2200" b="1">
-                <a:solidFill>
-                  <a:srgbClr val="C8963C"/>
+              <a:rPr sz="1400" b="1">
+                <a:solidFill>
+                  <a:srgbClr val="FFFFFF"/>
                 </a:solidFill>
                 <a:latin typeface="Microsoft YaHei"/>
               </a:rPr>
@@ -5563,14 +7294,14 @@
       </p:sp>
       <p:sp>
         <p:nvSpPr>
-          <p:cNvPr id="9" name="TextBox 8"/>
+          <p:cNvPr id="19" name="TextBox 18"/>
           <p:cNvSpPr txBox="1"/>
           <p:nvPr/>
         </p:nvSpPr>
         <p:spPr>
           <a:xfrm>
-            <a:off x="3657600" y="2743200"/>
-            <a:ext cx="7772400" cy="640080"/>
+            <a:off x="3078784" y="3035808"/>
+            <a:ext cx="7863840" cy="457200"/>
           </a:xfrm>
           <a:prstGeom prst="rect">
             <a:avLst/>
@@ -5585,17 +7316,1306 @@
           <a:p>
             <a:pPr algn="l">
               <a:spcAft>
-                <a:spcPts val="800"/>
+                <a:spcPts val="1000"/>
               </a:spcAft>
             </a:pPr>
             <a:r>
-              <a:rPr sz="2200" b="0">
-                <a:solidFill>
-                  <a:srgbClr val="64461E"/>
+              <a:rPr sz="2400" b="0">
+                <a:solidFill>
+                  <a:srgbClr val="5A461E"/>
                 </a:solidFill>
                 <a:latin typeface="Microsoft YaHei"/>
               </a:rPr>
               <a:t>任选一则寓言新编（100—200字）</a:t>
+            </a:r>
+          </a:p>
+        </p:txBody>
+      </p:sp>
+    </p:spTree>
+  </p:cSld>
+  <p:clrMapOvr>
+    <a:masterClrMapping/>
+  </p:clrMapOvr>
+</p:sld>
+</file>
+
+<file path=ppt/slides/slide8.xml><?xml version="1.0" encoding="utf-8"?>
+<p:sld xmlns:a="http://schemas.openxmlformats.org/drawingml/2006/main" xmlns:p="http://schemas.openxmlformats.org/presentationml/2006/main" xmlns:r="http://schemas.openxmlformats.org/officeDocument/2006/relationships">
+  <p:cSld>
+    <p:spTree>
+      <p:nvGrpSpPr>
+        <p:cNvPr id="1" name=""/>
+        <p:cNvGrpSpPr/>
+        <p:nvPr/>
+      </p:nvGrpSpPr>
+      <p:grpSpPr/>
+      <p:pic>
+        <p:nvPicPr>
+          <p:cNvPr id="2" name="Picture 1" descr="bg_fable.png"/>
+          <p:cNvPicPr>
+            <a:picLocks noChangeAspect="1"/>
+          </p:cNvPicPr>
+          <p:nvPr/>
+        </p:nvPicPr>
+        <p:blipFill>
+          <a:blip r:embed="rId2"/>
+          <a:stretch>
+            <a:fillRect/>
+          </a:stretch>
+        </p:blipFill>
+        <p:spPr>
+          <a:xfrm>
+            <a:off x="0" y="0"/>
+            <a:ext cx="12191695" cy="6858000"/>
+          </a:xfrm>
+          <a:prstGeom prst="rect">
+            <a:avLst/>
+          </a:prstGeom>
+        </p:spPr>
+      </p:pic>
+      <p:sp>
+        <p:nvSpPr>
+          <p:cNvPr id="3" name="Rectangle 2"/>
+          <p:cNvSpPr/>
+          <p:nvPr/>
+        </p:nvSpPr>
+        <p:spPr>
+          <a:xfrm>
+            <a:off x="292608" y="274320"/>
+            <a:ext cx="11594592" cy="6300216"/>
+          </a:xfrm>
+          <a:prstGeom prst="rect">
+            <a:avLst/>
+          </a:prstGeom>
+          <a:noFill/>
+          <a:ln w="31750">
+            <a:solidFill>
+              <a:srgbClr val="B48C3C"/>
+            </a:solidFill>
+          </a:ln>
+        </p:spPr>
+        <p:style>
+          <a:lnRef idx="1">
+            <a:schemeClr val="accent1"/>
+          </a:lnRef>
+          <a:fillRef idx="3">
+            <a:schemeClr val="accent1"/>
+          </a:fillRef>
+          <a:effectRef idx="2">
+            <a:schemeClr val="accent1"/>
+          </a:effectRef>
+          <a:fontRef idx="minor">
+            <a:schemeClr val="lt1"/>
+          </a:fontRef>
+        </p:style>
+        <p:txBody>
+          <a:bodyPr rtlCol="0" anchor="ctr"/>
+          <a:lstStyle/>
+          <a:p>
+            <a:pPr algn="ctr"/>
+          </a:p>
+        </p:txBody>
+      </p:sp>
+      <p:pic>
+        <p:nvPicPr>
+          <p:cNvPr id="4" name="Picture 3" descr="corner_fable_tl.png"/>
+          <p:cNvPicPr>
+            <a:picLocks noChangeAspect="1"/>
+          </p:cNvPicPr>
+          <p:nvPr/>
+        </p:nvPicPr>
+        <p:blipFill>
+          <a:blip r:embed="rId3"/>
+          <a:stretch>
+            <a:fillRect/>
+          </a:stretch>
+        </p:blipFill>
+        <p:spPr>
+          <a:xfrm>
+            <a:off x="-45720" y="-45720"/>
+            <a:ext cx="2011680" cy="2011680"/>
+          </a:xfrm>
+          <a:prstGeom prst="rect">
+            <a:avLst/>
+          </a:prstGeom>
+        </p:spPr>
+      </p:pic>
+      <p:pic>
+        <p:nvPicPr>
+          <p:cNvPr id="5" name="Picture 4" descr="corner_fable_tr.png"/>
+          <p:cNvPicPr>
+            <a:picLocks noChangeAspect="1"/>
+          </p:cNvPicPr>
+          <p:nvPr/>
+        </p:nvPicPr>
+        <p:blipFill>
+          <a:blip r:embed="rId4"/>
+          <a:stretch>
+            <a:fillRect/>
+          </a:stretch>
+        </p:blipFill>
+        <p:spPr>
+          <a:xfrm>
+            <a:off x="9875520" y="-45720"/>
+            <a:ext cx="2011680" cy="2011680"/>
+          </a:xfrm>
+          <a:prstGeom prst="rect">
+            <a:avLst/>
+          </a:prstGeom>
+        </p:spPr>
+      </p:pic>
+      <p:sp>
+        <p:nvSpPr>
+          <p:cNvPr id="6" name="Rounded Rectangle 5"/>
+          <p:cNvSpPr/>
+          <p:nvPr/>
+        </p:nvSpPr>
+        <p:spPr>
+          <a:xfrm>
+            <a:off x="4953304" y="502920"/>
+            <a:ext cx="2286000" cy="411480"/>
+          </a:xfrm>
+          <a:prstGeom prst="roundRect">
+            <a:avLst/>
+          </a:prstGeom>
+          <a:solidFill>
+            <a:srgbClr val="F0C864"/>
+          </a:solidFill>
+          <a:ln>
+            <a:noFill/>
+          </a:ln>
+        </p:spPr>
+        <p:style>
+          <a:lnRef idx="1">
+            <a:schemeClr val="accent1"/>
+          </a:lnRef>
+          <a:fillRef idx="3">
+            <a:schemeClr val="accent1"/>
+          </a:fillRef>
+          <a:effectRef idx="2">
+            <a:schemeClr val="accent1"/>
+          </a:effectRef>
+          <a:fontRef idx="minor">
+            <a:schemeClr val="lt1"/>
+          </a:fontRef>
+        </p:style>
+        <p:txBody>
+          <a:bodyPr rtlCol="0" anchor="ctr"/>
+          <a:lstStyle/>
+          <a:p>
+            <a:pPr algn="ctr"/>
+          </a:p>
+        </p:txBody>
+      </p:sp>
+      <p:sp>
+        <p:nvSpPr>
+          <p:cNvPr id="7" name="TextBox 6"/>
+          <p:cNvSpPr txBox="1"/>
+          <p:nvPr/>
+        </p:nvSpPr>
+        <p:spPr>
+          <a:xfrm>
+            <a:off x="4953304" y="521208"/>
+            <a:ext cx="2286000" cy="384048"/>
+          </a:xfrm>
+          <a:prstGeom prst="rect">
+            <a:avLst/>
+          </a:prstGeom>
+          <a:noFill/>
+        </p:spPr>
+        <p:txBody>
+          <a:bodyPr wrap="none">
+            <a:spAutoFit/>
+          </a:bodyPr>
+          <a:lstStyle/>
+          <a:p>
+            <a:pPr algn="ctr">
+              <a:spcAft>
+                <a:spcPts val="1000"/>
+              </a:spcAft>
+            </a:pPr>
+            <a:r>
+              <a:rPr sz="1800" b="1">
+                <a:solidFill>
+                  <a:srgbClr val="5A461E"/>
+                </a:solidFill>
+                <a:latin typeface="Microsoft YaHei"/>
+              </a:rPr>
+              <a:t>回顾收获</a:t>
+            </a:r>
+          </a:p>
+        </p:txBody>
+      </p:sp>
+      <p:sp>
+        <p:nvSpPr>
+          <p:cNvPr id="8" name="TextBox 7"/>
+          <p:cNvSpPr txBox="1"/>
+          <p:nvPr/>
+        </p:nvSpPr>
+        <p:spPr>
+          <a:xfrm>
+            <a:off x="1371600" y="1051560"/>
+            <a:ext cx="9418320" cy="822960"/>
+          </a:xfrm>
+          <a:prstGeom prst="rect">
+            <a:avLst/>
+          </a:prstGeom>
+          <a:noFill/>
+        </p:spPr>
+        <p:txBody>
+          <a:bodyPr wrap="square">
+            <a:spAutoFit/>
+          </a:bodyPr>
+          <a:lstStyle/>
+          <a:p>
+            <a:pPr algn="ctr">
+              <a:spcAft>
+                <a:spcPts val="1000"/>
+              </a:spcAft>
+            </a:pPr>
+            <a:r>
+              <a:rPr sz="3600" b="1">
+                <a:solidFill>
+                  <a:srgbClr val="C89628"/>
+                </a:solidFill>
+                <a:latin typeface="Microsoft YaHei"/>
+              </a:rPr>
+              <a:t>课堂小结</a:t>
+            </a:r>
+          </a:p>
+        </p:txBody>
+      </p:sp>
+      <p:sp>
+        <p:nvSpPr>
+          <p:cNvPr id="9" name="Rectangle 8"/>
+          <p:cNvSpPr/>
+          <p:nvPr/>
+        </p:nvSpPr>
+        <p:spPr>
+          <a:xfrm>
+            <a:off x="3200400" y="1691640"/>
+            <a:ext cx="5760720" cy="27432"/>
+          </a:xfrm>
+          <a:prstGeom prst="rect">
+            <a:avLst/>
+          </a:prstGeom>
+          <a:solidFill>
+            <a:srgbClr val="F0C864"/>
+          </a:solidFill>
+          <a:ln>
+            <a:noFill/>
+          </a:ln>
+        </p:spPr>
+        <p:style>
+          <a:lnRef idx="1">
+            <a:schemeClr val="accent1"/>
+          </a:lnRef>
+          <a:fillRef idx="3">
+            <a:schemeClr val="accent1"/>
+          </a:fillRef>
+          <a:effectRef idx="2">
+            <a:schemeClr val="accent1"/>
+          </a:effectRef>
+          <a:fontRef idx="minor">
+            <a:schemeClr val="lt1"/>
+          </a:fontRef>
+        </p:style>
+        <p:txBody>
+          <a:bodyPr rtlCol="0" anchor="ctr"/>
+          <a:lstStyle/>
+          <a:p>
+            <a:pPr algn="ctr"/>
+          </a:p>
+        </p:txBody>
+      </p:sp>
+      <p:sp>
+        <p:nvSpPr>
+          <p:cNvPr id="10" name="Rounded Rectangle 9"/>
+          <p:cNvSpPr/>
+          <p:nvPr/>
+        </p:nvSpPr>
+        <p:spPr>
+          <a:xfrm>
+            <a:off x="1295704" y="1737360"/>
+            <a:ext cx="9601200" cy="1837944"/>
+          </a:xfrm>
+          <a:prstGeom prst="roundRect">
+            <a:avLst/>
+          </a:prstGeom>
+          <a:solidFill>
+            <a:srgbClr val="FFFCF0"/>
+          </a:solidFill>
+          <a:ln w="19050">
+            <a:solidFill>
+              <a:srgbClr val="F0C864"/>
+            </a:solidFill>
+          </a:ln>
+        </p:spPr>
+        <p:style>
+          <a:lnRef idx="1">
+            <a:schemeClr val="accent1"/>
+          </a:lnRef>
+          <a:fillRef idx="3">
+            <a:schemeClr val="accent1"/>
+          </a:fillRef>
+          <a:effectRef idx="2">
+            <a:schemeClr val="accent1"/>
+          </a:effectRef>
+          <a:fontRef idx="minor">
+            <a:schemeClr val="lt1"/>
+          </a:fontRef>
+        </p:style>
+        <p:txBody>
+          <a:bodyPr rtlCol="0" anchor="ctr"/>
+          <a:lstStyle/>
+          <a:p>
+            <a:pPr algn="ctr"/>
+          </a:p>
+        </p:txBody>
+      </p:sp>
+      <p:sp>
+        <p:nvSpPr>
+          <p:cNvPr id="11" name="Oval 10"/>
+          <p:cNvSpPr/>
+          <p:nvPr/>
+        </p:nvSpPr>
+        <p:spPr>
+          <a:xfrm>
+            <a:off x="2621584" y="1920240"/>
+            <a:ext cx="347472" cy="347472"/>
+          </a:xfrm>
+          <a:prstGeom prst="ellipse">
+            <a:avLst/>
+          </a:prstGeom>
+          <a:solidFill>
+            <a:srgbClr val="C89628"/>
+          </a:solidFill>
+          <a:ln>
+            <a:noFill/>
+          </a:ln>
+        </p:spPr>
+        <p:style>
+          <a:lnRef idx="1">
+            <a:schemeClr val="accent1"/>
+          </a:lnRef>
+          <a:fillRef idx="3">
+            <a:schemeClr val="accent1"/>
+          </a:fillRef>
+          <a:effectRef idx="2">
+            <a:schemeClr val="accent1"/>
+          </a:effectRef>
+          <a:fontRef idx="minor">
+            <a:schemeClr val="lt1"/>
+          </a:fontRef>
+        </p:style>
+        <p:txBody>
+          <a:bodyPr rtlCol="0" anchor="ctr"/>
+          <a:lstStyle/>
+          <a:p>
+            <a:pPr algn="ctr"/>
+          </a:p>
+        </p:txBody>
+      </p:sp>
+      <p:sp>
+        <p:nvSpPr>
+          <p:cNvPr id="12" name="TextBox 11"/>
+          <p:cNvSpPr txBox="1"/>
+          <p:nvPr/>
+        </p:nvSpPr>
+        <p:spPr>
+          <a:xfrm>
+            <a:off x="2621584" y="1938528"/>
+            <a:ext cx="347472" cy="329184"/>
+          </a:xfrm>
+          <a:prstGeom prst="rect">
+            <a:avLst/>
+          </a:prstGeom>
+          <a:noFill/>
+        </p:spPr>
+        <p:txBody>
+          <a:bodyPr wrap="none">
+            <a:spAutoFit/>
+          </a:bodyPr>
+          <a:lstStyle/>
+          <a:p>
+            <a:pPr algn="ctr">
+              <a:spcAft>
+                <a:spcPts val="1000"/>
+              </a:spcAft>
+            </a:pPr>
+            <a:r>
+              <a:rPr sz="1400" b="1">
+                <a:solidFill>
+                  <a:srgbClr val="FFFFFF"/>
+                </a:solidFill>
+                <a:latin typeface="Microsoft YaHei"/>
+              </a:rPr>
+              <a:t>1</a:t>
+            </a:r>
+          </a:p>
+        </p:txBody>
+      </p:sp>
+      <p:sp>
+        <p:nvSpPr>
+          <p:cNvPr id="13" name="TextBox 12"/>
+          <p:cNvSpPr txBox="1"/>
+          <p:nvPr/>
+        </p:nvSpPr>
+        <p:spPr>
+          <a:xfrm>
+            <a:off x="3078784" y="1901952"/>
+            <a:ext cx="7863840" cy="457200"/>
+          </a:xfrm>
+          <a:prstGeom prst="rect">
+            <a:avLst/>
+          </a:prstGeom>
+          <a:noFill/>
+        </p:spPr>
+        <p:txBody>
+          <a:bodyPr wrap="none">
+            <a:spAutoFit/>
+          </a:bodyPr>
+          <a:lstStyle/>
+          <a:p>
+            <a:pPr algn="l">
+              <a:spcAft>
+                <a:spcPts val="1000"/>
+              </a:spcAft>
+            </a:pPr>
+            <a:r>
+              <a:rPr sz="2200" b="0">
+                <a:solidFill>
+                  <a:srgbClr val="5A461E"/>
+                </a:solidFill>
+                <a:latin typeface="Microsoft YaHei"/>
+              </a:rPr>
+              <a:t>寓言=故事+道理，道理由情节自然推出</a:t>
+            </a:r>
+          </a:p>
+        </p:txBody>
+      </p:sp>
+      <p:sp>
+        <p:nvSpPr>
+          <p:cNvPr id="14" name="Oval 13"/>
+          <p:cNvSpPr/>
+          <p:nvPr/>
+        </p:nvSpPr>
+        <p:spPr>
+          <a:xfrm>
+            <a:off x="2621584" y="2395728"/>
+            <a:ext cx="347472" cy="347472"/>
+          </a:xfrm>
+          <a:prstGeom prst="ellipse">
+            <a:avLst/>
+          </a:prstGeom>
+          <a:solidFill>
+            <a:srgbClr val="C89628"/>
+          </a:solidFill>
+          <a:ln>
+            <a:noFill/>
+          </a:ln>
+        </p:spPr>
+        <p:style>
+          <a:lnRef idx="1">
+            <a:schemeClr val="accent1"/>
+          </a:lnRef>
+          <a:fillRef idx="3">
+            <a:schemeClr val="accent1"/>
+          </a:fillRef>
+          <a:effectRef idx="2">
+            <a:schemeClr val="accent1"/>
+          </a:effectRef>
+          <a:fontRef idx="minor">
+            <a:schemeClr val="lt1"/>
+          </a:fontRef>
+        </p:style>
+        <p:txBody>
+          <a:bodyPr rtlCol="0" anchor="ctr"/>
+          <a:lstStyle/>
+          <a:p>
+            <a:pPr algn="ctr"/>
+          </a:p>
+        </p:txBody>
+      </p:sp>
+      <p:sp>
+        <p:nvSpPr>
+          <p:cNvPr id="15" name="TextBox 14"/>
+          <p:cNvSpPr txBox="1"/>
+          <p:nvPr/>
+        </p:nvSpPr>
+        <p:spPr>
+          <a:xfrm>
+            <a:off x="2621584" y="2414016"/>
+            <a:ext cx="347472" cy="329184"/>
+          </a:xfrm>
+          <a:prstGeom prst="rect">
+            <a:avLst/>
+          </a:prstGeom>
+          <a:noFill/>
+        </p:spPr>
+        <p:txBody>
+          <a:bodyPr wrap="none">
+            <a:spAutoFit/>
+          </a:bodyPr>
+          <a:lstStyle/>
+          <a:p>
+            <a:pPr algn="ctr">
+              <a:spcAft>
+                <a:spcPts val="1000"/>
+              </a:spcAft>
+            </a:pPr>
+            <a:r>
+              <a:rPr sz="1400" b="1">
+                <a:solidFill>
+                  <a:srgbClr val="FFFFFF"/>
+                </a:solidFill>
+                <a:latin typeface="Microsoft YaHei"/>
+              </a:rPr>
+              <a:t>2</a:t>
+            </a:r>
+          </a:p>
+        </p:txBody>
+      </p:sp>
+      <p:sp>
+        <p:nvSpPr>
+          <p:cNvPr id="16" name="TextBox 15"/>
+          <p:cNvSpPr txBox="1"/>
+          <p:nvPr/>
+        </p:nvSpPr>
+        <p:spPr>
+          <a:xfrm>
+            <a:off x="3078784" y="2377440"/>
+            <a:ext cx="7863840" cy="457200"/>
+          </a:xfrm>
+          <a:prstGeom prst="rect">
+            <a:avLst/>
+          </a:prstGeom>
+          <a:noFill/>
+        </p:spPr>
+        <p:txBody>
+          <a:bodyPr wrap="none">
+            <a:spAutoFit/>
+          </a:bodyPr>
+          <a:lstStyle/>
+          <a:p>
+            <a:pPr algn="l">
+              <a:spcAft>
+                <a:spcPts val="1000"/>
+              </a:spcAft>
+            </a:pPr>
+            <a:r>
+              <a:rPr sz="2200" b="0">
+                <a:solidFill>
+                  <a:srgbClr val="5A461E"/>
+                </a:solidFill>
+                <a:latin typeface="Microsoft YaHei"/>
+              </a:rPr>
+              <a:t>文言：闻、传、道、亡；重点句要准确翻译</a:t>
+            </a:r>
+          </a:p>
+        </p:txBody>
+      </p:sp>
+      <p:sp>
+        <p:nvSpPr>
+          <p:cNvPr id="17" name="Oval 16"/>
+          <p:cNvSpPr/>
+          <p:nvPr/>
+        </p:nvSpPr>
+        <p:spPr>
+          <a:xfrm>
+            <a:off x="2621584" y="2871216"/>
+            <a:ext cx="347472" cy="347472"/>
+          </a:xfrm>
+          <a:prstGeom prst="ellipse">
+            <a:avLst/>
+          </a:prstGeom>
+          <a:solidFill>
+            <a:srgbClr val="C89628"/>
+          </a:solidFill>
+          <a:ln>
+            <a:noFill/>
+          </a:ln>
+        </p:spPr>
+        <p:style>
+          <a:lnRef idx="1">
+            <a:schemeClr val="accent1"/>
+          </a:lnRef>
+          <a:fillRef idx="3">
+            <a:schemeClr val="accent1"/>
+          </a:fillRef>
+          <a:effectRef idx="2">
+            <a:schemeClr val="accent1"/>
+          </a:effectRef>
+          <a:fontRef idx="minor">
+            <a:schemeClr val="lt1"/>
+          </a:fontRef>
+        </p:style>
+        <p:txBody>
+          <a:bodyPr rtlCol="0" anchor="ctr"/>
+          <a:lstStyle/>
+          <a:p>
+            <a:pPr algn="ctr"/>
+          </a:p>
+        </p:txBody>
+      </p:sp>
+      <p:sp>
+        <p:nvSpPr>
+          <p:cNvPr id="18" name="TextBox 17"/>
+          <p:cNvSpPr txBox="1"/>
+          <p:nvPr/>
+        </p:nvSpPr>
+        <p:spPr>
+          <a:xfrm>
+            <a:off x="2621584" y="2889504"/>
+            <a:ext cx="347472" cy="329184"/>
+          </a:xfrm>
+          <a:prstGeom prst="rect">
+            <a:avLst/>
+          </a:prstGeom>
+          <a:noFill/>
+        </p:spPr>
+        <p:txBody>
+          <a:bodyPr wrap="none">
+            <a:spAutoFit/>
+          </a:bodyPr>
+          <a:lstStyle/>
+          <a:p>
+            <a:pPr algn="ctr">
+              <a:spcAft>
+                <a:spcPts val="1000"/>
+              </a:spcAft>
+            </a:pPr>
+            <a:r>
+              <a:rPr sz="1400" b="1">
+                <a:solidFill>
+                  <a:srgbClr val="FFFFFF"/>
+                </a:solidFill>
+                <a:latin typeface="Microsoft YaHei"/>
+              </a:rPr>
+              <a:t>3</a:t>
+            </a:r>
+          </a:p>
+        </p:txBody>
+      </p:sp>
+      <p:sp>
+        <p:nvSpPr>
+          <p:cNvPr id="19" name="TextBox 18"/>
+          <p:cNvSpPr txBox="1"/>
+          <p:nvPr/>
+        </p:nvSpPr>
+        <p:spPr>
+          <a:xfrm>
+            <a:off x="3078784" y="2852928"/>
+            <a:ext cx="7863840" cy="457200"/>
+          </a:xfrm>
+          <a:prstGeom prst="rect">
+            <a:avLst/>
+          </a:prstGeom>
+          <a:noFill/>
+        </p:spPr>
+        <p:txBody>
+          <a:bodyPr wrap="none">
+            <a:spAutoFit/>
+          </a:bodyPr>
+          <a:lstStyle/>
+          <a:p>
+            <a:pPr algn="l">
+              <a:spcAft>
+                <a:spcPts val="1000"/>
+              </a:spcAft>
+            </a:pPr>
+            <a:r>
+              <a:rPr sz="2200" b="0">
+                <a:solidFill>
+                  <a:srgbClr val="5A461E"/>
+                </a:solidFill>
+                <a:latin typeface="Microsoft YaHei"/>
+              </a:rPr>
+              <a:t>策展主题四：智慧与局限</a:t>
+            </a:r>
+          </a:p>
+        </p:txBody>
+      </p:sp>
+    </p:spTree>
+  </p:cSld>
+  <p:clrMapOvr>
+    <a:masterClrMapping/>
+  </p:clrMapOvr>
+</p:sld>
+</file>
+
+<file path=ppt/slides/slide9.xml><?xml version="1.0" encoding="utf-8"?>
+<p:sld xmlns:a="http://schemas.openxmlformats.org/drawingml/2006/main" xmlns:p="http://schemas.openxmlformats.org/presentationml/2006/main" xmlns:r="http://schemas.openxmlformats.org/officeDocument/2006/relationships">
+  <p:cSld>
+    <p:spTree>
+      <p:nvGrpSpPr>
+        <p:cNvPr id="1" name=""/>
+        <p:cNvGrpSpPr/>
+        <p:nvPr/>
+      </p:nvGrpSpPr>
+      <p:grpSpPr/>
+      <p:pic>
+        <p:nvPicPr>
+          <p:cNvPr id="2" name="Picture 1" descr="bg_fable.png"/>
+          <p:cNvPicPr>
+            <a:picLocks noChangeAspect="1"/>
+          </p:cNvPicPr>
+          <p:nvPr/>
+        </p:nvPicPr>
+        <p:blipFill>
+          <a:blip r:embed="rId2"/>
+          <a:stretch>
+            <a:fillRect/>
+          </a:stretch>
+        </p:blipFill>
+        <p:spPr>
+          <a:xfrm>
+            <a:off x="0" y="0"/>
+            <a:ext cx="12191695" cy="6858000"/>
+          </a:xfrm>
+          <a:prstGeom prst="rect">
+            <a:avLst/>
+          </a:prstGeom>
+        </p:spPr>
+      </p:pic>
+      <p:sp>
+        <p:nvSpPr>
+          <p:cNvPr id="3" name="Rectangle 2"/>
+          <p:cNvSpPr/>
+          <p:nvPr/>
+        </p:nvSpPr>
+        <p:spPr>
+          <a:xfrm>
+            <a:off x="292608" y="274320"/>
+            <a:ext cx="11594592" cy="6300216"/>
+          </a:xfrm>
+          <a:prstGeom prst="rect">
+            <a:avLst/>
+          </a:prstGeom>
+          <a:noFill/>
+          <a:ln w="31750">
+            <a:solidFill>
+              <a:srgbClr val="B48C3C"/>
+            </a:solidFill>
+          </a:ln>
+        </p:spPr>
+        <p:style>
+          <a:lnRef idx="1">
+            <a:schemeClr val="accent1"/>
+          </a:lnRef>
+          <a:fillRef idx="3">
+            <a:schemeClr val="accent1"/>
+          </a:fillRef>
+          <a:effectRef idx="2">
+            <a:schemeClr val="accent1"/>
+          </a:effectRef>
+          <a:fontRef idx="minor">
+            <a:schemeClr val="lt1"/>
+          </a:fontRef>
+        </p:style>
+        <p:txBody>
+          <a:bodyPr rtlCol="0" anchor="ctr"/>
+          <a:lstStyle/>
+          <a:p>
+            <a:pPr algn="ctr"/>
+          </a:p>
+        </p:txBody>
+      </p:sp>
+      <p:pic>
+        <p:nvPicPr>
+          <p:cNvPr id="4" name="Picture 3" descr="corner_fable_tl.png"/>
+          <p:cNvPicPr>
+            <a:picLocks noChangeAspect="1"/>
+          </p:cNvPicPr>
+          <p:nvPr/>
+        </p:nvPicPr>
+        <p:blipFill>
+          <a:blip r:embed="rId3"/>
+          <a:stretch>
+            <a:fillRect/>
+          </a:stretch>
+        </p:blipFill>
+        <p:spPr>
+          <a:xfrm>
+            <a:off x="-45720" y="-45720"/>
+            <a:ext cx="2011680" cy="2011680"/>
+          </a:xfrm>
+          <a:prstGeom prst="rect">
+            <a:avLst/>
+          </a:prstGeom>
+        </p:spPr>
+      </p:pic>
+      <p:pic>
+        <p:nvPicPr>
+          <p:cNvPr id="5" name="Picture 4" descr="corner_fable_tr.png"/>
+          <p:cNvPicPr>
+            <a:picLocks noChangeAspect="1"/>
+          </p:cNvPicPr>
+          <p:nvPr/>
+        </p:nvPicPr>
+        <p:blipFill>
+          <a:blip r:embed="rId4"/>
+          <a:stretch>
+            <a:fillRect/>
+          </a:stretch>
+        </p:blipFill>
+        <p:spPr>
+          <a:xfrm>
+            <a:off x="9875520" y="-45720"/>
+            <a:ext cx="2011680" cy="2011680"/>
+          </a:xfrm>
+          <a:prstGeom prst="rect">
+            <a:avLst/>
+          </a:prstGeom>
+        </p:spPr>
+      </p:pic>
+      <p:sp>
+        <p:nvSpPr>
+          <p:cNvPr id="6" name="Rounded Rectangle 5"/>
+          <p:cNvSpPr/>
+          <p:nvPr/>
+        </p:nvSpPr>
+        <p:spPr>
+          <a:xfrm>
+            <a:off x="4953304" y="502920"/>
+            <a:ext cx="2286000" cy="411480"/>
+          </a:xfrm>
+          <a:prstGeom prst="roundRect">
+            <a:avLst/>
+          </a:prstGeom>
+          <a:solidFill>
+            <a:srgbClr val="F0C864"/>
+          </a:solidFill>
+          <a:ln>
+            <a:noFill/>
+          </a:ln>
+        </p:spPr>
+        <p:style>
+          <a:lnRef idx="1">
+            <a:schemeClr val="accent1"/>
+          </a:lnRef>
+          <a:fillRef idx="3">
+            <a:schemeClr val="accent1"/>
+          </a:fillRef>
+          <a:effectRef idx="2">
+            <a:schemeClr val="accent1"/>
+          </a:effectRef>
+          <a:fontRef idx="minor">
+            <a:schemeClr val="lt1"/>
+          </a:fontRef>
+        </p:style>
+        <p:txBody>
+          <a:bodyPr rtlCol="0" anchor="ctr"/>
+          <a:lstStyle/>
+          <a:p>
+            <a:pPr algn="ctr"/>
+          </a:p>
+        </p:txBody>
+      </p:sp>
+      <p:sp>
+        <p:nvSpPr>
+          <p:cNvPr id="7" name="TextBox 6"/>
+          <p:cNvSpPr txBox="1"/>
+          <p:nvPr/>
+        </p:nvSpPr>
+        <p:spPr>
+          <a:xfrm>
+            <a:off x="4953304" y="521208"/>
+            <a:ext cx="2286000" cy="384048"/>
+          </a:xfrm>
+          <a:prstGeom prst="rect">
+            <a:avLst/>
+          </a:prstGeom>
+          <a:noFill/>
+        </p:spPr>
+        <p:txBody>
+          <a:bodyPr wrap="none">
+            <a:spAutoFit/>
+          </a:bodyPr>
+          <a:lstStyle/>
+          <a:p>
+            <a:pPr algn="ctr">
+              <a:spcAft>
+                <a:spcPts val="1000"/>
+              </a:spcAft>
+            </a:pPr>
+            <a:r>
+              <a:rPr sz="1800" b="1">
+                <a:solidFill>
+                  <a:srgbClr val="5A461E"/>
+                </a:solidFill>
+                <a:latin typeface="Microsoft YaHei"/>
+              </a:rPr>
+              <a:t>课后延伸</a:t>
+            </a:r>
+          </a:p>
+        </p:txBody>
+      </p:sp>
+      <p:sp>
+        <p:nvSpPr>
+          <p:cNvPr id="8" name="TextBox 7"/>
+          <p:cNvSpPr txBox="1"/>
+          <p:nvPr/>
+        </p:nvSpPr>
+        <p:spPr>
+          <a:xfrm>
+            <a:off x="1371600" y="1051560"/>
+            <a:ext cx="9418320" cy="822960"/>
+          </a:xfrm>
+          <a:prstGeom prst="rect">
+            <a:avLst/>
+          </a:prstGeom>
+          <a:noFill/>
+        </p:spPr>
+        <p:txBody>
+          <a:bodyPr wrap="square">
+            <a:spAutoFit/>
+          </a:bodyPr>
+          <a:lstStyle/>
+          <a:p>
+            <a:pPr algn="ctr">
+              <a:spcAft>
+                <a:spcPts val="1000"/>
+              </a:spcAft>
+            </a:pPr>
+            <a:r>
+              <a:rPr sz="3600" b="1">
+                <a:solidFill>
+                  <a:srgbClr val="C89628"/>
+                </a:solidFill>
+                <a:latin typeface="Microsoft YaHei"/>
+              </a:rPr>
+              <a:t>课后作业</a:t>
+            </a:r>
+          </a:p>
+        </p:txBody>
+      </p:sp>
+      <p:sp>
+        <p:nvSpPr>
+          <p:cNvPr id="9" name="Rectangle 8"/>
+          <p:cNvSpPr/>
+          <p:nvPr/>
+        </p:nvSpPr>
+        <p:spPr>
+          <a:xfrm>
+            <a:off x="3200400" y="1691640"/>
+            <a:ext cx="5760720" cy="27432"/>
+          </a:xfrm>
+          <a:prstGeom prst="rect">
+            <a:avLst/>
+          </a:prstGeom>
+          <a:solidFill>
+            <a:srgbClr val="F0C864"/>
+          </a:solidFill>
+          <a:ln>
+            <a:noFill/>
+          </a:ln>
+        </p:spPr>
+        <p:style>
+          <a:lnRef idx="1">
+            <a:schemeClr val="accent1"/>
+          </a:lnRef>
+          <a:fillRef idx="3">
+            <a:schemeClr val="accent1"/>
+          </a:fillRef>
+          <a:effectRef idx="2">
+            <a:schemeClr val="accent1"/>
+          </a:effectRef>
+          <a:fontRef idx="minor">
+            <a:schemeClr val="lt1"/>
+          </a:fontRef>
+        </p:style>
+        <p:txBody>
+          <a:bodyPr rtlCol="0" anchor="ctr"/>
+          <a:lstStyle/>
+          <a:p>
+            <a:pPr algn="ctr"/>
+          </a:p>
+        </p:txBody>
+      </p:sp>
+      <p:sp>
+        <p:nvSpPr>
+          <p:cNvPr id="10" name="Rounded Rectangle 9"/>
+          <p:cNvSpPr/>
+          <p:nvPr/>
+        </p:nvSpPr>
+        <p:spPr>
+          <a:xfrm>
+            <a:off x="1295704" y="1737360"/>
+            <a:ext cx="9601200" cy="1545336"/>
+          </a:xfrm>
+          <a:prstGeom prst="roundRect">
+            <a:avLst/>
+          </a:prstGeom>
+          <a:solidFill>
+            <a:srgbClr val="FFFCF0"/>
+          </a:solidFill>
+          <a:ln w="19050">
+            <a:solidFill>
+              <a:srgbClr val="F0C864"/>
+            </a:solidFill>
+          </a:ln>
+        </p:spPr>
+        <p:style>
+          <a:lnRef idx="1">
+            <a:schemeClr val="accent1"/>
+          </a:lnRef>
+          <a:fillRef idx="3">
+            <a:schemeClr val="accent1"/>
+          </a:fillRef>
+          <a:effectRef idx="2">
+            <a:schemeClr val="accent1"/>
+          </a:effectRef>
+          <a:fontRef idx="minor">
+            <a:schemeClr val="lt1"/>
+          </a:fontRef>
+        </p:style>
+        <p:txBody>
+          <a:bodyPr rtlCol="0" anchor="ctr"/>
+          <a:lstStyle/>
+          <a:p>
+            <a:pPr algn="ctr"/>
+          </a:p>
+        </p:txBody>
+      </p:sp>
+      <p:sp>
+        <p:nvSpPr>
+          <p:cNvPr id="11" name="Oval 10"/>
+          <p:cNvSpPr/>
+          <p:nvPr/>
+        </p:nvSpPr>
+        <p:spPr>
+          <a:xfrm>
+            <a:off x="2621584" y="1920240"/>
+            <a:ext cx="347472" cy="347472"/>
+          </a:xfrm>
+          <a:prstGeom prst="ellipse">
+            <a:avLst/>
+          </a:prstGeom>
+          <a:solidFill>
+            <a:srgbClr val="C89628"/>
+          </a:solidFill>
+          <a:ln>
+            <a:noFill/>
+          </a:ln>
+        </p:spPr>
+        <p:style>
+          <a:lnRef idx="1">
+            <a:schemeClr val="accent1"/>
+          </a:lnRef>
+          <a:fillRef idx="3">
+            <a:schemeClr val="accent1"/>
+          </a:fillRef>
+          <a:effectRef idx="2">
+            <a:schemeClr val="accent1"/>
+          </a:effectRef>
+          <a:fontRef idx="minor">
+            <a:schemeClr val="lt1"/>
+          </a:fontRef>
+        </p:style>
+        <p:txBody>
+          <a:bodyPr rtlCol="0" anchor="ctr"/>
+          <a:lstStyle/>
+          <a:p>
+            <a:pPr algn="ctr"/>
+          </a:p>
+        </p:txBody>
+      </p:sp>
+      <p:sp>
+        <p:nvSpPr>
+          <p:cNvPr id="12" name="TextBox 11"/>
+          <p:cNvSpPr txBox="1"/>
+          <p:nvPr/>
+        </p:nvSpPr>
+        <p:spPr>
+          <a:xfrm>
+            <a:off x="2621584" y="1938528"/>
+            <a:ext cx="347472" cy="329184"/>
+          </a:xfrm>
+          <a:prstGeom prst="rect">
+            <a:avLst/>
+          </a:prstGeom>
+          <a:noFill/>
+        </p:spPr>
+        <p:txBody>
+          <a:bodyPr wrap="none">
+            <a:spAutoFit/>
+          </a:bodyPr>
+          <a:lstStyle/>
+          <a:p>
+            <a:pPr algn="ctr">
+              <a:spcAft>
+                <a:spcPts val="1000"/>
+              </a:spcAft>
+            </a:pPr>
+            <a:r>
+              <a:rPr sz="1400" b="1">
+                <a:solidFill>
+                  <a:srgbClr val="FFFFFF"/>
+                </a:solidFill>
+                <a:latin typeface="Microsoft YaHei"/>
+              </a:rPr>
+              <a:t>1</a:t>
+            </a:r>
+          </a:p>
+        </p:txBody>
+      </p:sp>
+      <p:sp>
+        <p:nvSpPr>
+          <p:cNvPr id="13" name="TextBox 12"/>
+          <p:cNvSpPr txBox="1"/>
+          <p:nvPr/>
+        </p:nvSpPr>
+        <p:spPr>
+          <a:xfrm>
+            <a:off x="3078784" y="1901952"/>
+            <a:ext cx="7863840" cy="457200"/>
+          </a:xfrm>
+          <a:prstGeom prst="rect">
+            <a:avLst/>
+          </a:prstGeom>
+          <a:noFill/>
+        </p:spPr>
+        <p:txBody>
+          <a:bodyPr wrap="none">
+            <a:spAutoFit/>
+          </a:bodyPr>
+          <a:lstStyle/>
+          <a:p>
+            <a:pPr algn="l">
+              <a:spcAft>
+                <a:spcPts val="1000"/>
+              </a:spcAft>
+            </a:pPr>
+            <a:r>
+              <a:rPr sz="2400" b="0">
+                <a:solidFill>
+                  <a:srgbClr val="5A461E"/>
+                </a:solidFill>
+                <a:latin typeface="Microsoft YaHei"/>
+              </a:rPr>
+              <a:t>必做：用「这则寓言告诉我们……」写《蚊子和狮子》启示</a:t>
+            </a:r>
+          </a:p>
+        </p:txBody>
+      </p:sp>
+      <p:sp>
+        <p:nvSpPr>
+          <p:cNvPr id="14" name="Oval 13"/>
+          <p:cNvSpPr/>
+          <p:nvPr/>
+        </p:nvSpPr>
+        <p:spPr>
+          <a:xfrm>
+            <a:off x="2621584" y="2487168"/>
+            <a:ext cx="347472" cy="347472"/>
+          </a:xfrm>
+          <a:prstGeom prst="ellipse">
+            <a:avLst/>
+          </a:prstGeom>
+          <a:solidFill>
+            <a:srgbClr val="C89628"/>
+          </a:solidFill>
+          <a:ln>
+            <a:noFill/>
+          </a:ln>
+        </p:spPr>
+        <p:style>
+          <a:lnRef idx="1">
+            <a:schemeClr val="accent1"/>
+          </a:lnRef>
+          <a:fillRef idx="3">
+            <a:schemeClr val="accent1"/>
+          </a:fillRef>
+          <a:effectRef idx="2">
+            <a:schemeClr val="accent1"/>
+          </a:effectRef>
+          <a:fontRef idx="minor">
+            <a:schemeClr val="lt1"/>
+          </a:fontRef>
+        </p:style>
+        <p:txBody>
+          <a:bodyPr rtlCol="0" anchor="ctr"/>
+          <a:lstStyle/>
+          <a:p>
+            <a:pPr algn="ctr"/>
+          </a:p>
+        </p:txBody>
+      </p:sp>
+      <p:sp>
+        <p:nvSpPr>
+          <p:cNvPr id="15" name="TextBox 14"/>
+          <p:cNvSpPr txBox="1"/>
+          <p:nvPr/>
+        </p:nvSpPr>
+        <p:spPr>
+          <a:xfrm>
+            <a:off x="2621584" y="2505456"/>
+            <a:ext cx="347472" cy="329184"/>
+          </a:xfrm>
+          <a:prstGeom prst="rect">
+            <a:avLst/>
+          </a:prstGeom>
+          <a:noFill/>
+        </p:spPr>
+        <p:txBody>
+          <a:bodyPr wrap="none">
+            <a:spAutoFit/>
+          </a:bodyPr>
+          <a:lstStyle/>
+          <a:p>
+            <a:pPr algn="ctr">
+              <a:spcAft>
+                <a:spcPts val="1000"/>
+              </a:spcAft>
+            </a:pPr>
+            <a:r>
+              <a:rPr sz="1400" b="1">
+                <a:solidFill>
+                  <a:srgbClr val="FFFFFF"/>
+                </a:solidFill>
+                <a:latin typeface="Microsoft YaHei"/>
+              </a:rPr>
+              <a:t>2</a:t>
+            </a:r>
+          </a:p>
+        </p:txBody>
+      </p:sp>
+      <p:sp>
+        <p:nvSpPr>
+          <p:cNvPr id="16" name="TextBox 15"/>
+          <p:cNvSpPr txBox="1"/>
+          <p:nvPr/>
+        </p:nvSpPr>
+        <p:spPr>
+          <a:xfrm>
+            <a:off x="3078784" y="2468880"/>
+            <a:ext cx="7863840" cy="457200"/>
+          </a:xfrm>
+          <a:prstGeom prst="rect">
+            <a:avLst/>
+          </a:prstGeom>
+          <a:noFill/>
+        </p:spPr>
+        <p:txBody>
+          <a:bodyPr wrap="none">
+            <a:spAutoFit/>
+          </a:bodyPr>
+          <a:lstStyle/>
+          <a:p>
+            <a:pPr algn="l">
+              <a:spcAft>
+                <a:spcPts val="1000"/>
+              </a:spcAft>
+            </a:pPr>
+            <a:r>
+              <a:rPr sz="2400" b="0">
+                <a:solidFill>
+                  <a:srgbClr val="5A461E"/>
+                </a:solidFill>
+                <a:latin typeface="Microsoft YaHei"/>
+              </a:rPr>
+              <a:t>背诵：得一人之使，非得一人于井中也</a:t>
             </a:r>
           </a:p>
         </p:txBody>

--- a/unit6-lesson24-fables.pptx
+++ b/unit6-lesson24-fables.pptx
@@ -13,7 +13,6 @@
     <p:sldId id="261" r:id="rId12"/>
     <p:sldId id="262" r:id="rId13"/>
     <p:sldId id="263" r:id="rId14"/>
-    <p:sldId id="264" r:id="rId15"/>
   </p:sldIdLst>
   <p:sldSz cx="12191695" cy="6858000" type="screen4x3"/>
   <p:notesSz cx="6858000" cy="9144000"/>
@@ -3305,8 +3304,8 @@
         </p:nvSpPr>
         <p:spPr>
           <a:xfrm>
-            <a:off x="1371600" y="1828800"/>
-            <a:ext cx="9418320" cy="1828800"/>
+            <a:off x="1371600" y="2011680"/>
+            <a:ext cx="9418320" cy="1645920"/>
           </a:xfrm>
           <a:prstGeom prst="rect">
             <a:avLst/>
@@ -3605,7 +3604,7 @@
                 </a:solidFill>
                 <a:latin typeface="Microsoft YaHei"/>
               </a:rPr>
-              <a:t>课堂笔记</a:t>
+              <a:t>课时目标</a:t>
             </a:r>
           </a:p>
         </p:txBody>
@@ -3618,7 +3617,7 @@
         </p:nvSpPr>
         <p:spPr>
           <a:xfrm>
-            <a:off x="1371600" y="1051560"/>
+            <a:off x="1371600" y="960120"/>
             <a:ext cx="9418320" cy="822960"/>
           </a:xfrm>
           <a:prstGeom prst="rect">
@@ -3644,7 +3643,7 @@
                 </a:solidFill>
                 <a:latin typeface="Microsoft YaHei"/>
               </a:rPr>
-              <a:t>文体知识</a:t>
+              <a:t>本课目标</a:t>
             </a:r>
           </a:p>
         </p:txBody>
@@ -3657,7 +3656,7 @@
         </p:nvSpPr>
         <p:spPr>
           <a:xfrm>
-            <a:off x="3200400" y="1691640"/>
+            <a:off x="3200400" y="1600200"/>
             <a:ext cx="5760720" cy="27432"/>
           </a:xfrm>
           <a:prstGeom prst="rect">
@@ -3700,8 +3699,8 @@
         </p:nvSpPr>
         <p:spPr>
           <a:xfrm>
-            <a:off x="1249984" y="1810512"/>
-            <a:ext cx="9692640" cy="3319272"/>
+            <a:off x="1295704" y="1645920"/>
+            <a:ext cx="9601200" cy="2240280"/>
           </a:xfrm>
           <a:prstGeom prst="roundRect">
             <a:avLst/>
@@ -3739,14 +3738,57 @@
       </p:sp>
       <p:sp>
         <p:nvSpPr>
-          <p:cNvPr id="11" name="TextBox 10"/>
+          <p:cNvPr id="11" name="Oval 10"/>
+          <p:cNvSpPr/>
+          <p:nvPr/>
+        </p:nvSpPr>
+        <p:spPr>
+          <a:xfrm>
+            <a:off x="2255824" y="1828800"/>
+            <a:ext cx="384048" cy="384048"/>
+          </a:xfrm>
+          <a:prstGeom prst="ellipse">
+            <a:avLst/>
+          </a:prstGeom>
+          <a:solidFill>
+            <a:srgbClr val="C89628"/>
+          </a:solidFill>
+          <a:ln>
+            <a:noFill/>
+          </a:ln>
+        </p:spPr>
+        <p:style>
+          <a:lnRef idx="1">
+            <a:schemeClr val="accent1"/>
+          </a:lnRef>
+          <a:fillRef idx="3">
+            <a:schemeClr val="accent1"/>
+          </a:fillRef>
+          <a:effectRef idx="2">
+            <a:schemeClr val="accent1"/>
+          </a:effectRef>
+          <a:fontRef idx="minor">
+            <a:schemeClr val="lt1"/>
+          </a:fontRef>
+        </p:style>
+        <p:txBody>
+          <a:bodyPr rtlCol="0" anchor="ctr"/>
+          <a:lstStyle/>
+          <a:p>
+            <a:pPr algn="ctr"/>
+          </a:p>
+        </p:txBody>
+      </p:sp>
+      <p:sp>
+        <p:nvSpPr>
+          <p:cNvPr id="12" name="TextBox 11"/>
           <p:cNvSpPr txBox="1"/>
           <p:nvPr/>
         </p:nvSpPr>
         <p:spPr>
           <a:xfrm>
-            <a:off x="1463040" y="1920240"/>
-            <a:ext cx="2103120" cy="502920"/>
+            <a:off x="2255824" y="1847088"/>
+            <a:ext cx="384048" cy="365760"/>
           </a:xfrm>
           <a:prstGeom prst="rect">
             <a:avLst/>
@@ -3759,33 +3801,33 @@
           </a:bodyPr>
           <a:lstStyle/>
           <a:p>
-            <a:pPr algn="r">
+            <a:pPr algn="ctr">
               <a:spcAft>
                 <a:spcPts val="1000"/>
               </a:spcAft>
             </a:pPr>
             <a:r>
-              <a:rPr sz="2200" b="1">
+              <a:rPr sz="1600" b="1">
                 <a:solidFill>
-                  <a:srgbClr val="C89628"/>
+                  <a:srgbClr val="FFFFFF"/>
                 </a:solidFill>
                 <a:latin typeface="Microsoft YaHei"/>
               </a:rPr>
-              <a:t>寓言</a:t>
-            </a:r>
-          </a:p>
-        </p:txBody>
-      </p:sp>
-      <p:sp>
-        <p:nvSpPr>
-          <p:cNvPr id="12" name="TextBox 11"/>
+              <a:t>1</a:t>
+            </a:r>
+          </a:p>
+        </p:txBody>
+      </p:sp>
+      <p:sp>
+        <p:nvSpPr>
+          <p:cNvPr id="13" name="TextBox 12"/>
           <p:cNvSpPr txBox="1"/>
           <p:nvPr/>
         </p:nvSpPr>
         <p:spPr>
           <a:xfrm>
-            <a:off x="3749039" y="1920240"/>
-            <a:ext cx="7132320" cy="685800"/>
+            <a:off x="2758744" y="1810512"/>
+            <a:ext cx="7772400" cy="502920"/>
           </a:xfrm>
           <a:prstGeom prst="rect">
             <a:avLst/>
@@ -3804,27 +3846,70 @@
               </a:spcAft>
             </a:pPr>
             <a:r>
-              <a:rPr sz="2200" b="0">
+              <a:rPr sz="2400" b="0">
                 <a:solidFill>
                   <a:srgbClr val="5A461E"/>
                 </a:solidFill>
                 <a:latin typeface="Microsoft YaHei"/>
               </a:rPr>
-              <a:t>短小故事，寄寓深刻道理，多运用拟人手法</a:t>
-            </a:r>
-          </a:p>
-        </p:txBody>
-      </p:sp>
-      <p:sp>
-        <p:nvSpPr>
-          <p:cNvPr id="13" name="TextBox 12"/>
+              <a:t>归纳寓言文体特点，理解各则寓意</a:t>
+            </a:r>
+          </a:p>
+        </p:txBody>
+      </p:sp>
+      <p:sp>
+        <p:nvSpPr>
+          <p:cNvPr id="14" name="Oval 13"/>
+          <p:cNvSpPr/>
+          <p:nvPr/>
+        </p:nvSpPr>
+        <p:spPr>
+          <a:xfrm>
+            <a:off x="2255824" y="2395728"/>
+            <a:ext cx="384048" cy="384048"/>
+          </a:xfrm>
+          <a:prstGeom prst="ellipse">
+            <a:avLst/>
+          </a:prstGeom>
+          <a:solidFill>
+            <a:srgbClr val="C89628"/>
+          </a:solidFill>
+          <a:ln>
+            <a:noFill/>
+          </a:ln>
+        </p:spPr>
+        <p:style>
+          <a:lnRef idx="1">
+            <a:schemeClr val="accent1"/>
+          </a:lnRef>
+          <a:fillRef idx="3">
+            <a:schemeClr val="accent1"/>
+          </a:fillRef>
+          <a:effectRef idx="2">
+            <a:schemeClr val="accent1"/>
+          </a:effectRef>
+          <a:fontRef idx="minor">
+            <a:schemeClr val="lt1"/>
+          </a:fontRef>
+        </p:style>
+        <p:txBody>
+          <a:bodyPr rtlCol="0" anchor="ctr"/>
+          <a:lstStyle/>
+          <a:p>
+            <a:pPr algn="ctr"/>
+          </a:p>
+        </p:txBody>
+      </p:sp>
+      <p:sp>
+        <p:nvSpPr>
+          <p:cNvPr id="15" name="TextBox 14"/>
           <p:cNvSpPr txBox="1"/>
           <p:nvPr/>
         </p:nvSpPr>
         <p:spPr>
           <a:xfrm>
-            <a:off x="1463040" y="2670048"/>
-            <a:ext cx="2103120" cy="502920"/>
+            <a:off x="2255824" y="2414016"/>
+            <a:ext cx="384048" cy="365760"/>
           </a:xfrm>
           <a:prstGeom prst="rect">
             <a:avLst/>
@@ -3837,33 +3922,33 @@
           </a:bodyPr>
           <a:lstStyle/>
           <a:p>
-            <a:pPr algn="r">
+            <a:pPr algn="ctr">
               <a:spcAft>
                 <a:spcPts val="1000"/>
               </a:spcAft>
             </a:pPr>
             <a:r>
-              <a:rPr sz="2200" b="1">
+              <a:rPr sz="1600" b="1">
                 <a:solidFill>
-                  <a:srgbClr val="C89628"/>
+                  <a:srgbClr val="FFFFFF"/>
                 </a:solidFill>
                 <a:latin typeface="Microsoft YaHei"/>
               </a:rPr>
-              <a:t>特点</a:t>
-            </a:r>
-          </a:p>
-        </p:txBody>
-      </p:sp>
-      <p:sp>
-        <p:nvSpPr>
-          <p:cNvPr id="14" name="TextBox 13"/>
+              <a:t>2</a:t>
+            </a:r>
+          </a:p>
+        </p:txBody>
+      </p:sp>
+      <p:sp>
+        <p:nvSpPr>
+          <p:cNvPr id="16" name="TextBox 15"/>
           <p:cNvSpPr txBox="1"/>
           <p:nvPr/>
         </p:nvSpPr>
         <p:spPr>
           <a:xfrm>
-            <a:off x="3749039" y="2670048"/>
-            <a:ext cx="7132320" cy="685800"/>
+            <a:off x="2758744" y="2377440"/>
+            <a:ext cx="7772400" cy="502920"/>
           </a:xfrm>
           <a:prstGeom prst="rect">
             <a:avLst/>
@@ -3882,27 +3967,70 @@
               </a:spcAft>
             </a:pPr>
             <a:r>
-              <a:rPr sz="2200" b="0">
+              <a:rPr sz="2400" b="0">
                 <a:solidFill>
                   <a:srgbClr val="5A461E"/>
                 </a:solidFill>
                 <a:latin typeface="Microsoft YaHei"/>
               </a:rPr>
-              <a:t>情节简短、人物典型、寓意明确、多讽刺或警醒</a:t>
-            </a:r>
-          </a:p>
-        </p:txBody>
-      </p:sp>
-      <p:sp>
-        <p:nvSpPr>
-          <p:cNvPr id="15" name="TextBox 14"/>
+              <a:t>借助注释疏通文言，积累重点词语</a:t>
+            </a:r>
+          </a:p>
+        </p:txBody>
+      </p:sp>
+      <p:sp>
+        <p:nvSpPr>
+          <p:cNvPr id="17" name="Oval 16"/>
+          <p:cNvSpPr/>
+          <p:nvPr/>
+        </p:nvSpPr>
+        <p:spPr>
+          <a:xfrm>
+            <a:off x="2255824" y="2962656"/>
+            <a:ext cx="384048" cy="384048"/>
+          </a:xfrm>
+          <a:prstGeom prst="ellipse">
+            <a:avLst/>
+          </a:prstGeom>
+          <a:solidFill>
+            <a:srgbClr val="C89628"/>
+          </a:solidFill>
+          <a:ln>
+            <a:noFill/>
+          </a:ln>
+        </p:spPr>
+        <p:style>
+          <a:lnRef idx="1">
+            <a:schemeClr val="accent1"/>
+          </a:lnRef>
+          <a:fillRef idx="3">
+            <a:schemeClr val="accent1"/>
+          </a:fillRef>
+          <a:effectRef idx="2">
+            <a:schemeClr val="accent1"/>
+          </a:effectRef>
+          <a:fontRef idx="minor">
+            <a:schemeClr val="lt1"/>
+          </a:fontRef>
+        </p:style>
+        <p:txBody>
+          <a:bodyPr rtlCol="0" anchor="ctr"/>
+          <a:lstStyle/>
+          <a:p>
+            <a:pPr algn="ctr"/>
+          </a:p>
+        </p:txBody>
+      </p:sp>
+      <p:sp>
+        <p:nvSpPr>
+          <p:cNvPr id="18" name="TextBox 17"/>
           <p:cNvSpPr txBox="1"/>
           <p:nvPr/>
         </p:nvSpPr>
         <p:spPr>
           <a:xfrm>
-            <a:off x="1463040" y="3419856"/>
-            <a:ext cx="2103120" cy="502920"/>
+            <a:off x="2255824" y="2980944"/>
+            <a:ext cx="384048" cy="365760"/>
           </a:xfrm>
           <a:prstGeom prst="rect">
             <a:avLst/>
@@ -3915,33 +4043,33 @@
           </a:bodyPr>
           <a:lstStyle/>
           <a:p>
-            <a:pPr algn="r">
+            <a:pPr algn="ctr">
               <a:spcAft>
                 <a:spcPts val="1000"/>
               </a:spcAft>
             </a:pPr>
             <a:r>
-              <a:rPr sz="2200" b="1">
+              <a:rPr sz="1600" b="1">
                 <a:solidFill>
-                  <a:srgbClr val="C89628"/>
+                  <a:srgbClr val="FFFFFF"/>
                 </a:solidFill>
                 <a:latin typeface="Microsoft YaHei"/>
               </a:rPr>
-              <a:t>四则出处</a:t>
-            </a:r>
-          </a:p>
-        </p:txBody>
-      </p:sp>
-      <p:sp>
-        <p:nvSpPr>
-          <p:cNvPr id="16" name="TextBox 15"/>
+              <a:t>3</a:t>
+            </a:r>
+          </a:p>
+        </p:txBody>
+      </p:sp>
+      <p:sp>
+        <p:nvSpPr>
+          <p:cNvPr id="19" name="TextBox 18"/>
           <p:cNvSpPr txBox="1"/>
           <p:nvPr/>
         </p:nvSpPr>
         <p:spPr>
           <a:xfrm>
-            <a:off x="3749039" y="3419856"/>
-            <a:ext cx="7132320" cy="685800"/>
+            <a:off x="2758744" y="2944368"/>
+            <a:ext cx="7772400" cy="502920"/>
           </a:xfrm>
           <a:prstGeom prst="rect">
             <a:avLst/>
@@ -3960,52 +4088,13 @@
               </a:spcAft>
             </a:pPr>
             <a:r>
-              <a:rPr sz="2200" b="0">
+              <a:rPr sz="2400" b="0">
                 <a:solidFill>
                   <a:srgbClr val="5A461E"/>
                 </a:solidFill>
                 <a:latin typeface="Microsoft YaHei"/>
               </a:rPr>
-              <a:t>《赫耳墨斯和雕像者》《蚊子和狮子》出自《伊索寓言》</a:t>
-            </a:r>
-          </a:p>
-        </p:txBody>
-      </p:sp>
-      <p:sp>
-        <p:nvSpPr>
-          <p:cNvPr id="17" name="TextBox 16"/>
-          <p:cNvSpPr txBox="1"/>
-          <p:nvPr/>
-        </p:nvSpPr>
-        <p:spPr>
-          <a:xfrm>
-            <a:off x="1463040" y="4169664"/>
-            <a:ext cx="9418320" cy="685800"/>
-          </a:xfrm>
-          <a:prstGeom prst="rect">
-            <a:avLst/>
-          </a:prstGeom>
-          <a:noFill/>
-        </p:spPr>
-        <p:txBody>
-          <a:bodyPr wrap="none">
-            <a:spAutoFit/>
-          </a:bodyPr>
-          <a:lstStyle/>
-          <a:p>
-            <a:pPr algn="l">
-              <a:spcAft>
-                <a:spcPts val="1000"/>
-              </a:spcAft>
-            </a:pPr>
-            <a:r>
-              <a:rPr sz="2200" b="0">
-                <a:solidFill>
-                  <a:srgbClr val="5A461E"/>
-                </a:solidFill>
-                <a:latin typeface="Microsoft YaHei"/>
-              </a:rPr>
-              <a:t>《穿井得一人》《杞人忧天》出自《吕氏春秋》</a:t>
+              <a:t>分析寓意与情节设计，尝试寓言新编</a:t>
             </a:r>
           </a:p>
         </p:txBody>
@@ -4151,7 +4240,7 @@
         </p:nvSpPr>
         <p:spPr>
           <a:xfrm>
-            <a:off x="4953304" y="502920"/>
+            <a:off x="4953304" y="1005840"/>
             <a:ext cx="2286000" cy="411480"/>
           </a:xfrm>
           <a:prstGeom prst="roundRect">
@@ -4194,7 +4283,7 @@
         </p:nvSpPr>
         <p:spPr>
           <a:xfrm>
-            <a:off x="4953304" y="521208"/>
+            <a:off x="4953304" y="1024128"/>
             <a:ext cx="2286000" cy="384048"/>
           </a:xfrm>
           <a:prstGeom prst="rect">
@@ -4220,7 +4309,7 @@
                 </a:solidFill>
                 <a:latin typeface="Microsoft YaHei"/>
               </a:rPr>
-              <a:t>寓意笔记</a:t>
+              <a:t>想一想</a:t>
             </a:r>
           </a:p>
         </p:txBody>
@@ -4233,7 +4322,7 @@
         </p:nvSpPr>
         <p:spPr>
           <a:xfrm>
-            <a:off x="1371600" y="1051560"/>
+            <a:off x="1371600" y="1600200"/>
             <a:ext cx="9418320" cy="822960"/>
           </a:xfrm>
           <a:prstGeom prst="rect">
@@ -4253,13 +4342,13 @@
               </a:spcAft>
             </a:pPr>
             <a:r>
-              <a:rPr sz="3600" b="1">
+              <a:rPr sz="3200" b="1">
                 <a:solidFill>
                   <a:srgbClr val="C89628"/>
                 </a:solidFill>
                 <a:latin typeface="Microsoft YaHei"/>
               </a:rPr>
-              <a:t>四则寓意</a:t>
+              <a:t>寓言是「穿着外套的真理」</a:t>
             </a:r>
           </a:p>
         </p:txBody>
@@ -4272,7 +4361,7 @@
         </p:nvSpPr>
         <p:spPr>
           <a:xfrm>
-            <a:off x="3200400" y="1691640"/>
+            <a:off x="3200400" y="4389120"/>
             <a:ext cx="5760720" cy="27432"/>
           </a:xfrm>
           <a:prstGeom prst="rect">
@@ -4309,59 +4398,14 @@
       </p:sp>
       <p:sp>
         <p:nvSpPr>
-          <p:cNvPr id="10" name="Rounded Rectangle 9"/>
-          <p:cNvSpPr/>
-          <p:nvPr/>
-        </p:nvSpPr>
-        <p:spPr>
-          <a:xfrm>
-            <a:off x="1249984" y="1810512"/>
-            <a:ext cx="9692640" cy="3319272"/>
-          </a:xfrm>
-          <a:prstGeom prst="roundRect">
-            <a:avLst/>
-          </a:prstGeom>
-          <a:solidFill>
-            <a:srgbClr val="FFFCF0"/>
-          </a:solidFill>
-          <a:ln w="19050">
-            <a:solidFill>
-              <a:srgbClr val="F0C864"/>
-            </a:solidFill>
-          </a:ln>
-        </p:spPr>
-        <p:style>
-          <a:lnRef idx="1">
-            <a:schemeClr val="accent1"/>
-          </a:lnRef>
-          <a:fillRef idx="3">
-            <a:schemeClr val="accent1"/>
-          </a:fillRef>
-          <a:effectRef idx="2">
-            <a:schemeClr val="accent1"/>
-          </a:effectRef>
-          <a:fontRef idx="minor">
-            <a:schemeClr val="lt1"/>
-          </a:fontRef>
-        </p:style>
-        <p:txBody>
-          <a:bodyPr rtlCol="0" anchor="ctr"/>
-          <a:lstStyle/>
-          <a:p>
-            <a:pPr algn="ctr"/>
-          </a:p>
-        </p:txBody>
-      </p:sp>
-      <p:sp>
-        <p:nvSpPr>
-          <p:cNvPr id="11" name="TextBox 10"/>
+          <p:cNvPr id="10" name="TextBox 9"/>
           <p:cNvSpPr txBox="1"/>
           <p:nvPr/>
         </p:nvSpPr>
         <p:spPr>
           <a:xfrm>
-            <a:off x="1463040" y="1920240"/>
-            <a:ext cx="2103120" cy="502920"/>
+            <a:off x="1828800" y="4663440"/>
+            <a:ext cx="8503920" cy="914400"/>
           </a:xfrm>
           <a:prstGeom prst="rect">
             <a:avLst/>
@@ -4374,292 +4418,19 @@
           </a:bodyPr>
           <a:lstStyle/>
           <a:p>
-            <a:pPr algn="r">
+            <a:pPr algn="ctr">
               <a:spcAft>
                 <a:spcPts val="1000"/>
               </a:spcAft>
             </a:pPr>
             <a:r>
-              <a:rPr sz="2200" b="1">
+              <a:rPr sz="2200" b="0">
                 <a:solidFill>
                   <a:srgbClr val="C89628"/>
                 </a:solidFill>
                 <a:latin typeface="Microsoft YaHei"/>
               </a:rPr>
-              <a:t>赫耳墨斯</a:t>
-            </a:r>
-          </a:p>
-        </p:txBody>
-      </p:sp>
-      <p:sp>
-        <p:nvSpPr>
-          <p:cNvPr id="12" name="TextBox 11"/>
-          <p:cNvSpPr txBox="1"/>
-          <p:nvPr/>
-        </p:nvSpPr>
-        <p:spPr>
-          <a:xfrm>
-            <a:off x="3749039" y="1920240"/>
-            <a:ext cx="7132320" cy="685800"/>
-          </a:xfrm>
-          <a:prstGeom prst="rect">
-            <a:avLst/>
-          </a:prstGeom>
-          <a:noFill/>
-        </p:spPr>
-        <p:txBody>
-          <a:bodyPr wrap="none">
-            <a:spAutoFit/>
-          </a:bodyPr>
-          <a:lstStyle/>
-          <a:p>
-            <a:pPr algn="l">
-              <a:spcAft>
-                <a:spcPts val="1000"/>
-              </a:spcAft>
-            </a:pPr>
-            <a:r>
-              <a:rPr sz="2200" b="0">
-                <a:solidFill>
-                  <a:srgbClr val="5A461E"/>
-                </a:solidFill>
-                <a:latin typeface="Microsoft YaHei"/>
-              </a:rPr>
-              <a:t>讽刺自高自大、妄自尊重的人</a:t>
-            </a:r>
-          </a:p>
-        </p:txBody>
-      </p:sp>
-      <p:sp>
-        <p:nvSpPr>
-          <p:cNvPr id="13" name="TextBox 12"/>
-          <p:cNvSpPr txBox="1"/>
-          <p:nvPr/>
-        </p:nvSpPr>
-        <p:spPr>
-          <a:xfrm>
-            <a:off x="1463040" y="2670048"/>
-            <a:ext cx="2103120" cy="502920"/>
-          </a:xfrm>
-          <a:prstGeom prst="rect">
-            <a:avLst/>
-          </a:prstGeom>
-          <a:noFill/>
-        </p:spPr>
-        <p:txBody>
-          <a:bodyPr wrap="none">
-            <a:spAutoFit/>
-          </a:bodyPr>
-          <a:lstStyle/>
-          <a:p>
-            <a:pPr algn="r">
-              <a:spcAft>
-                <a:spcPts val="1000"/>
-              </a:spcAft>
-            </a:pPr>
-            <a:r>
-              <a:rPr sz="2200" b="1">
-                <a:solidFill>
-                  <a:srgbClr val="C89628"/>
-                </a:solidFill>
-                <a:latin typeface="Microsoft YaHei"/>
-              </a:rPr>
-              <a:t>蚊子和狮子</a:t>
-            </a:r>
-          </a:p>
-        </p:txBody>
-      </p:sp>
-      <p:sp>
-        <p:nvSpPr>
-          <p:cNvPr id="14" name="TextBox 13"/>
-          <p:cNvSpPr txBox="1"/>
-          <p:nvPr/>
-        </p:nvSpPr>
-        <p:spPr>
-          <a:xfrm>
-            <a:off x="3749039" y="2670048"/>
-            <a:ext cx="7132320" cy="685800"/>
-          </a:xfrm>
-          <a:prstGeom prst="rect">
-            <a:avLst/>
-          </a:prstGeom>
-          <a:noFill/>
-        </p:spPr>
-        <p:txBody>
-          <a:bodyPr wrap="none">
-            <a:spAutoFit/>
-          </a:bodyPr>
-          <a:lstStyle/>
-          <a:p>
-            <a:pPr algn="l">
-              <a:spcAft>
-                <a:spcPts val="1000"/>
-              </a:spcAft>
-            </a:pPr>
-            <a:r>
-              <a:rPr sz="2200" b="0">
-                <a:solidFill>
-                  <a:srgbClr val="5A461E"/>
-                </a:solidFill>
-                <a:latin typeface="Microsoft YaHei"/>
-              </a:rPr>
-              <a:t>再小的个体也有长处，骄兵必败</a:t>
-            </a:r>
-          </a:p>
-        </p:txBody>
-      </p:sp>
-      <p:sp>
-        <p:nvSpPr>
-          <p:cNvPr id="15" name="TextBox 14"/>
-          <p:cNvSpPr txBox="1"/>
-          <p:nvPr/>
-        </p:nvSpPr>
-        <p:spPr>
-          <a:xfrm>
-            <a:off x="1463040" y="3419856"/>
-            <a:ext cx="2103120" cy="502920"/>
-          </a:xfrm>
-          <a:prstGeom prst="rect">
-            <a:avLst/>
-          </a:prstGeom>
-          <a:noFill/>
-        </p:spPr>
-        <p:txBody>
-          <a:bodyPr wrap="none">
-            <a:spAutoFit/>
-          </a:bodyPr>
-          <a:lstStyle/>
-          <a:p>
-            <a:pPr algn="r">
-              <a:spcAft>
-                <a:spcPts val="1000"/>
-              </a:spcAft>
-            </a:pPr>
-            <a:r>
-              <a:rPr sz="2200" b="1">
-                <a:solidFill>
-                  <a:srgbClr val="C89628"/>
-                </a:solidFill>
-                <a:latin typeface="Microsoft YaHei"/>
-              </a:rPr>
-              <a:t>穿井得一人</a:t>
-            </a:r>
-          </a:p>
-        </p:txBody>
-      </p:sp>
-      <p:sp>
-        <p:nvSpPr>
-          <p:cNvPr id="16" name="TextBox 15"/>
-          <p:cNvSpPr txBox="1"/>
-          <p:nvPr/>
-        </p:nvSpPr>
-        <p:spPr>
-          <a:xfrm>
-            <a:off x="3749039" y="3419856"/>
-            <a:ext cx="7132320" cy="685800"/>
-          </a:xfrm>
-          <a:prstGeom prst="rect">
-            <a:avLst/>
-          </a:prstGeom>
-          <a:noFill/>
-        </p:spPr>
-        <p:txBody>
-          <a:bodyPr wrap="none">
-            <a:spAutoFit/>
-          </a:bodyPr>
-          <a:lstStyle/>
-          <a:p>
-            <a:pPr algn="l">
-              <a:spcAft>
-                <a:spcPts val="1000"/>
-              </a:spcAft>
-            </a:pPr>
-            <a:r>
-              <a:rPr sz="2200" b="0">
-                <a:solidFill>
-                  <a:srgbClr val="5A461E"/>
-                </a:solidFill>
-                <a:latin typeface="Microsoft YaHei"/>
-              </a:rPr>
-              <a:t>以讹传讹，调查求证才能辨明真相</a:t>
-            </a:r>
-          </a:p>
-        </p:txBody>
-      </p:sp>
-      <p:sp>
-        <p:nvSpPr>
-          <p:cNvPr id="17" name="TextBox 16"/>
-          <p:cNvSpPr txBox="1"/>
-          <p:nvPr/>
-        </p:nvSpPr>
-        <p:spPr>
-          <a:xfrm>
-            <a:off x="1463040" y="4169664"/>
-            <a:ext cx="2103120" cy="502920"/>
-          </a:xfrm>
-          <a:prstGeom prst="rect">
-            <a:avLst/>
-          </a:prstGeom>
-          <a:noFill/>
-        </p:spPr>
-        <p:txBody>
-          <a:bodyPr wrap="none">
-            <a:spAutoFit/>
-          </a:bodyPr>
-          <a:lstStyle/>
-          <a:p>
-            <a:pPr algn="r">
-              <a:spcAft>
-                <a:spcPts val="1000"/>
-              </a:spcAft>
-            </a:pPr>
-            <a:r>
-              <a:rPr sz="2200" b="1">
-                <a:solidFill>
-                  <a:srgbClr val="C89628"/>
-                </a:solidFill>
-                <a:latin typeface="Microsoft YaHei"/>
-              </a:rPr>
-              <a:t>杞人忧天</a:t>
-            </a:r>
-          </a:p>
-        </p:txBody>
-      </p:sp>
-      <p:sp>
-        <p:nvSpPr>
-          <p:cNvPr id="18" name="TextBox 17"/>
-          <p:cNvSpPr txBox="1"/>
-          <p:nvPr/>
-        </p:nvSpPr>
-        <p:spPr>
-          <a:xfrm>
-            <a:off x="3749039" y="4169664"/>
-            <a:ext cx="7132320" cy="685800"/>
-          </a:xfrm>
-          <a:prstGeom prst="rect">
-            <a:avLst/>
-          </a:prstGeom>
-          <a:noFill/>
-        </p:spPr>
-        <p:txBody>
-          <a:bodyPr wrap="none">
-            <a:spAutoFit/>
-          </a:bodyPr>
-          <a:lstStyle/>
-          <a:p>
-            <a:pPr algn="l">
-              <a:spcAft>
-                <a:spcPts val="1000"/>
-              </a:spcAft>
-            </a:pPr>
-            <a:r>
-              <a:rPr sz="2200" b="0">
-                <a:solidFill>
-                  <a:srgbClr val="5A461E"/>
-                </a:solidFill>
-                <a:latin typeface="Microsoft YaHei"/>
-              </a:rPr>
-              <a:t>讽刺不必要的担忧（也可读出忧患意识）</a:t>
+              <a:t>伊索、吕不韦、列子……跨越时空，智慧相通</a:t>
             </a:r>
           </a:p>
         </p:txBody>
@@ -4874,7 +4645,7 @@
                 </a:solidFill>
                 <a:latin typeface="Microsoft YaHei"/>
               </a:rPr>
-              <a:t>文言笔记</a:t>
+              <a:t>初识寓言</a:t>
             </a:r>
           </a:p>
         </p:txBody>
@@ -4887,7 +4658,7 @@
         </p:nvSpPr>
         <p:spPr>
           <a:xfrm>
-            <a:off x="1371600" y="1051560"/>
+            <a:off x="1371600" y="960120"/>
             <a:ext cx="9418320" cy="822960"/>
           </a:xfrm>
           <a:prstGeom prst="rect">
@@ -4913,7 +4684,7 @@
                 </a:solidFill>
                 <a:latin typeface="Microsoft YaHei"/>
               </a:rPr>
-              <a:t>文言词语</a:t>
+              <a:t>学习任务一</a:t>
             </a:r>
           </a:p>
         </p:txBody>
@@ -4926,7 +4697,7 @@
         </p:nvSpPr>
         <p:spPr>
           <a:xfrm>
-            <a:off x="3200400" y="1691640"/>
+            <a:off x="3200400" y="1600200"/>
             <a:ext cx="5760720" cy="27432"/>
           </a:xfrm>
           <a:prstGeom prst="rect">
@@ -4969,8 +4740,8 @@
         </p:nvSpPr>
         <p:spPr>
           <a:xfrm>
-            <a:off x="1249984" y="1810512"/>
-            <a:ext cx="9692640" cy="3319272"/>
+            <a:off x="1295704" y="1645920"/>
+            <a:ext cx="9601200" cy="2240280"/>
           </a:xfrm>
           <a:prstGeom prst="roundRect">
             <a:avLst/>
@@ -5008,14 +4779,57 @@
       </p:sp>
       <p:sp>
         <p:nvSpPr>
-          <p:cNvPr id="11" name="TextBox 10"/>
+          <p:cNvPr id="11" name="Oval 10"/>
+          <p:cNvSpPr/>
+          <p:nvPr/>
+        </p:nvSpPr>
+        <p:spPr>
+          <a:xfrm>
+            <a:off x="2255824" y="1828800"/>
+            <a:ext cx="384048" cy="384048"/>
+          </a:xfrm>
+          <a:prstGeom prst="ellipse">
+            <a:avLst/>
+          </a:prstGeom>
+          <a:solidFill>
+            <a:srgbClr val="C89628"/>
+          </a:solidFill>
+          <a:ln>
+            <a:noFill/>
+          </a:ln>
+        </p:spPr>
+        <p:style>
+          <a:lnRef idx="1">
+            <a:schemeClr val="accent1"/>
+          </a:lnRef>
+          <a:fillRef idx="3">
+            <a:schemeClr val="accent1"/>
+          </a:fillRef>
+          <a:effectRef idx="2">
+            <a:schemeClr val="accent1"/>
+          </a:effectRef>
+          <a:fontRef idx="minor">
+            <a:schemeClr val="lt1"/>
+          </a:fontRef>
+        </p:style>
+        <p:txBody>
+          <a:bodyPr rtlCol="0" anchor="ctr"/>
+          <a:lstStyle/>
+          <a:p>
+            <a:pPr algn="ctr"/>
+          </a:p>
+        </p:txBody>
+      </p:sp>
+      <p:sp>
+        <p:nvSpPr>
+          <p:cNvPr id="12" name="TextBox 11"/>
           <p:cNvSpPr txBox="1"/>
           <p:nvPr/>
         </p:nvSpPr>
         <p:spPr>
           <a:xfrm>
-            <a:off x="1463040" y="1920240"/>
-            <a:ext cx="2103120" cy="502920"/>
+            <a:off x="2255824" y="1847088"/>
+            <a:ext cx="384048" cy="365760"/>
           </a:xfrm>
           <a:prstGeom prst="rect">
             <a:avLst/>
@@ -5028,33 +4842,33 @@
           </a:bodyPr>
           <a:lstStyle/>
           <a:p>
-            <a:pPr algn="r">
+            <a:pPr algn="ctr">
               <a:spcAft>
                 <a:spcPts val="1000"/>
               </a:spcAft>
             </a:pPr>
             <a:r>
-              <a:rPr sz="2200" b="1">
+              <a:rPr sz="1600" b="1">
                 <a:solidFill>
-                  <a:srgbClr val="C89628"/>
+                  <a:srgbClr val="FFFFFF"/>
                 </a:solidFill>
                 <a:latin typeface="Microsoft YaHei"/>
               </a:rPr>
-              <a:t>闻</a:t>
-            </a:r>
-          </a:p>
-        </p:txBody>
-      </p:sp>
-      <p:sp>
-        <p:nvSpPr>
-          <p:cNvPr id="12" name="TextBox 11"/>
+              <a:t>1</a:t>
+            </a:r>
+          </a:p>
+        </p:txBody>
+      </p:sp>
+      <p:sp>
+        <p:nvSpPr>
+          <p:cNvPr id="13" name="TextBox 12"/>
           <p:cNvSpPr txBox="1"/>
           <p:nvPr/>
         </p:nvSpPr>
         <p:spPr>
           <a:xfrm>
-            <a:off x="3749039" y="1920240"/>
-            <a:ext cx="7132320" cy="685800"/>
+            <a:off x="2758744" y="1810512"/>
+            <a:ext cx="7772400" cy="502920"/>
           </a:xfrm>
           <a:prstGeom prst="rect">
             <a:avLst/>
@@ -5073,27 +4887,70 @@
               </a:spcAft>
             </a:pPr>
             <a:r>
-              <a:rPr sz="2200" b="0">
+              <a:rPr sz="2400" b="0">
                 <a:solidFill>
                   <a:srgbClr val="5A461E"/>
                 </a:solidFill>
                 <a:latin typeface="Microsoft YaHei"/>
               </a:rPr>
-              <a:t>听说</a:t>
-            </a:r>
-          </a:p>
-        </p:txBody>
-      </p:sp>
-      <p:sp>
-        <p:nvSpPr>
-          <p:cNvPr id="13" name="TextBox 12"/>
+              <a:t>默读四则寓言，完成「寓言档案卡」</a:t>
+            </a:r>
+          </a:p>
+        </p:txBody>
+      </p:sp>
+      <p:sp>
+        <p:nvSpPr>
+          <p:cNvPr id="14" name="Oval 13"/>
+          <p:cNvSpPr/>
+          <p:nvPr/>
+        </p:nvSpPr>
+        <p:spPr>
+          <a:xfrm>
+            <a:off x="2255824" y="2395728"/>
+            <a:ext cx="384048" cy="384048"/>
+          </a:xfrm>
+          <a:prstGeom prst="ellipse">
+            <a:avLst/>
+          </a:prstGeom>
+          <a:solidFill>
+            <a:srgbClr val="C89628"/>
+          </a:solidFill>
+          <a:ln>
+            <a:noFill/>
+          </a:ln>
+        </p:spPr>
+        <p:style>
+          <a:lnRef idx="1">
+            <a:schemeClr val="accent1"/>
+          </a:lnRef>
+          <a:fillRef idx="3">
+            <a:schemeClr val="accent1"/>
+          </a:fillRef>
+          <a:effectRef idx="2">
+            <a:schemeClr val="accent1"/>
+          </a:effectRef>
+          <a:fontRef idx="minor">
+            <a:schemeClr val="lt1"/>
+          </a:fontRef>
+        </p:style>
+        <p:txBody>
+          <a:bodyPr rtlCol="0" anchor="ctr"/>
+          <a:lstStyle/>
+          <a:p>
+            <a:pPr algn="ctr"/>
+          </a:p>
+        </p:txBody>
+      </p:sp>
+      <p:sp>
+        <p:nvSpPr>
+          <p:cNvPr id="15" name="TextBox 14"/>
           <p:cNvSpPr txBox="1"/>
           <p:nvPr/>
         </p:nvSpPr>
         <p:spPr>
           <a:xfrm>
-            <a:off x="1463040" y="2670048"/>
-            <a:ext cx="2103120" cy="502920"/>
+            <a:off x="2255824" y="2414016"/>
+            <a:ext cx="384048" cy="365760"/>
           </a:xfrm>
           <a:prstGeom prst="rect">
             <a:avLst/>
@@ -5106,33 +4963,33 @@
           </a:bodyPr>
           <a:lstStyle/>
           <a:p>
-            <a:pPr algn="r">
+            <a:pPr algn="ctr">
               <a:spcAft>
                 <a:spcPts val="1000"/>
               </a:spcAft>
             </a:pPr>
             <a:r>
-              <a:rPr sz="2200" b="1">
+              <a:rPr sz="1600" b="1">
                 <a:solidFill>
-                  <a:srgbClr val="C89628"/>
+                  <a:srgbClr val="FFFFFF"/>
                 </a:solidFill>
                 <a:latin typeface="Microsoft YaHei"/>
               </a:rPr>
-              <a:t>传</a:t>
-            </a:r>
-          </a:p>
-        </p:txBody>
-      </p:sp>
-      <p:sp>
-        <p:nvSpPr>
-          <p:cNvPr id="14" name="TextBox 13"/>
+              <a:t>2</a:t>
+            </a:r>
+          </a:p>
+        </p:txBody>
+      </p:sp>
+      <p:sp>
+        <p:nvSpPr>
+          <p:cNvPr id="16" name="TextBox 15"/>
           <p:cNvSpPr txBox="1"/>
           <p:nvPr/>
         </p:nvSpPr>
         <p:spPr>
           <a:xfrm>
-            <a:off x="3749039" y="2670048"/>
-            <a:ext cx="7132320" cy="685800"/>
+            <a:off x="2758744" y="2377440"/>
+            <a:ext cx="7772400" cy="502920"/>
           </a:xfrm>
           <a:prstGeom prst="rect">
             <a:avLst/>
@@ -5151,27 +5008,70 @@
               </a:spcAft>
             </a:pPr>
             <a:r>
-              <a:rPr sz="2200" b="0">
+              <a:rPr sz="2400" b="0">
                 <a:solidFill>
                   <a:srgbClr val="5A461E"/>
                 </a:solidFill>
                 <a:latin typeface="Microsoft YaHei"/>
               </a:rPr>
-              <a:t>传播、流传</a:t>
-            </a:r>
-          </a:p>
-        </p:txBody>
-      </p:sp>
-      <p:sp>
-        <p:nvSpPr>
-          <p:cNvPr id="15" name="TextBox 14"/>
+              <a:t>讨论：蚊子平静离开，寓意会发生什么变化？</a:t>
+            </a:r>
+          </a:p>
+        </p:txBody>
+      </p:sp>
+      <p:sp>
+        <p:nvSpPr>
+          <p:cNvPr id="17" name="Oval 16"/>
+          <p:cNvSpPr/>
+          <p:nvPr/>
+        </p:nvSpPr>
+        <p:spPr>
+          <a:xfrm>
+            <a:off x="2255824" y="2962656"/>
+            <a:ext cx="384048" cy="384048"/>
+          </a:xfrm>
+          <a:prstGeom prst="ellipse">
+            <a:avLst/>
+          </a:prstGeom>
+          <a:solidFill>
+            <a:srgbClr val="C89628"/>
+          </a:solidFill>
+          <a:ln>
+            <a:noFill/>
+          </a:ln>
+        </p:spPr>
+        <p:style>
+          <a:lnRef idx="1">
+            <a:schemeClr val="accent1"/>
+          </a:lnRef>
+          <a:fillRef idx="3">
+            <a:schemeClr val="accent1"/>
+          </a:fillRef>
+          <a:effectRef idx="2">
+            <a:schemeClr val="accent1"/>
+          </a:effectRef>
+          <a:fontRef idx="minor">
+            <a:schemeClr val="lt1"/>
+          </a:fontRef>
+        </p:style>
+        <p:txBody>
+          <a:bodyPr rtlCol="0" anchor="ctr"/>
+          <a:lstStyle/>
+          <a:p>
+            <a:pPr algn="ctr"/>
+          </a:p>
+        </p:txBody>
+      </p:sp>
+      <p:sp>
+        <p:nvSpPr>
+          <p:cNvPr id="18" name="TextBox 17"/>
           <p:cNvSpPr txBox="1"/>
           <p:nvPr/>
         </p:nvSpPr>
         <p:spPr>
           <a:xfrm>
-            <a:off x="1463040" y="3419856"/>
-            <a:ext cx="2103120" cy="502920"/>
+            <a:off x="2255824" y="2980944"/>
+            <a:ext cx="384048" cy="365760"/>
           </a:xfrm>
           <a:prstGeom prst="rect">
             <a:avLst/>
@@ -5184,33 +5084,33 @@
           </a:bodyPr>
           <a:lstStyle/>
           <a:p>
-            <a:pPr algn="r">
+            <a:pPr algn="ctr">
               <a:spcAft>
                 <a:spcPts val="1000"/>
               </a:spcAft>
             </a:pPr>
             <a:r>
-              <a:rPr sz="2200" b="1">
+              <a:rPr sz="1600" b="1">
                 <a:solidFill>
-                  <a:srgbClr val="C89628"/>
+                  <a:srgbClr val="FFFFFF"/>
                 </a:solidFill>
                 <a:latin typeface="Microsoft YaHei"/>
               </a:rPr>
-              <a:t>道</a:t>
-            </a:r>
-          </a:p>
-        </p:txBody>
-      </p:sp>
-      <p:sp>
-        <p:nvSpPr>
-          <p:cNvPr id="16" name="TextBox 15"/>
+              <a:t>3</a:t>
+            </a:r>
+          </a:p>
+        </p:txBody>
+      </p:sp>
+      <p:sp>
+        <p:nvSpPr>
+          <p:cNvPr id="19" name="TextBox 18"/>
           <p:cNvSpPr txBox="1"/>
           <p:nvPr/>
         </p:nvSpPr>
         <p:spPr>
           <a:xfrm>
-            <a:off x="3749039" y="3419856"/>
-            <a:ext cx="7132320" cy="685800"/>
+            <a:off x="2758744" y="2944368"/>
+            <a:ext cx="7772400" cy="502920"/>
           </a:xfrm>
           <a:prstGeom prst="rect">
             <a:avLst/>
@@ -5229,91 +5129,13 @@
               </a:spcAft>
             </a:pPr>
             <a:r>
-              <a:rPr sz="2200" b="0">
+              <a:rPr sz="2400" b="0">
                 <a:solidFill>
                   <a:srgbClr val="5A461E"/>
                 </a:solidFill>
                 <a:latin typeface="Microsoft YaHei"/>
               </a:rPr>
-              <a:t>讲述、说</a:t>
-            </a:r>
-          </a:p>
-        </p:txBody>
-      </p:sp>
-      <p:sp>
-        <p:nvSpPr>
-          <p:cNvPr id="17" name="TextBox 16"/>
-          <p:cNvSpPr txBox="1"/>
-          <p:nvPr/>
-        </p:nvSpPr>
-        <p:spPr>
-          <a:xfrm>
-            <a:off x="1463040" y="4169664"/>
-            <a:ext cx="2103120" cy="502920"/>
-          </a:xfrm>
-          <a:prstGeom prst="rect">
-            <a:avLst/>
-          </a:prstGeom>
-          <a:noFill/>
-        </p:spPr>
-        <p:txBody>
-          <a:bodyPr wrap="none">
-            <a:spAutoFit/>
-          </a:bodyPr>
-          <a:lstStyle/>
-          <a:p>
-            <a:pPr algn="r">
-              <a:spcAft>
-                <a:spcPts val="1000"/>
-              </a:spcAft>
-            </a:pPr>
-            <a:r>
-              <a:rPr sz="2200" b="1">
-                <a:solidFill>
-                  <a:srgbClr val="C89628"/>
-                </a:solidFill>
-                <a:latin typeface="Microsoft YaHei"/>
-              </a:rPr>
-              <a:t>亡</a:t>
-            </a:r>
-          </a:p>
-        </p:txBody>
-      </p:sp>
-      <p:sp>
-        <p:nvSpPr>
-          <p:cNvPr id="18" name="TextBox 17"/>
-          <p:cNvSpPr txBox="1"/>
-          <p:nvPr/>
-        </p:nvSpPr>
-        <p:spPr>
-          <a:xfrm>
-            <a:off x="3749039" y="4169664"/>
-            <a:ext cx="7132320" cy="685800"/>
-          </a:xfrm>
-          <a:prstGeom prst="rect">
-            <a:avLst/>
-          </a:prstGeom>
-          <a:noFill/>
-        </p:spPr>
-        <p:txBody>
-          <a:bodyPr wrap="none">
-            <a:spAutoFit/>
-          </a:bodyPr>
-          <a:lstStyle/>
-          <a:p>
-            <a:pPr algn="l">
-              <a:spcAft>
-                <a:spcPts val="1000"/>
-              </a:spcAft>
-            </a:pPr>
-            <a:r>
-              <a:rPr sz="2200" b="0">
-                <a:solidFill>
-                  <a:srgbClr val="5A461E"/>
-                </a:solidFill>
-                <a:latin typeface="Microsoft YaHei"/>
-              </a:rPr>
-              <a:t>同「无」，没有</a:t>
+              <a:t>归纳寓言文体特点</a:t>
             </a:r>
           </a:p>
         </p:txBody>
@@ -5528,7 +5350,7 @@
                 </a:solidFill>
                 <a:latin typeface="Microsoft YaHei"/>
               </a:rPr>
-              <a:t>文言笔记</a:t>
+              <a:t>深读寓意</a:t>
             </a:r>
           </a:p>
         </p:txBody>
@@ -5541,7 +5363,7 @@
         </p:nvSpPr>
         <p:spPr>
           <a:xfrm>
-            <a:off x="1371600" y="1051560"/>
+            <a:off x="1371600" y="960120"/>
             <a:ext cx="9418320" cy="822960"/>
           </a:xfrm>
           <a:prstGeom prst="rect">
@@ -5567,7 +5389,7 @@
                 </a:solidFill>
                 <a:latin typeface="Microsoft YaHei"/>
               </a:rPr>
-              <a:t>文言翻译</a:t>
+              <a:t>学习任务二</a:t>
             </a:r>
           </a:p>
         </p:txBody>
@@ -5580,7 +5402,7 @@
         </p:nvSpPr>
         <p:spPr>
           <a:xfrm>
-            <a:off x="3200400" y="1691640"/>
+            <a:off x="3200400" y="1600200"/>
             <a:ext cx="5760720" cy="27432"/>
           </a:xfrm>
           <a:prstGeom prst="rect">
@@ -5623,8 +5445,8 @@
         </p:nvSpPr>
         <p:spPr>
           <a:xfrm>
-            <a:off x="1249984" y="1810512"/>
-            <a:ext cx="9692640" cy="3319272"/>
+            <a:off x="1295704" y="1645920"/>
+            <a:ext cx="9601200" cy="2240280"/>
           </a:xfrm>
           <a:prstGeom prst="roundRect">
             <a:avLst/>
@@ -5662,14 +5484,57 @@
       </p:sp>
       <p:sp>
         <p:nvSpPr>
-          <p:cNvPr id="11" name="TextBox 10"/>
+          <p:cNvPr id="11" name="Oval 10"/>
+          <p:cNvSpPr/>
+          <p:nvPr/>
+        </p:nvSpPr>
+        <p:spPr>
+          <a:xfrm>
+            <a:off x="2255824" y="1828800"/>
+            <a:ext cx="384048" cy="384048"/>
+          </a:xfrm>
+          <a:prstGeom prst="ellipse">
+            <a:avLst/>
+          </a:prstGeom>
+          <a:solidFill>
+            <a:srgbClr val="C89628"/>
+          </a:solidFill>
+          <a:ln>
+            <a:noFill/>
+          </a:ln>
+        </p:spPr>
+        <p:style>
+          <a:lnRef idx="1">
+            <a:schemeClr val="accent1"/>
+          </a:lnRef>
+          <a:fillRef idx="3">
+            <a:schemeClr val="accent1"/>
+          </a:fillRef>
+          <a:effectRef idx="2">
+            <a:schemeClr val="accent1"/>
+          </a:effectRef>
+          <a:fontRef idx="minor">
+            <a:schemeClr val="lt1"/>
+          </a:fontRef>
+        </p:style>
+        <p:txBody>
+          <a:bodyPr rtlCol="0" anchor="ctr"/>
+          <a:lstStyle/>
+          <a:p>
+            <a:pPr algn="ctr"/>
+          </a:p>
+        </p:txBody>
+      </p:sp>
+      <p:sp>
+        <p:nvSpPr>
+          <p:cNvPr id="12" name="TextBox 11"/>
           <p:cNvSpPr txBox="1"/>
           <p:nvPr/>
         </p:nvSpPr>
         <p:spPr>
           <a:xfrm>
-            <a:off x="1463040" y="1920240"/>
-            <a:ext cx="2103120" cy="502920"/>
+            <a:off x="2255824" y="1847088"/>
+            <a:ext cx="384048" cy="365760"/>
           </a:xfrm>
           <a:prstGeom prst="rect">
             <a:avLst/>
@@ -5682,33 +5547,33 @@
           </a:bodyPr>
           <a:lstStyle/>
           <a:p>
-            <a:pPr algn="r">
+            <a:pPr algn="ctr">
               <a:spcAft>
                 <a:spcPts val="1000"/>
               </a:spcAft>
             </a:pPr>
             <a:r>
-              <a:rPr sz="2200" b="1">
+              <a:rPr sz="1600" b="1">
                 <a:solidFill>
-                  <a:srgbClr val="C89628"/>
+                  <a:srgbClr val="FFFFFF"/>
                 </a:solidFill>
                 <a:latin typeface="Microsoft YaHei"/>
               </a:rPr>
-              <a:t>只使</a:t>
-            </a:r>
-          </a:p>
-        </p:txBody>
-      </p:sp>
-      <p:sp>
-        <p:nvSpPr>
-          <p:cNvPr id="12" name="TextBox 11"/>
+              <a:t>1</a:t>
+            </a:r>
+          </a:p>
+        </p:txBody>
+      </p:sp>
+      <p:sp>
+        <p:nvSpPr>
+          <p:cNvPr id="13" name="TextBox 12"/>
           <p:cNvSpPr txBox="1"/>
           <p:nvPr/>
         </p:nvSpPr>
         <p:spPr>
           <a:xfrm>
-            <a:off x="3749039" y="1920240"/>
-            <a:ext cx="7132320" cy="685800"/>
+            <a:off x="2758744" y="1810512"/>
+            <a:ext cx="7772400" cy="502920"/>
           </a:xfrm>
           <a:prstGeom prst="rect">
             <a:avLst/>
@@ -5727,27 +5592,70 @@
               </a:spcAft>
             </a:pPr>
             <a:r>
-              <a:rPr sz="2200" b="0">
+              <a:rPr sz="2400" b="0">
                 <a:solidFill>
                   <a:srgbClr val="5A461E"/>
                 </a:solidFill>
                 <a:latin typeface="Microsoft YaHei"/>
               </a:rPr>
-              <a:t>纵使、即使</a:t>
-            </a:r>
-          </a:p>
-        </p:txBody>
-      </p:sp>
-      <p:sp>
-        <p:nvSpPr>
-          <p:cNvPr id="13" name="TextBox 12"/>
+              <a:t>解释加点词：闻、传、道、亡、只使、中伤……</a:t>
+            </a:r>
+          </a:p>
+        </p:txBody>
+      </p:sp>
+      <p:sp>
+        <p:nvSpPr>
+          <p:cNvPr id="14" name="Oval 13"/>
+          <p:cNvSpPr/>
+          <p:nvPr/>
+        </p:nvSpPr>
+        <p:spPr>
+          <a:xfrm>
+            <a:off x="2255824" y="2395728"/>
+            <a:ext cx="384048" cy="384048"/>
+          </a:xfrm>
+          <a:prstGeom prst="ellipse">
+            <a:avLst/>
+          </a:prstGeom>
+          <a:solidFill>
+            <a:srgbClr val="C89628"/>
+          </a:solidFill>
+          <a:ln>
+            <a:noFill/>
+          </a:ln>
+        </p:spPr>
+        <p:style>
+          <a:lnRef idx="1">
+            <a:schemeClr val="accent1"/>
+          </a:lnRef>
+          <a:fillRef idx="3">
+            <a:schemeClr val="accent1"/>
+          </a:fillRef>
+          <a:effectRef idx="2">
+            <a:schemeClr val="accent1"/>
+          </a:effectRef>
+          <a:fontRef idx="minor">
+            <a:schemeClr val="lt1"/>
+          </a:fontRef>
+        </p:style>
+        <p:txBody>
+          <a:bodyPr rtlCol="0" anchor="ctr"/>
+          <a:lstStyle/>
+          <a:p>
+            <a:pPr algn="ctr"/>
+          </a:p>
+        </p:txBody>
+      </p:sp>
+      <p:sp>
+        <p:nvSpPr>
+          <p:cNvPr id="15" name="TextBox 14"/>
           <p:cNvSpPr txBox="1"/>
           <p:nvPr/>
         </p:nvSpPr>
         <p:spPr>
           <a:xfrm>
-            <a:off x="1463040" y="2670048"/>
-            <a:ext cx="2103120" cy="502920"/>
+            <a:off x="2255824" y="2414016"/>
+            <a:ext cx="384048" cy="365760"/>
           </a:xfrm>
           <a:prstGeom prst="rect">
             <a:avLst/>
@@ -5760,33 +5668,33 @@
           </a:bodyPr>
           <a:lstStyle/>
           <a:p>
-            <a:pPr algn="r">
+            <a:pPr algn="ctr">
               <a:spcAft>
                 <a:spcPts val="1000"/>
               </a:spcAft>
             </a:pPr>
             <a:r>
-              <a:rPr sz="2200" b="1">
+              <a:rPr sz="1600" b="1">
                 <a:solidFill>
-                  <a:srgbClr val="C89628"/>
+                  <a:srgbClr val="FFFFFF"/>
                 </a:solidFill>
                 <a:latin typeface="Microsoft YaHei"/>
               </a:rPr>
-              <a:t>中伤</a:t>
-            </a:r>
-          </a:p>
-        </p:txBody>
-      </p:sp>
-      <p:sp>
-        <p:nvSpPr>
-          <p:cNvPr id="14" name="TextBox 13"/>
+              <a:t>2</a:t>
+            </a:r>
+          </a:p>
+        </p:txBody>
+      </p:sp>
+      <p:sp>
+        <p:nvSpPr>
+          <p:cNvPr id="16" name="TextBox 15"/>
           <p:cNvSpPr txBox="1"/>
           <p:nvPr/>
         </p:nvSpPr>
         <p:spPr>
           <a:xfrm>
-            <a:off x="3749039" y="2670048"/>
-            <a:ext cx="7132320" cy="685800"/>
+            <a:off x="2758744" y="2377440"/>
+            <a:ext cx="7772400" cy="502920"/>
           </a:xfrm>
           <a:prstGeom prst="rect">
             <a:avLst/>
@@ -5805,27 +5713,70 @@
               </a:spcAft>
             </a:pPr>
             <a:r>
-              <a:rPr sz="2200" b="0">
+              <a:rPr sz="2400" b="0">
                 <a:solidFill>
                   <a:srgbClr val="5A461E"/>
                 </a:solidFill>
                 <a:latin typeface="Microsoft YaHei"/>
               </a:rPr>
-              <a:t>伤害</a:t>
-            </a:r>
-          </a:p>
-        </p:txBody>
-      </p:sp>
-      <p:sp>
-        <p:nvSpPr>
-          <p:cNvPr id="15" name="TextBox 14"/>
+              <a:t>翻译：「得一人之使，非得一人于井中也」</a:t>
+            </a:r>
+          </a:p>
+        </p:txBody>
+      </p:sp>
+      <p:sp>
+        <p:nvSpPr>
+          <p:cNvPr id="17" name="Oval 16"/>
+          <p:cNvSpPr/>
+          <p:nvPr/>
+        </p:nvSpPr>
+        <p:spPr>
+          <a:xfrm>
+            <a:off x="2255824" y="2962656"/>
+            <a:ext cx="384048" cy="384048"/>
+          </a:xfrm>
+          <a:prstGeom prst="ellipse">
+            <a:avLst/>
+          </a:prstGeom>
+          <a:solidFill>
+            <a:srgbClr val="C89628"/>
+          </a:solidFill>
+          <a:ln>
+            <a:noFill/>
+          </a:ln>
+        </p:spPr>
+        <p:style>
+          <a:lnRef idx="1">
+            <a:schemeClr val="accent1"/>
+          </a:lnRef>
+          <a:fillRef idx="3">
+            <a:schemeClr val="accent1"/>
+          </a:fillRef>
+          <a:effectRef idx="2">
+            <a:schemeClr val="accent1"/>
+          </a:effectRef>
+          <a:fontRef idx="minor">
+            <a:schemeClr val="lt1"/>
+          </a:fontRef>
+        </p:style>
+        <p:txBody>
+          <a:bodyPr rtlCol="0" anchor="ctr"/>
+          <a:lstStyle/>
+          <a:p>
+            <a:pPr algn="ctr"/>
+          </a:p>
+        </p:txBody>
+      </p:sp>
+      <p:sp>
+        <p:nvSpPr>
+          <p:cNvPr id="18" name="TextBox 17"/>
           <p:cNvSpPr txBox="1"/>
           <p:nvPr/>
         </p:nvSpPr>
         <p:spPr>
           <a:xfrm>
-            <a:off x="1463040" y="3419856"/>
-            <a:ext cx="2103120" cy="502920"/>
+            <a:off x="2255824" y="2980944"/>
+            <a:ext cx="384048" cy="365760"/>
           </a:xfrm>
           <a:prstGeom prst="rect">
             <a:avLst/>
@@ -5838,33 +5789,33 @@
           </a:bodyPr>
           <a:lstStyle/>
           <a:p>
-            <a:pPr algn="r">
+            <a:pPr algn="ctr">
               <a:spcAft>
                 <a:spcPts val="1000"/>
               </a:spcAft>
             </a:pPr>
             <a:r>
-              <a:rPr sz="2200" b="1">
+              <a:rPr sz="1600" b="1">
                 <a:solidFill>
-                  <a:srgbClr val="C89628"/>
+                  <a:srgbClr val="FFFFFF"/>
                 </a:solidFill>
                 <a:latin typeface="Microsoft YaHei"/>
               </a:rPr>
-              <a:t>重点句</a:t>
-            </a:r>
-          </a:p>
-        </p:txBody>
-      </p:sp>
-      <p:sp>
-        <p:nvSpPr>
-          <p:cNvPr id="16" name="TextBox 15"/>
+              <a:t>3</a:t>
+            </a:r>
+          </a:p>
+        </p:txBody>
+      </p:sp>
+      <p:sp>
+        <p:nvSpPr>
+          <p:cNvPr id="19" name="TextBox 18"/>
           <p:cNvSpPr txBox="1"/>
           <p:nvPr/>
         </p:nvSpPr>
         <p:spPr>
           <a:xfrm>
-            <a:off x="3749039" y="3419856"/>
-            <a:ext cx="7132320" cy="685800"/>
+            <a:off x="2758744" y="2944368"/>
+            <a:ext cx="7772400" cy="502920"/>
           </a:xfrm>
           <a:prstGeom prst="rect">
             <a:avLst/>
@@ -5883,91 +5834,13 @@
               </a:spcAft>
             </a:pPr>
             <a:r>
-              <a:rPr sz="2200" b="0">
+              <a:rPr sz="2400" b="0">
                 <a:solidFill>
                   <a:srgbClr val="5A461E"/>
                 </a:solidFill>
                 <a:latin typeface="Microsoft YaHei"/>
               </a:rPr>
-              <a:t>得一人之使，非得一人于井中也</a:t>
-            </a:r>
-          </a:p>
-        </p:txBody>
-      </p:sp>
-      <p:sp>
-        <p:nvSpPr>
-          <p:cNvPr id="17" name="TextBox 16"/>
-          <p:cNvSpPr txBox="1"/>
-          <p:nvPr/>
-        </p:nvSpPr>
-        <p:spPr>
-          <a:xfrm>
-            <a:off x="1463040" y="4169664"/>
-            <a:ext cx="2103120" cy="502920"/>
-          </a:xfrm>
-          <a:prstGeom prst="rect">
-            <a:avLst/>
-          </a:prstGeom>
-          <a:noFill/>
-        </p:spPr>
-        <p:txBody>
-          <a:bodyPr wrap="none">
-            <a:spAutoFit/>
-          </a:bodyPr>
-          <a:lstStyle/>
-          <a:p>
-            <a:pPr algn="r">
-              <a:spcAft>
-                <a:spcPts val="1000"/>
-              </a:spcAft>
-            </a:pPr>
-            <a:r>
-              <a:rPr sz="2200" b="1">
-                <a:solidFill>
-                  <a:srgbClr val="C89628"/>
-                </a:solidFill>
-                <a:latin typeface="Microsoft YaHei"/>
-              </a:rPr>
-              <a:t>句意</a:t>
-            </a:r>
-          </a:p>
-        </p:txBody>
-      </p:sp>
-      <p:sp>
-        <p:nvSpPr>
-          <p:cNvPr id="18" name="TextBox 17"/>
-          <p:cNvSpPr txBox="1"/>
-          <p:nvPr/>
-        </p:nvSpPr>
-        <p:spPr>
-          <a:xfrm>
-            <a:off x="3749039" y="4169664"/>
-            <a:ext cx="7132320" cy="685800"/>
-          </a:xfrm>
-          <a:prstGeom prst="rect">
-            <a:avLst/>
-          </a:prstGeom>
-          <a:noFill/>
-        </p:spPr>
-        <p:txBody>
-          <a:bodyPr wrap="none">
-            <a:spAutoFit/>
-          </a:bodyPr>
-          <a:lstStyle/>
-          <a:p>
-            <a:pPr algn="l">
-              <a:spcAft>
-                <a:spcPts val="1000"/>
-              </a:spcAft>
-            </a:pPr>
-            <a:r>
-              <a:rPr sz="2200" b="0">
-                <a:solidFill>
-                  <a:srgbClr val="5A461E"/>
-                </a:solidFill>
-                <a:latin typeface="Microsoft YaHei"/>
-              </a:rPr>
-              <a:t>节省一人劳力，不是井里挖出一人</a:t>
+              <a:t>讨论「杞人忧天」的两种理解，结合生活举例</a:t>
             </a:r>
           </a:p>
         </p:txBody>
@@ -6182,7 +6055,7 @@
                 </a:solidFill>
                 <a:latin typeface="Microsoft YaHei"/>
               </a:rPr>
-              <a:t>主题笔记</a:t>
+              <a:t>寓言新编</a:t>
             </a:r>
           </a:p>
         </p:txBody>
@@ -6195,7 +6068,7 @@
         </p:nvSpPr>
         <p:spPr>
           <a:xfrm>
-            <a:off x="1371600" y="1051560"/>
+            <a:off x="1371600" y="960120"/>
             <a:ext cx="9418320" cy="822960"/>
           </a:xfrm>
           <a:prstGeom prst="rect">
@@ -6221,7 +6094,7 @@
                 </a:solidFill>
                 <a:latin typeface="Microsoft YaHei"/>
               </a:rPr>
-              <a:t>写法探究</a:t>
+              <a:t>学习任务三</a:t>
             </a:r>
           </a:p>
         </p:txBody>
@@ -6234,7 +6107,7 @@
         </p:nvSpPr>
         <p:spPr>
           <a:xfrm>
-            <a:off x="3200400" y="1691640"/>
+            <a:off x="3200400" y="1600200"/>
             <a:ext cx="5760720" cy="27432"/>
           </a:xfrm>
           <a:prstGeom prst="rect">
@@ -6277,8 +6150,8 @@
         </p:nvSpPr>
         <p:spPr>
           <a:xfrm>
-            <a:off x="1249984" y="1810512"/>
-            <a:ext cx="9692640" cy="3319272"/>
+            <a:off x="1295704" y="1645920"/>
+            <a:ext cx="9601200" cy="2240280"/>
           </a:xfrm>
           <a:prstGeom prst="roundRect">
             <a:avLst/>
@@ -6316,14 +6189,57 @@
       </p:sp>
       <p:sp>
         <p:nvSpPr>
-          <p:cNvPr id="11" name="TextBox 10"/>
+          <p:cNvPr id="11" name="Oval 10"/>
+          <p:cNvSpPr/>
+          <p:nvPr/>
+        </p:nvSpPr>
+        <p:spPr>
+          <a:xfrm>
+            <a:off x="2255824" y="1828800"/>
+            <a:ext cx="384048" cy="384048"/>
+          </a:xfrm>
+          <a:prstGeom prst="ellipse">
+            <a:avLst/>
+          </a:prstGeom>
+          <a:solidFill>
+            <a:srgbClr val="C89628"/>
+          </a:solidFill>
+          <a:ln>
+            <a:noFill/>
+          </a:ln>
+        </p:spPr>
+        <p:style>
+          <a:lnRef idx="1">
+            <a:schemeClr val="accent1"/>
+          </a:lnRef>
+          <a:fillRef idx="3">
+            <a:schemeClr val="accent1"/>
+          </a:fillRef>
+          <a:effectRef idx="2">
+            <a:schemeClr val="accent1"/>
+          </a:effectRef>
+          <a:fontRef idx="minor">
+            <a:schemeClr val="lt1"/>
+          </a:fontRef>
+        </p:style>
+        <p:txBody>
+          <a:bodyPr rtlCol="0" anchor="ctr"/>
+          <a:lstStyle/>
+          <a:p>
+            <a:pPr algn="ctr"/>
+          </a:p>
+        </p:txBody>
+      </p:sp>
+      <p:sp>
+        <p:nvSpPr>
+          <p:cNvPr id="12" name="TextBox 11"/>
           <p:cNvSpPr txBox="1"/>
           <p:nvPr/>
         </p:nvSpPr>
         <p:spPr>
           <a:xfrm>
-            <a:off x="1463040" y="1920240"/>
-            <a:ext cx="2103120" cy="502920"/>
+            <a:off x="2255824" y="1847088"/>
+            <a:ext cx="384048" cy="365760"/>
           </a:xfrm>
           <a:prstGeom prst="rect">
             <a:avLst/>
@@ -6336,33 +6252,33 @@
           </a:bodyPr>
           <a:lstStyle/>
           <a:p>
-            <a:pPr algn="r">
+            <a:pPr algn="ctr">
               <a:spcAft>
                 <a:spcPts val="1000"/>
               </a:spcAft>
             </a:pPr>
             <a:r>
-              <a:rPr sz="2200" b="1">
+              <a:rPr sz="1600" b="1">
                 <a:solidFill>
-                  <a:srgbClr val="C89628"/>
+                  <a:srgbClr val="FFFFFF"/>
                 </a:solidFill>
                 <a:latin typeface="Microsoft YaHei"/>
               </a:rPr>
-              <a:t>情节设计</a:t>
-            </a:r>
-          </a:p>
-        </p:txBody>
-      </p:sp>
-      <p:sp>
-        <p:nvSpPr>
-          <p:cNvPr id="12" name="TextBox 11"/>
+              <a:t>1</a:t>
+            </a:r>
+          </a:p>
+        </p:txBody>
+      </p:sp>
+      <p:sp>
+        <p:nvSpPr>
+          <p:cNvPr id="13" name="TextBox 12"/>
           <p:cNvSpPr txBox="1"/>
           <p:nvPr/>
         </p:nvSpPr>
         <p:spPr>
           <a:xfrm>
-            <a:off x="3749039" y="1920240"/>
-            <a:ext cx="7132320" cy="685800"/>
+            <a:off x="2758744" y="1810512"/>
+            <a:ext cx="7772400" cy="502920"/>
           </a:xfrm>
           <a:prstGeom prst="rect">
             <a:avLst/>
@@ -6381,27 +6297,70 @@
               </a:spcAft>
             </a:pPr>
             <a:r>
-              <a:rPr sz="2200" b="0">
+              <a:rPr sz="2400" b="0">
                 <a:solidFill>
                   <a:srgbClr val="5A461E"/>
                 </a:solidFill>
                 <a:latin typeface="Microsoft YaHei"/>
               </a:rPr>
-              <a:t>寓意藏在人物的欲望、选择与意外后果中</a:t>
-            </a:r>
-          </a:p>
-        </p:txBody>
-      </p:sp>
-      <p:sp>
-        <p:nvSpPr>
-          <p:cNvPr id="13" name="TextBox 12"/>
+              <a:t>任选一则，重新设计情节（100—200字）</a:t>
+            </a:r>
+          </a:p>
+        </p:txBody>
+      </p:sp>
+      <p:sp>
+        <p:nvSpPr>
+          <p:cNvPr id="14" name="Oval 13"/>
+          <p:cNvSpPr/>
+          <p:nvPr/>
+        </p:nvSpPr>
+        <p:spPr>
+          <a:xfrm>
+            <a:off x="2255824" y="2395728"/>
+            <a:ext cx="384048" cy="384048"/>
+          </a:xfrm>
+          <a:prstGeom prst="ellipse">
+            <a:avLst/>
+          </a:prstGeom>
+          <a:solidFill>
+            <a:srgbClr val="C89628"/>
+          </a:solidFill>
+          <a:ln>
+            <a:noFill/>
+          </a:ln>
+        </p:spPr>
+        <p:style>
+          <a:lnRef idx="1">
+            <a:schemeClr val="accent1"/>
+          </a:lnRef>
+          <a:fillRef idx="3">
+            <a:schemeClr val="accent1"/>
+          </a:fillRef>
+          <a:effectRef idx="2">
+            <a:schemeClr val="accent1"/>
+          </a:effectRef>
+          <a:fontRef idx="minor">
+            <a:schemeClr val="lt1"/>
+          </a:fontRef>
+        </p:style>
+        <p:txBody>
+          <a:bodyPr rtlCol="0" anchor="ctr"/>
+          <a:lstStyle/>
+          <a:p>
+            <a:pPr algn="ctr"/>
+          </a:p>
+        </p:txBody>
+      </p:sp>
+      <p:sp>
+        <p:nvSpPr>
+          <p:cNvPr id="15" name="TextBox 14"/>
           <p:cNvSpPr txBox="1"/>
           <p:nvPr/>
         </p:nvSpPr>
         <p:spPr>
           <a:xfrm>
-            <a:off x="1463040" y="2670048"/>
-            <a:ext cx="2103120" cy="502920"/>
+            <a:off x="2255824" y="2414016"/>
+            <a:ext cx="384048" cy="365760"/>
           </a:xfrm>
           <a:prstGeom prst="rect">
             <a:avLst/>
@@ -6414,33 +6373,33 @@
           </a:bodyPr>
           <a:lstStyle/>
           <a:p>
-            <a:pPr algn="r">
+            <a:pPr algn="ctr">
               <a:spcAft>
                 <a:spcPts val="1000"/>
               </a:spcAft>
             </a:pPr>
             <a:r>
-              <a:rPr sz="2200" b="1">
+              <a:rPr sz="1600" b="1">
                 <a:solidFill>
-                  <a:srgbClr val="C89628"/>
+                  <a:srgbClr val="FFFFFF"/>
                 </a:solidFill>
                 <a:latin typeface="Microsoft YaHei"/>
               </a:rPr>
-              <a:t>改情节改寓意</a:t>
-            </a:r>
-          </a:p>
-        </p:txBody>
-      </p:sp>
-      <p:sp>
-        <p:nvSpPr>
-          <p:cNvPr id="14" name="TextBox 13"/>
+              <a:t>2</a:t>
+            </a:r>
+          </a:p>
+        </p:txBody>
+      </p:sp>
+      <p:sp>
+        <p:nvSpPr>
+          <p:cNvPr id="16" name="TextBox 15"/>
           <p:cNvSpPr txBox="1"/>
           <p:nvPr/>
         </p:nvSpPr>
         <p:spPr>
           <a:xfrm>
-            <a:off x="3749039" y="2670048"/>
-            <a:ext cx="7132320" cy="685800"/>
+            <a:off x="2758744" y="2377440"/>
+            <a:ext cx="7772400" cy="502920"/>
           </a:xfrm>
           <a:prstGeom prst="rect">
             <a:avLst/>
@@ -6459,27 +6418,70 @@
               </a:spcAft>
             </a:pPr>
             <a:r>
-              <a:rPr sz="2200" b="0">
+              <a:rPr sz="2400" b="0">
                 <a:solidFill>
                   <a:srgbClr val="5A461E"/>
                 </a:solidFill>
                 <a:latin typeface="Microsoft YaHei"/>
               </a:rPr>
-              <a:t>蚊子战胜后平静离开→寓意从「骄兵必败」变为「懂得适可而止」</a:t>
-            </a:r>
-          </a:p>
-        </p:txBody>
-      </p:sp>
-      <p:sp>
-        <p:nvSpPr>
-          <p:cNvPr id="15" name="TextBox 14"/>
+              <a:t>策展主题四：认识认知局限，善用智慧</a:t>
+            </a:r>
+          </a:p>
+        </p:txBody>
+      </p:sp>
+      <p:sp>
+        <p:nvSpPr>
+          <p:cNvPr id="17" name="Oval 16"/>
+          <p:cNvSpPr/>
+          <p:nvPr/>
+        </p:nvSpPr>
+        <p:spPr>
+          <a:xfrm>
+            <a:off x="2255824" y="2962656"/>
+            <a:ext cx="384048" cy="384048"/>
+          </a:xfrm>
+          <a:prstGeom prst="ellipse">
+            <a:avLst/>
+          </a:prstGeom>
+          <a:solidFill>
+            <a:srgbClr val="C89628"/>
+          </a:solidFill>
+          <a:ln>
+            <a:noFill/>
+          </a:ln>
+        </p:spPr>
+        <p:style>
+          <a:lnRef idx="1">
+            <a:schemeClr val="accent1"/>
+          </a:lnRef>
+          <a:fillRef idx="3">
+            <a:schemeClr val="accent1"/>
+          </a:fillRef>
+          <a:effectRef idx="2">
+            <a:schemeClr val="accent1"/>
+          </a:effectRef>
+          <a:fontRef idx="minor">
+            <a:schemeClr val="lt1"/>
+          </a:fontRef>
+        </p:style>
+        <p:txBody>
+          <a:bodyPr rtlCol="0" anchor="ctr"/>
+          <a:lstStyle/>
+          <a:p>
+            <a:pPr algn="ctr"/>
+          </a:p>
+        </p:txBody>
+      </p:sp>
+      <p:sp>
+        <p:nvSpPr>
+          <p:cNvPr id="18" name="TextBox 17"/>
           <p:cNvSpPr txBox="1"/>
           <p:nvPr/>
         </p:nvSpPr>
         <p:spPr>
           <a:xfrm>
-            <a:off x="1463040" y="3419856"/>
-            <a:ext cx="2103120" cy="502920"/>
+            <a:off x="2255824" y="2980944"/>
+            <a:ext cx="384048" cy="365760"/>
           </a:xfrm>
           <a:prstGeom prst="rect">
             <a:avLst/>
@@ -6492,33 +6494,33 @@
           </a:bodyPr>
           <a:lstStyle/>
           <a:p>
-            <a:pPr algn="r">
+            <a:pPr algn="ctr">
               <a:spcAft>
                 <a:spcPts val="1000"/>
               </a:spcAft>
             </a:pPr>
             <a:r>
-              <a:rPr sz="2200" b="1">
+              <a:rPr sz="1600" b="1">
                 <a:solidFill>
-                  <a:srgbClr val="C89628"/>
+                  <a:srgbClr val="FFFFFF"/>
                 </a:solidFill>
                 <a:latin typeface="Microsoft YaHei"/>
               </a:rPr>
-              <a:t>阅读方法</a:t>
-            </a:r>
-          </a:p>
-        </p:txBody>
-      </p:sp>
-      <p:sp>
-        <p:nvSpPr>
-          <p:cNvPr id="16" name="TextBox 15"/>
+              <a:t>3</a:t>
+            </a:r>
+          </a:p>
+        </p:txBody>
+      </p:sp>
+      <p:sp>
+        <p:nvSpPr>
+          <p:cNvPr id="19" name="TextBox 18"/>
           <p:cNvSpPr txBox="1"/>
           <p:nvPr/>
         </p:nvSpPr>
         <p:spPr>
           <a:xfrm>
-            <a:off x="3749039" y="3419856"/>
-            <a:ext cx="7132320" cy="685800"/>
+            <a:off x="2758744" y="2944368"/>
+            <a:ext cx="7772400" cy="502920"/>
           </a:xfrm>
           <a:prstGeom prst="rect">
             <a:avLst/>
@@ -6537,91 +6539,13 @@
               </a:spcAft>
             </a:pPr>
             <a:r>
-              <a:rPr sz="2200" b="0">
+              <a:rPr sz="2400" b="0">
                 <a:solidFill>
                   <a:srgbClr val="5A461E"/>
                 </a:solidFill>
                 <a:latin typeface="Microsoft YaHei"/>
               </a:rPr>
-              <a:t>读懂「为什么这样结尾」，才能读到真正的提醒</a:t>
-            </a:r>
-          </a:p>
-        </p:txBody>
-      </p:sp>
-      <p:sp>
-        <p:nvSpPr>
-          <p:cNvPr id="17" name="TextBox 16"/>
-          <p:cNvSpPr txBox="1"/>
-          <p:nvPr/>
-        </p:nvSpPr>
-        <p:spPr>
-          <a:xfrm>
-            <a:off x="1463040" y="4169664"/>
-            <a:ext cx="2103120" cy="502920"/>
-          </a:xfrm>
-          <a:prstGeom prst="rect">
-            <a:avLst/>
-          </a:prstGeom>
-          <a:noFill/>
-        </p:spPr>
-        <p:txBody>
-          <a:bodyPr wrap="none">
-            <a:spAutoFit/>
-          </a:bodyPr>
-          <a:lstStyle/>
-          <a:p>
-            <a:pPr algn="r">
-              <a:spcAft>
-                <a:spcPts val="1000"/>
-              </a:spcAft>
-            </a:pPr>
-            <a:r>
-              <a:rPr sz="2200" b="1">
-                <a:solidFill>
-                  <a:srgbClr val="C89628"/>
-                </a:solidFill>
-                <a:latin typeface="Microsoft YaHei"/>
-              </a:rPr>
-              <a:t>策展主题</a:t>
-            </a:r>
-          </a:p>
-        </p:txBody>
-      </p:sp>
-      <p:sp>
-        <p:nvSpPr>
-          <p:cNvPr id="18" name="TextBox 17"/>
-          <p:cNvSpPr txBox="1"/>
-          <p:nvPr/>
-        </p:nvSpPr>
-        <p:spPr>
-          <a:xfrm>
-            <a:off x="3749039" y="4169664"/>
-            <a:ext cx="7132320" cy="685800"/>
-          </a:xfrm>
-          <a:prstGeom prst="rect">
-            <a:avLst/>
-          </a:prstGeom>
-          <a:noFill/>
-        </p:spPr>
-        <p:txBody>
-          <a:bodyPr wrap="none">
-            <a:spAutoFit/>
-          </a:bodyPr>
-          <a:lstStyle/>
-          <a:p>
-            <a:pPr algn="l">
-              <a:spcAft>
-                <a:spcPts val="1000"/>
-              </a:spcAft>
-            </a:pPr>
-            <a:r>
-              <a:rPr sz="2200" b="0">
-                <a:solidFill>
-                  <a:srgbClr val="5A461E"/>
-                </a:solidFill>
-                <a:latin typeface="Microsoft YaHei"/>
-              </a:rPr>
-              <a:t>认识自己的认知局限，善用智慧（智慧与局限）</a:t>
+              <a:t>同伴互评：寓意是否由情节自然推出？</a:t>
             </a:r>
           </a:p>
         </p:txBody>
@@ -6836,7 +6760,7 @@
                 </a:solidFill>
                 <a:latin typeface="Microsoft YaHei"/>
               </a:rPr>
-              <a:t>课堂活动</a:t>
+              <a:t>回顾收获</a:t>
             </a:r>
           </a:p>
         </p:txBody>
@@ -6849,7 +6773,7 @@
         </p:nvSpPr>
         <p:spPr>
           <a:xfrm>
-            <a:off x="1371600" y="1051560"/>
+            <a:off x="1371600" y="960120"/>
             <a:ext cx="9418320" cy="822960"/>
           </a:xfrm>
           <a:prstGeom prst="rect">
@@ -6875,7 +6799,7 @@
                 </a:solidFill>
                 <a:latin typeface="Microsoft YaHei"/>
               </a:rPr>
-              <a:t>学习任务</a:t>
+              <a:t>课堂小结</a:t>
             </a:r>
           </a:p>
         </p:txBody>
@@ -6888,7 +6812,7 @@
         </p:nvSpPr>
         <p:spPr>
           <a:xfrm>
-            <a:off x="3200400" y="1691640"/>
+            <a:off x="3200400" y="1600200"/>
             <a:ext cx="5760720" cy="27432"/>
           </a:xfrm>
           <a:prstGeom prst="rect">
@@ -6931,8 +6855,8 @@
         </p:nvSpPr>
         <p:spPr>
           <a:xfrm>
-            <a:off x="1295704" y="1737360"/>
-            <a:ext cx="9601200" cy="2112264"/>
+            <a:off x="1295704" y="1645920"/>
+            <a:ext cx="9601200" cy="2240280"/>
           </a:xfrm>
           <a:prstGeom prst="roundRect">
             <a:avLst/>
@@ -6976,8 +6900,8 @@
         </p:nvSpPr>
         <p:spPr>
           <a:xfrm>
-            <a:off x="2621584" y="1920240"/>
-            <a:ext cx="347472" cy="347472"/>
+            <a:off x="2255824" y="1828800"/>
+            <a:ext cx="384048" cy="384048"/>
           </a:xfrm>
           <a:prstGeom prst="ellipse">
             <a:avLst/>
@@ -7019,8 +6943,8 @@
         </p:nvSpPr>
         <p:spPr>
           <a:xfrm>
-            <a:off x="2621584" y="1938528"/>
-            <a:ext cx="347472" cy="329184"/>
+            <a:off x="2255824" y="1847088"/>
+            <a:ext cx="384048" cy="365760"/>
           </a:xfrm>
           <a:prstGeom prst="rect">
             <a:avLst/>
@@ -7039,7 +6963,7 @@
               </a:spcAft>
             </a:pPr>
             <a:r>
-              <a:rPr sz="1400" b="1">
+              <a:rPr sz="1600" b="1">
                 <a:solidFill>
                   <a:srgbClr val="FFFFFF"/>
                 </a:solidFill>
@@ -7058,8 +6982,8 @@
         </p:nvSpPr>
         <p:spPr>
           <a:xfrm>
-            <a:off x="3078784" y="1901952"/>
-            <a:ext cx="7863840" cy="457200"/>
+            <a:off x="2758744" y="1810512"/>
+            <a:ext cx="7772400" cy="502920"/>
           </a:xfrm>
           <a:prstGeom prst="rect">
             <a:avLst/>
@@ -7084,7 +7008,7 @@
                 </a:solidFill>
                 <a:latin typeface="Microsoft YaHei"/>
               </a:rPr>
-              <a:t>完成「寓言档案卡」，概括四则寓意</a:t>
+              <a:t>寓言道理藏在欲望、选择与意外后果中</a:t>
             </a:r>
           </a:p>
         </p:txBody>
@@ -7097,8 +7021,8 @@
         </p:nvSpPr>
         <p:spPr>
           <a:xfrm>
-            <a:off x="2621584" y="2487168"/>
-            <a:ext cx="347472" cy="347472"/>
+            <a:off x="2255824" y="2395728"/>
+            <a:ext cx="384048" cy="384048"/>
           </a:xfrm>
           <a:prstGeom prst="ellipse">
             <a:avLst/>
@@ -7140,8 +7064,8 @@
         </p:nvSpPr>
         <p:spPr>
           <a:xfrm>
-            <a:off x="2621584" y="2505456"/>
-            <a:ext cx="347472" cy="329184"/>
+            <a:off x="2255824" y="2414016"/>
+            <a:ext cx="384048" cy="365760"/>
           </a:xfrm>
           <a:prstGeom prst="rect">
             <a:avLst/>
@@ -7160,7 +7084,7 @@
               </a:spcAft>
             </a:pPr>
             <a:r>
-              <a:rPr sz="1400" b="1">
+              <a:rPr sz="1600" b="1">
                 <a:solidFill>
                   <a:srgbClr val="FFFFFF"/>
                 </a:solidFill>
@@ -7179,8 +7103,8 @@
         </p:nvSpPr>
         <p:spPr>
           <a:xfrm>
-            <a:off x="3078784" y="2468880"/>
-            <a:ext cx="7863840" cy="457200"/>
+            <a:off x="2758744" y="2377440"/>
+            <a:ext cx="7772400" cy="502920"/>
           </a:xfrm>
           <a:prstGeom prst="rect">
             <a:avLst/>
@@ -7205,7 +7129,7 @@
                 </a:solidFill>
                 <a:latin typeface="Microsoft YaHei"/>
               </a:rPr>
-              <a:t>解释加点词，翻译重点句</a:t>
+              <a:t>读懂「为什么这样结尾」，才能读到真正的提醒</a:t>
             </a:r>
           </a:p>
         </p:txBody>
@@ -7218,8 +7142,8 @@
         </p:nvSpPr>
         <p:spPr>
           <a:xfrm>
-            <a:off x="2621584" y="3054096"/>
-            <a:ext cx="347472" cy="347472"/>
+            <a:off x="2255824" y="2962656"/>
+            <a:ext cx="384048" cy="384048"/>
           </a:xfrm>
           <a:prstGeom prst="ellipse">
             <a:avLst/>
@@ -7261,8 +7185,8 @@
         </p:nvSpPr>
         <p:spPr>
           <a:xfrm>
-            <a:off x="2621584" y="3072384"/>
-            <a:ext cx="347472" cy="329184"/>
+            <a:off x="2255824" y="2980944"/>
+            <a:ext cx="384048" cy="365760"/>
           </a:xfrm>
           <a:prstGeom prst="rect">
             <a:avLst/>
@@ -7281,7 +7205,7 @@
               </a:spcAft>
             </a:pPr>
             <a:r>
-              <a:rPr sz="1400" b="1">
+              <a:rPr sz="1600" b="1">
                 <a:solidFill>
                   <a:srgbClr val="FFFFFF"/>
                 </a:solidFill>
@@ -7300,8 +7224,8 @@
         </p:nvSpPr>
         <p:spPr>
           <a:xfrm>
-            <a:off x="3078784" y="3035808"/>
-            <a:ext cx="7863840" cy="457200"/>
+            <a:off x="2758744" y="2944368"/>
+            <a:ext cx="7772400" cy="502920"/>
           </a:xfrm>
           <a:prstGeom prst="rect">
             <a:avLst/>
@@ -7326,7 +7250,7 @@
                 </a:solidFill>
                 <a:latin typeface="Microsoft YaHei"/>
               </a:rPr>
-              <a:t>任选一则寓言新编（100—200字）</a:t>
+              <a:t>策展主题：智慧与局限</a:t>
             </a:r>
           </a:p>
         </p:txBody>
@@ -7541,7 +7465,7 @@
                 </a:solidFill>
                 <a:latin typeface="Microsoft YaHei"/>
               </a:rPr>
-              <a:t>回顾收获</a:t>
+              <a:t>课后延伸</a:t>
             </a:r>
           </a:p>
         </p:txBody>
@@ -7554,7 +7478,7 @@
         </p:nvSpPr>
         <p:spPr>
           <a:xfrm>
-            <a:off x="1371600" y="1051560"/>
+            <a:off x="1371600" y="960120"/>
             <a:ext cx="9418320" cy="822960"/>
           </a:xfrm>
           <a:prstGeom prst="rect">
@@ -7580,7 +7504,7 @@
                 </a:solidFill>
                 <a:latin typeface="Microsoft YaHei"/>
               </a:rPr>
-              <a:t>课堂小结</a:t>
+              <a:t>课后作业</a:t>
             </a:r>
           </a:p>
         </p:txBody>
@@ -7593,7 +7517,7 @@
         </p:nvSpPr>
         <p:spPr>
           <a:xfrm>
-            <a:off x="3200400" y="1691640"/>
+            <a:off x="3200400" y="1600200"/>
             <a:ext cx="5760720" cy="27432"/>
           </a:xfrm>
           <a:prstGeom prst="rect">
@@ -7636,8 +7560,8 @@
         </p:nvSpPr>
         <p:spPr>
           <a:xfrm>
-            <a:off x="1295704" y="1737360"/>
-            <a:ext cx="9601200" cy="1837944"/>
+            <a:off x="1295704" y="1645920"/>
+            <a:ext cx="9601200" cy="1645920"/>
           </a:xfrm>
           <a:prstGeom prst="roundRect">
             <a:avLst/>
@@ -7681,8 +7605,8 @@
         </p:nvSpPr>
         <p:spPr>
           <a:xfrm>
-            <a:off x="2621584" y="1920240"/>
-            <a:ext cx="347472" cy="347472"/>
+            <a:off x="2255824" y="1828800"/>
+            <a:ext cx="384048" cy="384048"/>
           </a:xfrm>
           <a:prstGeom prst="ellipse">
             <a:avLst/>
@@ -7724,8 +7648,8 @@
         </p:nvSpPr>
         <p:spPr>
           <a:xfrm>
-            <a:off x="2621584" y="1938528"/>
-            <a:ext cx="347472" cy="329184"/>
+            <a:off x="2255824" y="1847088"/>
+            <a:ext cx="384048" cy="365760"/>
           </a:xfrm>
           <a:prstGeom prst="rect">
             <a:avLst/>
@@ -7744,7 +7668,7 @@
               </a:spcAft>
             </a:pPr>
             <a:r>
-              <a:rPr sz="1400" b="1">
+              <a:rPr sz="1600" b="1">
                 <a:solidFill>
                   <a:srgbClr val="FFFFFF"/>
                 </a:solidFill>
@@ -7763,713 +7687,8 @@
         </p:nvSpPr>
         <p:spPr>
           <a:xfrm>
-            <a:off x="3078784" y="1901952"/>
-            <a:ext cx="7863840" cy="457200"/>
-          </a:xfrm>
-          <a:prstGeom prst="rect">
-            <a:avLst/>
-          </a:prstGeom>
-          <a:noFill/>
-        </p:spPr>
-        <p:txBody>
-          <a:bodyPr wrap="none">
-            <a:spAutoFit/>
-          </a:bodyPr>
-          <a:lstStyle/>
-          <a:p>
-            <a:pPr algn="l">
-              <a:spcAft>
-                <a:spcPts val="1000"/>
-              </a:spcAft>
-            </a:pPr>
-            <a:r>
-              <a:rPr sz="2200" b="0">
-                <a:solidFill>
-                  <a:srgbClr val="5A461E"/>
-                </a:solidFill>
-                <a:latin typeface="Microsoft YaHei"/>
-              </a:rPr>
-              <a:t>寓言=故事+道理，道理由情节自然推出</a:t>
-            </a:r>
-          </a:p>
-        </p:txBody>
-      </p:sp>
-      <p:sp>
-        <p:nvSpPr>
-          <p:cNvPr id="14" name="Oval 13"/>
-          <p:cNvSpPr/>
-          <p:nvPr/>
-        </p:nvSpPr>
-        <p:spPr>
-          <a:xfrm>
-            <a:off x="2621584" y="2395728"/>
-            <a:ext cx="347472" cy="347472"/>
-          </a:xfrm>
-          <a:prstGeom prst="ellipse">
-            <a:avLst/>
-          </a:prstGeom>
-          <a:solidFill>
-            <a:srgbClr val="C89628"/>
-          </a:solidFill>
-          <a:ln>
-            <a:noFill/>
-          </a:ln>
-        </p:spPr>
-        <p:style>
-          <a:lnRef idx="1">
-            <a:schemeClr val="accent1"/>
-          </a:lnRef>
-          <a:fillRef idx="3">
-            <a:schemeClr val="accent1"/>
-          </a:fillRef>
-          <a:effectRef idx="2">
-            <a:schemeClr val="accent1"/>
-          </a:effectRef>
-          <a:fontRef idx="minor">
-            <a:schemeClr val="lt1"/>
-          </a:fontRef>
-        </p:style>
-        <p:txBody>
-          <a:bodyPr rtlCol="0" anchor="ctr"/>
-          <a:lstStyle/>
-          <a:p>
-            <a:pPr algn="ctr"/>
-          </a:p>
-        </p:txBody>
-      </p:sp>
-      <p:sp>
-        <p:nvSpPr>
-          <p:cNvPr id="15" name="TextBox 14"/>
-          <p:cNvSpPr txBox="1"/>
-          <p:nvPr/>
-        </p:nvSpPr>
-        <p:spPr>
-          <a:xfrm>
-            <a:off x="2621584" y="2414016"/>
-            <a:ext cx="347472" cy="329184"/>
-          </a:xfrm>
-          <a:prstGeom prst="rect">
-            <a:avLst/>
-          </a:prstGeom>
-          <a:noFill/>
-        </p:spPr>
-        <p:txBody>
-          <a:bodyPr wrap="none">
-            <a:spAutoFit/>
-          </a:bodyPr>
-          <a:lstStyle/>
-          <a:p>
-            <a:pPr algn="ctr">
-              <a:spcAft>
-                <a:spcPts val="1000"/>
-              </a:spcAft>
-            </a:pPr>
-            <a:r>
-              <a:rPr sz="1400" b="1">
-                <a:solidFill>
-                  <a:srgbClr val="FFFFFF"/>
-                </a:solidFill>
-                <a:latin typeface="Microsoft YaHei"/>
-              </a:rPr>
-              <a:t>2</a:t>
-            </a:r>
-          </a:p>
-        </p:txBody>
-      </p:sp>
-      <p:sp>
-        <p:nvSpPr>
-          <p:cNvPr id="16" name="TextBox 15"/>
-          <p:cNvSpPr txBox="1"/>
-          <p:nvPr/>
-        </p:nvSpPr>
-        <p:spPr>
-          <a:xfrm>
-            <a:off x="3078784" y="2377440"/>
-            <a:ext cx="7863840" cy="457200"/>
-          </a:xfrm>
-          <a:prstGeom prst="rect">
-            <a:avLst/>
-          </a:prstGeom>
-          <a:noFill/>
-        </p:spPr>
-        <p:txBody>
-          <a:bodyPr wrap="none">
-            <a:spAutoFit/>
-          </a:bodyPr>
-          <a:lstStyle/>
-          <a:p>
-            <a:pPr algn="l">
-              <a:spcAft>
-                <a:spcPts val="1000"/>
-              </a:spcAft>
-            </a:pPr>
-            <a:r>
-              <a:rPr sz="2200" b="0">
-                <a:solidFill>
-                  <a:srgbClr val="5A461E"/>
-                </a:solidFill>
-                <a:latin typeface="Microsoft YaHei"/>
-              </a:rPr>
-              <a:t>文言：闻、传、道、亡；重点句要准确翻译</a:t>
-            </a:r>
-          </a:p>
-        </p:txBody>
-      </p:sp>
-      <p:sp>
-        <p:nvSpPr>
-          <p:cNvPr id="17" name="Oval 16"/>
-          <p:cNvSpPr/>
-          <p:nvPr/>
-        </p:nvSpPr>
-        <p:spPr>
-          <a:xfrm>
-            <a:off x="2621584" y="2871216"/>
-            <a:ext cx="347472" cy="347472"/>
-          </a:xfrm>
-          <a:prstGeom prst="ellipse">
-            <a:avLst/>
-          </a:prstGeom>
-          <a:solidFill>
-            <a:srgbClr val="C89628"/>
-          </a:solidFill>
-          <a:ln>
-            <a:noFill/>
-          </a:ln>
-        </p:spPr>
-        <p:style>
-          <a:lnRef idx="1">
-            <a:schemeClr val="accent1"/>
-          </a:lnRef>
-          <a:fillRef idx="3">
-            <a:schemeClr val="accent1"/>
-          </a:fillRef>
-          <a:effectRef idx="2">
-            <a:schemeClr val="accent1"/>
-          </a:effectRef>
-          <a:fontRef idx="minor">
-            <a:schemeClr val="lt1"/>
-          </a:fontRef>
-        </p:style>
-        <p:txBody>
-          <a:bodyPr rtlCol="0" anchor="ctr"/>
-          <a:lstStyle/>
-          <a:p>
-            <a:pPr algn="ctr"/>
-          </a:p>
-        </p:txBody>
-      </p:sp>
-      <p:sp>
-        <p:nvSpPr>
-          <p:cNvPr id="18" name="TextBox 17"/>
-          <p:cNvSpPr txBox="1"/>
-          <p:nvPr/>
-        </p:nvSpPr>
-        <p:spPr>
-          <a:xfrm>
-            <a:off x="2621584" y="2889504"/>
-            <a:ext cx="347472" cy="329184"/>
-          </a:xfrm>
-          <a:prstGeom prst="rect">
-            <a:avLst/>
-          </a:prstGeom>
-          <a:noFill/>
-        </p:spPr>
-        <p:txBody>
-          <a:bodyPr wrap="none">
-            <a:spAutoFit/>
-          </a:bodyPr>
-          <a:lstStyle/>
-          <a:p>
-            <a:pPr algn="ctr">
-              <a:spcAft>
-                <a:spcPts val="1000"/>
-              </a:spcAft>
-            </a:pPr>
-            <a:r>
-              <a:rPr sz="1400" b="1">
-                <a:solidFill>
-                  <a:srgbClr val="FFFFFF"/>
-                </a:solidFill>
-                <a:latin typeface="Microsoft YaHei"/>
-              </a:rPr>
-              <a:t>3</a:t>
-            </a:r>
-          </a:p>
-        </p:txBody>
-      </p:sp>
-      <p:sp>
-        <p:nvSpPr>
-          <p:cNvPr id="19" name="TextBox 18"/>
-          <p:cNvSpPr txBox="1"/>
-          <p:nvPr/>
-        </p:nvSpPr>
-        <p:spPr>
-          <a:xfrm>
-            <a:off x="3078784" y="2852928"/>
-            <a:ext cx="7863840" cy="457200"/>
-          </a:xfrm>
-          <a:prstGeom prst="rect">
-            <a:avLst/>
-          </a:prstGeom>
-          <a:noFill/>
-        </p:spPr>
-        <p:txBody>
-          <a:bodyPr wrap="none">
-            <a:spAutoFit/>
-          </a:bodyPr>
-          <a:lstStyle/>
-          <a:p>
-            <a:pPr algn="l">
-              <a:spcAft>
-                <a:spcPts val="1000"/>
-              </a:spcAft>
-            </a:pPr>
-            <a:r>
-              <a:rPr sz="2200" b="0">
-                <a:solidFill>
-                  <a:srgbClr val="5A461E"/>
-                </a:solidFill>
-                <a:latin typeface="Microsoft YaHei"/>
-              </a:rPr>
-              <a:t>策展主题四：智慧与局限</a:t>
-            </a:r>
-          </a:p>
-        </p:txBody>
-      </p:sp>
-    </p:spTree>
-  </p:cSld>
-  <p:clrMapOvr>
-    <a:masterClrMapping/>
-  </p:clrMapOvr>
-</p:sld>
-</file>
-
-<file path=ppt/slides/slide9.xml><?xml version="1.0" encoding="utf-8"?>
-<p:sld xmlns:a="http://schemas.openxmlformats.org/drawingml/2006/main" xmlns:p="http://schemas.openxmlformats.org/presentationml/2006/main" xmlns:r="http://schemas.openxmlformats.org/officeDocument/2006/relationships">
-  <p:cSld>
-    <p:spTree>
-      <p:nvGrpSpPr>
-        <p:cNvPr id="1" name=""/>
-        <p:cNvGrpSpPr/>
-        <p:nvPr/>
-      </p:nvGrpSpPr>
-      <p:grpSpPr/>
-      <p:pic>
-        <p:nvPicPr>
-          <p:cNvPr id="2" name="Picture 1" descr="bg_fable.png"/>
-          <p:cNvPicPr>
-            <a:picLocks noChangeAspect="1"/>
-          </p:cNvPicPr>
-          <p:nvPr/>
-        </p:nvPicPr>
-        <p:blipFill>
-          <a:blip r:embed="rId2"/>
-          <a:stretch>
-            <a:fillRect/>
-          </a:stretch>
-        </p:blipFill>
-        <p:spPr>
-          <a:xfrm>
-            <a:off x="0" y="0"/>
-            <a:ext cx="12191695" cy="6858000"/>
-          </a:xfrm>
-          <a:prstGeom prst="rect">
-            <a:avLst/>
-          </a:prstGeom>
-        </p:spPr>
-      </p:pic>
-      <p:sp>
-        <p:nvSpPr>
-          <p:cNvPr id="3" name="Rectangle 2"/>
-          <p:cNvSpPr/>
-          <p:nvPr/>
-        </p:nvSpPr>
-        <p:spPr>
-          <a:xfrm>
-            <a:off x="292608" y="274320"/>
-            <a:ext cx="11594592" cy="6300216"/>
-          </a:xfrm>
-          <a:prstGeom prst="rect">
-            <a:avLst/>
-          </a:prstGeom>
-          <a:noFill/>
-          <a:ln w="31750">
-            <a:solidFill>
-              <a:srgbClr val="B48C3C"/>
-            </a:solidFill>
-          </a:ln>
-        </p:spPr>
-        <p:style>
-          <a:lnRef idx="1">
-            <a:schemeClr val="accent1"/>
-          </a:lnRef>
-          <a:fillRef idx="3">
-            <a:schemeClr val="accent1"/>
-          </a:fillRef>
-          <a:effectRef idx="2">
-            <a:schemeClr val="accent1"/>
-          </a:effectRef>
-          <a:fontRef idx="minor">
-            <a:schemeClr val="lt1"/>
-          </a:fontRef>
-        </p:style>
-        <p:txBody>
-          <a:bodyPr rtlCol="0" anchor="ctr"/>
-          <a:lstStyle/>
-          <a:p>
-            <a:pPr algn="ctr"/>
-          </a:p>
-        </p:txBody>
-      </p:sp>
-      <p:pic>
-        <p:nvPicPr>
-          <p:cNvPr id="4" name="Picture 3" descr="corner_fable_tl.png"/>
-          <p:cNvPicPr>
-            <a:picLocks noChangeAspect="1"/>
-          </p:cNvPicPr>
-          <p:nvPr/>
-        </p:nvPicPr>
-        <p:blipFill>
-          <a:blip r:embed="rId3"/>
-          <a:stretch>
-            <a:fillRect/>
-          </a:stretch>
-        </p:blipFill>
-        <p:spPr>
-          <a:xfrm>
-            <a:off x="-45720" y="-45720"/>
-            <a:ext cx="2011680" cy="2011680"/>
-          </a:xfrm>
-          <a:prstGeom prst="rect">
-            <a:avLst/>
-          </a:prstGeom>
-        </p:spPr>
-      </p:pic>
-      <p:pic>
-        <p:nvPicPr>
-          <p:cNvPr id="5" name="Picture 4" descr="corner_fable_tr.png"/>
-          <p:cNvPicPr>
-            <a:picLocks noChangeAspect="1"/>
-          </p:cNvPicPr>
-          <p:nvPr/>
-        </p:nvPicPr>
-        <p:blipFill>
-          <a:blip r:embed="rId4"/>
-          <a:stretch>
-            <a:fillRect/>
-          </a:stretch>
-        </p:blipFill>
-        <p:spPr>
-          <a:xfrm>
-            <a:off x="9875520" y="-45720"/>
-            <a:ext cx="2011680" cy="2011680"/>
-          </a:xfrm>
-          <a:prstGeom prst="rect">
-            <a:avLst/>
-          </a:prstGeom>
-        </p:spPr>
-      </p:pic>
-      <p:sp>
-        <p:nvSpPr>
-          <p:cNvPr id="6" name="Rounded Rectangle 5"/>
-          <p:cNvSpPr/>
-          <p:nvPr/>
-        </p:nvSpPr>
-        <p:spPr>
-          <a:xfrm>
-            <a:off x="4953304" y="502920"/>
-            <a:ext cx="2286000" cy="411480"/>
-          </a:xfrm>
-          <a:prstGeom prst="roundRect">
-            <a:avLst/>
-          </a:prstGeom>
-          <a:solidFill>
-            <a:srgbClr val="F0C864"/>
-          </a:solidFill>
-          <a:ln>
-            <a:noFill/>
-          </a:ln>
-        </p:spPr>
-        <p:style>
-          <a:lnRef idx="1">
-            <a:schemeClr val="accent1"/>
-          </a:lnRef>
-          <a:fillRef idx="3">
-            <a:schemeClr val="accent1"/>
-          </a:fillRef>
-          <a:effectRef idx="2">
-            <a:schemeClr val="accent1"/>
-          </a:effectRef>
-          <a:fontRef idx="minor">
-            <a:schemeClr val="lt1"/>
-          </a:fontRef>
-        </p:style>
-        <p:txBody>
-          <a:bodyPr rtlCol="0" anchor="ctr"/>
-          <a:lstStyle/>
-          <a:p>
-            <a:pPr algn="ctr"/>
-          </a:p>
-        </p:txBody>
-      </p:sp>
-      <p:sp>
-        <p:nvSpPr>
-          <p:cNvPr id="7" name="TextBox 6"/>
-          <p:cNvSpPr txBox="1"/>
-          <p:nvPr/>
-        </p:nvSpPr>
-        <p:spPr>
-          <a:xfrm>
-            <a:off x="4953304" y="521208"/>
-            <a:ext cx="2286000" cy="384048"/>
-          </a:xfrm>
-          <a:prstGeom prst="rect">
-            <a:avLst/>
-          </a:prstGeom>
-          <a:noFill/>
-        </p:spPr>
-        <p:txBody>
-          <a:bodyPr wrap="none">
-            <a:spAutoFit/>
-          </a:bodyPr>
-          <a:lstStyle/>
-          <a:p>
-            <a:pPr algn="ctr">
-              <a:spcAft>
-                <a:spcPts val="1000"/>
-              </a:spcAft>
-            </a:pPr>
-            <a:r>
-              <a:rPr sz="1800" b="1">
-                <a:solidFill>
-                  <a:srgbClr val="5A461E"/>
-                </a:solidFill>
-                <a:latin typeface="Microsoft YaHei"/>
-              </a:rPr>
-              <a:t>课后延伸</a:t>
-            </a:r>
-          </a:p>
-        </p:txBody>
-      </p:sp>
-      <p:sp>
-        <p:nvSpPr>
-          <p:cNvPr id="8" name="TextBox 7"/>
-          <p:cNvSpPr txBox="1"/>
-          <p:nvPr/>
-        </p:nvSpPr>
-        <p:spPr>
-          <a:xfrm>
-            <a:off x="1371600" y="1051560"/>
-            <a:ext cx="9418320" cy="822960"/>
-          </a:xfrm>
-          <a:prstGeom prst="rect">
-            <a:avLst/>
-          </a:prstGeom>
-          <a:noFill/>
-        </p:spPr>
-        <p:txBody>
-          <a:bodyPr wrap="square">
-            <a:spAutoFit/>
-          </a:bodyPr>
-          <a:lstStyle/>
-          <a:p>
-            <a:pPr algn="ctr">
-              <a:spcAft>
-                <a:spcPts val="1000"/>
-              </a:spcAft>
-            </a:pPr>
-            <a:r>
-              <a:rPr sz="3600" b="1">
-                <a:solidFill>
-                  <a:srgbClr val="C89628"/>
-                </a:solidFill>
-                <a:latin typeface="Microsoft YaHei"/>
-              </a:rPr>
-              <a:t>课后作业</a:t>
-            </a:r>
-          </a:p>
-        </p:txBody>
-      </p:sp>
-      <p:sp>
-        <p:nvSpPr>
-          <p:cNvPr id="9" name="Rectangle 8"/>
-          <p:cNvSpPr/>
-          <p:nvPr/>
-        </p:nvSpPr>
-        <p:spPr>
-          <a:xfrm>
-            <a:off x="3200400" y="1691640"/>
-            <a:ext cx="5760720" cy="27432"/>
-          </a:xfrm>
-          <a:prstGeom prst="rect">
-            <a:avLst/>
-          </a:prstGeom>
-          <a:solidFill>
-            <a:srgbClr val="F0C864"/>
-          </a:solidFill>
-          <a:ln>
-            <a:noFill/>
-          </a:ln>
-        </p:spPr>
-        <p:style>
-          <a:lnRef idx="1">
-            <a:schemeClr val="accent1"/>
-          </a:lnRef>
-          <a:fillRef idx="3">
-            <a:schemeClr val="accent1"/>
-          </a:fillRef>
-          <a:effectRef idx="2">
-            <a:schemeClr val="accent1"/>
-          </a:effectRef>
-          <a:fontRef idx="minor">
-            <a:schemeClr val="lt1"/>
-          </a:fontRef>
-        </p:style>
-        <p:txBody>
-          <a:bodyPr rtlCol="0" anchor="ctr"/>
-          <a:lstStyle/>
-          <a:p>
-            <a:pPr algn="ctr"/>
-          </a:p>
-        </p:txBody>
-      </p:sp>
-      <p:sp>
-        <p:nvSpPr>
-          <p:cNvPr id="10" name="Rounded Rectangle 9"/>
-          <p:cNvSpPr/>
-          <p:nvPr/>
-        </p:nvSpPr>
-        <p:spPr>
-          <a:xfrm>
-            <a:off x="1295704" y="1737360"/>
-            <a:ext cx="9601200" cy="1545336"/>
-          </a:xfrm>
-          <a:prstGeom prst="roundRect">
-            <a:avLst/>
-          </a:prstGeom>
-          <a:solidFill>
-            <a:srgbClr val="FFFCF0"/>
-          </a:solidFill>
-          <a:ln w="19050">
-            <a:solidFill>
-              <a:srgbClr val="F0C864"/>
-            </a:solidFill>
-          </a:ln>
-        </p:spPr>
-        <p:style>
-          <a:lnRef idx="1">
-            <a:schemeClr val="accent1"/>
-          </a:lnRef>
-          <a:fillRef idx="3">
-            <a:schemeClr val="accent1"/>
-          </a:fillRef>
-          <a:effectRef idx="2">
-            <a:schemeClr val="accent1"/>
-          </a:effectRef>
-          <a:fontRef idx="minor">
-            <a:schemeClr val="lt1"/>
-          </a:fontRef>
-        </p:style>
-        <p:txBody>
-          <a:bodyPr rtlCol="0" anchor="ctr"/>
-          <a:lstStyle/>
-          <a:p>
-            <a:pPr algn="ctr"/>
-          </a:p>
-        </p:txBody>
-      </p:sp>
-      <p:sp>
-        <p:nvSpPr>
-          <p:cNvPr id="11" name="Oval 10"/>
-          <p:cNvSpPr/>
-          <p:nvPr/>
-        </p:nvSpPr>
-        <p:spPr>
-          <a:xfrm>
-            <a:off x="2621584" y="1920240"/>
-            <a:ext cx="347472" cy="347472"/>
-          </a:xfrm>
-          <a:prstGeom prst="ellipse">
-            <a:avLst/>
-          </a:prstGeom>
-          <a:solidFill>
-            <a:srgbClr val="C89628"/>
-          </a:solidFill>
-          <a:ln>
-            <a:noFill/>
-          </a:ln>
-        </p:spPr>
-        <p:style>
-          <a:lnRef idx="1">
-            <a:schemeClr val="accent1"/>
-          </a:lnRef>
-          <a:fillRef idx="3">
-            <a:schemeClr val="accent1"/>
-          </a:fillRef>
-          <a:effectRef idx="2">
-            <a:schemeClr val="accent1"/>
-          </a:effectRef>
-          <a:fontRef idx="minor">
-            <a:schemeClr val="lt1"/>
-          </a:fontRef>
-        </p:style>
-        <p:txBody>
-          <a:bodyPr rtlCol="0" anchor="ctr"/>
-          <a:lstStyle/>
-          <a:p>
-            <a:pPr algn="ctr"/>
-          </a:p>
-        </p:txBody>
-      </p:sp>
-      <p:sp>
-        <p:nvSpPr>
-          <p:cNvPr id="12" name="TextBox 11"/>
-          <p:cNvSpPr txBox="1"/>
-          <p:nvPr/>
-        </p:nvSpPr>
-        <p:spPr>
-          <a:xfrm>
-            <a:off x="2621584" y="1938528"/>
-            <a:ext cx="347472" cy="329184"/>
-          </a:xfrm>
-          <a:prstGeom prst="rect">
-            <a:avLst/>
-          </a:prstGeom>
-          <a:noFill/>
-        </p:spPr>
-        <p:txBody>
-          <a:bodyPr wrap="none">
-            <a:spAutoFit/>
-          </a:bodyPr>
-          <a:lstStyle/>
-          <a:p>
-            <a:pPr algn="ctr">
-              <a:spcAft>
-                <a:spcPts val="1000"/>
-              </a:spcAft>
-            </a:pPr>
-            <a:r>
-              <a:rPr sz="1400" b="1">
-                <a:solidFill>
-                  <a:srgbClr val="FFFFFF"/>
-                </a:solidFill>
-                <a:latin typeface="Microsoft YaHei"/>
-              </a:rPr>
-              <a:t>1</a:t>
-            </a:r>
-          </a:p>
-        </p:txBody>
-      </p:sp>
-      <p:sp>
-        <p:nvSpPr>
-          <p:cNvPr id="13" name="TextBox 12"/>
-          <p:cNvSpPr txBox="1"/>
-          <p:nvPr/>
-        </p:nvSpPr>
-        <p:spPr>
-          <a:xfrm>
-            <a:off x="3078784" y="1901952"/>
-            <a:ext cx="7863840" cy="457200"/>
+            <a:off x="2758744" y="1810512"/>
+            <a:ext cx="7772400" cy="502920"/>
           </a:xfrm>
           <a:prstGeom prst="rect">
             <a:avLst/>
@@ -8507,8 +7726,8 @@
         </p:nvSpPr>
         <p:spPr>
           <a:xfrm>
-            <a:off x="2621584" y="2487168"/>
-            <a:ext cx="347472" cy="347472"/>
+            <a:off x="2255824" y="2395728"/>
+            <a:ext cx="384048" cy="384048"/>
           </a:xfrm>
           <a:prstGeom prst="ellipse">
             <a:avLst/>
@@ -8550,8 +7769,8 @@
         </p:nvSpPr>
         <p:spPr>
           <a:xfrm>
-            <a:off x="2621584" y="2505456"/>
-            <a:ext cx="347472" cy="329184"/>
+            <a:off x="2255824" y="2414016"/>
+            <a:ext cx="384048" cy="365760"/>
           </a:xfrm>
           <a:prstGeom prst="rect">
             <a:avLst/>
@@ -8570,7 +7789,7 @@
               </a:spcAft>
             </a:pPr>
             <a:r>
-              <a:rPr sz="1400" b="1">
+              <a:rPr sz="1600" b="1">
                 <a:solidFill>
                   <a:srgbClr val="FFFFFF"/>
                 </a:solidFill>
@@ -8589,8 +7808,8 @@
         </p:nvSpPr>
         <p:spPr>
           <a:xfrm>
-            <a:off x="3078784" y="2468880"/>
-            <a:ext cx="7863840" cy="457200"/>
+            <a:off x="2758744" y="2377440"/>
+            <a:ext cx="7772400" cy="502920"/>
           </a:xfrm>
           <a:prstGeom prst="rect">
             <a:avLst/>

--- a/unit6-lesson24-fables.pptx
+++ b/unit6-lesson24-fables.pptx
@@ -3304,8 +3304,8 @@
         </p:nvSpPr>
         <p:spPr>
           <a:xfrm>
-            <a:off x="1371600" y="2011680"/>
-            <a:ext cx="9418320" cy="1645920"/>
+            <a:off x="1371600" y="1828800"/>
+            <a:ext cx="9418320" cy="1828800"/>
           </a:xfrm>
           <a:prstGeom prst="rect">
             <a:avLst/>
@@ -3347,6 +3347,22 @@
                 <a:latin typeface="Microsoft YaHei"/>
               </a:rPr>
               <a:t>第24课 · 第八、九课时 · 智慧与局限</a:t>
+            </a:r>
+          </a:p>
+          <a:p>
+            <a:pPr algn="ctr">
+              <a:spcAft>
+                <a:spcPts val="1000"/>
+              </a:spcAft>
+            </a:pPr>
+            <a:r>
+              <a:rPr sz="2000" b="1">
+                <a:solidFill>
+                  <a:srgbClr val="F0C864"/>
+                </a:solidFill>
+                <a:latin typeface="Microsoft YaHei"/>
+              </a:rPr>
+              <a:t>含课堂笔记 · 2026版</a:t>
             </a:r>
           </a:p>
         </p:txBody>
@@ -3535,8 +3551,342 @@
         </p:nvSpPr>
         <p:spPr>
           <a:xfrm>
-            <a:off x="4953304" y="502920"/>
-            <a:ext cx="2286000" cy="411480"/>
+            <a:off x="502920" y="384048"/>
+            <a:ext cx="2011680" cy="384048"/>
+          </a:xfrm>
+          <a:prstGeom prst="roundRect">
+            <a:avLst/>
+          </a:prstGeom>
+          <a:solidFill>
+            <a:srgbClr val="C89628"/>
+          </a:solidFill>
+          <a:ln>
+            <a:noFill/>
+          </a:ln>
+        </p:spPr>
+        <p:style>
+          <a:lnRef idx="1">
+            <a:schemeClr val="accent1"/>
+          </a:lnRef>
+          <a:fillRef idx="3">
+            <a:schemeClr val="accent1"/>
+          </a:fillRef>
+          <a:effectRef idx="2">
+            <a:schemeClr val="accent1"/>
+          </a:effectRef>
+          <a:fontRef idx="minor">
+            <a:schemeClr val="lt1"/>
+          </a:fontRef>
+        </p:style>
+        <p:txBody>
+          <a:bodyPr rtlCol="0" anchor="ctr"/>
+          <a:lstStyle/>
+          <a:p>
+            <a:pPr algn="ctr"/>
+          </a:p>
+        </p:txBody>
+      </p:sp>
+      <p:sp>
+        <p:nvSpPr>
+          <p:cNvPr id="7" name="TextBox 6"/>
+          <p:cNvSpPr txBox="1"/>
+          <p:nvPr/>
+        </p:nvSpPr>
+        <p:spPr>
+          <a:xfrm>
+            <a:off x="502920" y="402336"/>
+            <a:ext cx="2011680" cy="347472"/>
+          </a:xfrm>
+          <a:prstGeom prst="rect">
+            <a:avLst/>
+          </a:prstGeom>
+          <a:noFill/>
+        </p:spPr>
+        <p:txBody>
+          <a:bodyPr wrap="none">
+            <a:spAutoFit/>
+          </a:bodyPr>
+          <a:lstStyle/>
+          <a:p>
+            <a:pPr algn="ctr">
+              <a:spcAft>
+                <a:spcPts val="1000"/>
+              </a:spcAft>
+            </a:pPr>
+            <a:r>
+              <a:rPr sz="1600" b="1">
+                <a:solidFill>
+                  <a:srgbClr val="FFFFFF"/>
+                </a:solidFill>
+                <a:latin typeface="Microsoft YaHei"/>
+              </a:rPr>
+              <a:t>知识要点</a:t>
+            </a:r>
+          </a:p>
+        </p:txBody>
+      </p:sp>
+      <p:sp>
+        <p:nvSpPr>
+          <p:cNvPr id="8" name="TextBox 7"/>
+          <p:cNvSpPr txBox="1"/>
+          <p:nvPr/>
+        </p:nvSpPr>
+        <p:spPr>
+          <a:xfrm>
+            <a:off x="1371600" y="384048"/>
+            <a:ext cx="9418320" cy="822960"/>
+          </a:xfrm>
+          <a:prstGeom prst="rect">
+            <a:avLst/>
+          </a:prstGeom>
+          <a:noFill/>
+        </p:spPr>
+        <p:txBody>
+          <a:bodyPr wrap="square">
+            <a:spAutoFit/>
+          </a:bodyPr>
+          <a:lstStyle/>
+          <a:p>
+            <a:pPr algn="ctr">
+              <a:spcAft>
+                <a:spcPts val="1000"/>
+              </a:spcAft>
+            </a:pPr>
+            <a:r>
+              <a:rPr sz="3400" b="1">
+                <a:solidFill>
+                  <a:srgbClr val="C89628"/>
+                </a:solidFill>
+                <a:latin typeface="Microsoft YaHei"/>
+              </a:rPr>
+              <a:t>文体知识</a:t>
+            </a:r>
+          </a:p>
+        </p:txBody>
+      </p:sp>
+      <p:sp>
+        <p:nvSpPr>
+          <p:cNvPr id="9" name="Rounded Rectangle 8"/>
+          <p:cNvSpPr/>
+          <p:nvPr/>
+        </p:nvSpPr>
+        <p:spPr>
+          <a:xfrm>
+            <a:off x="1067104" y="1143000"/>
+            <a:ext cx="10058400" cy="3721608"/>
+          </a:xfrm>
+          <a:prstGeom prst="roundRect">
+            <a:avLst/>
+          </a:prstGeom>
+          <a:solidFill>
+            <a:srgbClr val="FFFCEB"/>
+          </a:solidFill>
+          <a:ln w="25400">
+            <a:solidFill>
+              <a:srgbClr val="B48C3C"/>
+            </a:solidFill>
+          </a:ln>
+        </p:spPr>
+        <p:style>
+          <a:lnRef idx="1">
+            <a:schemeClr val="accent1"/>
+          </a:lnRef>
+          <a:fillRef idx="3">
+            <a:schemeClr val="accent1"/>
+          </a:fillRef>
+          <a:effectRef idx="2">
+            <a:schemeClr val="accent1"/>
+          </a:effectRef>
+          <a:fontRef idx="minor">
+            <a:schemeClr val="lt1"/>
+          </a:fontRef>
+        </p:style>
+        <p:txBody>
+          <a:bodyPr rtlCol="0" anchor="ctr"/>
+          <a:lstStyle/>
+          <a:p>
+            <a:pPr algn="ctr"/>
+          </a:p>
+        </p:txBody>
+      </p:sp>
+      <p:sp>
+        <p:nvSpPr>
+          <p:cNvPr id="10" name="Rectangle 9"/>
+          <p:cNvSpPr/>
+          <p:nvPr/>
+        </p:nvSpPr>
+        <p:spPr>
+          <a:xfrm>
+            <a:off x="1067104" y="1143000"/>
+            <a:ext cx="10058400" cy="384048"/>
+          </a:xfrm>
+          <a:prstGeom prst="rect">
+            <a:avLst/>
+          </a:prstGeom>
+          <a:solidFill>
+            <a:srgbClr val="C89628"/>
+          </a:solidFill>
+          <a:ln>
+            <a:noFill/>
+          </a:ln>
+        </p:spPr>
+        <p:style>
+          <a:lnRef idx="1">
+            <a:schemeClr val="accent1"/>
+          </a:lnRef>
+          <a:fillRef idx="3">
+            <a:schemeClr val="accent1"/>
+          </a:fillRef>
+          <a:effectRef idx="2">
+            <a:schemeClr val="accent1"/>
+          </a:effectRef>
+          <a:fontRef idx="minor">
+            <a:schemeClr val="lt1"/>
+          </a:fontRef>
+        </p:style>
+        <p:txBody>
+          <a:bodyPr rtlCol="0" anchor="ctr"/>
+          <a:lstStyle/>
+          <a:p>
+            <a:pPr algn="ctr"/>
+          </a:p>
+        </p:txBody>
+      </p:sp>
+      <p:sp>
+        <p:nvSpPr>
+          <p:cNvPr id="11" name="TextBox 10"/>
+          <p:cNvSpPr txBox="1"/>
+          <p:nvPr/>
+        </p:nvSpPr>
+        <p:spPr>
+          <a:xfrm>
+            <a:off x="1067104" y="1179576"/>
+            <a:ext cx="10058400" cy="347472"/>
+          </a:xfrm>
+          <a:prstGeom prst="rect">
+            <a:avLst/>
+          </a:prstGeom>
+          <a:noFill/>
+        </p:spPr>
+        <p:txBody>
+          <a:bodyPr wrap="none">
+            <a:spAutoFit/>
+          </a:bodyPr>
+          <a:lstStyle/>
+          <a:p>
+            <a:pPr algn="ctr">
+              <a:spcAft>
+                <a:spcPts val="1000"/>
+              </a:spcAft>
+            </a:pPr>
+            <a:r>
+              <a:rPr sz="1800" b="1">
+                <a:solidFill>
+                  <a:srgbClr val="FFFFFF"/>
+                </a:solidFill>
+                <a:latin typeface="Microsoft YaHei"/>
+              </a:rPr>
+              <a:t>📝  课堂笔记  —  请摘抄要点</a:t>
+            </a:r>
+          </a:p>
+        </p:txBody>
+      </p:sp>
+      <p:sp>
+        <p:nvSpPr>
+          <p:cNvPr id="12" name="Rectangle 11"/>
+          <p:cNvSpPr/>
+          <p:nvPr/>
+        </p:nvSpPr>
+        <p:spPr>
+          <a:xfrm>
+            <a:off x="1570024" y="1527048"/>
+            <a:ext cx="27432" cy="3337560"/>
+          </a:xfrm>
+          <a:prstGeom prst="rect">
+            <a:avLst/>
+          </a:prstGeom>
+          <a:solidFill>
+            <a:srgbClr val="DC5050"/>
+          </a:solidFill>
+          <a:ln>
+            <a:noFill/>
+          </a:ln>
+        </p:spPr>
+        <p:style>
+          <a:lnRef idx="1">
+            <a:schemeClr val="accent1"/>
+          </a:lnRef>
+          <a:fillRef idx="3">
+            <a:schemeClr val="accent1"/>
+          </a:fillRef>
+          <a:effectRef idx="2">
+            <a:schemeClr val="accent1"/>
+          </a:effectRef>
+          <a:fontRef idx="minor">
+            <a:schemeClr val="lt1"/>
+          </a:fontRef>
+        </p:style>
+        <p:txBody>
+          <a:bodyPr rtlCol="0" anchor="ctr"/>
+          <a:lstStyle/>
+          <a:p>
+            <a:pPr algn="ctr"/>
+          </a:p>
+        </p:txBody>
+      </p:sp>
+      <p:sp>
+        <p:nvSpPr>
+          <p:cNvPr id="13" name="Rectangle 12"/>
+          <p:cNvSpPr/>
+          <p:nvPr/>
+        </p:nvSpPr>
+        <p:spPr>
+          <a:xfrm>
+            <a:off x="1417320" y="2276856"/>
+            <a:ext cx="9601200" cy="13716"/>
+          </a:xfrm>
+          <a:prstGeom prst="rect">
+            <a:avLst/>
+          </a:prstGeom>
+          <a:solidFill>
+            <a:srgbClr val="D2C8AF"/>
+          </a:solidFill>
+          <a:ln>
+            <a:noFill/>
+          </a:ln>
+        </p:spPr>
+        <p:style>
+          <a:lnRef idx="1">
+            <a:schemeClr val="accent1"/>
+          </a:lnRef>
+          <a:fillRef idx="3">
+            <a:schemeClr val="accent1"/>
+          </a:fillRef>
+          <a:effectRef idx="2">
+            <a:schemeClr val="accent1"/>
+          </a:effectRef>
+          <a:fontRef idx="minor">
+            <a:schemeClr val="lt1"/>
+          </a:fontRef>
+        </p:style>
+        <p:txBody>
+          <a:bodyPr rtlCol="0" anchor="ctr"/>
+          <a:lstStyle/>
+          <a:p>
+            <a:pPr algn="ctr"/>
+          </a:p>
+        </p:txBody>
+      </p:sp>
+      <p:sp>
+        <p:nvSpPr>
+          <p:cNvPr id="14" name="Rounded Rectangle 13"/>
+          <p:cNvSpPr/>
+          <p:nvPr/>
+        </p:nvSpPr>
+        <p:spPr>
+          <a:xfrm>
+            <a:off x="1600200" y="1627632"/>
+            <a:ext cx="1280160" cy="347472"/>
           </a:xfrm>
           <a:prstGeom prst="roundRect">
             <a:avLst/>
@@ -3572,14 +3922,14 @@
       </p:sp>
       <p:sp>
         <p:nvSpPr>
-          <p:cNvPr id="7" name="TextBox 6"/>
+          <p:cNvPr id="15" name="TextBox 14"/>
           <p:cNvSpPr txBox="1"/>
           <p:nvPr/>
         </p:nvSpPr>
         <p:spPr>
           <a:xfrm>
-            <a:off x="4953304" y="521208"/>
-            <a:ext cx="2286000" cy="384048"/>
+            <a:off x="1600200" y="1645920"/>
+            <a:ext cx="1280160" cy="310896"/>
           </a:xfrm>
           <a:prstGeom prst="rect">
             <a:avLst/>
@@ -3604,21 +3954,21 @@
                 </a:solidFill>
                 <a:latin typeface="Microsoft YaHei"/>
               </a:rPr>
-              <a:t>课时目标</a:t>
-            </a:r>
-          </a:p>
-        </p:txBody>
-      </p:sp>
-      <p:sp>
-        <p:nvSpPr>
-          <p:cNvPr id="8" name="TextBox 7"/>
+              <a:t>寓言</a:t>
+            </a:r>
+          </a:p>
+        </p:txBody>
+      </p:sp>
+      <p:sp>
+        <p:nvSpPr>
+          <p:cNvPr id="16" name="TextBox 15"/>
           <p:cNvSpPr txBox="1"/>
           <p:nvPr/>
         </p:nvSpPr>
         <p:spPr>
           <a:xfrm>
-            <a:off x="1371600" y="960120"/>
-            <a:ext cx="9418320" cy="822960"/>
+            <a:off x="3017520" y="1627632"/>
+            <a:ext cx="7498079" cy="658368"/>
           </a:xfrm>
           <a:prstGeom prst="rect">
             <a:avLst/>
@@ -3626,40 +3976,83 @@
           <a:noFill/>
         </p:spPr>
         <p:txBody>
-          <a:bodyPr wrap="square">
+          <a:bodyPr wrap="none">
             <a:spAutoFit/>
           </a:bodyPr>
           <a:lstStyle/>
           <a:p>
-            <a:pPr algn="ctr">
+            <a:pPr algn="l">
               <a:spcAft>
                 <a:spcPts val="1000"/>
               </a:spcAft>
             </a:pPr>
             <a:r>
-              <a:rPr sz="3600" b="1">
+              <a:rPr sz="2100" b="0">
                 <a:solidFill>
-                  <a:srgbClr val="C89628"/>
+                  <a:srgbClr val="5A461E"/>
                 </a:solidFill>
                 <a:latin typeface="Microsoft YaHei"/>
               </a:rPr>
-              <a:t>本课目标</a:t>
-            </a:r>
-          </a:p>
-        </p:txBody>
-      </p:sp>
-      <p:sp>
-        <p:nvSpPr>
-          <p:cNvPr id="9" name="Rectangle 8"/>
+              <a:t>短小故事，寄寓深刻道理，多运用拟人手法</a:t>
+            </a:r>
+          </a:p>
+        </p:txBody>
+      </p:sp>
+      <p:sp>
+        <p:nvSpPr>
+          <p:cNvPr id="17" name="Rectangle 16"/>
           <p:cNvSpPr/>
           <p:nvPr/>
         </p:nvSpPr>
         <p:spPr>
           <a:xfrm>
-            <a:off x="3200400" y="1600200"/>
-            <a:ext cx="5760720" cy="27432"/>
-          </a:xfrm>
-          <a:prstGeom prst="rect">
+            <a:off x="1417320" y="3081527"/>
+            <a:ext cx="9601200" cy="13716"/>
+          </a:xfrm>
+          <a:prstGeom prst="rect">
+            <a:avLst/>
+          </a:prstGeom>
+          <a:solidFill>
+            <a:srgbClr val="D2C8AF"/>
+          </a:solidFill>
+          <a:ln>
+            <a:noFill/>
+          </a:ln>
+        </p:spPr>
+        <p:style>
+          <a:lnRef idx="1">
+            <a:schemeClr val="accent1"/>
+          </a:lnRef>
+          <a:fillRef idx="3">
+            <a:schemeClr val="accent1"/>
+          </a:fillRef>
+          <a:effectRef idx="2">
+            <a:schemeClr val="accent1"/>
+          </a:effectRef>
+          <a:fontRef idx="minor">
+            <a:schemeClr val="lt1"/>
+          </a:fontRef>
+        </p:style>
+        <p:txBody>
+          <a:bodyPr rtlCol="0" anchor="ctr"/>
+          <a:lstStyle/>
+          <a:p>
+            <a:pPr algn="ctr"/>
+          </a:p>
+        </p:txBody>
+      </p:sp>
+      <p:sp>
+        <p:nvSpPr>
+          <p:cNvPr id="18" name="Rounded Rectangle 17"/>
+          <p:cNvSpPr/>
+          <p:nvPr/>
+        </p:nvSpPr>
+        <p:spPr>
+          <a:xfrm>
+            <a:off x="1600200" y="2432303"/>
+            <a:ext cx="1280160" cy="347472"/>
+          </a:xfrm>
+          <a:prstGeom prst="roundRect">
             <a:avLst/>
           </a:prstGeom>
           <a:solidFill>
@@ -3693,25 +4086,101 @@
       </p:sp>
       <p:sp>
         <p:nvSpPr>
-          <p:cNvPr id="10" name="Rounded Rectangle 9"/>
+          <p:cNvPr id="19" name="TextBox 18"/>
+          <p:cNvSpPr txBox="1"/>
+          <p:nvPr/>
+        </p:nvSpPr>
+        <p:spPr>
+          <a:xfrm>
+            <a:off x="1600200" y="2450591"/>
+            <a:ext cx="1280160" cy="310896"/>
+          </a:xfrm>
+          <a:prstGeom prst="rect">
+            <a:avLst/>
+          </a:prstGeom>
+          <a:noFill/>
+        </p:spPr>
+        <p:txBody>
+          <a:bodyPr wrap="none">
+            <a:spAutoFit/>
+          </a:bodyPr>
+          <a:lstStyle/>
+          <a:p>
+            <a:pPr algn="ctr">
+              <a:spcAft>
+                <a:spcPts val="1000"/>
+              </a:spcAft>
+            </a:pPr>
+            <a:r>
+              <a:rPr sz="1800" b="1">
+                <a:solidFill>
+                  <a:srgbClr val="5A461E"/>
+                </a:solidFill>
+                <a:latin typeface="Microsoft YaHei"/>
+              </a:rPr>
+              <a:t>特点</a:t>
+            </a:r>
+          </a:p>
+        </p:txBody>
+      </p:sp>
+      <p:sp>
+        <p:nvSpPr>
+          <p:cNvPr id="20" name="TextBox 19"/>
+          <p:cNvSpPr txBox="1"/>
+          <p:nvPr/>
+        </p:nvSpPr>
+        <p:spPr>
+          <a:xfrm>
+            <a:off x="3017520" y="2432303"/>
+            <a:ext cx="7498079" cy="658368"/>
+          </a:xfrm>
+          <a:prstGeom prst="rect">
+            <a:avLst/>
+          </a:prstGeom>
+          <a:noFill/>
+        </p:spPr>
+        <p:txBody>
+          <a:bodyPr wrap="none">
+            <a:spAutoFit/>
+          </a:bodyPr>
+          <a:lstStyle/>
+          <a:p>
+            <a:pPr algn="l">
+              <a:spcAft>
+                <a:spcPts val="1000"/>
+              </a:spcAft>
+            </a:pPr>
+            <a:r>
+              <a:rPr sz="2100" b="0">
+                <a:solidFill>
+                  <a:srgbClr val="5A461E"/>
+                </a:solidFill>
+                <a:latin typeface="Microsoft YaHei"/>
+              </a:rPr>
+              <a:t>情节简短、人物典型、寓意明确、多讽刺或警醒</a:t>
+            </a:r>
+          </a:p>
+        </p:txBody>
+      </p:sp>
+      <p:sp>
+        <p:nvSpPr>
+          <p:cNvPr id="21" name="Rectangle 20"/>
           <p:cNvSpPr/>
           <p:nvPr/>
         </p:nvSpPr>
         <p:spPr>
           <a:xfrm>
-            <a:off x="1295704" y="1645920"/>
-            <a:ext cx="9601200" cy="2240280"/>
-          </a:xfrm>
-          <a:prstGeom prst="roundRect">
+            <a:off x="1417320" y="3886200"/>
+            <a:ext cx="9601200" cy="13716"/>
+          </a:xfrm>
+          <a:prstGeom prst="rect">
             <a:avLst/>
           </a:prstGeom>
           <a:solidFill>
-            <a:srgbClr val="FFFCF0"/>
+            <a:srgbClr val="D2C8AF"/>
           </a:solidFill>
-          <a:ln w="19050">
-            <a:solidFill>
-              <a:srgbClr val="F0C864"/>
-            </a:solidFill>
+          <a:ln>
+            <a:noFill/>
           </a:ln>
         </p:spPr>
         <p:style>
@@ -3738,20 +4207,20 @@
       </p:sp>
       <p:sp>
         <p:nvSpPr>
-          <p:cNvPr id="11" name="Oval 10"/>
+          <p:cNvPr id="22" name="Rounded Rectangle 21"/>
           <p:cNvSpPr/>
           <p:nvPr/>
         </p:nvSpPr>
         <p:spPr>
           <a:xfrm>
-            <a:off x="2255824" y="1828800"/>
-            <a:ext cx="384048" cy="384048"/>
-          </a:xfrm>
-          <a:prstGeom prst="ellipse">
+            <a:off x="1600200" y="3236976"/>
+            <a:ext cx="1444752" cy="347472"/>
+          </a:xfrm>
+          <a:prstGeom prst="roundRect">
             <a:avLst/>
           </a:prstGeom>
           <a:solidFill>
-            <a:srgbClr val="C89628"/>
+            <a:srgbClr val="F0C864"/>
           </a:solidFill>
           <a:ln>
             <a:noFill/>
@@ -3781,14 +4250,14 @@
       </p:sp>
       <p:sp>
         <p:nvSpPr>
-          <p:cNvPr id="12" name="TextBox 11"/>
+          <p:cNvPr id="23" name="TextBox 22"/>
           <p:cNvSpPr txBox="1"/>
           <p:nvPr/>
         </p:nvSpPr>
         <p:spPr>
           <a:xfrm>
-            <a:off x="2255824" y="1847088"/>
-            <a:ext cx="384048" cy="365760"/>
+            <a:off x="1600200" y="3255264"/>
+            <a:ext cx="1444752" cy="310896"/>
           </a:xfrm>
           <a:prstGeom prst="rect">
             <a:avLst/>
@@ -3807,27 +4276,27 @@
               </a:spcAft>
             </a:pPr>
             <a:r>
-              <a:rPr sz="1600" b="1">
+              <a:rPr sz="1800" b="1">
                 <a:solidFill>
-                  <a:srgbClr val="FFFFFF"/>
+                  <a:srgbClr val="5A461E"/>
                 </a:solidFill>
                 <a:latin typeface="Microsoft YaHei"/>
               </a:rPr>
-              <a:t>1</a:t>
-            </a:r>
-          </a:p>
-        </p:txBody>
-      </p:sp>
-      <p:sp>
-        <p:nvSpPr>
-          <p:cNvPr id="13" name="TextBox 12"/>
+              <a:t>四则出处</a:t>
+            </a:r>
+          </a:p>
+        </p:txBody>
+      </p:sp>
+      <p:sp>
+        <p:nvSpPr>
+          <p:cNvPr id="24" name="TextBox 23"/>
           <p:cNvSpPr txBox="1"/>
           <p:nvPr/>
         </p:nvSpPr>
         <p:spPr>
           <a:xfrm>
-            <a:off x="2758744" y="1810512"/>
-            <a:ext cx="7772400" cy="502920"/>
+            <a:off x="3182112" y="3236976"/>
+            <a:ext cx="7333488" cy="658368"/>
           </a:xfrm>
           <a:prstGeom prst="rect">
             <a:avLst/>
@@ -3846,33 +4315,33 @@
               </a:spcAft>
             </a:pPr>
             <a:r>
-              <a:rPr sz="2400" b="0">
+              <a:rPr sz="2100" b="0">
                 <a:solidFill>
                   <a:srgbClr val="5A461E"/>
                 </a:solidFill>
                 <a:latin typeface="Microsoft YaHei"/>
               </a:rPr>
-              <a:t>归纳寓言文体特点，理解各则寓意</a:t>
-            </a:r>
-          </a:p>
-        </p:txBody>
-      </p:sp>
-      <p:sp>
-        <p:nvSpPr>
-          <p:cNvPr id="14" name="Oval 13"/>
+              <a:t>《赫耳墨斯和雕像者》《蚊子和狮子》出自《伊索寓言》</a:t>
+            </a:r>
+          </a:p>
+        </p:txBody>
+      </p:sp>
+      <p:sp>
+        <p:nvSpPr>
+          <p:cNvPr id="25" name="Rectangle 24"/>
           <p:cNvSpPr/>
           <p:nvPr/>
         </p:nvSpPr>
         <p:spPr>
           <a:xfrm>
-            <a:off x="2255824" y="2395728"/>
-            <a:ext cx="384048" cy="384048"/>
-          </a:xfrm>
-          <a:prstGeom prst="ellipse">
+            <a:off x="1417320" y="4690872"/>
+            <a:ext cx="9601200" cy="13716"/>
+          </a:xfrm>
+          <a:prstGeom prst="rect">
             <a:avLst/>
           </a:prstGeom>
           <a:solidFill>
-            <a:srgbClr val="C89628"/>
+            <a:srgbClr val="D2C8AF"/>
           </a:solidFill>
           <a:ln>
             <a:noFill/>
@@ -3902,53 +4371,14 @@
       </p:sp>
       <p:sp>
         <p:nvSpPr>
-          <p:cNvPr id="15" name="TextBox 14"/>
+          <p:cNvPr id="26" name="TextBox 25"/>
           <p:cNvSpPr txBox="1"/>
           <p:nvPr/>
         </p:nvSpPr>
         <p:spPr>
           <a:xfrm>
-            <a:off x="2255824" y="2414016"/>
-            <a:ext cx="384048" cy="365760"/>
-          </a:xfrm>
-          <a:prstGeom prst="rect">
-            <a:avLst/>
-          </a:prstGeom>
-          <a:noFill/>
-        </p:spPr>
-        <p:txBody>
-          <a:bodyPr wrap="none">
-            <a:spAutoFit/>
-          </a:bodyPr>
-          <a:lstStyle/>
-          <a:p>
-            <a:pPr algn="ctr">
-              <a:spcAft>
-                <a:spcPts val="1000"/>
-              </a:spcAft>
-            </a:pPr>
-            <a:r>
-              <a:rPr sz="1600" b="1">
-                <a:solidFill>
-                  <a:srgbClr val="FFFFFF"/>
-                </a:solidFill>
-                <a:latin typeface="Microsoft YaHei"/>
-              </a:rPr>
-              <a:t>2</a:t>
-            </a:r>
-          </a:p>
-        </p:txBody>
-      </p:sp>
-      <p:sp>
-        <p:nvSpPr>
-          <p:cNvPr id="16" name="TextBox 15"/>
-          <p:cNvSpPr txBox="1"/>
-          <p:nvPr/>
-        </p:nvSpPr>
-        <p:spPr>
-          <a:xfrm>
-            <a:off x="2758744" y="2377440"/>
-            <a:ext cx="7772400" cy="502920"/>
+            <a:off x="1600200" y="4041648"/>
+            <a:ext cx="8915400" cy="658368"/>
           </a:xfrm>
           <a:prstGeom prst="rect">
             <a:avLst/>
@@ -3967,134 +4397,13 @@
               </a:spcAft>
             </a:pPr>
             <a:r>
-              <a:rPr sz="2400" b="0">
+              <a:rPr sz="2100" b="0">
                 <a:solidFill>
                   <a:srgbClr val="5A461E"/>
                 </a:solidFill>
                 <a:latin typeface="Microsoft YaHei"/>
               </a:rPr>
-              <a:t>借助注释疏通文言，积累重点词语</a:t>
-            </a:r>
-          </a:p>
-        </p:txBody>
-      </p:sp>
-      <p:sp>
-        <p:nvSpPr>
-          <p:cNvPr id="17" name="Oval 16"/>
-          <p:cNvSpPr/>
-          <p:nvPr/>
-        </p:nvSpPr>
-        <p:spPr>
-          <a:xfrm>
-            <a:off x="2255824" y="2962656"/>
-            <a:ext cx="384048" cy="384048"/>
-          </a:xfrm>
-          <a:prstGeom prst="ellipse">
-            <a:avLst/>
-          </a:prstGeom>
-          <a:solidFill>
-            <a:srgbClr val="C89628"/>
-          </a:solidFill>
-          <a:ln>
-            <a:noFill/>
-          </a:ln>
-        </p:spPr>
-        <p:style>
-          <a:lnRef idx="1">
-            <a:schemeClr val="accent1"/>
-          </a:lnRef>
-          <a:fillRef idx="3">
-            <a:schemeClr val="accent1"/>
-          </a:fillRef>
-          <a:effectRef idx="2">
-            <a:schemeClr val="accent1"/>
-          </a:effectRef>
-          <a:fontRef idx="minor">
-            <a:schemeClr val="lt1"/>
-          </a:fontRef>
-        </p:style>
-        <p:txBody>
-          <a:bodyPr rtlCol="0" anchor="ctr"/>
-          <a:lstStyle/>
-          <a:p>
-            <a:pPr algn="ctr"/>
-          </a:p>
-        </p:txBody>
-      </p:sp>
-      <p:sp>
-        <p:nvSpPr>
-          <p:cNvPr id="18" name="TextBox 17"/>
-          <p:cNvSpPr txBox="1"/>
-          <p:nvPr/>
-        </p:nvSpPr>
-        <p:spPr>
-          <a:xfrm>
-            <a:off x="2255824" y="2980944"/>
-            <a:ext cx="384048" cy="365760"/>
-          </a:xfrm>
-          <a:prstGeom prst="rect">
-            <a:avLst/>
-          </a:prstGeom>
-          <a:noFill/>
-        </p:spPr>
-        <p:txBody>
-          <a:bodyPr wrap="none">
-            <a:spAutoFit/>
-          </a:bodyPr>
-          <a:lstStyle/>
-          <a:p>
-            <a:pPr algn="ctr">
-              <a:spcAft>
-                <a:spcPts val="1000"/>
-              </a:spcAft>
-            </a:pPr>
-            <a:r>
-              <a:rPr sz="1600" b="1">
-                <a:solidFill>
-                  <a:srgbClr val="FFFFFF"/>
-                </a:solidFill>
-                <a:latin typeface="Microsoft YaHei"/>
-              </a:rPr>
-              <a:t>3</a:t>
-            </a:r>
-          </a:p>
-        </p:txBody>
-      </p:sp>
-      <p:sp>
-        <p:nvSpPr>
-          <p:cNvPr id="19" name="TextBox 18"/>
-          <p:cNvSpPr txBox="1"/>
-          <p:nvPr/>
-        </p:nvSpPr>
-        <p:spPr>
-          <a:xfrm>
-            <a:off x="2758744" y="2944368"/>
-            <a:ext cx="7772400" cy="502920"/>
-          </a:xfrm>
-          <a:prstGeom prst="rect">
-            <a:avLst/>
-          </a:prstGeom>
-          <a:noFill/>
-        </p:spPr>
-        <p:txBody>
-          <a:bodyPr wrap="none">
-            <a:spAutoFit/>
-          </a:bodyPr>
-          <a:lstStyle/>
-          <a:p>
-            <a:pPr algn="l">
-              <a:spcAft>
-                <a:spcPts val="1000"/>
-              </a:spcAft>
-            </a:pPr>
-            <a:r>
-              <a:rPr sz="2400" b="0">
-                <a:solidFill>
-                  <a:srgbClr val="5A461E"/>
-                </a:solidFill>
-                <a:latin typeface="Microsoft YaHei"/>
-              </a:rPr>
-              <a:t>分析寓意与情节设计，尝试寓言新编</a:t>
+              <a:t>《穿井得一人》《杞人忧天》出自《吕氏春秋》</a:t>
             </a:r>
           </a:p>
         </p:txBody>
@@ -4240,8 +4549,342 @@
         </p:nvSpPr>
         <p:spPr>
           <a:xfrm>
-            <a:off x="4953304" y="1005840"/>
-            <a:ext cx="2286000" cy="411480"/>
+            <a:off x="502920" y="384048"/>
+            <a:ext cx="2011680" cy="384048"/>
+          </a:xfrm>
+          <a:prstGeom prst="roundRect">
+            <a:avLst/>
+          </a:prstGeom>
+          <a:solidFill>
+            <a:srgbClr val="C89628"/>
+          </a:solidFill>
+          <a:ln>
+            <a:noFill/>
+          </a:ln>
+        </p:spPr>
+        <p:style>
+          <a:lnRef idx="1">
+            <a:schemeClr val="accent1"/>
+          </a:lnRef>
+          <a:fillRef idx="3">
+            <a:schemeClr val="accent1"/>
+          </a:fillRef>
+          <a:effectRef idx="2">
+            <a:schemeClr val="accent1"/>
+          </a:effectRef>
+          <a:fontRef idx="minor">
+            <a:schemeClr val="lt1"/>
+          </a:fontRef>
+        </p:style>
+        <p:txBody>
+          <a:bodyPr rtlCol="0" anchor="ctr"/>
+          <a:lstStyle/>
+          <a:p>
+            <a:pPr algn="ctr"/>
+          </a:p>
+        </p:txBody>
+      </p:sp>
+      <p:sp>
+        <p:nvSpPr>
+          <p:cNvPr id="7" name="TextBox 6"/>
+          <p:cNvSpPr txBox="1"/>
+          <p:nvPr/>
+        </p:nvSpPr>
+        <p:spPr>
+          <a:xfrm>
+            <a:off x="502920" y="402336"/>
+            <a:ext cx="2011680" cy="347472"/>
+          </a:xfrm>
+          <a:prstGeom prst="rect">
+            <a:avLst/>
+          </a:prstGeom>
+          <a:noFill/>
+        </p:spPr>
+        <p:txBody>
+          <a:bodyPr wrap="none">
+            <a:spAutoFit/>
+          </a:bodyPr>
+          <a:lstStyle/>
+          <a:p>
+            <a:pPr algn="ctr">
+              <a:spcAft>
+                <a:spcPts val="1000"/>
+              </a:spcAft>
+            </a:pPr>
+            <a:r>
+              <a:rPr sz="1600" b="1">
+                <a:solidFill>
+                  <a:srgbClr val="FFFFFF"/>
+                </a:solidFill>
+                <a:latin typeface="Microsoft YaHei"/>
+              </a:rPr>
+              <a:t>寓意笔记</a:t>
+            </a:r>
+          </a:p>
+        </p:txBody>
+      </p:sp>
+      <p:sp>
+        <p:nvSpPr>
+          <p:cNvPr id="8" name="TextBox 7"/>
+          <p:cNvSpPr txBox="1"/>
+          <p:nvPr/>
+        </p:nvSpPr>
+        <p:spPr>
+          <a:xfrm>
+            <a:off x="1371600" y="384048"/>
+            <a:ext cx="9418320" cy="822960"/>
+          </a:xfrm>
+          <a:prstGeom prst="rect">
+            <a:avLst/>
+          </a:prstGeom>
+          <a:noFill/>
+        </p:spPr>
+        <p:txBody>
+          <a:bodyPr wrap="square">
+            <a:spAutoFit/>
+          </a:bodyPr>
+          <a:lstStyle/>
+          <a:p>
+            <a:pPr algn="ctr">
+              <a:spcAft>
+                <a:spcPts val="1000"/>
+              </a:spcAft>
+            </a:pPr>
+            <a:r>
+              <a:rPr sz="3400" b="1">
+                <a:solidFill>
+                  <a:srgbClr val="C89628"/>
+                </a:solidFill>
+                <a:latin typeface="Microsoft YaHei"/>
+              </a:rPr>
+              <a:t>四则寓意</a:t>
+            </a:r>
+          </a:p>
+        </p:txBody>
+      </p:sp>
+      <p:sp>
+        <p:nvSpPr>
+          <p:cNvPr id="9" name="Rounded Rectangle 8"/>
+          <p:cNvSpPr/>
+          <p:nvPr/>
+        </p:nvSpPr>
+        <p:spPr>
+          <a:xfrm>
+            <a:off x="1067104" y="1143000"/>
+            <a:ext cx="10058400" cy="3721608"/>
+          </a:xfrm>
+          <a:prstGeom prst="roundRect">
+            <a:avLst/>
+          </a:prstGeom>
+          <a:solidFill>
+            <a:srgbClr val="FFFCEB"/>
+          </a:solidFill>
+          <a:ln w="25400">
+            <a:solidFill>
+              <a:srgbClr val="B48C3C"/>
+            </a:solidFill>
+          </a:ln>
+        </p:spPr>
+        <p:style>
+          <a:lnRef idx="1">
+            <a:schemeClr val="accent1"/>
+          </a:lnRef>
+          <a:fillRef idx="3">
+            <a:schemeClr val="accent1"/>
+          </a:fillRef>
+          <a:effectRef idx="2">
+            <a:schemeClr val="accent1"/>
+          </a:effectRef>
+          <a:fontRef idx="minor">
+            <a:schemeClr val="lt1"/>
+          </a:fontRef>
+        </p:style>
+        <p:txBody>
+          <a:bodyPr rtlCol="0" anchor="ctr"/>
+          <a:lstStyle/>
+          <a:p>
+            <a:pPr algn="ctr"/>
+          </a:p>
+        </p:txBody>
+      </p:sp>
+      <p:sp>
+        <p:nvSpPr>
+          <p:cNvPr id="10" name="Rectangle 9"/>
+          <p:cNvSpPr/>
+          <p:nvPr/>
+        </p:nvSpPr>
+        <p:spPr>
+          <a:xfrm>
+            <a:off x="1067104" y="1143000"/>
+            <a:ext cx="10058400" cy="384048"/>
+          </a:xfrm>
+          <a:prstGeom prst="rect">
+            <a:avLst/>
+          </a:prstGeom>
+          <a:solidFill>
+            <a:srgbClr val="C89628"/>
+          </a:solidFill>
+          <a:ln>
+            <a:noFill/>
+          </a:ln>
+        </p:spPr>
+        <p:style>
+          <a:lnRef idx="1">
+            <a:schemeClr val="accent1"/>
+          </a:lnRef>
+          <a:fillRef idx="3">
+            <a:schemeClr val="accent1"/>
+          </a:fillRef>
+          <a:effectRef idx="2">
+            <a:schemeClr val="accent1"/>
+          </a:effectRef>
+          <a:fontRef idx="minor">
+            <a:schemeClr val="lt1"/>
+          </a:fontRef>
+        </p:style>
+        <p:txBody>
+          <a:bodyPr rtlCol="0" anchor="ctr"/>
+          <a:lstStyle/>
+          <a:p>
+            <a:pPr algn="ctr"/>
+          </a:p>
+        </p:txBody>
+      </p:sp>
+      <p:sp>
+        <p:nvSpPr>
+          <p:cNvPr id="11" name="TextBox 10"/>
+          <p:cNvSpPr txBox="1"/>
+          <p:nvPr/>
+        </p:nvSpPr>
+        <p:spPr>
+          <a:xfrm>
+            <a:off x="1067104" y="1179576"/>
+            <a:ext cx="10058400" cy="347472"/>
+          </a:xfrm>
+          <a:prstGeom prst="rect">
+            <a:avLst/>
+          </a:prstGeom>
+          <a:noFill/>
+        </p:spPr>
+        <p:txBody>
+          <a:bodyPr wrap="none">
+            <a:spAutoFit/>
+          </a:bodyPr>
+          <a:lstStyle/>
+          <a:p>
+            <a:pPr algn="ctr">
+              <a:spcAft>
+                <a:spcPts val="1000"/>
+              </a:spcAft>
+            </a:pPr>
+            <a:r>
+              <a:rPr sz="1800" b="1">
+                <a:solidFill>
+                  <a:srgbClr val="FFFFFF"/>
+                </a:solidFill>
+                <a:latin typeface="Microsoft YaHei"/>
+              </a:rPr>
+              <a:t>📝  课堂笔记  —  请摘抄要点</a:t>
+            </a:r>
+          </a:p>
+        </p:txBody>
+      </p:sp>
+      <p:sp>
+        <p:nvSpPr>
+          <p:cNvPr id="12" name="Rectangle 11"/>
+          <p:cNvSpPr/>
+          <p:nvPr/>
+        </p:nvSpPr>
+        <p:spPr>
+          <a:xfrm>
+            <a:off x="1570024" y="1527048"/>
+            <a:ext cx="27432" cy="3337560"/>
+          </a:xfrm>
+          <a:prstGeom prst="rect">
+            <a:avLst/>
+          </a:prstGeom>
+          <a:solidFill>
+            <a:srgbClr val="DC5050"/>
+          </a:solidFill>
+          <a:ln>
+            <a:noFill/>
+          </a:ln>
+        </p:spPr>
+        <p:style>
+          <a:lnRef idx="1">
+            <a:schemeClr val="accent1"/>
+          </a:lnRef>
+          <a:fillRef idx="3">
+            <a:schemeClr val="accent1"/>
+          </a:fillRef>
+          <a:effectRef idx="2">
+            <a:schemeClr val="accent1"/>
+          </a:effectRef>
+          <a:fontRef idx="minor">
+            <a:schemeClr val="lt1"/>
+          </a:fontRef>
+        </p:style>
+        <p:txBody>
+          <a:bodyPr rtlCol="0" anchor="ctr"/>
+          <a:lstStyle/>
+          <a:p>
+            <a:pPr algn="ctr"/>
+          </a:p>
+        </p:txBody>
+      </p:sp>
+      <p:sp>
+        <p:nvSpPr>
+          <p:cNvPr id="13" name="Rectangle 12"/>
+          <p:cNvSpPr/>
+          <p:nvPr/>
+        </p:nvSpPr>
+        <p:spPr>
+          <a:xfrm>
+            <a:off x="1417320" y="2276856"/>
+            <a:ext cx="9601200" cy="13716"/>
+          </a:xfrm>
+          <a:prstGeom prst="rect">
+            <a:avLst/>
+          </a:prstGeom>
+          <a:solidFill>
+            <a:srgbClr val="D2C8AF"/>
+          </a:solidFill>
+          <a:ln>
+            <a:noFill/>
+          </a:ln>
+        </p:spPr>
+        <p:style>
+          <a:lnRef idx="1">
+            <a:schemeClr val="accent1"/>
+          </a:lnRef>
+          <a:fillRef idx="3">
+            <a:schemeClr val="accent1"/>
+          </a:fillRef>
+          <a:effectRef idx="2">
+            <a:schemeClr val="accent1"/>
+          </a:effectRef>
+          <a:fontRef idx="minor">
+            <a:schemeClr val="lt1"/>
+          </a:fontRef>
+        </p:style>
+        <p:txBody>
+          <a:bodyPr rtlCol="0" anchor="ctr"/>
+          <a:lstStyle/>
+          <a:p>
+            <a:pPr algn="ctr"/>
+          </a:p>
+        </p:txBody>
+      </p:sp>
+      <p:sp>
+        <p:nvSpPr>
+          <p:cNvPr id="14" name="Rounded Rectangle 13"/>
+          <p:cNvSpPr/>
+          <p:nvPr/>
+        </p:nvSpPr>
+        <p:spPr>
+          <a:xfrm>
+            <a:off x="1600200" y="1627632"/>
+            <a:ext cx="1444752" cy="347472"/>
           </a:xfrm>
           <a:prstGeom prst="roundRect">
             <a:avLst/>
@@ -4277,14 +4920,14 @@
       </p:sp>
       <p:sp>
         <p:nvSpPr>
-          <p:cNvPr id="7" name="TextBox 6"/>
+          <p:cNvPr id="15" name="TextBox 14"/>
           <p:cNvSpPr txBox="1"/>
           <p:nvPr/>
         </p:nvSpPr>
         <p:spPr>
           <a:xfrm>
-            <a:off x="4953304" y="1024128"/>
-            <a:ext cx="2286000" cy="384048"/>
+            <a:off x="1600200" y="1645920"/>
+            <a:ext cx="1444752" cy="310896"/>
           </a:xfrm>
           <a:prstGeom prst="rect">
             <a:avLst/>
@@ -4309,21 +4952,21 @@
                 </a:solidFill>
                 <a:latin typeface="Microsoft YaHei"/>
               </a:rPr>
-              <a:t>想一想</a:t>
-            </a:r>
-          </a:p>
-        </p:txBody>
-      </p:sp>
-      <p:sp>
-        <p:nvSpPr>
-          <p:cNvPr id="8" name="TextBox 7"/>
+              <a:t>赫耳墨斯</a:t>
+            </a:r>
+          </a:p>
+        </p:txBody>
+      </p:sp>
+      <p:sp>
+        <p:nvSpPr>
+          <p:cNvPr id="16" name="TextBox 15"/>
           <p:cNvSpPr txBox="1"/>
           <p:nvPr/>
         </p:nvSpPr>
         <p:spPr>
           <a:xfrm>
-            <a:off x="1371600" y="1600200"/>
-            <a:ext cx="9418320" cy="822960"/>
+            <a:off x="3182112" y="1627632"/>
+            <a:ext cx="7333488" cy="658368"/>
           </a:xfrm>
           <a:prstGeom prst="rect">
             <a:avLst/>
@@ -4331,40 +4974,83 @@
           <a:noFill/>
         </p:spPr>
         <p:txBody>
-          <a:bodyPr wrap="square">
+          <a:bodyPr wrap="none">
             <a:spAutoFit/>
           </a:bodyPr>
           <a:lstStyle/>
           <a:p>
-            <a:pPr algn="ctr">
+            <a:pPr algn="l">
               <a:spcAft>
                 <a:spcPts val="1000"/>
               </a:spcAft>
             </a:pPr>
             <a:r>
-              <a:rPr sz="3200" b="1">
+              <a:rPr sz="2100" b="0">
                 <a:solidFill>
-                  <a:srgbClr val="C89628"/>
+                  <a:srgbClr val="5A461E"/>
                 </a:solidFill>
                 <a:latin typeface="Microsoft YaHei"/>
               </a:rPr>
-              <a:t>寓言是「穿着外套的真理」</a:t>
-            </a:r>
-          </a:p>
-        </p:txBody>
-      </p:sp>
-      <p:sp>
-        <p:nvSpPr>
-          <p:cNvPr id="9" name="Rectangle 8"/>
+              <a:t>讽刺自高自大、妄自尊重的人</a:t>
+            </a:r>
+          </a:p>
+        </p:txBody>
+      </p:sp>
+      <p:sp>
+        <p:nvSpPr>
+          <p:cNvPr id="17" name="Rectangle 16"/>
           <p:cNvSpPr/>
           <p:nvPr/>
         </p:nvSpPr>
         <p:spPr>
           <a:xfrm>
-            <a:off x="3200400" y="4389120"/>
-            <a:ext cx="5760720" cy="27432"/>
-          </a:xfrm>
-          <a:prstGeom prst="rect">
+            <a:off x="1417320" y="3081527"/>
+            <a:ext cx="9601200" cy="13716"/>
+          </a:xfrm>
+          <a:prstGeom prst="rect">
+            <a:avLst/>
+          </a:prstGeom>
+          <a:solidFill>
+            <a:srgbClr val="D2C8AF"/>
+          </a:solidFill>
+          <a:ln>
+            <a:noFill/>
+          </a:ln>
+        </p:spPr>
+        <p:style>
+          <a:lnRef idx="1">
+            <a:schemeClr val="accent1"/>
+          </a:lnRef>
+          <a:fillRef idx="3">
+            <a:schemeClr val="accent1"/>
+          </a:fillRef>
+          <a:effectRef idx="2">
+            <a:schemeClr val="accent1"/>
+          </a:effectRef>
+          <a:fontRef idx="minor">
+            <a:schemeClr val="lt1"/>
+          </a:fontRef>
+        </p:style>
+        <p:txBody>
+          <a:bodyPr rtlCol="0" anchor="ctr"/>
+          <a:lstStyle/>
+          <a:p>
+            <a:pPr algn="ctr"/>
+          </a:p>
+        </p:txBody>
+      </p:sp>
+      <p:sp>
+        <p:nvSpPr>
+          <p:cNvPr id="18" name="Rounded Rectangle 17"/>
+          <p:cNvSpPr/>
+          <p:nvPr/>
+        </p:nvSpPr>
+        <p:spPr>
+          <a:xfrm>
+            <a:off x="1600200" y="2432303"/>
+            <a:ext cx="1737360" cy="347472"/>
+          </a:xfrm>
+          <a:prstGeom prst="roundRect">
             <a:avLst/>
           </a:prstGeom>
           <a:solidFill>
@@ -4398,14 +5084,14 @@
       </p:sp>
       <p:sp>
         <p:nvSpPr>
-          <p:cNvPr id="10" name="TextBox 9"/>
+          <p:cNvPr id="19" name="TextBox 18"/>
           <p:cNvSpPr txBox="1"/>
           <p:nvPr/>
         </p:nvSpPr>
         <p:spPr>
           <a:xfrm>
-            <a:off x="1828800" y="4663440"/>
-            <a:ext cx="8503920" cy="914400"/>
+            <a:off x="1600200" y="2450591"/>
+            <a:ext cx="1737360" cy="310896"/>
           </a:xfrm>
           <a:prstGeom prst="rect">
             <a:avLst/>
@@ -4424,13 +5110,380 @@
               </a:spcAft>
             </a:pPr>
             <a:r>
-              <a:rPr sz="2200" b="0">
+              <a:rPr sz="1800" b="1">
                 <a:solidFill>
-                  <a:srgbClr val="C89628"/>
+                  <a:srgbClr val="5A461E"/>
                 </a:solidFill>
                 <a:latin typeface="Microsoft YaHei"/>
               </a:rPr>
-              <a:t>伊索、吕不韦、列子……跨越时空，智慧相通</a:t>
+              <a:t>蚊子和狮子</a:t>
+            </a:r>
+          </a:p>
+        </p:txBody>
+      </p:sp>
+      <p:sp>
+        <p:nvSpPr>
+          <p:cNvPr id="20" name="TextBox 19"/>
+          <p:cNvSpPr txBox="1"/>
+          <p:nvPr/>
+        </p:nvSpPr>
+        <p:spPr>
+          <a:xfrm>
+            <a:off x="3474720" y="2432303"/>
+            <a:ext cx="7040879" cy="658368"/>
+          </a:xfrm>
+          <a:prstGeom prst="rect">
+            <a:avLst/>
+          </a:prstGeom>
+          <a:noFill/>
+        </p:spPr>
+        <p:txBody>
+          <a:bodyPr wrap="none">
+            <a:spAutoFit/>
+          </a:bodyPr>
+          <a:lstStyle/>
+          <a:p>
+            <a:pPr algn="l">
+              <a:spcAft>
+                <a:spcPts val="1000"/>
+              </a:spcAft>
+            </a:pPr>
+            <a:r>
+              <a:rPr sz="2100" b="0">
+                <a:solidFill>
+                  <a:srgbClr val="5A461E"/>
+                </a:solidFill>
+                <a:latin typeface="Microsoft YaHei"/>
+              </a:rPr>
+              <a:t>再小的个体也有长处，骄兵必败</a:t>
+            </a:r>
+          </a:p>
+        </p:txBody>
+      </p:sp>
+      <p:sp>
+        <p:nvSpPr>
+          <p:cNvPr id="21" name="Rectangle 20"/>
+          <p:cNvSpPr/>
+          <p:nvPr/>
+        </p:nvSpPr>
+        <p:spPr>
+          <a:xfrm>
+            <a:off x="1417320" y="3886200"/>
+            <a:ext cx="9601200" cy="13716"/>
+          </a:xfrm>
+          <a:prstGeom prst="rect">
+            <a:avLst/>
+          </a:prstGeom>
+          <a:solidFill>
+            <a:srgbClr val="D2C8AF"/>
+          </a:solidFill>
+          <a:ln>
+            <a:noFill/>
+          </a:ln>
+        </p:spPr>
+        <p:style>
+          <a:lnRef idx="1">
+            <a:schemeClr val="accent1"/>
+          </a:lnRef>
+          <a:fillRef idx="3">
+            <a:schemeClr val="accent1"/>
+          </a:fillRef>
+          <a:effectRef idx="2">
+            <a:schemeClr val="accent1"/>
+          </a:effectRef>
+          <a:fontRef idx="minor">
+            <a:schemeClr val="lt1"/>
+          </a:fontRef>
+        </p:style>
+        <p:txBody>
+          <a:bodyPr rtlCol="0" anchor="ctr"/>
+          <a:lstStyle/>
+          <a:p>
+            <a:pPr algn="ctr"/>
+          </a:p>
+        </p:txBody>
+      </p:sp>
+      <p:sp>
+        <p:nvSpPr>
+          <p:cNvPr id="22" name="Rounded Rectangle 21"/>
+          <p:cNvSpPr/>
+          <p:nvPr/>
+        </p:nvSpPr>
+        <p:spPr>
+          <a:xfrm>
+            <a:off x="1600200" y="3236976"/>
+            <a:ext cx="1737360" cy="347472"/>
+          </a:xfrm>
+          <a:prstGeom prst="roundRect">
+            <a:avLst/>
+          </a:prstGeom>
+          <a:solidFill>
+            <a:srgbClr val="F0C864"/>
+          </a:solidFill>
+          <a:ln>
+            <a:noFill/>
+          </a:ln>
+        </p:spPr>
+        <p:style>
+          <a:lnRef idx="1">
+            <a:schemeClr val="accent1"/>
+          </a:lnRef>
+          <a:fillRef idx="3">
+            <a:schemeClr val="accent1"/>
+          </a:fillRef>
+          <a:effectRef idx="2">
+            <a:schemeClr val="accent1"/>
+          </a:effectRef>
+          <a:fontRef idx="minor">
+            <a:schemeClr val="lt1"/>
+          </a:fontRef>
+        </p:style>
+        <p:txBody>
+          <a:bodyPr rtlCol="0" anchor="ctr"/>
+          <a:lstStyle/>
+          <a:p>
+            <a:pPr algn="ctr"/>
+          </a:p>
+        </p:txBody>
+      </p:sp>
+      <p:sp>
+        <p:nvSpPr>
+          <p:cNvPr id="23" name="TextBox 22"/>
+          <p:cNvSpPr txBox="1"/>
+          <p:nvPr/>
+        </p:nvSpPr>
+        <p:spPr>
+          <a:xfrm>
+            <a:off x="1600200" y="3255264"/>
+            <a:ext cx="1737360" cy="310896"/>
+          </a:xfrm>
+          <a:prstGeom prst="rect">
+            <a:avLst/>
+          </a:prstGeom>
+          <a:noFill/>
+        </p:spPr>
+        <p:txBody>
+          <a:bodyPr wrap="none">
+            <a:spAutoFit/>
+          </a:bodyPr>
+          <a:lstStyle/>
+          <a:p>
+            <a:pPr algn="ctr">
+              <a:spcAft>
+                <a:spcPts val="1000"/>
+              </a:spcAft>
+            </a:pPr>
+            <a:r>
+              <a:rPr sz="1800" b="1">
+                <a:solidFill>
+                  <a:srgbClr val="5A461E"/>
+                </a:solidFill>
+                <a:latin typeface="Microsoft YaHei"/>
+              </a:rPr>
+              <a:t>穿井得一人</a:t>
+            </a:r>
+          </a:p>
+        </p:txBody>
+      </p:sp>
+      <p:sp>
+        <p:nvSpPr>
+          <p:cNvPr id="24" name="TextBox 23"/>
+          <p:cNvSpPr txBox="1"/>
+          <p:nvPr/>
+        </p:nvSpPr>
+        <p:spPr>
+          <a:xfrm>
+            <a:off x="3474720" y="3236976"/>
+            <a:ext cx="7040879" cy="658368"/>
+          </a:xfrm>
+          <a:prstGeom prst="rect">
+            <a:avLst/>
+          </a:prstGeom>
+          <a:noFill/>
+        </p:spPr>
+        <p:txBody>
+          <a:bodyPr wrap="none">
+            <a:spAutoFit/>
+          </a:bodyPr>
+          <a:lstStyle/>
+          <a:p>
+            <a:pPr algn="l">
+              <a:spcAft>
+                <a:spcPts val="1000"/>
+              </a:spcAft>
+            </a:pPr>
+            <a:r>
+              <a:rPr sz="2100" b="0">
+                <a:solidFill>
+                  <a:srgbClr val="5A461E"/>
+                </a:solidFill>
+                <a:latin typeface="Microsoft YaHei"/>
+              </a:rPr>
+              <a:t>以讹传讹，调查求证才能辨明真相</a:t>
+            </a:r>
+          </a:p>
+        </p:txBody>
+      </p:sp>
+      <p:sp>
+        <p:nvSpPr>
+          <p:cNvPr id="25" name="Rectangle 24"/>
+          <p:cNvSpPr/>
+          <p:nvPr/>
+        </p:nvSpPr>
+        <p:spPr>
+          <a:xfrm>
+            <a:off x="1417320" y="4690872"/>
+            <a:ext cx="9601200" cy="13716"/>
+          </a:xfrm>
+          <a:prstGeom prst="rect">
+            <a:avLst/>
+          </a:prstGeom>
+          <a:solidFill>
+            <a:srgbClr val="D2C8AF"/>
+          </a:solidFill>
+          <a:ln>
+            <a:noFill/>
+          </a:ln>
+        </p:spPr>
+        <p:style>
+          <a:lnRef idx="1">
+            <a:schemeClr val="accent1"/>
+          </a:lnRef>
+          <a:fillRef idx="3">
+            <a:schemeClr val="accent1"/>
+          </a:fillRef>
+          <a:effectRef idx="2">
+            <a:schemeClr val="accent1"/>
+          </a:effectRef>
+          <a:fontRef idx="minor">
+            <a:schemeClr val="lt1"/>
+          </a:fontRef>
+        </p:style>
+        <p:txBody>
+          <a:bodyPr rtlCol="0" anchor="ctr"/>
+          <a:lstStyle/>
+          <a:p>
+            <a:pPr algn="ctr"/>
+          </a:p>
+        </p:txBody>
+      </p:sp>
+      <p:sp>
+        <p:nvSpPr>
+          <p:cNvPr id="26" name="Rounded Rectangle 25"/>
+          <p:cNvSpPr/>
+          <p:nvPr/>
+        </p:nvSpPr>
+        <p:spPr>
+          <a:xfrm>
+            <a:off x="1600200" y="4041648"/>
+            <a:ext cx="1444752" cy="347472"/>
+          </a:xfrm>
+          <a:prstGeom prst="roundRect">
+            <a:avLst/>
+          </a:prstGeom>
+          <a:solidFill>
+            <a:srgbClr val="F0C864"/>
+          </a:solidFill>
+          <a:ln>
+            <a:noFill/>
+          </a:ln>
+        </p:spPr>
+        <p:style>
+          <a:lnRef idx="1">
+            <a:schemeClr val="accent1"/>
+          </a:lnRef>
+          <a:fillRef idx="3">
+            <a:schemeClr val="accent1"/>
+          </a:fillRef>
+          <a:effectRef idx="2">
+            <a:schemeClr val="accent1"/>
+          </a:effectRef>
+          <a:fontRef idx="minor">
+            <a:schemeClr val="lt1"/>
+          </a:fontRef>
+        </p:style>
+        <p:txBody>
+          <a:bodyPr rtlCol="0" anchor="ctr"/>
+          <a:lstStyle/>
+          <a:p>
+            <a:pPr algn="ctr"/>
+          </a:p>
+        </p:txBody>
+      </p:sp>
+      <p:sp>
+        <p:nvSpPr>
+          <p:cNvPr id="27" name="TextBox 26"/>
+          <p:cNvSpPr txBox="1"/>
+          <p:nvPr/>
+        </p:nvSpPr>
+        <p:spPr>
+          <a:xfrm>
+            <a:off x="1600200" y="4059936"/>
+            <a:ext cx="1444752" cy="310896"/>
+          </a:xfrm>
+          <a:prstGeom prst="rect">
+            <a:avLst/>
+          </a:prstGeom>
+          <a:noFill/>
+        </p:spPr>
+        <p:txBody>
+          <a:bodyPr wrap="none">
+            <a:spAutoFit/>
+          </a:bodyPr>
+          <a:lstStyle/>
+          <a:p>
+            <a:pPr algn="ctr">
+              <a:spcAft>
+                <a:spcPts val="1000"/>
+              </a:spcAft>
+            </a:pPr>
+            <a:r>
+              <a:rPr sz="1800" b="1">
+                <a:solidFill>
+                  <a:srgbClr val="5A461E"/>
+                </a:solidFill>
+                <a:latin typeface="Microsoft YaHei"/>
+              </a:rPr>
+              <a:t>杞人忧天</a:t>
+            </a:r>
+          </a:p>
+        </p:txBody>
+      </p:sp>
+      <p:sp>
+        <p:nvSpPr>
+          <p:cNvPr id="28" name="TextBox 27"/>
+          <p:cNvSpPr txBox="1"/>
+          <p:nvPr/>
+        </p:nvSpPr>
+        <p:spPr>
+          <a:xfrm>
+            <a:off x="3182112" y="4041648"/>
+            <a:ext cx="7333488" cy="658368"/>
+          </a:xfrm>
+          <a:prstGeom prst="rect">
+            <a:avLst/>
+          </a:prstGeom>
+          <a:noFill/>
+        </p:spPr>
+        <p:txBody>
+          <a:bodyPr wrap="none">
+            <a:spAutoFit/>
+          </a:bodyPr>
+          <a:lstStyle/>
+          <a:p>
+            <a:pPr algn="l">
+              <a:spcAft>
+                <a:spcPts val="1000"/>
+              </a:spcAft>
+            </a:pPr>
+            <a:r>
+              <a:rPr sz="2100" b="0">
+                <a:solidFill>
+                  <a:srgbClr val="5A461E"/>
+                </a:solidFill>
+                <a:latin typeface="Microsoft YaHei"/>
+              </a:rPr>
+              <a:t>讽刺不必要的担忧（也可读出忧患意识）</a:t>
             </a:r>
           </a:p>
         </p:txBody>
@@ -4576,8 +5629,342 @@
         </p:nvSpPr>
         <p:spPr>
           <a:xfrm>
-            <a:off x="4953304" y="502920"/>
-            <a:ext cx="2286000" cy="411480"/>
+            <a:off x="502920" y="384048"/>
+            <a:ext cx="2011680" cy="384048"/>
+          </a:xfrm>
+          <a:prstGeom prst="roundRect">
+            <a:avLst/>
+          </a:prstGeom>
+          <a:solidFill>
+            <a:srgbClr val="C89628"/>
+          </a:solidFill>
+          <a:ln>
+            <a:noFill/>
+          </a:ln>
+        </p:spPr>
+        <p:style>
+          <a:lnRef idx="1">
+            <a:schemeClr val="accent1"/>
+          </a:lnRef>
+          <a:fillRef idx="3">
+            <a:schemeClr val="accent1"/>
+          </a:fillRef>
+          <a:effectRef idx="2">
+            <a:schemeClr val="accent1"/>
+          </a:effectRef>
+          <a:fontRef idx="minor">
+            <a:schemeClr val="lt1"/>
+          </a:fontRef>
+        </p:style>
+        <p:txBody>
+          <a:bodyPr rtlCol="0" anchor="ctr"/>
+          <a:lstStyle/>
+          <a:p>
+            <a:pPr algn="ctr"/>
+          </a:p>
+        </p:txBody>
+      </p:sp>
+      <p:sp>
+        <p:nvSpPr>
+          <p:cNvPr id="7" name="TextBox 6"/>
+          <p:cNvSpPr txBox="1"/>
+          <p:nvPr/>
+        </p:nvSpPr>
+        <p:spPr>
+          <a:xfrm>
+            <a:off x="502920" y="402336"/>
+            <a:ext cx="2011680" cy="347472"/>
+          </a:xfrm>
+          <a:prstGeom prst="rect">
+            <a:avLst/>
+          </a:prstGeom>
+          <a:noFill/>
+        </p:spPr>
+        <p:txBody>
+          <a:bodyPr wrap="none">
+            <a:spAutoFit/>
+          </a:bodyPr>
+          <a:lstStyle/>
+          <a:p>
+            <a:pPr algn="ctr">
+              <a:spcAft>
+                <a:spcPts val="1000"/>
+              </a:spcAft>
+            </a:pPr>
+            <a:r>
+              <a:rPr sz="1600" b="1">
+                <a:solidFill>
+                  <a:srgbClr val="FFFFFF"/>
+                </a:solidFill>
+                <a:latin typeface="Microsoft YaHei"/>
+              </a:rPr>
+              <a:t>文言笔记</a:t>
+            </a:r>
+          </a:p>
+        </p:txBody>
+      </p:sp>
+      <p:sp>
+        <p:nvSpPr>
+          <p:cNvPr id="8" name="TextBox 7"/>
+          <p:cNvSpPr txBox="1"/>
+          <p:nvPr/>
+        </p:nvSpPr>
+        <p:spPr>
+          <a:xfrm>
+            <a:off x="1371600" y="384048"/>
+            <a:ext cx="9418320" cy="822960"/>
+          </a:xfrm>
+          <a:prstGeom prst="rect">
+            <a:avLst/>
+          </a:prstGeom>
+          <a:noFill/>
+        </p:spPr>
+        <p:txBody>
+          <a:bodyPr wrap="square">
+            <a:spAutoFit/>
+          </a:bodyPr>
+          <a:lstStyle/>
+          <a:p>
+            <a:pPr algn="ctr">
+              <a:spcAft>
+                <a:spcPts val="1000"/>
+              </a:spcAft>
+            </a:pPr>
+            <a:r>
+              <a:rPr sz="3400" b="1">
+                <a:solidFill>
+                  <a:srgbClr val="C89628"/>
+                </a:solidFill>
+                <a:latin typeface="Microsoft YaHei"/>
+              </a:rPr>
+              <a:t>文言积累</a:t>
+            </a:r>
+          </a:p>
+        </p:txBody>
+      </p:sp>
+      <p:sp>
+        <p:nvSpPr>
+          <p:cNvPr id="9" name="Rounded Rectangle 8"/>
+          <p:cNvSpPr/>
+          <p:nvPr/>
+        </p:nvSpPr>
+        <p:spPr>
+          <a:xfrm>
+            <a:off x="1067104" y="1143000"/>
+            <a:ext cx="10058400" cy="4526280"/>
+          </a:xfrm>
+          <a:prstGeom prst="roundRect">
+            <a:avLst/>
+          </a:prstGeom>
+          <a:solidFill>
+            <a:srgbClr val="FFFCEB"/>
+          </a:solidFill>
+          <a:ln w="25400">
+            <a:solidFill>
+              <a:srgbClr val="B48C3C"/>
+            </a:solidFill>
+          </a:ln>
+        </p:spPr>
+        <p:style>
+          <a:lnRef idx="1">
+            <a:schemeClr val="accent1"/>
+          </a:lnRef>
+          <a:fillRef idx="3">
+            <a:schemeClr val="accent1"/>
+          </a:fillRef>
+          <a:effectRef idx="2">
+            <a:schemeClr val="accent1"/>
+          </a:effectRef>
+          <a:fontRef idx="minor">
+            <a:schemeClr val="lt1"/>
+          </a:fontRef>
+        </p:style>
+        <p:txBody>
+          <a:bodyPr rtlCol="0" anchor="ctr"/>
+          <a:lstStyle/>
+          <a:p>
+            <a:pPr algn="ctr"/>
+          </a:p>
+        </p:txBody>
+      </p:sp>
+      <p:sp>
+        <p:nvSpPr>
+          <p:cNvPr id="10" name="Rectangle 9"/>
+          <p:cNvSpPr/>
+          <p:nvPr/>
+        </p:nvSpPr>
+        <p:spPr>
+          <a:xfrm>
+            <a:off x="1067104" y="1143000"/>
+            <a:ext cx="10058400" cy="384048"/>
+          </a:xfrm>
+          <a:prstGeom prst="rect">
+            <a:avLst/>
+          </a:prstGeom>
+          <a:solidFill>
+            <a:srgbClr val="C89628"/>
+          </a:solidFill>
+          <a:ln>
+            <a:noFill/>
+          </a:ln>
+        </p:spPr>
+        <p:style>
+          <a:lnRef idx="1">
+            <a:schemeClr val="accent1"/>
+          </a:lnRef>
+          <a:fillRef idx="3">
+            <a:schemeClr val="accent1"/>
+          </a:fillRef>
+          <a:effectRef idx="2">
+            <a:schemeClr val="accent1"/>
+          </a:effectRef>
+          <a:fontRef idx="minor">
+            <a:schemeClr val="lt1"/>
+          </a:fontRef>
+        </p:style>
+        <p:txBody>
+          <a:bodyPr rtlCol="0" anchor="ctr"/>
+          <a:lstStyle/>
+          <a:p>
+            <a:pPr algn="ctr"/>
+          </a:p>
+        </p:txBody>
+      </p:sp>
+      <p:sp>
+        <p:nvSpPr>
+          <p:cNvPr id="11" name="TextBox 10"/>
+          <p:cNvSpPr txBox="1"/>
+          <p:nvPr/>
+        </p:nvSpPr>
+        <p:spPr>
+          <a:xfrm>
+            <a:off x="1067104" y="1179576"/>
+            <a:ext cx="10058400" cy="347472"/>
+          </a:xfrm>
+          <a:prstGeom prst="rect">
+            <a:avLst/>
+          </a:prstGeom>
+          <a:noFill/>
+        </p:spPr>
+        <p:txBody>
+          <a:bodyPr wrap="none">
+            <a:spAutoFit/>
+          </a:bodyPr>
+          <a:lstStyle/>
+          <a:p>
+            <a:pPr algn="ctr">
+              <a:spcAft>
+                <a:spcPts val="1000"/>
+              </a:spcAft>
+            </a:pPr>
+            <a:r>
+              <a:rPr sz="1800" b="1">
+                <a:solidFill>
+                  <a:srgbClr val="FFFFFF"/>
+                </a:solidFill>
+                <a:latin typeface="Microsoft YaHei"/>
+              </a:rPr>
+              <a:t>📝  课堂笔记  —  请摘抄要点</a:t>
+            </a:r>
+          </a:p>
+        </p:txBody>
+      </p:sp>
+      <p:sp>
+        <p:nvSpPr>
+          <p:cNvPr id="12" name="Rectangle 11"/>
+          <p:cNvSpPr/>
+          <p:nvPr/>
+        </p:nvSpPr>
+        <p:spPr>
+          <a:xfrm>
+            <a:off x="1570024" y="1527048"/>
+            <a:ext cx="27432" cy="4142232"/>
+          </a:xfrm>
+          <a:prstGeom prst="rect">
+            <a:avLst/>
+          </a:prstGeom>
+          <a:solidFill>
+            <a:srgbClr val="DC5050"/>
+          </a:solidFill>
+          <a:ln>
+            <a:noFill/>
+          </a:ln>
+        </p:spPr>
+        <p:style>
+          <a:lnRef idx="1">
+            <a:schemeClr val="accent1"/>
+          </a:lnRef>
+          <a:fillRef idx="3">
+            <a:schemeClr val="accent1"/>
+          </a:fillRef>
+          <a:effectRef idx="2">
+            <a:schemeClr val="accent1"/>
+          </a:effectRef>
+          <a:fontRef idx="minor">
+            <a:schemeClr val="lt1"/>
+          </a:fontRef>
+        </p:style>
+        <p:txBody>
+          <a:bodyPr rtlCol="0" anchor="ctr"/>
+          <a:lstStyle/>
+          <a:p>
+            <a:pPr algn="ctr"/>
+          </a:p>
+        </p:txBody>
+      </p:sp>
+      <p:sp>
+        <p:nvSpPr>
+          <p:cNvPr id="13" name="Rectangle 12"/>
+          <p:cNvSpPr/>
+          <p:nvPr/>
+        </p:nvSpPr>
+        <p:spPr>
+          <a:xfrm>
+            <a:off x="1417320" y="2276856"/>
+            <a:ext cx="9601200" cy="13716"/>
+          </a:xfrm>
+          <a:prstGeom prst="rect">
+            <a:avLst/>
+          </a:prstGeom>
+          <a:solidFill>
+            <a:srgbClr val="D2C8AF"/>
+          </a:solidFill>
+          <a:ln>
+            <a:noFill/>
+          </a:ln>
+        </p:spPr>
+        <p:style>
+          <a:lnRef idx="1">
+            <a:schemeClr val="accent1"/>
+          </a:lnRef>
+          <a:fillRef idx="3">
+            <a:schemeClr val="accent1"/>
+          </a:fillRef>
+          <a:effectRef idx="2">
+            <a:schemeClr val="accent1"/>
+          </a:effectRef>
+          <a:fontRef idx="minor">
+            <a:schemeClr val="lt1"/>
+          </a:fontRef>
+        </p:style>
+        <p:txBody>
+          <a:bodyPr rtlCol="0" anchor="ctr"/>
+          <a:lstStyle/>
+          <a:p>
+            <a:pPr algn="ctr"/>
+          </a:p>
+        </p:txBody>
+      </p:sp>
+      <p:sp>
+        <p:nvSpPr>
+          <p:cNvPr id="14" name="Rounded Rectangle 13"/>
+          <p:cNvSpPr/>
+          <p:nvPr/>
+        </p:nvSpPr>
+        <p:spPr>
+          <a:xfrm>
+            <a:off x="1600200" y="1627632"/>
+            <a:ext cx="1280160" cy="347472"/>
           </a:xfrm>
           <a:prstGeom prst="roundRect">
             <a:avLst/>
@@ -4613,14 +6000,14 @@
       </p:sp>
       <p:sp>
         <p:nvSpPr>
-          <p:cNvPr id="7" name="TextBox 6"/>
+          <p:cNvPr id="15" name="TextBox 14"/>
           <p:cNvSpPr txBox="1"/>
           <p:nvPr/>
         </p:nvSpPr>
         <p:spPr>
           <a:xfrm>
-            <a:off x="4953304" y="521208"/>
-            <a:ext cx="2286000" cy="384048"/>
+            <a:off x="1600200" y="1645920"/>
+            <a:ext cx="1280160" cy="310896"/>
           </a:xfrm>
           <a:prstGeom prst="rect">
             <a:avLst/>
@@ -4645,21 +6032,21 @@
                 </a:solidFill>
                 <a:latin typeface="Microsoft YaHei"/>
               </a:rPr>
-              <a:t>初识寓言</a:t>
-            </a:r>
-          </a:p>
-        </p:txBody>
-      </p:sp>
-      <p:sp>
-        <p:nvSpPr>
-          <p:cNvPr id="8" name="TextBox 7"/>
+              <a:t>闻</a:t>
+            </a:r>
+          </a:p>
+        </p:txBody>
+      </p:sp>
+      <p:sp>
+        <p:nvSpPr>
+          <p:cNvPr id="16" name="TextBox 15"/>
           <p:cNvSpPr txBox="1"/>
           <p:nvPr/>
         </p:nvSpPr>
         <p:spPr>
           <a:xfrm>
-            <a:off x="1371600" y="960120"/>
-            <a:ext cx="9418320" cy="822960"/>
+            <a:off x="3017520" y="1627632"/>
+            <a:ext cx="7498079" cy="658368"/>
           </a:xfrm>
           <a:prstGeom prst="rect">
             <a:avLst/>
@@ -4667,40 +6054,83 @@
           <a:noFill/>
         </p:spPr>
         <p:txBody>
-          <a:bodyPr wrap="square">
+          <a:bodyPr wrap="none">
             <a:spAutoFit/>
           </a:bodyPr>
           <a:lstStyle/>
           <a:p>
-            <a:pPr algn="ctr">
+            <a:pPr algn="l">
               <a:spcAft>
                 <a:spcPts val="1000"/>
               </a:spcAft>
             </a:pPr>
             <a:r>
-              <a:rPr sz="3600" b="1">
+              <a:rPr sz="2100" b="0">
                 <a:solidFill>
-                  <a:srgbClr val="C89628"/>
+                  <a:srgbClr val="5A461E"/>
                 </a:solidFill>
                 <a:latin typeface="Microsoft YaHei"/>
               </a:rPr>
-              <a:t>学习任务一</a:t>
-            </a:r>
-          </a:p>
-        </p:txBody>
-      </p:sp>
-      <p:sp>
-        <p:nvSpPr>
-          <p:cNvPr id="9" name="Rectangle 8"/>
+              <a:t>听说；传：传播、流传</a:t>
+            </a:r>
+          </a:p>
+        </p:txBody>
+      </p:sp>
+      <p:sp>
+        <p:nvSpPr>
+          <p:cNvPr id="17" name="Rectangle 16"/>
           <p:cNvSpPr/>
           <p:nvPr/>
         </p:nvSpPr>
         <p:spPr>
           <a:xfrm>
-            <a:off x="3200400" y="1600200"/>
-            <a:ext cx="5760720" cy="27432"/>
-          </a:xfrm>
-          <a:prstGeom prst="rect">
+            <a:off x="1417320" y="3081527"/>
+            <a:ext cx="9601200" cy="13716"/>
+          </a:xfrm>
+          <a:prstGeom prst="rect">
+            <a:avLst/>
+          </a:prstGeom>
+          <a:solidFill>
+            <a:srgbClr val="D2C8AF"/>
+          </a:solidFill>
+          <a:ln>
+            <a:noFill/>
+          </a:ln>
+        </p:spPr>
+        <p:style>
+          <a:lnRef idx="1">
+            <a:schemeClr val="accent1"/>
+          </a:lnRef>
+          <a:fillRef idx="3">
+            <a:schemeClr val="accent1"/>
+          </a:fillRef>
+          <a:effectRef idx="2">
+            <a:schemeClr val="accent1"/>
+          </a:effectRef>
+          <a:fontRef idx="minor">
+            <a:schemeClr val="lt1"/>
+          </a:fontRef>
+        </p:style>
+        <p:txBody>
+          <a:bodyPr rtlCol="0" anchor="ctr"/>
+          <a:lstStyle/>
+          <a:p>
+            <a:pPr algn="ctr"/>
+          </a:p>
+        </p:txBody>
+      </p:sp>
+      <p:sp>
+        <p:nvSpPr>
+          <p:cNvPr id="18" name="Rounded Rectangle 17"/>
+          <p:cNvSpPr/>
+          <p:nvPr/>
+        </p:nvSpPr>
+        <p:spPr>
+          <a:xfrm>
+            <a:off x="1600200" y="2432303"/>
+            <a:ext cx="1280160" cy="347472"/>
+          </a:xfrm>
+          <a:prstGeom prst="roundRect">
             <a:avLst/>
           </a:prstGeom>
           <a:solidFill>
@@ -4734,25 +6164,101 @@
       </p:sp>
       <p:sp>
         <p:nvSpPr>
-          <p:cNvPr id="10" name="Rounded Rectangle 9"/>
+          <p:cNvPr id="19" name="TextBox 18"/>
+          <p:cNvSpPr txBox="1"/>
+          <p:nvPr/>
+        </p:nvSpPr>
+        <p:spPr>
+          <a:xfrm>
+            <a:off x="1600200" y="2450591"/>
+            <a:ext cx="1280160" cy="310896"/>
+          </a:xfrm>
+          <a:prstGeom prst="rect">
+            <a:avLst/>
+          </a:prstGeom>
+          <a:noFill/>
+        </p:spPr>
+        <p:txBody>
+          <a:bodyPr wrap="none">
+            <a:spAutoFit/>
+          </a:bodyPr>
+          <a:lstStyle/>
+          <a:p>
+            <a:pPr algn="ctr">
+              <a:spcAft>
+                <a:spcPts val="1000"/>
+              </a:spcAft>
+            </a:pPr>
+            <a:r>
+              <a:rPr sz="1800" b="1">
+                <a:solidFill>
+                  <a:srgbClr val="5A461E"/>
+                </a:solidFill>
+                <a:latin typeface="Microsoft YaHei"/>
+              </a:rPr>
+              <a:t>道</a:t>
+            </a:r>
+          </a:p>
+        </p:txBody>
+      </p:sp>
+      <p:sp>
+        <p:nvSpPr>
+          <p:cNvPr id="20" name="TextBox 19"/>
+          <p:cNvSpPr txBox="1"/>
+          <p:nvPr/>
+        </p:nvSpPr>
+        <p:spPr>
+          <a:xfrm>
+            <a:off x="3017520" y="2432303"/>
+            <a:ext cx="7498079" cy="658368"/>
+          </a:xfrm>
+          <a:prstGeom prst="rect">
+            <a:avLst/>
+          </a:prstGeom>
+          <a:noFill/>
+        </p:spPr>
+        <p:txBody>
+          <a:bodyPr wrap="none">
+            <a:spAutoFit/>
+          </a:bodyPr>
+          <a:lstStyle/>
+          <a:p>
+            <a:pPr algn="l">
+              <a:spcAft>
+                <a:spcPts val="1000"/>
+              </a:spcAft>
+            </a:pPr>
+            <a:r>
+              <a:rPr sz="2100" b="0">
+                <a:solidFill>
+                  <a:srgbClr val="5A461E"/>
+                </a:solidFill>
+                <a:latin typeface="Microsoft YaHei"/>
+              </a:rPr>
+              <a:t>讲述、说（国人道之）</a:t>
+            </a:r>
+          </a:p>
+        </p:txBody>
+      </p:sp>
+      <p:sp>
+        <p:nvSpPr>
+          <p:cNvPr id="21" name="Rectangle 20"/>
           <p:cNvSpPr/>
           <p:nvPr/>
         </p:nvSpPr>
         <p:spPr>
           <a:xfrm>
-            <a:off x="1295704" y="1645920"/>
-            <a:ext cx="9601200" cy="2240280"/>
-          </a:xfrm>
-          <a:prstGeom prst="roundRect">
+            <a:off x="1417320" y="3886200"/>
+            <a:ext cx="9601200" cy="13716"/>
+          </a:xfrm>
+          <a:prstGeom prst="rect">
             <a:avLst/>
           </a:prstGeom>
           <a:solidFill>
-            <a:srgbClr val="FFFCF0"/>
+            <a:srgbClr val="D2C8AF"/>
           </a:solidFill>
-          <a:ln w="19050">
-            <a:solidFill>
-              <a:srgbClr val="F0C864"/>
-            </a:solidFill>
+          <a:ln>
+            <a:noFill/>
           </a:ln>
         </p:spPr>
         <p:style>
@@ -4779,20 +6285,20 @@
       </p:sp>
       <p:sp>
         <p:nvSpPr>
-          <p:cNvPr id="11" name="Oval 10"/>
+          <p:cNvPr id="22" name="Rounded Rectangle 21"/>
           <p:cNvSpPr/>
           <p:nvPr/>
         </p:nvSpPr>
         <p:spPr>
           <a:xfrm>
-            <a:off x="2255824" y="1828800"/>
-            <a:ext cx="384048" cy="384048"/>
-          </a:xfrm>
-          <a:prstGeom prst="ellipse">
+            <a:off x="1600200" y="3236976"/>
+            <a:ext cx="1280160" cy="347472"/>
+          </a:xfrm>
+          <a:prstGeom prst="roundRect">
             <a:avLst/>
           </a:prstGeom>
           <a:solidFill>
-            <a:srgbClr val="C89628"/>
+            <a:srgbClr val="F0C864"/>
           </a:solidFill>
           <a:ln>
             <a:noFill/>
@@ -4822,14 +6328,14 @@
       </p:sp>
       <p:sp>
         <p:nvSpPr>
-          <p:cNvPr id="12" name="TextBox 11"/>
+          <p:cNvPr id="23" name="TextBox 22"/>
           <p:cNvSpPr txBox="1"/>
           <p:nvPr/>
         </p:nvSpPr>
         <p:spPr>
           <a:xfrm>
-            <a:off x="2255824" y="1847088"/>
-            <a:ext cx="384048" cy="365760"/>
+            <a:off x="1600200" y="3255264"/>
+            <a:ext cx="1280160" cy="310896"/>
           </a:xfrm>
           <a:prstGeom prst="rect">
             <a:avLst/>
@@ -4848,27 +6354,27 @@
               </a:spcAft>
             </a:pPr>
             <a:r>
-              <a:rPr sz="1600" b="1">
+              <a:rPr sz="1800" b="1">
                 <a:solidFill>
-                  <a:srgbClr val="FFFFFF"/>
+                  <a:srgbClr val="5A461E"/>
                 </a:solidFill>
                 <a:latin typeface="Microsoft YaHei"/>
               </a:rPr>
-              <a:t>1</a:t>
-            </a:r>
-          </a:p>
-        </p:txBody>
-      </p:sp>
-      <p:sp>
-        <p:nvSpPr>
-          <p:cNvPr id="13" name="TextBox 12"/>
+              <a:t>亡</a:t>
+            </a:r>
+          </a:p>
+        </p:txBody>
+      </p:sp>
+      <p:sp>
+        <p:nvSpPr>
+          <p:cNvPr id="24" name="TextBox 23"/>
           <p:cNvSpPr txBox="1"/>
           <p:nvPr/>
         </p:nvSpPr>
         <p:spPr>
           <a:xfrm>
-            <a:off x="2758744" y="1810512"/>
-            <a:ext cx="7772400" cy="502920"/>
+            <a:off x="3017520" y="3236976"/>
+            <a:ext cx="7498079" cy="658368"/>
           </a:xfrm>
           <a:prstGeom prst="rect">
             <a:avLst/>
@@ -4887,33 +6393,33 @@
               </a:spcAft>
             </a:pPr>
             <a:r>
-              <a:rPr sz="2400" b="0">
+              <a:rPr sz="2100" b="0">
                 <a:solidFill>
                   <a:srgbClr val="5A461E"/>
                 </a:solidFill>
                 <a:latin typeface="Microsoft YaHei"/>
               </a:rPr>
-              <a:t>默读四则寓言，完成「寓言档案卡」</a:t>
-            </a:r>
-          </a:p>
-        </p:txBody>
-      </p:sp>
-      <p:sp>
-        <p:nvSpPr>
-          <p:cNvPr id="14" name="Oval 13"/>
+              <a:t>同「无」，没有（亡处亡气）</a:t>
+            </a:r>
+          </a:p>
+        </p:txBody>
+      </p:sp>
+      <p:sp>
+        <p:nvSpPr>
+          <p:cNvPr id="25" name="Rectangle 24"/>
           <p:cNvSpPr/>
           <p:nvPr/>
         </p:nvSpPr>
         <p:spPr>
           <a:xfrm>
-            <a:off x="2255824" y="2395728"/>
-            <a:ext cx="384048" cy="384048"/>
-          </a:xfrm>
-          <a:prstGeom prst="ellipse">
+            <a:off x="1417320" y="4690872"/>
+            <a:ext cx="9601200" cy="13716"/>
+          </a:xfrm>
+          <a:prstGeom prst="rect">
             <a:avLst/>
           </a:prstGeom>
           <a:solidFill>
-            <a:srgbClr val="C89628"/>
+            <a:srgbClr val="D2C8AF"/>
           </a:solidFill>
           <a:ln>
             <a:noFill/>
@@ -4943,14 +6449,57 @@
       </p:sp>
       <p:sp>
         <p:nvSpPr>
-          <p:cNvPr id="15" name="TextBox 14"/>
+          <p:cNvPr id="26" name="Rounded Rectangle 25"/>
+          <p:cNvSpPr/>
+          <p:nvPr/>
+        </p:nvSpPr>
+        <p:spPr>
+          <a:xfrm>
+            <a:off x="1600200" y="4041648"/>
+            <a:ext cx="1280160" cy="347472"/>
+          </a:xfrm>
+          <a:prstGeom prst="roundRect">
+            <a:avLst/>
+          </a:prstGeom>
+          <a:solidFill>
+            <a:srgbClr val="F0C864"/>
+          </a:solidFill>
+          <a:ln>
+            <a:noFill/>
+          </a:ln>
+        </p:spPr>
+        <p:style>
+          <a:lnRef idx="1">
+            <a:schemeClr val="accent1"/>
+          </a:lnRef>
+          <a:fillRef idx="3">
+            <a:schemeClr val="accent1"/>
+          </a:fillRef>
+          <a:effectRef idx="2">
+            <a:schemeClr val="accent1"/>
+          </a:effectRef>
+          <a:fontRef idx="minor">
+            <a:schemeClr val="lt1"/>
+          </a:fontRef>
+        </p:style>
+        <p:txBody>
+          <a:bodyPr rtlCol="0" anchor="ctr"/>
+          <a:lstStyle/>
+          <a:p>
+            <a:pPr algn="ctr"/>
+          </a:p>
+        </p:txBody>
+      </p:sp>
+      <p:sp>
+        <p:nvSpPr>
+          <p:cNvPr id="27" name="TextBox 26"/>
           <p:cNvSpPr txBox="1"/>
           <p:nvPr/>
         </p:nvSpPr>
         <p:spPr>
           <a:xfrm>
-            <a:off x="2255824" y="2414016"/>
-            <a:ext cx="384048" cy="365760"/>
+            <a:off x="1600200" y="4059936"/>
+            <a:ext cx="1280160" cy="310896"/>
           </a:xfrm>
           <a:prstGeom prst="rect">
             <a:avLst/>
@@ -4969,27 +6518,27 @@
               </a:spcAft>
             </a:pPr>
             <a:r>
-              <a:rPr sz="1600" b="1">
+              <a:rPr sz="1800" b="1">
                 <a:solidFill>
-                  <a:srgbClr val="FFFFFF"/>
+                  <a:srgbClr val="5A461E"/>
                 </a:solidFill>
                 <a:latin typeface="Microsoft YaHei"/>
               </a:rPr>
-              <a:t>2</a:t>
-            </a:r>
-          </a:p>
-        </p:txBody>
-      </p:sp>
-      <p:sp>
-        <p:nvSpPr>
-          <p:cNvPr id="16" name="TextBox 15"/>
+              <a:t>只使</a:t>
+            </a:r>
+          </a:p>
+        </p:txBody>
+      </p:sp>
+      <p:sp>
+        <p:nvSpPr>
+          <p:cNvPr id="28" name="TextBox 27"/>
           <p:cNvSpPr txBox="1"/>
           <p:nvPr/>
         </p:nvSpPr>
         <p:spPr>
           <a:xfrm>
-            <a:off x="2758744" y="2377440"/>
-            <a:ext cx="7772400" cy="502920"/>
+            <a:off x="3017520" y="4041648"/>
+            <a:ext cx="7498079" cy="658368"/>
           </a:xfrm>
           <a:prstGeom prst="rect">
             <a:avLst/>
@@ -5008,33 +6557,33 @@
               </a:spcAft>
             </a:pPr>
             <a:r>
-              <a:rPr sz="2400" b="0">
+              <a:rPr sz="2100" b="0">
                 <a:solidFill>
                   <a:srgbClr val="5A461E"/>
                 </a:solidFill>
                 <a:latin typeface="Microsoft YaHei"/>
               </a:rPr>
-              <a:t>讨论：蚊子平静离开，寓意会发生什么变化？</a:t>
-            </a:r>
-          </a:p>
-        </p:txBody>
-      </p:sp>
-      <p:sp>
-        <p:nvSpPr>
-          <p:cNvPr id="17" name="Oval 16"/>
+              <a:t>纵使、即使；中伤：伤害</a:t>
+            </a:r>
+          </a:p>
+        </p:txBody>
+      </p:sp>
+      <p:sp>
+        <p:nvSpPr>
+          <p:cNvPr id="29" name="Rectangle 28"/>
           <p:cNvSpPr/>
           <p:nvPr/>
         </p:nvSpPr>
         <p:spPr>
           <a:xfrm>
-            <a:off x="2255824" y="2962656"/>
-            <a:ext cx="384048" cy="384048"/>
-          </a:xfrm>
-          <a:prstGeom prst="ellipse">
+            <a:off x="1417320" y="5495544"/>
+            <a:ext cx="9601200" cy="13716"/>
+          </a:xfrm>
+          <a:prstGeom prst="rect">
             <a:avLst/>
           </a:prstGeom>
           <a:solidFill>
-            <a:srgbClr val="C89628"/>
+            <a:srgbClr val="D2C8AF"/>
           </a:solidFill>
           <a:ln>
             <a:noFill/>
@@ -5064,14 +6613,57 @@
       </p:sp>
       <p:sp>
         <p:nvSpPr>
-          <p:cNvPr id="18" name="TextBox 17"/>
+          <p:cNvPr id="30" name="Rounded Rectangle 29"/>
+          <p:cNvSpPr/>
+          <p:nvPr/>
+        </p:nvSpPr>
+        <p:spPr>
+          <a:xfrm>
+            <a:off x="1600200" y="4846320"/>
+            <a:ext cx="1280160" cy="347472"/>
+          </a:xfrm>
+          <a:prstGeom prst="roundRect">
+            <a:avLst/>
+          </a:prstGeom>
+          <a:solidFill>
+            <a:srgbClr val="F0C864"/>
+          </a:solidFill>
+          <a:ln>
+            <a:noFill/>
+          </a:ln>
+        </p:spPr>
+        <p:style>
+          <a:lnRef idx="1">
+            <a:schemeClr val="accent1"/>
+          </a:lnRef>
+          <a:fillRef idx="3">
+            <a:schemeClr val="accent1"/>
+          </a:fillRef>
+          <a:effectRef idx="2">
+            <a:schemeClr val="accent1"/>
+          </a:effectRef>
+          <a:fontRef idx="minor">
+            <a:schemeClr val="lt1"/>
+          </a:fontRef>
+        </p:style>
+        <p:txBody>
+          <a:bodyPr rtlCol="0" anchor="ctr"/>
+          <a:lstStyle/>
+          <a:p>
+            <a:pPr algn="ctr"/>
+          </a:p>
+        </p:txBody>
+      </p:sp>
+      <p:sp>
+        <p:nvSpPr>
+          <p:cNvPr id="31" name="TextBox 30"/>
           <p:cNvSpPr txBox="1"/>
           <p:nvPr/>
         </p:nvSpPr>
         <p:spPr>
           <a:xfrm>
-            <a:off x="2255824" y="2980944"/>
-            <a:ext cx="384048" cy="365760"/>
+            <a:off x="1600200" y="4864608"/>
+            <a:ext cx="1280160" cy="310896"/>
           </a:xfrm>
           <a:prstGeom prst="rect">
             <a:avLst/>
@@ -5090,27 +6682,27 @@
               </a:spcAft>
             </a:pPr>
             <a:r>
-              <a:rPr sz="1600" b="1">
+              <a:rPr sz="1800" b="1">
                 <a:solidFill>
-                  <a:srgbClr val="FFFFFF"/>
+                  <a:srgbClr val="5A461E"/>
                 </a:solidFill>
                 <a:latin typeface="Microsoft YaHei"/>
               </a:rPr>
-              <a:t>3</a:t>
-            </a:r>
-          </a:p>
-        </p:txBody>
-      </p:sp>
-      <p:sp>
-        <p:nvSpPr>
-          <p:cNvPr id="19" name="TextBox 18"/>
+              <a:t>重点句</a:t>
+            </a:r>
+          </a:p>
+        </p:txBody>
+      </p:sp>
+      <p:sp>
+        <p:nvSpPr>
+          <p:cNvPr id="32" name="TextBox 31"/>
           <p:cNvSpPr txBox="1"/>
           <p:nvPr/>
         </p:nvSpPr>
         <p:spPr>
           <a:xfrm>
-            <a:off x="2758744" y="2944368"/>
-            <a:ext cx="7772400" cy="502920"/>
+            <a:off x="3017520" y="4846320"/>
+            <a:ext cx="7498079" cy="658368"/>
           </a:xfrm>
           <a:prstGeom prst="rect">
             <a:avLst/>
@@ -5129,13 +6721,13 @@
               </a:spcAft>
             </a:pPr>
             <a:r>
-              <a:rPr sz="2400" b="0">
+              <a:rPr sz="2100" b="0">
                 <a:solidFill>
                   <a:srgbClr val="5A461E"/>
                 </a:solidFill>
                 <a:latin typeface="Microsoft YaHei"/>
               </a:rPr>
-              <a:t>归纳寓言文体特点</a:t>
+              <a:t>得一人之使，非得一人于井中也。（节省一人劳力，不是井里挖出一人）</a:t>
             </a:r>
           </a:p>
         </p:txBody>
@@ -5281,8 +6873,342 @@
         </p:nvSpPr>
         <p:spPr>
           <a:xfrm>
-            <a:off x="4953304" y="502920"/>
-            <a:ext cx="2286000" cy="411480"/>
+            <a:off x="502920" y="384048"/>
+            <a:ext cx="2011680" cy="384048"/>
+          </a:xfrm>
+          <a:prstGeom prst="roundRect">
+            <a:avLst/>
+          </a:prstGeom>
+          <a:solidFill>
+            <a:srgbClr val="C89628"/>
+          </a:solidFill>
+          <a:ln>
+            <a:noFill/>
+          </a:ln>
+        </p:spPr>
+        <p:style>
+          <a:lnRef idx="1">
+            <a:schemeClr val="accent1"/>
+          </a:lnRef>
+          <a:fillRef idx="3">
+            <a:schemeClr val="accent1"/>
+          </a:fillRef>
+          <a:effectRef idx="2">
+            <a:schemeClr val="accent1"/>
+          </a:effectRef>
+          <a:fontRef idx="minor">
+            <a:schemeClr val="lt1"/>
+          </a:fontRef>
+        </p:style>
+        <p:txBody>
+          <a:bodyPr rtlCol="0" anchor="ctr"/>
+          <a:lstStyle/>
+          <a:p>
+            <a:pPr algn="ctr"/>
+          </a:p>
+        </p:txBody>
+      </p:sp>
+      <p:sp>
+        <p:nvSpPr>
+          <p:cNvPr id="7" name="TextBox 6"/>
+          <p:cNvSpPr txBox="1"/>
+          <p:nvPr/>
+        </p:nvSpPr>
+        <p:spPr>
+          <a:xfrm>
+            <a:off x="502920" y="402336"/>
+            <a:ext cx="2011680" cy="347472"/>
+          </a:xfrm>
+          <a:prstGeom prst="rect">
+            <a:avLst/>
+          </a:prstGeom>
+          <a:noFill/>
+        </p:spPr>
+        <p:txBody>
+          <a:bodyPr wrap="none">
+            <a:spAutoFit/>
+          </a:bodyPr>
+          <a:lstStyle/>
+          <a:p>
+            <a:pPr algn="ctr">
+              <a:spcAft>
+                <a:spcPts val="1000"/>
+              </a:spcAft>
+            </a:pPr>
+            <a:r>
+              <a:rPr sz="1600" b="1">
+                <a:solidFill>
+                  <a:srgbClr val="FFFFFF"/>
+                </a:solidFill>
+                <a:latin typeface="Microsoft YaHei"/>
+              </a:rPr>
+              <a:t>主题笔记</a:t>
+            </a:r>
+          </a:p>
+        </p:txBody>
+      </p:sp>
+      <p:sp>
+        <p:nvSpPr>
+          <p:cNvPr id="8" name="TextBox 7"/>
+          <p:cNvSpPr txBox="1"/>
+          <p:nvPr/>
+        </p:nvSpPr>
+        <p:spPr>
+          <a:xfrm>
+            <a:off x="1371600" y="384048"/>
+            <a:ext cx="9418320" cy="822960"/>
+          </a:xfrm>
+          <a:prstGeom prst="rect">
+            <a:avLst/>
+          </a:prstGeom>
+          <a:noFill/>
+        </p:spPr>
+        <p:txBody>
+          <a:bodyPr wrap="square">
+            <a:spAutoFit/>
+          </a:bodyPr>
+          <a:lstStyle/>
+          <a:p>
+            <a:pPr algn="ctr">
+              <a:spcAft>
+                <a:spcPts val="1000"/>
+              </a:spcAft>
+            </a:pPr>
+            <a:r>
+              <a:rPr sz="3400" b="1">
+                <a:solidFill>
+                  <a:srgbClr val="C89628"/>
+                </a:solidFill>
+                <a:latin typeface="Microsoft YaHei"/>
+              </a:rPr>
+              <a:t>写法探究</a:t>
+            </a:r>
+          </a:p>
+        </p:txBody>
+      </p:sp>
+      <p:sp>
+        <p:nvSpPr>
+          <p:cNvPr id="9" name="Rounded Rectangle 8"/>
+          <p:cNvSpPr/>
+          <p:nvPr/>
+        </p:nvSpPr>
+        <p:spPr>
+          <a:xfrm>
+            <a:off x="1067104" y="1143000"/>
+            <a:ext cx="10058400" cy="3721608"/>
+          </a:xfrm>
+          <a:prstGeom prst="roundRect">
+            <a:avLst/>
+          </a:prstGeom>
+          <a:solidFill>
+            <a:srgbClr val="FFFCEB"/>
+          </a:solidFill>
+          <a:ln w="25400">
+            <a:solidFill>
+              <a:srgbClr val="B48C3C"/>
+            </a:solidFill>
+          </a:ln>
+        </p:spPr>
+        <p:style>
+          <a:lnRef idx="1">
+            <a:schemeClr val="accent1"/>
+          </a:lnRef>
+          <a:fillRef idx="3">
+            <a:schemeClr val="accent1"/>
+          </a:fillRef>
+          <a:effectRef idx="2">
+            <a:schemeClr val="accent1"/>
+          </a:effectRef>
+          <a:fontRef idx="minor">
+            <a:schemeClr val="lt1"/>
+          </a:fontRef>
+        </p:style>
+        <p:txBody>
+          <a:bodyPr rtlCol="0" anchor="ctr"/>
+          <a:lstStyle/>
+          <a:p>
+            <a:pPr algn="ctr"/>
+          </a:p>
+        </p:txBody>
+      </p:sp>
+      <p:sp>
+        <p:nvSpPr>
+          <p:cNvPr id="10" name="Rectangle 9"/>
+          <p:cNvSpPr/>
+          <p:nvPr/>
+        </p:nvSpPr>
+        <p:spPr>
+          <a:xfrm>
+            <a:off x="1067104" y="1143000"/>
+            <a:ext cx="10058400" cy="384048"/>
+          </a:xfrm>
+          <a:prstGeom prst="rect">
+            <a:avLst/>
+          </a:prstGeom>
+          <a:solidFill>
+            <a:srgbClr val="C89628"/>
+          </a:solidFill>
+          <a:ln>
+            <a:noFill/>
+          </a:ln>
+        </p:spPr>
+        <p:style>
+          <a:lnRef idx="1">
+            <a:schemeClr val="accent1"/>
+          </a:lnRef>
+          <a:fillRef idx="3">
+            <a:schemeClr val="accent1"/>
+          </a:fillRef>
+          <a:effectRef idx="2">
+            <a:schemeClr val="accent1"/>
+          </a:effectRef>
+          <a:fontRef idx="minor">
+            <a:schemeClr val="lt1"/>
+          </a:fontRef>
+        </p:style>
+        <p:txBody>
+          <a:bodyPr rtlCol="0" anchor="ctr"/>
+          <a:lstStyle/>
+          <a:p>
+            <a:pPr algn="ctr"/>
+          </a:p>
+        </p:txBody>
+      </p:sp>
+      <p:sp>
+        <p:nvSpPr>
+          <p:cNvPr id="11" name="TextBox 10"/>
+          <p:cNvSpPr txBox="1"/>
+          <p:nvPr/>
+        </p:nvSpPr>
+        <p:spPr>
+          <a:xfrm>
+            <a:off x="1067104" y="1179576"/>
+            <a:ext cx="10058400" cy="347472"/>
+          </a:xfrm>
+          <a:prstGeom prst="rect">
+            <a:avLst/>
+          </a:prstGeom>
+          <a:noFill/>
+        </p:spPr>
+        <p:txBody>
+          <a:bodyPr wrap="none">
+            <a:spAutoFit/>
+          </a:bodyPr>
+          <a:lstStyle/>
+          <a:p>
+            <a:pPr algn="ctr">
+              <a:spcAft>
+                <a:spcPts val="1000"/>
+              </a:spcAft>
+            </a:pPr>
+            <a:r>
+              <a:rPr sz="1800" b="1">
+                <a:solidFill>
+                  <a:srgbClr val="FFFFFF"/>
+                </a:solidFill>
+                <a:latin typeface="Microsoft YaHei"/>
+              </a:rPr>
+              <a:t>📝  课堂笔记  —  请摘抄要点</a:t>
+            </a:r>
+          </a:p>
+        </p:txBody>
+      </p:sp>
+      <p:sp>
+        <p:nvSpPr>
+          <p:cNvPr id="12" name="Rectangle 11"/>
+          <p:cNvSpPr/>
+          <p:nvPr/>
+        </p:nvSpPr>
+        <p:spPr>
+          <a:xfrm>
+            <a:off x="1570024" y="1527048"/>
+            <a:ext cx="27432" cy="3337560"/>
+          </a:xfrm>
+          <a:prstGeom prst="rect">
+            <a:avLst/>
+          </a:prstGeom>
+          <a:solidFill>
+            <a:srgbClr val="DC5050"/>
+          </a:solidFill>
+          <a:ln>
+            <a:noFill/>
+          </a:ln>
+        </p:spPr>
+        <p:style>
+          <a:lnRef idx="1">
+            <a:schemeClr val="accent1"/>
+          </a:lnRef>
+          <a:fillRef idx="3">
+            <a:schemeClr val="accent1"/>
+          </a:fillRef>
+          <a:effectRef idx="2">
+            <a:schemeClr val="accent1"/>
+          </a:effectRef>
+          <a:fontRef idx="minor">
+            <a:schemeClr val="lt1"/>
+          </a:fontRef>
+        </p:style>
+        <p:txBody>
+          <a:bodyPr rtlCol="0" anchor="ctr"/>
+          <a:lstStyle/>
+          <a:p>
+            <a:pPr algn="ctr"/>
+          </a:p>
+        </p:txBody>
+      </p:sp>
+      <p:sp>
+        <p:nvSpPr>
+          <p:cNvPr id="13" name="Rectangle 12"/>
+          <p:cNvSpPr/>
+          <p:nvPr/>
+        </p:nvSpPr>
+        <p:spPr>
+          <a:xfrm>
+            <a:off x="1417320" y="2276856"/>
+            <a:ext cx="9601200" cy="13716"/>
+          </a:xfrm>
+          <a:prstGeom prst="rect">
+            <a:avLst/>
+          </a:prstGeom>
+          <a:solidFill>
+            <a:srgbClr val="D2C8AF"/>
+          </a:solidFill>
+          <a:ln>
+            <a:noFill/>
+          </a:ln>
+        </p:spPr>
+        <p:style>
+          <a:lnRef idx="1">
+            <a:schemeClr val="accent1"/>
+          </a:lnRef>
+          <a:fillRef idx="3">
+            <a:schemeClr val="accent1"/>
+          </a:fillRef>
+          <a:effectRef idx="2">
+            <a:schemeClr val="accent1"/>
+          </a:effectRef>
+          <a:fontRef idx="minor">
+            <a:schemeClr val="lt1"/>
+          </a:fontRef>
+        </p:style>
+        <p:txBody>
+          <a:bodyPr rtlCol="0" anchor="ctr"/>
+          <a:lstStyle/>
+          <a:p>
+            <a:pPr algn="ctr"/>
+          </a:p>
+        </p:txBody>
+      </p:sp>
+      <p:sp>
+        <p:nvSpPr>
+          <p:cNvPr id="14" name="Rounded Rectangle 13"/>
+          <p:cNvSpPr/>
+          <p:nvPr/>
+        </p:nvSpPr>
+        <p:spPr>
+          <a:xfrm>
+            <a:off x="1600200" y="1627632"/>
+            <a:ext cx="1444752" cy="347472"/>
           </a:xfrm>
           <a:prstGeom prst="roundRect">
             <a:avLst/>
@@ -5318,14 +7244,14 @@
       </p:sp>
       <p:sp>
         <p:nvSpPr>
-          <p:cNvPr id="7" name="TextBox 6"/>
+          <p:cNvPr id="15" name="TextBox 14"/>
           <p:cNvSpPr txBox="1"/>
           <p:nvPr/>
         </p:nvSpPr>
         <p:spPr>
           <a:xfrm>
-            <a:off x="4953304" y="521208"/>
-            <a:ext cx="2286000" cy="384048"/>
+            <a:off x="1600200" y="1645920"/>
+            <a:ext cx="1444752" cy="310896"/>
           </a:xfrm>
           <a:prstGeom prst="rect">
             <a:avLst/>
@@ -5350,21 +7276,21 @@
                 </a:solidFill>
                 <a:latin typeface="Microsoft YaHei"/>
               </a:rPr>
-              <a:t>深读寓意</a:t>
-            </a:r>
-          </a:p>
-        </p:txBody>
-      </p:sp>
-      <p:sp>
-        <p:nvSpPr>
-          <p:cNvPr id="8" name="TextBox 7"/>
+              <a:t>情节设计</a:t>
+            </a:r>
+          </a:p>
+        </p:txBody>
+      </p:sp>
+      <p:sp>
+        <p:nvSpPr>
+          <p:cNvPr id="16" name="TextBox 15"/>
           <p:cNvSpPr txBox="1"/>
           <p:nvPr/>
         </p:nvSpPr>
         <p:spPr>
           <a:xfrm>
-            <a:off x="1371600" y="960120"/>
-            <a:ext cx="9418320" cy="822960"/>
+            <a:off x="3182112" y="1627632"/>
+            <a:ext cx="7333488" cy="658368"/>
           </a:xfrm>
           <a:prstGeom prst="rect">
             <a:avLst/>
@@ -5372,40 +7298,83 @@
           <a:noFill/>
         </p:spPr>
         <p:txBody>
-          <a:bodyPr wrap="square">
+          <a:bodyPr wrap="none">
             <a:spAutoFit/>
           </a:bodyPr>
           <a:lstStyle/>
           <a:p>
-            <a:pPr algn="ctr">
+            <a:pPr algn="l">
               <a:spcAft>
                 <a:spcPts val="1000"/>
               </a:spcAft>
             </a:pPr>
             <a:r>
-              <a:rPr sz="3600" b="1">
+              <a:rPr sz="2100" b="0">
                 <a:solidFill>
-                  <a:srgbClr val="C89628"/>
+                  <a:srgbClr val="5A461E"/>
                 </a:solidFill>
                 <a:latin typeface="Microsoft YaHei"/>
               </a:rPr>
-              <a:t>学习任务二</a:t>
-            </a:r>
-          </a:p>
-        </p:txBody>
-      </p:sp>
-      <p:sp>
-        <p:nvSpPr>
-          <p:cNvPr id="9" name="Rectangle 8"/>
+              <a:t>寓意藏在人物的欲望、选择与意外后果中</a:t>
+            </a:r>
+          </a:p>
+        </p:txBody>
+      </p:sp>
+      <p:sp>
+        <p:nvSpPr>
+          <p:cNvPr id="17" name="Rectangle 16"/>
           <p:cNvSpPr/>
           <p:nvPr/>
         </p:nvSpPr>
         <p:spPr>
           <a:xfrm>
-            <a:off x="3200400" y="1600200"/>
-            <a:ext cx="5760720" cy="27432"/>
-          </a:xfrm>
-          <a:prstGeom prst="rect">
+            <a:off x="1417320" y="3081527"/>
+            <a:ext cx="9601200" cy="13716"/>
+          </a:xfrm>
+          <a:prstGeom prst="rect">
+            <a:avLst/>
+          </a:prstGeom>
+          <a:solidFill>
+            <a:srgbClr val="D2C8AF"/>
+          </a:solidFill>
+          <a:ln>
+            <a:noFill/>
+          </a:ln>
+        </p:spPr>
+        <p:style>
+          <a:lnRef idx="1">
+            <a:schemeClr val="accent1"/>
+          </a:lnRef>
+          <a:fillRef idx="3">
+            <a:schemeClr val="accent1"/>
+          </a:fillRef>
+          <a:effectRef idx="2">
+            <a:schemeClr val="accent1"/>
+          </a:effectRef>
+          <a:fontRef idx="minor">
+            <a:schemeClr val="lt1"/>
+          </a:fontRef>
+        </p:style>
+        <p:txBody>
+          <a:bodyPr rtlCol="0" anchor="ctr"/>
+          <a:lstStyle/>
+          <a:p>
+            <a:pPr algn="ctr"/>
+          </a:p>
+        </p:txBody>
+      </p:sp>
+      <p:sp>
+        <p:nvSpPr>
+          <p:cNvPr id="18" name="Rounded Rectangle 17"/>
+          <p:cNvSpPr/>
+          <p:nvPr/>
+        </p:nvSpPr>
+        <p:spPr>
+          <a:xfrm>
+            <a:off x="1600200" y="2432303"/>
+            <a:ext cx="2029967" cy="347472"/>
+          </a:xfrm>
+          <a:prstGeom prst="roundRect">
             <a:avLst/>
           </a:prstGeom>
           <a:solidFill>
@@ -5439,25 +7408,101 @@
       </p:sp>
       <p:sp>
         <p:nvSpPr>
-          <p:cNvPr id="10" name="Rounded Rectangle 9"/>
+          <p:cNvPr id="19" name="TextBox 18"/>
+          <p:cNvSpPr txBox="1"/>
+          <p:nvPr/>
+        </p:nvSpPr>
+        <p:spPr>
+          <a:xfrm>
+            <a:off x="1600200" y="2450591"/>
+            <a:ext cx="2029967" cy="310896"/>
+          </a:xfrm>
+          <a:prstGeom prst="rect">
+            <a:avLst/>
+          </a:prstGeom>
+          <a:noFill/>
+        </p:spPr>
+        <p:txBody>
+          <a:bodyPr wrap="none">
+            <a:spAutoFit/>
+          </a:bodyPr>
+          <a:lstStyle/>
+          <a:p>
+            <a:pPr algn="ctr">
+              <a:spcAft>
+                <a:spcPts val="1000"/>
+              </a:spcAft>
+            </a:pPr>
+            <a:r>
+              <a:rPr sz="1800" b="1">
+                <a:solidFill>
+                  <a:srgbClr val="5A461E"/>
+                </a:solidFill>
+                <a:latin typeface="Microsoft YaHei"/>
+              </a:rPr>
+              <a:t>改情节改寓意</a:t>
+            </a:r>
+          </a:p>
+        </p:txBody>
+      </p:sp>
+      <p:sp>
+        <p:nvSpPr>
+          <p:cNvPr id="20" name="TextBox 19"/>
+          <p:cNvSpPr txBox="1"/>
+          <p:nvPr/>
+        </p:nvSpPr>
+        <p:spPr>
+          <a:xfrm>
+            <a:off x="3767328" y="2432303"/>
+            <a:ext cx="6748272" cy="658368"/>
+          </a:xfrm>
+          <a:prstGeom prst="rect">
+            <a:avLst/>
+          </a:prstGeom>
+          <a:noFill/>
+        </p:spPr>
+        <p:txBody>
+          <a:bodyPr wrap="none">
+            <a:spAutoFit/>
+          </a:bodyPr>
+          <a:lstStyle/>
+          <a:p>
+            <a:pPr algn="l">
+              <a:spcAft>
+                <a:spcPts val="1000"/>
+              </a:spcAft>
+            </a:pPr>
+            <a:r>
+              <a:rPr sz="2100" b="0">
+                <a:solidFill>
+                  <a:srgbClr val="5A461E"/>
+                </a:solidFill>
+                <a:latin typeface="Microsoft YaHei"/>
+              </a:rPr>
+              <a:t>蚊子战胜后平静离开→寓意从「骄兵必败」变为「懂得适可而止」</a:t>
+            </a:r>
+          </a:p>
+        </p:txBody>
+      </p:sp>
+      <p:sp>
+        <p:nvSpPr>
+          <p:cNvPr id="21" name="Rectangle 20"/>
           <p:cNvSpPr/>
           <p:nvPr/>
         </p:nvSpPr>
         <p:spPr>
           <a:xfrm>
-            <a:off x="1295704" y="1645920"/>
-            <a:ext cx="9601200" cy="2240280"/>
-          </a:xfrm>
-          <a:prstGeom prst="roundRect">
+            <a:off x="1417320" y="3886200"/>
+            <a:ext cx="9601200" cy="13716"/>
+          </a:xfrm>
+          <a:prstGeom prst="rect">
             <a:avLst/>
           </a:prstGeom>
           <a:solidFill>
-            <a:srgbClr val="FFFCF0"/>
+            <a:srgbClr val="D2C8AF"/>
           </a:solidFill>
-          <a:ln w="19050">
-            <a:solidFill>
-              <a:srgbClr val="F0C864"/>
-            </a:solidFill>
+          <a:ln>
+            <a:noFill/>
           </a:ln>
         </p:spPr>
         <p:style>
@@ -5484,20 +7529,20 @@
       </p:sp>
       <p:sp>
         <p:nvSpPr>
-          <p:cNvPr id="11" name="Oval 10"/>
+          <p:cNvPr id="22" name="Rounded Rectangle 21"/>
           <p:cNvSpPr/>
           <p:nvPr/>
         </p:nvSpPr>
         <p:spPr>
           <a:xfrm>
-            <a:off x="2255824" y="1828800"/>
-            <a:ext cx="384048" cy="384048"/>
-          </a:xfrm>
-          <a:prstGeom prst="ellipse">
+            <a:off x="1600200" y="3236976"/>
+            <a:ext cx="1444752" cy="347472"/>
+          </a:xfrm>
+          <a:prstGeom prst="roundRect">
             <a:avLst/>
           </a:prstGeom>
           <a:solidFill>
-            <a:srgbClr val="C89628"/>
+            <a:srgbClr val="F0C864"/>
           </a:solidFill>
           <a:ln>
             <a:noFill/>
@@ -5527,14 +7572,14 @@
       </p:sp>
       <p:sp>
         <p:nvSpPr>
-          <p:cNvPr id="12" name="TextBox 11"/>
+          <p:cNvPr id="23" name="TextBox 22"/>
           <p:cNvSpPr txBox="1"/>
           <p:nvPr/>
         </p:nvSpPr>
         <p:spPr>
           <a:xfrm>
-            <a:off x="2255824" y="1847088"/>
-            <a:ext cx="384048" cy="365760"/>
+            <a:off x="1600200" y="3255264"/>
+            <a:ext cx="1444752" cy="310896"/>
           </a:xfrm>
           <a:prstGeom prst="rect">
             <a:avLst/>
@@ -5553,27 +7598,27 @@
               </a:spcAft>
             </a:pPr>
             <a:r>
-              <a:rPr sz="1600" b="1">
+              <a:rPr sz="1800" b="1">
                 <a:solidFill>
-                  <a:srgbClr val="FFFFFF"/>
+                  <a:srgbClr val="5A461E"/>
                 </a:solidFill>
                 <a:latin typeface="Microsoft YaHei"/>
               </a:rPr>
-              <a:t>1</a:t>
-            </a:r>
-          </a:p>
-        </p:txBody>
-      </p:sp>
-      <p:sp>
-        <p:nvSpPr>
-          <p:cNvPr id="13" name="TextBox 12"/>
+              <a:t>阅读方法</a:t>
+            </a:r>
+          </a:p>
+        </p:txBody>
+      </p:sp>
+      <p:sp>
+        <p:nvSpPr>
+          <p:cNvPr id="24" name="TextBox 23"/>
           <p:cNvSpPr txBox="1"/>
           <p:nvPr/>
         </p:nvSpPr>
         <p:spPr>
           <a:xfrm>
-            <a:off x="2758744" y="1810512"/>
-            <a:ext cx="7772400" cy="502920"/>
+            <a:off x="3182112" y="3236976"/>
+            <a:ext cx="7333488" cy="658368"/>
           </a:xfrm>
           <a:prstGeom prst="rect">
             <a:avLst/>
@@ -5592,33 +7637,33 @@
               </a:spcAft>
             </a:pPr>
             <a:r>
-              <a:rPr sz="2400" b="0">
+              <a:rPr sz="2100" b="0">
                 <a:solidFill>
                   <a:srgbClr val="5A461E"/>
                 </a:solidFill>
                 <a:latin typeface="Microsoft YaHei"/>
               </a:rPr>
-              <a:t>解释加点词：闻、传、道、亡、只使、中伤……</a:t>
-            </a:r>
-          </a:p>
-        </p:txBody>
-      </p:sp>
-      <p:sp>
-        <p:nvSpPr>
-          <p:cNvPr id="14" name="Oval 13"/>
+              <a:t>读懂「为什么这样结尾」，才能读到真正的提醒</a:t>
+            </a:r>
+          </a:p>
+        </p:txBody>
+      </p:sp>
+      <p:sp>
+        <p:nvSpPr>
+          <p:cNvPr id="25" name="Rectangle 24"/>
           <p:cNvSpPr/>
           <p:nvPr/>
         </p:nvSpPr>
         <p:spPr>
           <a:xfrm>
-            <a:off x="2255824" y="2395728"/>
-            <a:ext cx="384048" cy="384048"/>
-          </a:xfrm>
-          <a:prstGeom prst="ellipse">
+            <a:off x="1417320" y="4690872"/>
+            <a:ext cx="9601200" cy="13716"/>
+          </a:xfrm>
+          <a:prstGeom prst="rect">
             <a:avLst/>
           </a:prstGeom>
           <a:solidFill>
-            <a:srgbClr val="C89628"/>
+            <a:srgbClr val="D2C8AF"/>
           </a:solidFill>
           <a:ln>
             <a:noFill/>
@@ -5648,14 +7693,57 @@
       </p:sp>
       <p:sp>
         <p:nvSpPr>
-          <p:cNvPr id="15" name="TextBox 14"/>
+          <p:cNvPr id="26" name="Rounded Rectangle 25"/>
+          <p:cNvSpPr/>
+          <p:nvPr/>
+        </p:nvSpPr>
+        <p:spPr>
+          <a:xfrm>
+            <a:off x="1600200" y="4041648"/>
+            <a:ext cx="1444752" cy="347472"/>
+          </a:xfrm>
+          <a:prstGeom prst="roundRect">
+            <a:avLst/>
+          </a:prstGeom>
+          <a:solidFill>
+            <a:srgbClr val="F0C864"/>
+          </a:solidFill>
+          <a:ln>
+            <a:noFill/>
+          </a:ln>
+        </p:spPr>
+        <p:style>
+          <a:lnRef idx="1">
+            <a:schemeClr val="accent1"/>
+          </a:lnRef>
+          <a:fillRef idx="3">
+            <a:schemeClr val="accent1"/>
+          </a:fillRef>
+          <a:effectRef idx="2">
+            <a:schemeClr val="accent1"/>
+          </a:effectRef>
+          <a:fontRef idx="minor">
+            <a:schemeClr val="lt1"/>
+          </a:fontRef>
+        </p:style>
+        <p:txBody>
+          <a:bodyPr rtlCol="0" anchor="ctr"/>
+          <a:lstStyle/>
+          <a:p>
+            <a:pPr algn="ctr"/>
+          </a:p>
+        </p:txBody>
+      </p:sp>
+      <p:sp>
+        <p:nvSpPr>
+          <p:cNvPr id="27" name="TextBox 26"/>
           <p:cNvSpPr txBox="1"/>
           <p:nvPr/>
         </p:nvSpPr>
         <p:spPr>
           <a:xfrm>
-            <a:off x="2255824" y="2414016"/>
-            <a:ext cx="384048" cy="365760"/>
+            <a:off x="1600200" y="4059936"/>
+            <a:ext cx="1444752" cy="310896"/>
           </a:xfrm>
           <a:prstGeom prst="rect">
             <a:avLst/>
@@ -5674,27 +7762,27 @@
               </a:spcAft>
             </a:pPr>
             <a:r>
-              <a:rPr sz="1600" b="1">
+              <a:rPr sz="1800" b="1">
                 <a:solidFill>
-                  <a:srgbClr val="FFFFFF"/>
+                  <a:srgbClr val="5A461E"/>
                 </a:solidFill>
                 <a:latin typeface="Microsoft YaHei"/>
               </a:rPr>
-              <a:t>2</a:t>
-            </a:r>
-          </a:p>
-        </p:txBody>
-      </p:sp>
-      <p:sp>
-        <p:nvSpPr>
-          <p:cNvPr id="16" name="TextBox 15"/>
+              <a:t>策展主题</a:t>
+            </a:r>
+          </a:p>
+        </p:txBody>
+      </p:sp>
+      <p:sp>
+        <p:nvSpPr>
+          <p:cNvPr id="28" name="TextBox 27"/>
           <p:cNvSpPr txBox="1"/>
           <p:nvPr/>
         </p:nvSpPr>
         <p:spPr>
           <a:xfrm>
-            <a:off x="2758744" y="2377440"/>
-            <a:ext cx="7772400" cy="502920"/>
+            <a:off x="3182112" y="4041648"/>
+            <a:ext cx="7333488" cy="658368"/>
           </a:xfrm>
           <a:prstGeom prst="rect">
             <a:avLst/>
@@ -5713,134 +7801,13 @@
               </a:spcAft>
             </a:pPr>
             <a:r>
-              <a:rPr sz="2400" b="0">
+              <a:rPr sz="2100" b="0">
                 <a:solidFill>
                   <a:srgbClr val="5A461E"/>
                 </a:solidFill>
                 <a:latin typeface="Microsoft YaHei"/>
               </a:rPr>
-              <a:t>翻译：「得一人之使，非得一人于井中也」</a:t>
-            </a:r>
-          </a:p>
-        </p:txBody>
-      </p:sp>
-      <p:sp>
-        <p:nvSpPr>
-          <p:cNvPr id="17" name="Oval 16"/>
-          <p:cNvSpPr/>
-          <p:nvPr/>
-        </p:nvSpPr>
-        <p:spPr>
-          <a:xfrm>
-            <a:off x="2255824" y="2962656"/>
-            <a:ext cx="384048" cy="384048"/>
-          </a:xfrm>
-          <a:prstGeom prst="ellipse">
-            <a:avLst/>
-          </a:prstGeom>
-          <a:solidFill>
-            <a:srgbClr val="C89628"/>
-          </a:solidFill>
-          <a:ln>
-            <a:noFill/>
-          </a:ln>
-        </p:spPr>
-        <p:style>
-          <a:lnRef idx="1">
-            <a:schemeClr val="accent1"/>
-          </a:lnRef>
-          <a:fillRef idx="3">
-            <a:schemeClr val="accent1"/>
-          </a:fillRef>
-          <a:effectRef idx="2">
-            <a:schemeClr val="accent1"/>
-          </a:effectRef>
-          <a:fontRef idx="minor">
-            <a:schemeClr val="lt1"/>
-          </a:fontRef>
-        </p:style>
-        <p:txBody>
-          <a:bodyPr rtlCol="0" anchor="ctr"/>
-          <a:lstStyle/>
-          <a:p>
-            <a:pPr algn="ctr"/>
-          </a:p>
-        </p:txBody>
-      </p:sp>
-      <p:sp>
-        <p:nvSpPr>
-          <p:cNvPr id="18" name="TextBox 17"/>
-          <p:cNvSpPr txBox="1"/>
-          <p:nvPr/>
-        </p:nvSpPr>
-        <p:spPr>
-          <a:xfrm>
-            <a:off x="2255824" y="2980944"/>
-            <a:ext cx="384048" cy="365760"/>
-          </a:xfrm>
-          <a:prstGeom prst="rect">
-            <a:avLst/>
-          </a:prstGeom>
-          <a:noFill/>
-        </p:spPr>
-        <p:txBody>
-          <a:bodyPr wrap="none">
-            <a:spAutoFit/>
-          </a:bodyPr>
-          <a:lstStyle/>
-          <a:p>
-            <a:pPr algn="ctr">
-              <a:spcAft>
-                <a:spcPts val="1000"/>
-              </a:spcAft>
-            </a:pPr>
-            <a:r>
-              <a:rPr sz="1600" b="1">
-                <a:solidFill>
-                  <a:srgbClr val="FFFFFF"/>
-                </a:solidFill>
-                <a:latin typeface="Microsoft YaHei"/>
-              </a:rPr>
-              <a:t>3</a:t>
-            </a:r>
-          </a:p>
-        </p:txBody>
-      </p:sp>
-      <p:sp>
-        <p:nvSpPr>
-          <p:cNvPr id="19" name="TextBox 18"/>
-          <p:cNvSpPr txBox="1"/>
-          <p:nvPr/>
-        </p:nvSpPr>
-        <p:spPr>
-          <a:xfrm>
-            <a:off x="2758744" y="2944368"/>
-            <a:ext cx="7772400" cy="502920"/>
-          </a:xfrm>
-          <a:prstGeom prst="rect">
-            <a:avLst/>
-          </a:prstGeom>
-          <a:noFill/>
-        </p:spPr>
-        <p:txBody>
-          <a:bodyPr wrap="none">
-            <a:spAutoFit/>
-          </a:bodyPr>
-          <a:lstStyle/>
-          <a:p>
-            <a:pPr algn="l">
-              <a:spcAft>
-                <a:spcPts val="1000"/>
-              </a:spcAft>
-            </a:pPr>
-            <a:r>
-              <a:rPr sz="2400" b="0">
-                <a:solidFill>
-                  <a:srgbClr val="5A461E"/>
-                </a:solidFill>
-                <a:latin typeface="Microsoft YaHei"/>
-              </a:rPr>
-              <a:t>讨论「杞人忧天」的两种理解，结合生活举例</a:t>
+              <a:t>认识自己的认知局限，善用智慧（智慧与局限）</a:t>
             </a:r>
           </a:p>
         </p:txBody>
@@ -5986,6 +7953,88 @@
         </p:nvSpPr>
         <p:spPr>
           <a:xfrm>
+            <a:off x="502920" y="384048"/>
+            <a:ext cx="2011680" cy="384048"/>
+          </a:xfrm>
+          <a:prstGeom prst="roundRect">
+            <a:avLst/>
+          </a:prstGeom>
+          <a:solidFill>
+            <a:srgbClr val="3C9664"/>
+          </a:solidFill>
+          <a:ln>
+            <a:noFill/>
+          </a:ln>
+        </p:spPr>
+        <p:style>
+          <a:lnRef idx="1">
+            <a:schemeClr val="accent1"/>
+          </a:lnRef>
+          <a:fillRef idx="3">
+            <a:schemeClr val="accent1"/>
+          </a:fillRef>
+          <a:effectRef idx="2">
+            <a:schemeClr val="accent1"/>
+          </a:effectRef>
+          <a:fontRef idx="minor">
+            <a:schemeClr val="lt1"/>
+          </a:fontRef>
+        </p:style>
+        <p:txBody>
+          <a:bodyPr rtlCol="0" anchor="ctr"/>
+          <a:lstStyle/>
+          <a:p>
+            <a:pPr algn="ctr"/>
+          </a:p>
+        </p:txBody>
+      </p:sp>
+      <p:sp>
+        <p:nvSpPr>
+          <p:cNvPr id="7" name="TextBox 6"/>
+          <p:cNvSpPr txBox="1"/>
+          <p:nvPr/>
+        </p:nvSpPr>
+        <p:spPr>
+          <a:xfrm>
+            <a:off x="502920" y="402336"/>
+            <a:ext cx="2011680" cy="347472"/>
+          </a:xfrm>
+          <a:prstGeom prst="rect">
+            <a:avLst/>
+          </a:prstGeom>
+          <a:noFill/>
+        </p:spPr>
+        <p:txBody>
+          <a:bodyPr wrap="none">
+            <a:spAutoFit/>
+          </a:bodyPr>
+          <a:lstStyle/>
+          <a:p>
+            <a:pPr algn="ctr">
+              <a:spcAft>
+                <a:spcPts val="1000"/>
+              </a:spcAft>
+            </a:pPr>
+            <a:r>
+              <a:rPr sz="1600" b="1">
+                <a:solidFill>
+                  <a:srgbClr val="FFFFFF"/>
+                </a:solidFill>
+                <a:latin typeface="Microsoft YaHei"/>
+              </a:rPr>
+              <a:t>课堂活动</a:t>
+            </a:r>
+          </a:p>
+        </p:txBody>
+      </p:sp>
+      <p:sp>
+        <p:nvSpPr>
+          <p:cNvPr id="8" name="Rounded Rectangle 7"/>
+          <p:cNvSpPr/>
+          <p:nvPr/>
+        </p:nvSpPr>
+        <p:spPr>
+          <a:xfrm>
             <a:off x="4953304" y="502920"/>
             <a:ext cx="2286000" cy="411480"/>
           </a:xfrm>
@@ -6023,7 +8072,7 @@
       </p:sp>
       <p:sp>
         <p:nvSpPr>
-          <p:cNvPr id="7" name="TextBox 6"/>
+          <p:cNvPr id="9" name="TextBox 8"/>
           <p:cNvSpPr txBox="1"/>
           <p:nvPr/>
         </p:nvSpPr>
@@ -6055,14 +8104,14 @@
                 </a:solidFill>
                 <a:latin typeface="Microsoft YaHei"/>
               </a:rPr>
-              <a:t>寓言新编</a:t>
-            </a:r>
-          </a:p>
-        </p:txBody>
-      </p:sp>
-      <p:sp>
-        <p:nvSpPr>
-          <p:cNvPr id="8" name="TextBox 7"/>
+              <a:t>课堂活动</a:t>
+            </a:r>
+          </a:p>
+        </p:txBody>
+      </p:sp>
+      <p:sp>
+        <p:nvSpPr>
+          <p:cNvPr id="10" name="TextBox 9"/>
           <p:cNvSpPr txBox="1"/>
           <p:nvPr/>
         </p:nvSpPr>
@@ -6094,14 +8143,14 @@
                 </a:solidFill>
                 <a:latin typeface="Microsoft YaHei"/>
               </a:rPr>
-              <a:t>学习任务三</a:t>
-            </a:r>
-          </a:p>
-        </p:txBody>
-      </p:sp>
-      <p:sp>
-        <p:nvSpPr>
-          <p:cNvPr id="9" name="Rectangle 8"/>
+              <a:t>学习任务</a:t>
+            </a:r>
+          </a:p>
+        </p:txBody>
+      </p:sp>
+      <p:sp>
+        <p:nvSpPr>
+          <p:cNvPr id="11" name="Rectangle 10"/>
           <p:cNvSpPr/>
           <p:nvPr/>
         </p:nvSpPr>
@@ -6144,14 +8193,14 @@
       </p:sp>
       <p:sp>
         <p:nvSpPr>
-          <p:cNvPr id="10" name="Rounded Rectangle 9"/>
+          <p:cNvPr id="12" name="Rounded Rectangle 11"/>
           <p:cNvSpPr/>
           <p:nvPr/>
         </p:nvSpPr>
         <p:spPr>
           <a:xfrm>
             <a:off x="1295704" y="1645920"/>
-            <a:ext cx="9601200" cy="2240280"/>
+            <a:ext cx="9601200" cy="2112264"/>
           </a:xfrm>
           <a:prstGeom prst="roundRect">
             <a:avLst/>
@@ -6189,14 +8238,14 @@
       </p:sp>
       <p:sp>
         <p:nvSpPr>
-          <p:cNvPr id="11" name="Oval 10"/>
+          <p:cNvPr id="13" name="Oval 12"/>
           <p:cNvSpPr/>
           <p:nvPr/>
         </p:nvSpPr>
         <p:spPr>
           <a:xfrm>
             <a:off x="2255824" y="1828800"/>
-            <a:ext cx="384048" cy="384048"/>
+            <a:ext cx="347472" cy="347472"/>
           </a:xfrm>
           <a:prstGeom prst="ellipse">
             <a:avLst/>
@@ -6232,14 +8281,14 @@
       </p:sp>
       <p:sp>
         <p:nvSpPr>
-          <p:cNvPr id="12" name="TextBox 11"/>
+          <p:cNvPr id="14" name="TextBox 13"/>
           <p:cNvSpPr txBox="1"/>
           <p:nvPr/>
         </p:nvSpPr>
         <p:spPr>
           <a:xfrm>
             <a:off x="2255824" y="1847088"/>
-            <a:ext cx="384048" cy="365760"/>
+            <a:ext cx="347472" cy="329184"/>
           </a:xfrm>
           <a:prstGeom prst="rect">
             <a:avLst/>
@@ -6258,7 +8307,7 @@
               </a:spcAft>
             </a:pPr>
             <a:r>
-              <a:rPr sz="1600" b="1">
+              <a:rPr sz="1400" b="1">
                 <a:solidFill>
                   <a:srgbClr val="FFFFFF"/>
                 </a:solidFill>
@@ -6271,14 +8320,14 @@
       </p:sp>
       <p:sp>
         <p:nvSpPr>
-          <p:cNvPr id="13" name="TextBox 12"/>
+          <p:cNvPr id="15" name="TextBox 14"/>
           <p:cNvSpPr txBox="1"/>
           <p:nvPr/>
         </p:nvSpPr>
         <p:spPr>
           <a:xfrm>
-            <a:off x="2758744" y="1810512"/>
-            <a:ext cx="7772400" cy="502920"/>
+            <a:off x="2713024" y="1810512"/>
+            <a:ext cx="7863840" cy="457200"/>
           </a:xfrm>
           <a:prstGeom prst="rect">
             <a:avLst/>
@@ -6303,21 +8352,21 @@
                 </a:solidFill>
                 <a:latin typeface="Microsoft YaHei"/>
               </a:rPr>
-              <a:t>任选一则，重新设计情节（100—200字）</a:t>
-            </a:r>
-          </a:p>
-        </p:txBody>
-      </p:sp>
-      <p:sp>
-        <p:nvSpPr>
-          <p:cNvPr id="14" name="Oval 13"/>
+              <a:t>完成「寓言档案卡」，概括四则寓意</a:t>
+            </a:r>
+          </a:p>
+        </p:txBody>
+      </p:sp>
+      <p:sp>
+        <p:nvSpPr>
+          <p:cNvPr id="16" name="Oval 15"/>
           <p:cNvSpPr/>
           <p:nvPr/>
         </p:nvSpPr>
         <p:spPr>
           <a:xfrm>
             <a:off x="2255824" y="2395728"/>
-            <a:ext cx="384048" cy="384048"/>
+            <a:ext cx="347472" cy="347472"/>
           </a:xfrm>
           <a:prstGeom prst="ellipse">
             <a:avLst/>
@@ -6353,14 +8402,14 @@
       </p:sp>
       <p:sp>
         <p:nvSpPr>
-          <p:cNvPr id="15" name="TextBox 14"/>
+          <p:cNvPr id="17" name="TextBox 16"/>
           <p:cNvSpPr txBox="1"/>
           <p:nvPr/>
         </p:nvSpPr>
         <p:spPr>
           <a:xfrm>
             <a:off x="2255824" y="2414016"/>
-            <a:ext cx="384048" cy="365760"/>
+            <a:ext cx="347472" cy="329184"/>
           </a:xfrm>
           <a:prstGeom prst="rect">
             <a:avLst/>
@@ -6379,7 +8428,7 @@
               </a:spcAft>
             </a:pPr>
             <a:r>
-              <a:rPr sz="1600" b="1">
+              <a:rPr sz="1400" b="1">
                 <a:solidFill>
                   <a:srgbClr val="FFFFFF"/>
                 </a:solidFill>
@@ -6392,14 +8441,14 @@
       </p:sp>
       <p:sp>
         <p:nvSpPr>
-          <p:cNvPr id="16" name="TextBox 15"/>
+          <p:cNvPr id="18" name="TextBox 17"/>
           <p:cNvSpPr txBox="1"/>
           <p:nvPr/>
         </p:nvSpPr>
         <p:spPr>
           <a:xfrm>
-            <a:off x="2758744" y="2377440"/>
-            <a:ext cx="7772400" cy="502920"/>
+            <a:off x="2713024" y="2377440"/>
+            <a:ext cx="7863840" cy="457200"/>
           </a:xfrm>
           <a:prstGeom prst="rect">
             <a:avLst/>
@@ -6424,21 +8473,21 @@
                 </a:solidFill>
                 <a:latin typeface="Microsoft YaHei"/>
               </a:rPr>
-              <a:t>策展主题四：认识认知局限，善用智慧</a:t>
-            </a:r>
-          </a:p>
-        </p:txBody>
-      </p:sp>
-      <p:sp>
-        <p:nvSpPr>
-          <p:cNvPr id="17" name="Oval 16"/>
+              <a:t>解释加点词，翻译重点句</a:t>
+            </a:r>
+          </a:p>
+        </p:txBody>
+      </p:sp>
+      <p:sp>
+        <p:nvSpPr>
+          <p:cNvPr id="19" name="Oval 18"/>
           <p:cNvSpPr/>
           <p:nvPr/>
         </p:nvSpPr>
         <p:spPr>
           <a:xfrm>
             <a:off x="2255824" y="2962656"/>
-            <a:ext cx="384048" cy="384048"/>
+            <a:ext cx="347472" cy="347472"/>
           </a:xfrm>
           <a:prstGeom prst="ellipse">
             <a:avLst/>
@@ -6474,14 +8523,14 @@
       </p:sp>
       <p:sp>
         <p:nvSpPr>
-          <p:cNvPr id="18" name="TextBox 17"/>
+          <p:cNvPr id="20" name="TextBox 19"/>
           <p:cNvSpPr txBox="1"/>
           <p:nvPr/>
         </p:nvSpPr>
         <p:spPr>
           <a:xfrm>
             <a:off x="2255824" y="2980944"/>
-            <a:ext cx="384048" cy="365760"/>
+            <a:ext cx="347472" cy="329184"/>
           </a:xfrm>
           <a:prstGeom prst="rect">
             <a:avLst/>
@@ -6500,7 +8549,7 @@
               </a:spcAft>
             </a:pPr>
             <a:r>
-              <a:rPr sz="1600" b="1">
+              <a:rPr sz="1400" b="1">
                 <a:solidFill>
                   <a:srgbClr val="FFFFFF"/>
                 </a:solidFill>
@@ -6513,14 +8562,14 @@
       </p:sp>
       <p:sp>
         <p:nvSpPr>
-          <p:cNvPr id="19" name="TextBox 18"/>
+          <p:cNvPr id="21" name="TextBox 20"/>
           <p:cNvSpPr txBox="1"/>
           <p:nvPr/>
         </p:nvSpPr>
         <p:spPr>
           <a:xfrm>
-            <a:off x="2758744" y="2944368"/>
-            <a:ext cx="7772400" cy="502920"/>
+            <a:off x="2713024" y="2944368"/>
+            <a:ext cx="7863840" cy="457200"/>
           </a:xfrm>
           <a:prstGeom prst="rect">
             <a:avLst/>
@@ -6545,7 +8594,7 @@
                 </a:solidFill>
                 <a:latin typeface="Microsoft YaHei"/>
               </a:rPr>
-              <a:t>同伴互评：寓意是否由情节自然推出？</a:t>
+              <a:t>任选一则寓言新编（100—200字）</a:t>
             </a:r>
           </a:p>
         </p:txBody>
@@ -6691,6 +8740,88 @@
         </p:nvSpPr>
         <p:spPr>
           <a:xfrm>
+            <a:off x="502920" y="384048"/>
+            <a:ext cx="2011680" cy="384048"/>
+          </a:xfrm>
+          <a:prstGeom prst="roundRect">
+            <a:avLst/>
+          </a:prstGeom>
+          <a:solidFill>
+            <a:srgbClr val="3C9664"/>
+          </a:solidFill>
+          <a:ln>
+            <a:noFill/>
+          </a:ln>
+        </p:spPr>
+        <p:style>
+          <a:lnRef idx="1">
+            <a:schemeClr val="accent1"/>
+          </a:lnRef>
+          <a:fillRef idx="3">
+            <a:schemeClr val="accent1"/>
+          </a:fillRef>
+          <a:effectRef idx="2">
+            <a:schemeClr val="accent1"/>
+          </a:effectRef>
+          <a:fontRef idx="minor">
+            <a:schemeClr val="lt1"/>
+          </a:fontRef>
+        </p:style>
+        <p:txBody>
+          <a:bodyPr rtlCol="0" anchor="ctr"/>
+          <a:lstStyle/>
+          <a:p>
+            <a:pPr algn="ctr"/>
+          </a:p>
+        </p:txBody>
+      </p:sp>
+      <p:sp>
+        <p:nvSpPr>
+          <p:cNvPr id="7" name="TextBox 6"/>
+          <p:cNvSpPr txBox="1"/>
+          <p:nvPr/>
+        </p:nvSpPr>
+        <p:spPr>
+          <a:xfrm>
+            <a:off x="502920" y="402336"/>
+            <a:ext cx="2011680" cy="347472"/>
+          </a:xfrm>
+          <a:prstGeom prst="rect">
+            <a:avLst/>
+          </a:prstGeom>
+          <a:noFill/>
+        </p:spPr>
+        <p:txBody>
+          <a:bodyPr wrap="none">
+            <a:spAutoFit/>
+          </a:bodyPr>
+          <a:lstStyle/>
+          <a:p>
+            <a:pPr algn="ctr">
+              <a:spcAft>
+                <a:spcPts val="1000"/>
+              </a:spcAft>
+            </a:pPr>
+            <a:r>
+              <a:rPr sz="1600" b="1">
+                <a:solidFill>
+                  <a:srgbClr val="FFFFFF"/>
+                </a:solidFill>
+                <a:latin typeface="Microsoft YaHei"/>
+              </a:rPr>
+              <a:t>课堂活动</a:t>
+            </a:r>
+          </a:p>
+        </p:txBody>
+      </p:sp>
+      <p:sp>
+        <p:nvSpPr>
+          <p:cNvPr id="8" name="Rounded Rectangle 7"/>
+          <p:cNvSpPr/>
+          <p:nvPr/>
+        </p:nvSpPr>
+        <p:spPr>
+          <a:xfrm>
             <a:off x="4953304" y="502920"/>
             <a:ext cx="2286000" cy="411480"/>
           </a:xfrm>
@@ -6728,7 +8859,7 @@
       </p:sp>
       <p:sp>
         <p:nvSpPr>
-          <p:cNvPr id="7" name="TextBox 6"/>
+          <p:cNvPr id="9" name="TextBox 8"/>
           <p:cNvSpPr txBox="1"/>
           <p:nvPr/>
         </p:nvSpPr>
@@ -6767,7 +8898,7 @@
       </p:sp>
       <p:sp>
         <p:nvSpPr>
-          <p:cNvPr id="8" name="TextBox 7"/>
+          <p:cNvPr id="10" name="TextBox 9"/>
           <p:cNvSpPr txBox="1"/>
           <p:nvPr/>
         </p:nvSpPr>
@@ -6806,7 +8937,7 @@
       </p:sp>
       <p:sp>
         <p:nvSpPr>
-          <p:cNvPr id="9" name="Rectangle 8"/>
+          <p:cNvPr id="11" name="Rectangle 10"/>
           <p:cNvSpPr/>
           <p:nvPr/>
         </p:nvSpPr>
@@ -6849,14 +8980,14 @@
       </p:sp>
       <p:sp>
         <p:nvSpPr>
-          <p:cNvPr id="10" name="Rounded Rectangle 9"/>
+          <p:cNvPr id="12" name="Rounded Rectangle 11"/>
           <p:cNvSpPr/>
           <p:nvPr/>
         </p:nvSpPr>
         <p:spPr>
           <a:xfrm>
             <a:off x="1295704" y="1645920"/>
-            <a:ext cx="9601200" cy="2240280"/>
+            <a:ext cx="9601200" cy="1837944"/>
           </a:xfrm>
           <a:prstGeom prst="roundRect">
             <a:avLst/>
@@ -6894,14 +9025,14 @@
       </p:sp>
       <p:sp>
         <p:nvSpPr>
-          <p:cNvPr id="11" name="Oval 10"/>
+          <p:cNvPr id="13" name="Oval 12"/>
           <p:cNvSpPr/>
           <p:nvPr/>
         </p:nvSpPr>
         <p:spPr>
           <a:xfrm>
             <a:off x="2255824" y="1828800"/>
-            <a:ext cx="384048" cy="384048"/>
+            <a:ext cx="347472" cy="347472"/>
           </a:xfrm>
           <a:prstGeom prst="ellipse">
             <a:avLst/>
@@ -6937,14 +9068,14 @@
       </p:sp>
       <p:sp>
         <p:nvSpPr>
-          <p:cNvPr id="12" name="TextBox 11"/>
+          <p:cNvPr id="14" name="TextBox 13"/>
           <p:cNvSpPr txBox="1"/>
           <p:nvPr/>
         </p:nvSpPr>
         <p:spPr>
           <a:xfrm>
             <a:off x="2255824" y="1847088"/>
-            <a:ext cx="384048" cy="365760"/>
+            <a:ext cx="347472" cy="329184"/>
           </a:xfrm>
           <a:prstGeom prst="rect">
             <a:avLst/>
@@ -6963,7 +9094,7 @@
               </a:spcAft>
             </a:pPr>
             <a:r>
-              <a:rPr sz="1600" b="1">
+              <a:rPr sz="1400" b="1">
                 <a:solidFill>
                   <a:srgbClr val="FFFFFF"/>
                 </a:solidFill>
@@ -6976,14 +9107,14 @@
       </p:sp>
       <p:sp>
         <p:nvSpPr>
-          <p:cNvPr id="13" name="TextBox 12"/>
+          <p:cNvPr id="15" name="TextBox 14"/>
           <p:cNvSpPr txBox="1"/>
           <p:nvPr/>
         </p:nvSpPr>
         <p:spPr>
           <a:xfrm>
-            <a:off x="2758744" y="1810512"/>
-            <a:ext cx="7772400" cy="502920"/>
+            <a:off x="2713024" y="1810512"/>
+            <a:ext cx="7863840" cy="457200"/>
           </a:xfrm>
           <a:prstGeom prst="rect">
             <a:avLst/>
@@ -7002,27 +9133,27 @@
               </a:spcAft>
             </a:pPr>
             <a:r>
-              <a:rPr sz="2400" b="0">
+              <a:rPr sz="2200" b="0">
                 <a:solidFill>
                   <a:srgbClr val="5A461E"/>
                 </a:solidFill>
                 <a:latin typeface="Microsoft YaHei"/>
               </a:rPr>
-              <a:t>寓言道理藏在欲望、选择与意外后果中</a:t>
-            </a:r>
-          </a:p>
-        </p:txBody>
-      </p:sp>
-      <p:sp>
-        <p:nvSpPr>
-          <p:cNvPr id="14" name="Oval 13"/>
+              <a:t>寓言=故事+道理，道理由情节自然推出</a:t>
+            </a:r>
+          </a:p>
+        </p:txBody>
+      </p:sp>
+      <p:sp>
+        <p:nvSpPr>
+          <p:cNvPr id="16" name="Oval 15"/>
           <p:cNvSpPr/>
           <p:nvPr/>
         </p:nvSpPr>
         <p:spPr>
           <a:xfrm>
-            <a:off x="2255824" y="2395728"/>
-            <a:ext cx="384048" cy="384048"/>
+            <a:off x="2255824" y="2304288"/>
+            <a:ext cx="347472" cy="347472"/>
           </a:xfrm>
           <a:prstGeom prst="ellipse">
             <a:avLst/>
@@ -7058,14 +9189,14 @@
       </p:sp>
       <p:sp>
         <p:nvSpPr>
-          <p:cNvPr id="15" name="TextBox 14"/>
+          <p:cNvPr id="17" name="TextBox 16"/>
           <p:cNvSpPr txBox="1"/>
           <p:nvPr/>
         </p:nvSpPr>
         <p:spPr>
           <a:xfrm>
-            <a:off x="2255824" y="2414016"/>
-            <a:ext cx="384048" cy="365760"/>
+            <a:off x="2255824" y="2322576"/>
+            <a:ext cx="347472" cy="329184"/>
           </a:xfrm>
           <a:prstGeom prst="rect">
             <a:avLst/>
@@ -7084,7 +9215,7 @@
               </a:spcAft>
             </a:pPr>
             <a:r>
-              <a:rPr sz="1600" b="1">
+              <a:rPr sz="1400" b="1">
                 <a:solidFill>
                   <a:srgbClr val="FFFFFF"/>
                 </a:solidFill>
@@ -7097,14 +9228,14 @@
       </p:sp>
       <p:sp>
         <p:nvSpPr>
-          <p:cNvPr id="16" name="TextBox 15"/>
+          <p:cNvPr id="18" name="TextBox 17"/>
           <p:cNvSpPr txBox="1"/>
           <p:nvPr/>
         </p:nvSpPr>
         <p:spPr>
           <a:xfrm>
-            <a:off x="2758744" y="2377440"/>
-            <a:ext cx="7772400" cy="502920"/>
+            <a:off x="2713024" y="2286000"/>
+            <a:ext cx="7863840" cy="457200"/>
           </a:xfrm>
           <a:prstGeom prst="rect">
             <a:avLst/>
@@ -7123,27 +9254,27 @@
               </a:spcAft>
             </a:pPr>
             <a:r>
-              <a:rPr sz="2400" b="0">
+              <a:rPr sz="2200" b="0">
                 <a:solidFill>
                   <a:srgbClr val="5A461E"/>
                 </a:solidFill>
                 <a:latin typeface="Microsoft YaHei"/>
               </a:rPr>
-              <a:t>读懂「为什么这样结尾」，才能读到真正的提醒</a:t>
-            </a:r>
-          </a:p>
-        </p:txBody>
-      </p:sp>
-      <p:sp>
-        <p:nvSpPr>
-          <p:cNvPr id="17" name="Oval 16"/>
+              <a:t>文言：闻、传、道、亡；重点句要准确翻译</a:t>
+            </a:r>
+          </a:p>
+        </p:txBody>
+      </p:sp>
+      <p:sp>
+        <p:nvSpPr>
+          <p:cNvPr id="19" name="Oval 18"/>
           <p:cNvSpPr/>
           <p:nvPr/>
         </p:nvSpPr>
         <p:spPr>
           <a:xfrm>
-            <a:off x="2255824" y="2962656"/>
-            <a:ext cx="384048" cy="384048"/>
+            <a:off x="2255824" y="2779776"/>
+            <a:ext cx="347472" cy="347472"/>
           </a:xfrm>
           <a:prstGeom prst="ellipse">
             <a:avLst/>
@@ -7179,14 +9310,14 @@
       </p:sp>
       <p:sp>
         <p:nvSpPr>
-          <p:cNvPr id="18" name="TextBox 17"/>
+          <p:cNvPr id="20" name="TextBox 19"/>
           <p:cNvSpPr txBox="1"/>
           <p:nvPr/>
         </p:nvSpPr>
         <p:spPr>
           <a:xfrm>
-            <a:off x="2255824" y="2980944"/>
-            <a:ext cx="384048" cy="365760"/>
+            <a:off x="2255824" y="2798064"/>
+            <a:ext cx="347472" cy="329184"/>
           </a:xfrm>
           <a:prstGeom prst="rect">
             <a:avLst/>
@@ -7205,7 +9336,7 @@
               </a:spcAft>
             </a:pPr>
             <a:r>
-              <a:rPr sz="1600" b="1">
+              <a:rPr sz="1400" b="1">
                 <a:solidFill>
                   <a:srgbClr val="FFFFFF"/>
                 </a:solidFill>
@@ -7218,14 +9349,14 @@
       </p:sp>
       <p:sp>
         <p:nvSpPr>
-          <p:cNvPr id="19" name="TextBox 18"/>
+          <p:cNvPr id="21" name="TextBox 20"/>
           <p:cNvSpPr txBox="1"/>
           <p:nvPr/>
         </p:nvSpPr>
         <p:spPr>
           <a:xfrm>
-            <a:off x="2758744" y="2944368"/>
-            <a:ext cx="7772400" cy="502920"/>
+            <a:off x="2713024" y="2761488"/>
+            <a:ext cx="7863840" cy="457200"/>
           </a:xfrm>
           <a:prstGeom prst="rect">
             <a:avLst/>
@@ -7244,13 +9375,13 @@
               </a:spcAft>
             </a:pPr>
             <a:r>
-              <a:rPr sz="2400" b="0">
+              <a:rPr sz="2200" b="0">
                 <a:solidFill>
                   <a:srgbClr val="5A461E"/>
                 </a:solidFill>
                 <a:latin typeface="Microsoft YaHei"/>
               </a:rPr>
-              <a:t>策展主题：智慧与局限</a:t>
+              <a:t>策展主题四：智慧与局限</a:t>
             </a:r>
           </a:p>
         </p:txBody>
@@ -7396,6 +9527,88 @@
         </p:nvSpPr>
         <p:spPr>
           <a:xfrm>
+            <a:off x="502920" y="384048"/>
+            <a:ext cx="2011680" cy="384048"/>
+          </a:xfrm>
+          <a:prstGeom prst="roundRect">
+            <a:avLst/>
+          </a:prstGeom>
+          <a:solidFill>
+            <a:srgbClr val="3C9664"/>
+          </a:solidFill>
+          <a:ln>
+            <a:noFill/>
+          </a:ln>
+        </p:spPr>
+        <p:style>
+          <a:lnRef idx="1">
+            <a:schemeClr val="accent1"/>
+          </a:lnRef>
+          <a:fillRef idx="3">
+            <a:schemeClr val="accent1"/>
+          </a:fillRef>
+          <a:effectRef idx="2">
+            <a:schemeClr val="accent1"/>
+          </a:effectRef>
+          <a:fontRef idx="minor">
+            <a:schemeClr val="lt1"/>
+          </a:fontRef>
+        </p:style>
+        <p:txBody>
+          <a:bodyPr rtlCol="0" anchor="ctr"/>
+          <a:lstStyle/>
+          <a:p>
+            <a:pPr algn="ctr"/>
+          </a:p>
+        </p:txBody>
+      </p:sp>
+      <p:sp>
+        <p:nvSpPr>
+          <p:cNvPr id="7" name="TextBox 6"/>
+          <p:cNvSpPr txBox="1"/>
+          <p:nvPr/>
+        </p:nvSpPr>
+        <p:spPr>
+          <a:xfrm>
+            <a:off x="502920" y="402336"/>
+            <a:ext cx="2011680" cy="347472"/>
+          </a:xfrm>
+          <a:prstGeom prst="rect">
+            <a:avLst/>
+          </a:prstGeom>
+          <a:noFill/>
+        </p:spPr>
+        <p:txBody>
+          <a:bodyPr wrap="none">
+            <a:spAutoFit/>
+          </a:bodyPr>
+          <a:lstStyle/>
+          <a:p>
+            <a:pPr algn="ctr">
+              <a:spcAft>
+                <a:spcPts val="1000"/>
+              </a:spcAft>
+            </a:pPr>
+            <a:r>
+              <a:rPr sz="1600" b="1">
+                <a:solidFill>
+                  <a:srgbClr val="FFFFFF"/>
+                </a:solidFill>
+                <a:latin typeface="Microsoft YaHei"/>
+              </a:rPr>
+              <a:t>课堂活动</a:t>
+            </a:r>
+          </a:p>
+        </p:txBody>
+      </p:sp>
+      <p:sp>
+        <p:nvSpPr>
+          <p:cNvPr id="8" name="Rounded Rectangle 7"/>
+          <p:cNvSpPr/>
+          <p:nvPr/>
+        </p:nvSpPr>
+        <p:spPr>
+          <a:xfrm>
             <a:off x="4953304" y="502920"/>
             <a:ext cx="2286000" cy="411480"/>
           </a:xfrm>
@@ -7433,7 +9646,7 @@
       </p:sp>
       <p:sp>
         <p:nvSpPr>
-          <p:cNvPr id="7" name="TextBox 6"/>
+          <p:cNvPr id="9" name="TextBox 8"/>
           <p:cNvSpPr txBox="1"/>
           <p:nvPr/>
         </p:nvSpPr>
@@ -7472,7 +9685,7 @@
       </p:sp>
       <p:sp>
         <p:nvSpPr>
-          <p:cNvPr id="8" name="TextBox 7"/>
+          <p:cNvPr id="10" name="TextBox 9"/>
           <p:cNvSpPr txBox="1"/>
           <p:nvPr/>
         </p:nvSpPr>
@@ -7511,7 +9724,7 @@
       </p:sp>
       <p:sp>
         <p:nvSpPr>
-          <p:cNvPr id="9" name="Rectangle 8"/>
+          <p:cNvPr id="11" name="Rectangle 10"/>
           <p:cNvSpPr/>
           <p:nvPr/>
         </p:nvSpPr>
@@ -7554,14 +9767,14 @@
       </p:sp>
       <p:sp>
         <p:nvSpPr>
-          <p:cNvPr id="10" name="Rounded Rectangle 9"/>
+          <p:cNvPr id="12" name="Rounded Rectangle 11"/>
           <p:cNvSpPr/>
           <p:nvPr/>
         </p:nvSpPr>
         <p:spPr>
           <a:xfrm>
             <a:off x="1295704" y="1645920"/>
-            <a:ext cx="9601200" cy="1645920"/>
+            <a:ext cx="9601200" cy="1545336"/>
           </a:xfrm>
           <a:prstGeom prst="roundRect">
             <a:avLst/>
@@ -7599,14 +9812,14 @@
       </p:sp>
       <p:sp>
         <p:nvSpPr>
-          <p:cNvPr id="11" name="Oval 10"/>
+          <p:cNvPr id="13" name="Oval 12"/>
           <p:cNvSpPr/>
           <p:nvPr/>
         </p:nvSpPr>
         <p:spPr>
           <a:xfrm>
             <a:off x="2255824" y="1828800"/>
-            <a:ext cx="384048" cy="384048"/>
+            <a:ext cx="347472" cy="347472"/>
           </a:xfrm>
           <a:prstGeom prst="ellipse">
             <a:avLst/>
@@ -7642,14 +9855,14 @@
       </p:sp>
       <p:sp>
         <p:nvSpPr>
-          <p:cNvPr id="12" name="TextBox 11"/>
+          <p:cNvPr id="14" name="TextBox 13"/>
           <p:cNvSpPr txBox="1"/>
           <p:nvPr/>
         </p:nvSpPr>
         <p:spPr>
           <a:xfrm>
             <a:off x="2255824" y="1847088"/>
-            <a:ext cx="384048" cy="365760"/>
+            <a:ext cx="347472" cy="329184"/>
           </a:xfrm>
           <a:prstGeom prst="rect">
             <a:avLst/>
@@ -7668,7 +9881,7 @@
               </a:spcAft>
             </a:pPr>
             <a:r>
-              <a:rPr sz="1600" b="1">
+              <a:rPr sz="1400" b="1">
                 <a:solidFill>
                   <a:srgbClr val="FFFFFF"/>
                 </a:solidFill>
@@ -7681,14 +9894,14 @@
       </p:sp>
       <p:sp>
         <p:nvSpPr>
-          <p:cNvPr id="13" name="TextBox 12"/>
+          <p:cNvPr id="15" name="TextBox 14"/>
           <p:cNvSpPr txBox="1"/>
           <p:nvPr/>
         </p:nvSpPr>
         <p:spPr>
           <a:xfrm>
-            <a:off x="2758744" y="1810512"/>
-            <a:ext cx="7772400" cy="502920"/>
+            <a:off x="2713024" y="1810512"/>
+            <a:ext cx="7863840" cy="457200"/>
           </a:xfrm>
           <a:prstGeom prst="rect">
             <a:avLst/>
@@ -7720,14 +9933,14 @@
       </p:sp>
       <p:sp>
         <p:nvSpPr>
-          <p:cNvPr id="14" name="Oval 13"/>
+          <p:cNvPr id="16" name="Oval 15"/>
           <p:cNvSpPr/>
           <p:nvPr/>
         </p:nvSpPr>
         <p:spPr>
           <a:xfrm>
             <a:off x="2255824" y="2395728"/>
-            <a:ext cx="384048" cy="384048"/>
+            <a:ext cx="347472" cy="347472"/>
           </a:xfrm>
           <a:prstGeom prst="ellipse">
             <a:avLst/>
@@ -7763,14 +9976,14 @@
       </p:sp>
       <p:sp>
         <p:nvSpPr>
-          <p:cNvPr id="15" name="TextBox 14"/>
+          <p:cNvPr id="17" name="TextBox 16"/>
           <p:cNvSpPr txBox="1"/>
           <p:nvPr/>
         </p:nvSpPr>
         <p:spPr>
           <a:xfrm>
             <a:off x="2255824" y="2414016"/>
-            <a:ext cx="384048" cy="365760"/>
+            <a:ext cx="347472" cy="329184"/>
           </a:xfrm>
           <a:prstGeom prst="rect">
             <a:avLst/>
@@ -7789,7 +10002,7 @@
               </a:spcAft>
             </a:pPr>
             <a:r>
-              <a:rPr sz="1600" b="1">
+              <a:rPr sz="1400" b="1">
                 <a:solidFill>
                   <a:srgbClr val="FFFFFF"/>
                 </a:solidFill>
@@ -7802,14 +10015,14 @@
       </p:sp>
       <p:sp>
         <p:nvSpPr>
-          <p:cNvPr id="16" name="TextBox 15"/>
+          <p:cNvPr id="18" name="TextBox 17"/>
           <p:cNvSpPr txBox="1"/>
           <p:nvPr/>
         </p:nvSpPr>
         <p:spPr>
           <a:xfrm>
-            <a:off x="2758744" y="2377440"/>
-            <a:ext cx="7772400" cy="502920"/>
+            <a:off x="2713024" y="2377440"/>
+            <a:ext cx="7863840" cy="457200"/>
           </a:xfrm>
           <a:prstGeom prst="rect">
             <a:avLst/>
